--- a/docs/pptx/carbo/jx-carbo-linsubhr-ratio-akikdigo.pptx
+++ b/docs/pptx/carbo/jx-carbo-linsubhr-ratio-akikdigo.pptx
@@ -2271,7 +2271,7 @@
           </p:nvSpPr>
           <p:spPr>
             <a:xfrm>
-              <a:off x="817517" y="5114368"/>
+              <a:off x="817517" y="5142518"/>
               <a:ext cx="7799693" cy="0"/>
             </a:xfrm>
             <a:custGeom>
@@ -2314,7 +2314,7 @@
           </p:nvSpPr>
           <p:spPr>
             <a:xfrm>
-              <a:off x="817517" y="4244691"/>
+              <a:off x="817517" y="4313054"/>
               <a:ext cx="7799693" cy="0"/>
             </a:xfrm>
             <a:custGeom>
@@ -2357,7 +2357,7 @@
           </p:nvSpPr>
           <p:spPr>
             <a:xfrm>
-              <a:off x="817517" y="3375014"/>
+              <a:off x="817517" y="3483591"/>
               <a:ext cx="7799693" cy="0"/>
             </a:xfrm>
             <a:custGeom>
@@ -2400,7 +2400,7 @@
           </p:nvSpPr>
           <p:spPr>
             <a:xfrm>
-              <a:off x="817517" y="2505337"/>
+              <a:off x="817517" y="2654127"/>
               <a:ext cx="7799693" cy="0"/>
             </a:xfrm>
             <a:custGeom>
@@ -2443,15 +2443,15 @@
           </p:nvSpPr>
           <p:spPr>
             <a:xfrm>
-              <a:off x="1615213" y="1896563"/>
-              <a:ext cx="0" cy="3826579"/>
+              <a:off x="1615213" y="2073503"/>
+              <a:ext cx="0" cy="3649639"/>
             </a:xfrm>
             <a:custGeom>
               <a:avLst/>
               <a:pathLst>
-                <a:path w="0" h="3826579">
+                <a:path w="0" h="3649639">
                   <a:moveTo>
-                    <a:pt x="0" y="3826579"/>
+                    <a:pt x="0" y="3649639"/>
                   </a:moveTo>
                   <a:lnTo>
                     <a:pt x="0" y="0"/>
@@ -2486,15 +2486,15 @@
           </p:nvSpPr>
           <p:spPr>
             <a:xfrm>
-              <a:off x="3387871" y="1896563"/>
-              <a:ext cx="0" cy="3826579"/>
+              <a:off x="3387871" y="2073503"/>
+              <a:ext cx="0" cy="3649639"/>
             </a:xfrm>
             <a:custGeom>
               <a:avLst/>
               <a:pathLst>
-                <a:path w="0" h="3826579">
+                <a:path w="0" h="3649639">
                   <a:moveTo>
-                    <a:pt x="0" y="3826579"/>
+                    <a:pt x="0" y="3649639"/>
                   </a:moveTo>
                   <a:lnTo>
                     <a:pt x="0" y="0"/>
@@ -2529,15 +2529,15 @@
           </p:nvSpPr>
           <p:spPr>
             <a:xfrm>
-              <a:off x="5160528" y="1896563"/>
-              <a:ext cx="0" cy="3826579"/>
+              <a:off x="5160528" y="2073503"/>
+              <a:ext cx="0" cy="3649639"/>
             </a:xfrm>
             <a:custGeom>
               <a:avLst/>
               <a:pathLst>
-                <a:path w="0" h="3826579">
+                <a:path w="0" h="3649639">
                   <a:moveTo>
-                    <a:pt x="0" y="3826579"/>
+                    <a:pt x="0" y="3649639"/>
                   </a:moveTo>
                   <a:lnTo>
                     <a:pt x="0" y="0"/>
@@ -2572,15 +2572,15 @@
           </p:nvSpPr>
           <p:spPr>
             <a:xfrm>
-              <a:off x="6933186" y="1896563"/>
-              <a:ext cx="0" cy="3826579"/>
+              <a:off x="6933186" y="2073503"/>
+              <a:ext cx="0" cy="3649639"/>
             </a:xfrm>
             <a:custGeom>
               <a:avLst/>
               <a:pathLst>
-                <a:path w="0" h="3826579">
+                <a:path w="0" h="3649639">
                   <a:moveTo>
-                    <a:pt x="0" y="3826579"/>
+                    <a:pt x="0" y="3649639"/>
                   </a:moveTo>
                   <a:lnTo>
                     <a:pt x="0" y="0"/>
@@ -2615,7 +2615,7 @@
           </p:nvSpPr>
           <p:spPr>
             <a:xfrm>
-              <a:off x="817517" y="5549207"/>
+              <a:off x="817517" y="5557249"/>
               <a:ext cx="7799693" cy="0"/>
             </a:xfrm>
             <a:custGeom>
@@ -2658,7 +2658,7 @@
           </p:nvSpPr>
           <p:spPr>
             <a:xfrm>
-              <a:off x="817517" y="4679530"/>
+              <a:off x="817517" y="4727786"/>
               <a:ext cx="7799693" cy="0"/>
             </a:xfrm>
             <a:custGeom>
@@ -2701,7 +2701,7 @@
           </p:nvSpPr>
           <p:spPr>
             <a:xfrm>
-              <a:off x="817517" y="3809853"/>
+              <a:off x="817517" y="3898322"/>
               <a:ext cx="7799693" cy="0"/>
             </a:xfrm>
             <a:custGeom>
@@ -2744,7 +2744,7 @@
           </p:nvSpPr>
           <p:spPr>
             <a:xfrm>
-              <a:off x="817517" y="2940175"/>
+              <a:off x="817517" y="3068859"/>
               <a:ext cx="7799693" cy="0"/>
             </a:xfrm>
             <a:custGeom>
@@ -2787,7 +2787,7 @@
           </p:nvSpPr>
           <p:spPr>
             <a:xfrm>
-              <a:off x="817517" y="2070498"/>
+              <a:off x="817517" y="2239395"/>
               <a:ext cx="7799693" cy="0"/>
             </a:xfrm>
             <a:custGeom>
@@ -2830,15 +2830,15 @@
           </p:nvSpPr>
           <p:spPr>
             <a:xfrm>
-              <a:off x="2501542" y="1896563"/>
-              <a:ext cx="0" cy="3826579"/>
+              <a:off x="2501542" y="2073503"/>
+              <a:ext cx="0" cy="3649639"/>
             </a:xfrm>
             <a:custGeom>
               <a:avLst/>
               <a:pathLst>
-                <a:path w="0" h="3826579">
+                <a:path w="0" h="3649639">
                   <a:moveTo>
-                    <a:pt x="0" y="3826579"/>
+                    <a:pt x="0" y="3649639"/>
                   </a:moveTo>
                   <a:lnTo>
                     <a:pt x="0" y="0"/>
@@ -2873,15 +2873,15 @@
           </p:nvSpPr>
           <p:spPr>
             <a:xfrm>
-              <a:off x="4274200" y="1896563"/>
-              <a:ext cx="0" cy="3826579"/>
+              <a:off x="4274200" y="2073503"/>
+              <a:ext cx="0" cy="3649639"/>
             </a:xfrm>
             <a:custGeom>
               <a:avLst/>
               <a:pathLst>
-                <a:path w="0" h="3826579">
+                <a:path w="0" h="3649639">
                   <a:moveTo>
-                    <a:pt x="0" y="3826579"/>
+                    <a:pt x="0" y="3649639"/>
                   </a:moveTo>
                   <a:lnTo>
                     <a:pt x="0" y="0"/>
@@ -2916,15 +2916,15 @@
           </p:nvSpPr>
           <p:spPr>
             <a:xfrm>
-              <a:off x="6046857" y="1896563"/>
-              <a:ext cx="0" cy="3826579"/>
+              <a:off x="6046857" y="2073503"/>
+              <a:ext cx="0" cy="3649639"/>
             </a:xfrm>
             <a:custGeom>
               <a:avLst/>
               <a:pathLst>
-                <a:path w="0" h="3826579">
+                <a:path w="0" h="3649639">
                   <a:moveTo>
-                    <a:pt x="0" y="3826579"/>
+                    <a:pt x="0" y="3649639"/>
                   </a:moveTo>
                   <a:lnTo>
                     <a:pt x="0" y="0"/>
@@ -2959,15 +2959,15 @@
           </p:nvSpPr>
           <p:spPr>
             <a:xfrm>
-              <a:off x="7819515" y="1896563"/>
-              <a:ext cx="0" cy="3826579"/>
+              <a:off x="7819515" y="2073503"/>
+              <a:ext cx="0" cy="3649639"/>
             </a:xfrm>
             <a:custGeom>
               <a:avLst/>
               <a:pathLst>
-                <a:path w="0" h="3826579">
+                <a:path w="0" h="3649639">
                   <a:moveTo>
-                    <a:pt x="0" y="3826579"/>
+                    <a:pt x="0" y="3649639"/>
                   </a:moveTo>
                   <a:lnTo>
                     <a:pt x="0" y="0"/>
@@ -3002,576 +3002,576 @@
           </p:nvSpPr>
           <p:spPr>
             <a:xfrm>
-              <a:off x="817517" y="1896563"/>
-              <a:ext cx="7403783" cy="3540184"/>
+              <a:off x="817517" y="2073503"/>
+              <a:ext cx="7403783" cy="3376487"/>
             </a:xfrm>
             <a:custGeom>
               <a:avLst/>
               <a:pathLst>
-                <a:path w="7403783" h="3540184">
+                <a:path w="7403783" h="3376487">
                   <a:moveTo>
                     <a:pt x="602816" y="0"/>
                   </a:moveTo>
                   <a:lnTo>
-                    <a:pt x="660118" y="106070"/>
-                  </a:lnTo>
-                  <a:lnTo>
-                    <a:pt x="736751" y="242465"/>
-                  </a:lnTo>
-                  <a:lnTo>
-                    <a:pt x="813384" y="373616"/>
-                  </a:lnTo>
-                  <a:lnTo>
-                    <a:pt x="890016" y="499722"/>
-                  </a:lnTo>
-                  <a:lnTo>
-                    <a:pt x="966649" y="620979"/>
-                  </a:lnTo>
-                  <a:lnTo>
-                    <a:pt x="1043281" y="737572"/>
-                  </a:lnTo>
-                  <a:lnTo>
-                    <a:pt x="1119914" y="849681"/>
-                  </a:lnTo>
-                  <a:lnTo>
-                    <a:pt x="1196546" y="957479"/>
-                  </a:lnTo>
-                  <a:lnTo>
-                    <a:pt x="1273179" y="1061131"/>
-                  </a:lnTo>
-                  <a:lnTo>
-                    <a:pt x="1349811" y="1160797"/>
-                  </a:lnTo>
-                  <a:lnTo>
-                    <a:pt x="1426444" y="1256629"/>
-                  </a:lnTo>
-                  <a:lnTo>
-                    <a:pt x="1503076" y="1348776"/>
-                  </a:lnTo>
-                  <a:lnTo>
-                    <a:pt x="1579709" y="1437380"/>
-                  </a:lnTo>
-                  <a:lnTo>
-                    <a:pt x="1656342" y="1522575"/>
-                  </a:lnTo>
-                  <a:lnTo>
-                    <a:pt x="1732974" y="1604494"/>
-                  </a:lnTo>
-                  <a:lnTo>
-                    <a:pt x="1809607" y="1683263"/>
-                  </a:lnTo>
-                  <a:lnTo>
-                    <a:pt x="1886239" y="1759003"/>
-                  </a:lnTo>
-                  <a:lnTo>
-                    <a:pt x="1962872" y="1831829"/>
-                  </a:lnTo>
-                  <a:lnTo>
-                    <a:pt x="2039504" y="1901855"/>
-                  </a:lnTo>
-                  <a:lnTo>
-                    <a:pt x="2116137" y="1969188"/>
-                  </a:lnTo>
-                  <a:lnTo>
-                    <a:pt x="2192769" y="2033931"/>
-                  </a:lnTo>
-                  <a:lnTo>
-                    <a:pt x="2269402" y="2096184"/>
-                  </a:lnTo>
-                  <a:lnTo>
-                    <a:pt x="2346034" y="2156043"/>
-                  </a:lnTo>
-                  <a:lnTo>
-                    <a:pt x="2422667" y="2213600"/>
-                  </a:lnTo>
-                  <a:lnTo>
-                    <a:pt x="2499300" y="2268943"/>
-                  </a:lnTo>
-                  <a:lnTo>
-                    <a:pt x="2575932" y="2322158"/>
-                  </a:lnTo>
-                  <a:lnTo>
-                    <a:pt x="2652565" y="2373327"/>
-                  </a:lnTo>
-                  <a:lnTo>
-                    <a:pt x="2729197" y="2422527"/>
-                  </a:lnTo>
-                  <a:lnTo>
-                    <a:pt x="2805830" y="2469836"/>
-                  </a:lnTo>
-                  <a:lnTo>
-                    <a:pt x="2882462" y="2515325"/>
-                  </a:lnTo>
-                  <a:lnTo>
-                    <a:pt x="2959095" y="2559064"/>
-                  </a:lnTo>
-                  <a:lnTo>
-                    <a:pt x="3035727" y="2601122"/>
-                  </a:lnTo>
-                  <a:lnTo>
-                    <a:pt x="3112360" y="2641562"/>
-                  </a:lnTo>
-                  <a:lnTo>
-                    <a:pt x="3188993" y="2680446"/>
-                  </a:lnTo>
-                  <a:lnTo>
-                    <a:pt x="3265625" y="2717836"/>
-                  </a:lnTo>
-                  <a:lnTo>
-                    <a:pt x="3342258" y="2753787"/>
-                  </a:lnTo>
-                  <a:lnTo>
-                    <a:pt x="3418890" y="2783668"/>
-                  </a:lnTo>
-                  <a:lnTo>
-                    <a:pt x="3495523" y="2788082"/>
-                  </a:lnTo>
-                  <a:lnTo>
-                    <a:pt x="3572155" y="2792474"/>
-                  </a:lnTo>
-                  <a:lnTo>
-                    <a:pt x="3648788" y="2796843"/>
-                  </a:lnTo>
-                  <a:lnTo>
-                    <a:pt x="3725420" y="2801190"/>
-                  </a:lnTo>
-                  <a:lnTo>
-                    <a:pt x="3802053" y="2805515"/>
-                  </a:lnTo>
-                  <a:lnTo>
-                    <a:pt x="3878685" y="2809819"/>
-                  </a:lnTo>
-                  <a:lnTo>
-                    <a:pt x="3955318" y="2814100"/>
-                  </a:lnTo>
-                  <a:lnTo>
-                    <a:pt x="4031951" y="2818359"/>
-                  </a:lnTo>
-                  <a:lnTo>
-                    <a:pt x="4108583" y="2822597"/>
-                  </a:lnTo>
-                  <a:lnTo>
-                    <a:pt x="4185216" y="2826814"/>
-                  </a:lnTo>
-                  <a:lnTo>
-                    <a:pt x="4261848" y="2831008"/>
-                  </a:lnTo>
-                  <a:lnTo>
-                    <a:pt x="4338481" y="2835182"/>
-                  </a:lnTo>
-                  <a:lnTo>
-                    <a:pt x="4415113" y="2839335"/>
-                  </a:lnTo>
-                  <a:lnTo>
-                    <a:pt x="4491746" y="2843466"/>
-                  </a:lnTo>
-                  <a:lnTo>
-                    <a:pt x="4568378" y="2847576"/>
-                  </a:lnTo>
-                  <a:lnTo>
-                    <a:pt x="4645011" y="2851666"/>
-                  </a:lnTo>
-                  <a:lnTo>
-                    <a:pt x="4721644" y="2855734"/>
-                  </a:lnTo>
-                  <a:lnTo>
-                    <a:pt x="4798276" y="2859782"/>
-                  </a:lnTo>
-                  <a:lnTo>
-                    <a:pt x="4874909" y="2863810"/>
-                  </a:lnTo>
-                  <a:lnTo>
-                    <a:pt x="4951541" y="2867817"/>
-                  </a:lnTo>
-                  <a:lnTo>
-                    <a:pt x="5028174" y="2871804"/>
-                  </a:lnTo>
-                  <a:lnTo>
-                    <a:pt x="5104806" y="2875770"/>
-                  </a:lnTo>
-                  <a:lnTo>
-                    <a:pt x="5181439" y="2879716"/>
-                  </a:lnTo>
-                  <a:lnTo>
-                    <a:pt x="5258071" y="2883642"/>
-                  </a:lnTo>
-                  <a:lnTo>
-                    <a:pt x="5334704" y="2887549"/>
-                  </a:lnTo>
-                  <a:lnTo>
-                    <a:pt x="5411336" y="2891435"/>
-                  </a:lnTo>
-                  <a:lnTo>
-                    <a:pt x="5487969" y="2895302"/>
-                  </a:lnTo>
-                  <a:lnTo>
-                    <a:pt x="5564602" y="2899149"/>
-                  </a:lnTo>
-                  <a:lnTo>
-                    <a:pt x="5641234" y="2902976"/>
-                  </a:lnTo>
-                  <a:lnTo>
-                    <a:pt x="5717867" y="2906784"/>
-                  </a:lnTo>
-                  <a:lnTo>
-                    <a:pt x="5794499" y="2910573"/>
-                  </a:lnTo>
-                  <a:lnTo>
-                    <a:pt x="5871132" y="2914343"/>
-                  </a:lnTo>
-                  <a:lnTo>
-                    <a:pt x="5947764" y="2918093"/>
-                  </a:lnTo>
-                  <a:lnTo>
-                    <a:pt x="6024397" y="2921824"/>
-                  </a:lnTo>
-                  <a:lnTo>
-                    <a:pt x="6101029" y="2925537"/>
-                  </a:lnTo>
-                  <a:lnTo>
-                    <a:pt x="6177662" y="2929230"/>
-                  </a:lnTo>
-                  <a:lnTo>
-                    <a:pt x="6254294" y="2932905"/>
-                  </a:lnTo>
-                  <a:lnTo>
-                    <a:pt x="6330927" y="2936561"/>
-                  </a:lnTo>
-                  <a:lnTo>
-                    <a:pt x="6407560" y="2940198"/>
-                  </a:lnTo>
-                  <a:lnTo>
-                    <a:pt x="6484192" y="2943817"/>
-                  </a:lnTo>
-                  <a:lnTo>
-                    <a:pt x="6560825" y="2947418"/>
-                  </a:lnTo>
-                  <a:lnTo>
-                    <a:pt x="6637457" y="2951000"/>
-                  </a:lnTo>
-                  <a:lnTo>
-                    <a:pt x="6714090" y="2954564"/>
-                  </a:lnTo>
-                  <a:lnTo>
-                    <a:pt x="6790722" y="2958110"/>
-                  </a:lnTo>
-                  <a:lnTo>
-                    <a:pt x="6867355" y="2961638"/>
-                  </a:lnTo>
-                  <a:lnTo>
-                    <a:pt x="6943987" y="2965148"/>
-                  </a:lnTo>
-                  <a:lnTo>
-                    <a:pt x="7020620" y="2968641"/>
-                  </a:lnTo>
-                  <a:lnTo>
-                    <a:pt x="7097253" y="2972115"/>
-                  </a:lnTo>
-                  <a:lnTo>
-                    <a:pt x="7173885" y="2975572"/>
-                  </a:lnTo>
-                  <a:lnTo>
-                    <a:pt x="7250518" y="2979011"/>
-                  </a:lnTo>
-                  <a:lnTo>
-                    <a:pt x="7327150" y="2982433"/>
-                  </a:lnTo>
-                  <a:lnTo>
-                    <a:pt x="7403783" y="2985837"/>
-                  </a:lnTo>
-                  <a:lnTo>
-                    <a:pt x="7403783" y="3540184"/>
-                  </a:lnTo>
-                  <a:lnTo>
-                    <a:pt x="7327150" y="3535686"/>
-                  </a:lnTo>
-                  <a:lnTo>
-                    <a:pt x="7250518" y="3531008"/>
-                  </a:lnTo>
-                  <a:lnTo>
-                    <a:pt x="7173885" y="3526143"/>
-                  </a:lnTo>
-                  <a:lnTo>
-                    <a:pt x="7097253" y="3521083"/>
-                  </a:lnTo>
-                  <a:lnTo>
-                    <a:pt x="7020620" y="3515821"/>
-                  </a:lnTo>
-                  <a:lnTo>
-                    <a:pt x="6943987" y="3510349"/>
-                  </a:lnTo>
-                  <a:lnTo>
-                    <a:pt x="6867355" y="3504657"/>
-                  </a:lnTo>
-                  <a:lnTo>
-                    <a:pt x="6790722" y="3498739"/>
-                  </a:lnTo>
-                  <a:lnTo>
-                    <a:pt x="6714090" y="3492583"/>
-                  </a:lnTo>
-                  <a:lnTo>
-                    <a:pt x="6637457" y="3486181"/>
-                  </a:lnTo>
-                  <a:lnTo>
-                    <a:pt x="6560825" y="3479523"/>
-                  </a:lnTo>
-                  <a:lnTo>
-                    <a:pt x="6484192" y="3472599"/>
-                  </a:lnTo>
-                  <a:lnTo>
-                    <a:pt x="6407560" y="3465398"/>
-                  </a:lnTo>
-                  <a:lnTo>
-                    <a:pt x="6330927" y="3457908"/>
-                  </a:lnTo>
-                  <a:lnTo>
-                    <a:pt x="6254294" y="3450120"/>
-                  </a:lnTo>
-                  <a:lnTo>
-                    <a:pt x="6177662" y="3442019"/>
-                  </a:lnTo>
-                  <a:lnTo>
-                    <a:pt x="6101029" y="3433595"/>
-                  </a:lnTo>
-                  <a:lnTo>
-                    <a:pt x="6024397" y="3424834"/>
-                  </a:lnTo>
-                  <a:lnTo>
-                    <a:pt x="5947764" y="3415722"/>
-                  </a:lnTo>
-                  <a:lnTo>
-                    <a:pt x="5871132" y="3406246"/>
-                  </a:lnTo>
-                  <a:lnTo>
-                    <a:pt x="5794499" y="3396391"/>
-                  </a:lnTo>
-                  <a:lnTo>
-                    <a:pt x="5717867" y="3386142"/>
-                  </a:lnTo>
-                  <a:lnTo>
-                    <a:pt x="5641234" y="3375483"/>
-                  </a:lnTo>
-                  <a:lnTo>
-                    <a:pt x="5564602" y="3364397"/>
-                  </a:lnTo>
-                  <a:lnTo>
-                    <a:pt x="5487969" y="3352868"/>
-                  </a:lnTo>
-                  <a:lnTo>
-                    <a:pt x="5411336" y="3340878"/>
-                  </a:lnTo>
-                  <a:lnTo>
-                    <a:pt x="5334704" y="3328409"/>
-                  </a:lnTo>
-                  <a:lnTo>
-                    <a:pt x="5258071" y="3315440"/>
-                  </a:lnTo>
-                  <a:lnTo>
-                    <a:pt x="5181439" y="3301953"/>
-                  </a:lnTo>
-                  <a:lnTo>
-                    <a:pt x="5104806" y="3287927"/>
-                  </a:lnTo>
-                  <a:lnTo>
-                    <a:pt x="5028174" y="3273340"/>
-                  </a:lnTo>
-                  <a:lnTo>
-                    <a:pt x="4951541" y="3258169"/>
-                  </a:lnTo>
-                  <a:lnTo>
-                    <a:pt x="4874909" y="3242391"/>
-                  </a:lnTo>
-                  <a:lnTo>
-                    <a:pt x="4798276" y="3225982"/>
-                  </a:lnTo>
-                  <a:lnTo>
-                    <a:pt x="4721644" y="3208917"/>
-                  </a:lnTo>
-                  <a:lnTo>
-                    <a:pt x="4645011" y="3191170"/>
-                  </a:lnTo>
-                  <a:lnTo>
-                    <a:pt x="4568378" y="3172712"/>
-                  </a:lnTo>
-                  <a:lnTo>
-                    <a:pt x="4491746" y="3153516"/>
-                  </a:lnTo>
-                  <a:lnTo>
-                    <a:pt x="4415113" y="3133553"/>
-                  </a:lnTo>
-                  <a:lnTo>
-                    <a:pt x="4338481" y="3112791"/>
-                  </a:lnTo>
-                  <a:lnTo>
-                    <a:pt x="4261848" y="3091199"/>
-                  </a:lnTo>
-                  <a:lnTo>
-                    <a:pt x="4185216" y="3068743"/>
-                  </a:lnTo>
-                  <a:lnTo>
-                    <a:pt x="4108583" y="3045389"/>
-                  </a:lnTo>
-                  <a:lnTo>
-                    <a:pt x="4031951" y="3021101"/>
-                  </a:lnTo>
-                  <a:lnTo>
-                    <a:pt x="3955318" y="2995841"/>
-                  </a:lnTo>
-                  <a:lnTo>
-                    <a:pt x="3878685" y="2969571"/>
-                  </a:lnTo>
-                  <a:lnTo>
-                    <a:pt x="3802053" y="2942250"/>
-                  </a:lnTo>
-                  <a:lnTo>
-                    <a:pt x="3725420" y="2913837"/>
-                  </a:lnTo>
-                  <a:lnTo>
-                    <a:pt x="3648788" y="2884287"/>
-                  </a:lnTo>
-                  <a:lnTo>
-                    <a:pt x="3572155" y="2853556"/>
-                  </a:lnTo>
-                  <a:lnTo>
-                    <a:pt x="3495523" y="2821595"/>
-                  </a:lnTo>
-                  <a:lnTo>
-                    <a:pt x="3418890" y="2788356"/>
-                  </a:lnTo>
-                  <a:lnTo>
-                    <a:pt x="3342258" y="2779231"/>
-                  </a:lnTo>
-                  <a:lnTo>
-                    <a:pt x="3265625" y="2774772"/>
-                  </a:lnTo>
-                  <a:lnTo>
-                    <a:pt x="3188993" y="2770290"/>
-                  </a:lnTo>
-                  <a:lnTo>
-                    <a:pt x="3112360" y="2765785"/>
-                  </a:lnTo>
-                  <a:lnTo>
-                    <a:pt x="3035727" y="2761257"/>
-                  </a:lnTo>
-                  <a:lnTo>
-                    <a:pt x="2959095" y="2756706"/>
-                  </a:lnTo>
-                  <a:lnTo>
-                    <a:pt x="2882462" y="2752132"/>
-                  </a:lnTo>
-                  <a:lnTo>
-                    <a:pt x="2805830" y="2747534"/>
-                  </a:lnTo>
-                  <a:lnTo>
-                    <a:pt x="2729197" y="2742913"/>
-                  </a:lnTo>
-                  <a:lnTo>
-                    <a:pt x="2652565" y="2738268"/>
-                  </a:lnTo>
-                  <a:lnTo>
-                    <a:pt x="2575932" y="2733600"/>
-                  </a:lnTo>
-                  <a:lnTo>
-                    <a:pt x="2499300" y="2728907"/>
-                  </a:lnTo>
-                  <a:lnTo>
-                    <a:pt x="2422667" y="2724191"/>
-                  </a:lnTo>
-                  <a:lnTo>
-                    <a:pt x="2346034" y="2719451"/>
-                  </a:lnTo>
-                  <a:lnTo>
-                    <a:pt x="2269402" y="2714686"/>
-                  </a:lnTo>
-                  <a:lnTo>
-                    <a:pt x="2192769" y="2709898"/>
-                  </a:lnTo>
-                  <a:lnTo>
-                    <a:pt x="2116137" y="2705084"/>
-                  </a:lnTo>
-                  <a:lnTo>
-                    <a:pt x="2039504" y="2700246"/>
-                  </a:lnTo>
-                  <a:lnTo>
-                    <a:pt x="1962872" y="2695384"/>
-                  </a:lnTo>
-                  <a:lnTo>
-                    <a:pt x="1886239" y="2690496"/>
-                  </a:lnTo>
-                  <a:lnTo>
-                    <a:pt x="1809607" y="2685584"/>
-                  </a:lnTo>
-                  <a:lnTo>
-                    <a:pt x="1732974" y="2680647"/>
-                  </a:lnTo>
-                  <a:lnTo>
-                    <a:pt x="1656342" y="2675684"/>
-                  </a:lnTo>
-                  <a:lnTo>
-                    <a:pt x="1579709" y="2670696"/>
-                  </a:lnTo>
-                  <a:lnTo>
-                    <a:pt x="1503076" y="2665683"/>
-                  </a:lnTo>
-                  <a:lnTo>
-                    <a:pt x="1426444" y="2660644"/>
-                  </a:lnTo>
-                  <a:lnTo>
-                    <a:pt x="1349811" y="2655579"/>
-                  </a:lnTo>
-                  <a:lnTo>
-                    <a:pt x="1273179" y="2650488"/>
-                  </a:lnTo>
-                  <a:lnTo>
-                    <a:pt x="1196546" y="2645372"/>
-                  </a:lnTo>
-                  <a:lnTo>
-                    <a:pt x="1119914" y="2640229"/>
-                  </a:lnTo>
-                  <a:lnTo>
-                    <a:pt x="1043281" y="2635060"/>
-                  </a:lnTo>
-                  <a:lnTo>
-                    <a:pt x="966649" y="2629865"/>
-                  </a:lnTo>
-                  <a:lnTo>
-                    <a:pt x="890016" y="2624643"/>
-                  </a:lnTo>
-                  <a:lnTo>
-                    <a:pt x="813384" y="2619394"/>
-                  </a:lnTo>
-                  <a:lnTo>
-                    <a:pt x="736751" y="2614119"/>
-                  </a:lnTo>
-                  <a:lnTo>
-                    <a:pt x="660118" y="2608816"/>
-                  </a:lnTo>
-                  <a:lnTo>
-                    <a:pt x="583486" y="2603487"/>
-                  </a:lnTo>
-                  <a:lnTo>
-                    <a:pt x="506853" y="2598131"/>
-                  </a:lnTo>
-                  <a:lnTo>
-                    <a:pt x="430221" y="2592747"/>
-                  </a:lnTo>
-                  <a:lnTo>
-                    <a:pt x="353588" y="2587335"/>
-                  </a:lnTo>
-                  <a:lnTo>
-                    <a:pt x="276956" y="2581896"/>
-                  </a:lnTo>
-                  <a:lnTo>
-                    <a:pt x="200323" y="2576429"/>
-                  </a:lnTo>
-                  <a:lnTo>
-                    <a:pt x="123691" y="2570935"/>
-                  </a:lnTo>
-                  <a:lnTo>
-                    <a:pt x="47058" y="2565412"/>
-                  </a:lnTo>
-                  <a:lnTo>
-                    <a:pt x="0" y="2562003"/>
+                    <a:pt x="660118" y="101165"/>
+                  </a:lnTo>
+                  <a:lnTo>
+                    <a:pt x="736751" y="231254"/>
+                  </a:lnTo>
+                  <a:lnTo>
+                    <a:pt x="813384" y="356340"/>
+                  </a:lnTo>
+                  <a:lnTo>
+                    <a:pt x="890016" y="476615"/>
+                  </a:lnTo>
+                  <a:lnTo>
+                    <a:pt x="966649" y="592265"/>
+                  </a:lnTo>
+                  <a:lnTo>
+                    <a:pt x="1043281" y="703467"/>
+                  </a:lnTo>
+                  <a:lnTo>
+                    <a:pt x="1119914" y="810392"/>
+                  </a:lnTo>
+                  <a:lnTo>
+                    <a:pt x="1196546" y="913205"/>
+                  </a:lnTo>
+                  <a:lnTo>
+                    <a:pt x="1273179" y="1012065"/>
+                  </a:lnTo>
+                  <a:lnTo>
+                    <a:pt x="1349811" y="1107122"/>
+                  </a:lnTo>
+                  <a:lnTo>
+                    <a:pt x="1426444" y="1198523"/>
+                  </a:lnTo>
+                  <a:lnTo>
+                    <a:pt x="1503076" y="1286409"/>
+                  </a:lnTo>
+                  <a:lnTo>
+                    <a:pt x="1579709" y="1370916"/>
+                  </a:lnTo>
+                  <a:lnTo>
+                    <a:pt x="1656342" y="1452172"/>
+                  </a:lnTo>
+                  <a:lnTo>
+                    <a:pt x="1732974" y="1530303"/>
+                  </a:lnTo>
+                  <a:lnTo>
+                    <a:pt x="1809607" y="1605430"/>
+                  </a:lnTo>
+                  <a:lnTo>
+                    <a:pt x="1886239" y="1677667"/>
+                  </a:lnTo>
+                  <a:lnTo>
+                    <a:pt x="1962872" y="1747126"/>
+                  </a:lnTo>
+                  <a:lnTo>
+                    <a:pt x="2039504" y="1813914"/>
+                  </a:lnTo>
+                  <a:lnTo>
+                    <a:pt x="2116137" y="1878133"/>
+                  </a:lnTo>
+                  <a:lnTo>
+                    <a:pt x="2192769" y="1939882"/>
+                  </a:lnTo>
+                  <a:lnTo>
+                    <a:pt x="2269402" y="1999257"/>
+                  </a:lnTo>
+                  <a:lnTo>
+                    <a:pt x="2346034" y="2056348"/>
+                  </a:lnTo>
+                  <a:lnTo>
+                    <a:pt x="2422667" y="2111244"/>
+                  </a:lnTo>
+                  <a:lnTo>
+                    <a:pt x="2499300" y="2164028"/>
+                  </a:lnTo>
+                  <a:lnTo>
+                    <a:pt x="2575932" y="2214783"/>
+                  </a:lnTo>
+                  <a:lnTo>
+                    <a:pt x="2652565" y="2263585"/>
+                  </a:lnTo>
+                  <a:lnTo>
+                    <a:pt x="2729197" y="2310511"/>
+                  </a:lnTo>
+                  <a:lnTo>
+                    <a:pt x="2805830" y="2355632"/>
+                  </a:lnTo>
+                  <a:lnTo>
+                    <a:pt x="2882462" y="2399017"/>
+                  </a:lnTo>
+                  <a:lnTo>
+                    <a:pt x="2959095" y="2440734"/>
+                  </a:lnTo>
+                  <a:lnTo>
+                    <a:pt x="3035727" y="2480847"/>
+                  </a:lnTo>
+                  <a:lnTo>
+                    <a:pt x="3112360" y="2519417"/>
+                  </a:lnTo>
+                  <a:lnTo>
+                    <a:pt x="3188993" y="2556503"/>
+                  </a:lnTo>
+                  <a:lnTo>
+                    <a:pt x="3265625" y="2592164"/>
+                  </a:lnTo>
+                  <a:lnTo>
+                    <a:pt x="3342258" y="2626453"/>
+                  </a:lnTo>
+                  <a:lnTo>
+                    <a:pt x="3418890" y="2654952"/>
+                  </a:lnTo>
+                  <a:lnTo>
+                    <a:pt x="3495523" y="2659162"/>
+                  </a:lnTo>
+                  <a:lnTo>
+                    <a:pt x="3572155" y="2663351"/>
+                  </a:lnTo>
+                  <a:lnTo>
+                    <a:pt x="3648788" y="2667518"/>
+                  </a:lnTo>
+                  <a:lnTo>
+                    <a:pt x="3725420" y="2671664"/>
+                  </a:lnTo>
+                  <a:lnTo>
+                    <a:pt x="3802053" y="2675789"/>
+                  </a:lnTo>
+                  <a:lnTo>
+                    <a:pt x="3878685" y="2679894"/>
+                  </a:lnTo>
+                  <a:lnTo>
+                    <a:pt x="3955318" y="2683977"/>
+                  </a:lnTo>
+                  <a:lnTo>
+                    <a:pt x="4031951" y="2688039"/>
+                  </a:lnTo>
+                  <a:lnTo>
+                    <a:pt x="4108583" y="2692081"/>
+                  </a:lnTo>
+                  <a:lnTo>
+                    <a:pt x="4185216" y="2696103"/>
+                  </a:lnTo>
+                  <a:lnTo>
+                    <a:pt x="4261848" y="2700104"/>
+                  </a:lnTo>
+                  <a:lnTo>
+                    <a:pt x="4338481" y="2704084"/>
+                  </a:lnTo>
+                  <a:lnTo>
+                    <a:pt x="4415113" y="2708045"/>
+                  </a:lnTo>
+                  <a:lnTo>
+                    <a:pt x="4491746" y="2711985"/>
+                  </a:lnTo>
+                  <a:lnTo>
+                    <a:pt x="4568378" y="2715905"/>
+                  </a:lnTo>
+                  <a:lnTo>
+                    <a:pt x="4645011" y="2719806"/>
+                  </a:lnTo>
+                  <a:lnTo>
+                    <a:pt x="4721644" y="2723686"/>
+                  </a:lnTo>
+                  <a:lnTo>
+                    <a:pt x="4798276" y="2727547"/>
+                  </a:lnTo>
+                  <a:lnTo>
+                    <a:pt x="4874909" y="2731388"/>
+                  </a:lnTo>
+                  <a:lnTo>
+                    <a:pt x="4951541" y="2735210"/>
+                  </a:lnTo>
+                  <a:lnTo>
+                    <a:pt x="5028174" y="2739012"/>
+                  </a:lnTo>
+                  <a:lnTo>
+                    <a:pt x="5104806" y="2742795"/>
+                  </a:lnTo>
+                  <a:lnTo>
+                    <a:pt x="5181439" y="2746559"/>
+                  </a:lnTo>
+                  <a:lnTo>
+                    <a:pt x="5258071" y="2750304"/>
+                  </a:lnTo>
+                  <a:lnTo>
+                    <a:pt x="5334704" y="2754030"/>
+                  </a:lnTo>
+                  <a:lnTo>
+                    <a:pt x="5411336" y="2757736"/>
+                  </a:lnTo>
+                  <a:lnTo>
+                    <a:pt x="5487969" y="2761424"/>
+                  </a:lnTo>
+                  <a:lnTo>
+                    <a:pt x="5564602" y="2765093"/>
+                  </a:lnTo>
+                  <a:lnTo>
+                    <a:pt x="5641234" y="2768744"/>
+                  </a:lnTo>
+                  <a:lnTo>
+                    <a:pt x="5717867" y="2772376"/>
+                  </a:lnTo>
+                  <a:lnTo>
+                    <a:pt x="5794499" y="2775989"/>
+                  </a:lnTo>
+                  <a:lnTo>
+                    <a:pt x="5871132" y="2779584"/>
+                  </a:lnTo>
+                  <a:lnTo>
+                    <a:pt x="5947764" y="2783161"/>
+                  </a:lnTo>
+                  <a:lnTo>
+                    <a:pt x="6024397" y="2786720"/>
+                  </a:lnTo>
+                  <a:lnTo>
+                    <a:pt x="6101029" y="2790261"/>
+                  </a:lnTo>
+                  <a:lnTo>
+                    <a:pt x="6177662" y="2793783"/>
+                  </a:lnTo>
+                  <a:lnTo>
+                    <a:pt x="6254294" y="2797288"/>
+                  </a:lnTo>
+                  <a:lnTo>
+                    <a:pt x="6330927" y="2800775"/>
+                  </a:lnTo>
+                  <a:lnTo>
+                    <a:pt x="6407560" y="2804245"/>
+                  </a:lnTo>
+                  <a:lnTo>
+                    <a:pt x="6484192" y="2807696"/>
+                  </a:lnTo>
+                  <a:lnTo>
+                    <a:pt x="6560825" y="2811130"/>
+                  </a:lnTo>
+                  <a:lnTo>
+                    <a:pt x="6637457" y="2814547"/>
+                  </a:lnTo>
+                  <a:lnTo>
+                    <a:pt x="6714090" y="2817946"/>
+                  </a:lnTo>
+                  <a:lnTo>
+                    <a:pt x="6790722" y="2821328"/>
+                  </a:lnTo>
+                  <a:lnTo>
+                    <a:pt x="6867355" y="2824693"/>
+                  </a:lnTo>
+                  <a:lnTo>
+                    <a:pt x="6943987" y="2828041"/>
+                  </a:lnTo>
+                  <a:lnTo>
+                    <a:pt x="7020620" y="2831372"/>
+                  </a:lnTo>
+                  <a:lnTo>
+                    <a:pt x="7097253" y="2834686"/>
+                  </a:lnTo>
+                  <a:lnTo>
+                    <a:pt x="7173885" y="2837983"/>
+                  </a:lnTo>
+                  <a:lnTo>
+                    <a:pt x="7250518" y="2841263"/>
+                  </a:lnTo>
+                  <a:lnTo>
+                    <a:pt x="7327150" y="2844526"/>
+                  </a:lnTo>
+                  <a:lnTo>
+                    <a:pt x="7403783" y="2847773"/>
+                  </a:lnTo>
+                  <a:lnTo>
+                    <a:pt x="7403783" y="3376487"/>
+                  </a:lnTo>
+                  <a:lnTo>
+                    <a:pt x="7327150" y="3372197"/>
+                  </a:lnTo>
+                  <a:lnTo>
+                    <a:pt x="7250518" y="3367735"/>
+                  </a:lnTo>
+                  <a:lnTo>
+                    <a:pt x="7173885" y="3363095"/>
+                  </a:lnTo>
+                  <a:lnTo>
+                    <a:pt x="7097253" y="3358270"/>
+                  </a:lnTo>
+                  <a:lnTo>
+                    <a:pt x="7020620" y="3353251"/>
+                  </a:lnTo>
+                  <a:lnTo>
+                    <a:pt x="6943987" y="3348032"/>
+                  </a:lnTo>
+                  <a:lnTo>
+                    <a:pt x="6867355" y="3342603"/>
+                  </a:lnTo>
+                  <a:lnTo>
+                    <a:pt x="6790722" y="3336958"/>
+                  </a:lnTo>
+                  <a:lnTo>
+                    <a:pt x="6714090" y="3331087"/>
+                  </a:lnTo>
+                  <a:lnTo>
+                    <a:pt x="6637457" y="3324981"/>
+                  </a:lnTo>
+                  <a:lnTo>
+                    <a:pt x="6560825" y="3318631"/>
+                  </a:lnTo>
+                  <a:lnTo>
+                    <a:pt x="6484192" y="3312027"/>
+                  </a:lnTo>
+                  <a:lnTo>
+                    <a:pt x="6407560" y="3305159"/>
+                  </a:lnTo>
+                  <a:lnTo>
+                    <a:pt x="6330927" y="3298016"/>
+                  </a:lnTo>
+                  <a:lnTo>
+                    <a:pt x="6254294" y="3290587"/>
+                  </a:lnTo>
+                  <a:lnTo>
+                    <a:pt x="6177662" y="3282862"/>
+                  </a:lnTo>
+                  <a:lnTo>
+                    <a:pt x="6101029" y="3274827"/>
+                  </a:lnTo>
+                  <a:lnTo>
+                    <a:pt x="6024397" y="3266471"/>
+                  </a:lnTo>
+                  <a:lnTo>
+                    <a:pt x="5947764" y="3257781"/>
+                  </a:lnTo>
+                  <a:lnTo>
+                    <a:pt x="5871132" y="3248743"/>
+                  </a:lnTo>
+                  <a:lnTo>
+                    <a:pt x="5794499" y="3239343"/>
+                  </a:lnTo>
+                  <a:lnTo>
+                    <a:pt x="5717867" y="3229568"/>
+                  </a:lnTo>
+                  <a:lnTo>
+                    <a:pt x="5641234" y="3219402"/>
+                  </a:lnTo>
+                  <a:lnTo>
+                    <a:pt x="5564602" y="3208829"/>
+                  </a:lnTo>
+                  <a:lnTo>
+                    <a:pt x="5487969" y="3197833"/>
+                  </a:lnTo>
+                  <a:lnTo>
+                    <a:pt x="5411336" y="3186397"/>
+                  </a:lnTo>
+                  <a:lnTo>
+                    <a:pt x="5334704" y="3174504"/>
+                  </a:lnTo>
+                  <a:lnTo>
+                    <a:pt x="5258071" y="3162136"/>
+                  </a:lnTo>
+                  <a:lnTo>
+                    <a:pt x="5181439" y="3149272"/>
+                  </a:lnTo>
+                  <a:lnTo>
+                    <a:pt x="5104806" y="3135894"/>
+                  </a:lnTo>
+                  <a:lnTo>
+                    <a:pt x="5028174" y="3121981"/>
+                  </a:lnTo>
+                  <a:lnTo>
+                    <a:pt x="4951541" y="3107512"/>
+                  </a:lnTo>
+                  <a:lnTo>
+                    <a:pt x="4874909" y="3092464"/>
+                  </a:lnTo>
+                  <a:lnTo>
+                    <a:pt x="4798276" y="3076814"/>
+                  </a:lnTo>
+                  <a:lnTo>
+                    <a:pt x="4721644" y="3060538"/>
+                  </a:lnTo>
+                  <a:lnTo>
+                    <a:pt x="4645011" y="3043611"/>
+                  </a:lnTo>
+                  <a:lnTo>
+                    <a:pt x="4568378" y="3026007"/>
+                  </a:lnTo>
+                  <a:lnTo>
+                    <a:pt x="4491746" y="3007699"/>
+                  </a:lnTo>
+                  <a:lnTo>
+                    <a:pt x="4415113" y="2988659"/>
+                  </a:lnTo>
+                  <a:lnTo>
+                    <a:pt x="4338481" y="2968857"/>
+                  </a:lnTo>
+                  <a:lnTo>
+                    <a:pt x="4261848" y="2948263"/>
+                  </a:lnTo>
+                  <a:lnTo>
+                    <a:pt x="4185216" y="2926845"/>
+                  </a:lnTo>
+                  <a:lnTo>
+                    <a:pt x="4108583" y="2904571"/>
+                  </a:lnTo>
+                  <a:lnTo>
+                    <a:pt x="4031951" y="2881406"/>
+                  </a:lnTo>
+                  <a:lnTo>
+                    <a:pt x="3955318" y="2857314"/>
+                  </a:lnTo>
+                  <a:lnTo>
+                    <a:pt x="3878685" y="2832259"/>
+                  </a:lnTo>
+                  <a:lnTo>
+                    <a:pt x="3802053" y="2806202"/>
+                  </a:lnTo>
+                  <a:lnTo>
+                    <a:pt x="3725420" y="2779102"/>
+                  </a:lnTo>
+                  <a:lnTo>
+                    <a:pt x="3648788" y="2750919"/>
+                  </a:lnTo>
+                  <a:lnTo>
+                    <a:pt x="3572155" y="2721608"/>
+                  </a:lnTo>
+                  <a:lnTo>
+                    <a:pt x="3495523" y="2691125"/>
+                  </a:lnTo>
+                  <a:lnTo>
+                    <a:pt x="3418890" y="2659423"/>
+                  </a:lnTo>
+                  <a:lnTo>
+                    <a:pt x="3342258" y="2650721"/>
+                  </a:lnTo>
+                  <a:lnTo>
+                    <a:pt x="3265625" y="2646468"/>
+                  </a:lnTo>
+                  <a:lnTo>
+                    <a:pt x="3188993" y="2642193"/>
+                  </a:lnTo>
+                  <a:lnTo>
+                    <a:pt x="3112360" y="2637896"/>
+                  </a:lnTo>
+                  <a:lnTo>
+                    <a:pt x="3035727" y="2633578"/>
+                  </a:lnTo>
+                  <a:lnTo>
+                    <a:pt x="2959095" y="2629237"/>
+                  </a:lnTo>
+                  <a:lnTo>
+                    <a:pt x="2882462" y="2624874"/>
+                  </a:lnTo>
+                  <a:lnTo>
+                    <a:pt x="2805830" y="2620489"/>
+                  </a:lnTo>
+                  <a:lnTo>
+                    <a:pt x="2729197" y="2616082"/>
+                  </a:lnTo>
+                  <a:lnTo>
+                    <a:pt x="2652565" y="2611652"/>
+                  </a:lnTo>
+                  <a:lnTo>
+                    <a:pt x="2575932" y="2607199"/>
+                  </a:lnTo>
+                  <a:lnTo>
+                    <a:pt x="2499300" y="2602724"/>
+                  </a:lnTo>
+                  <a:lnTo>
+                    <a:pt x="2422667" y="2598226"/>
+                  </a:lnTo>
+                  <a:lnTo>
+                    <a:pt x="2346034" y="2593705"/>
+                  </a:lnTo>
+                  <a:lnTo>
+                    <a:pt x="2269402" y="2589160"/>
+                  </a:lnTo>
+                  <a:lnTo>
+                    <a:pt x="2192769" y="2584593"/>
+                  </a:lnTo>
+                  <a:lnTo>
+                    <a:pt x="2116137" y="2580002"/>
+                  </a:lnTo>
+                  <a:lnTo>
+                    <a:pt x="2039504" y="2575388"/>
+                  </a:lnTo>
+                  <a:lnTo>
+                    <a:pt x="1962872" y="2570750"/>
+                  </a:lnTo>
+                  <a:lnTo>
+                    <a:pt x="1886239" y="2566089"/>
+                  </a:lnTo>
+                  <a:lnTo>
+                    <a:pt x="1809607" y="2561404"/>
+                  </a:lnTo>
+                  <a:lnTo>
+                    <a:pt x="1732974" y="2556695"/>
+                  </a:lnTo>
+                  <a:lnTo>
+                    <a:pt x="1656342" y="2551961"/>
+                  </a:lnTo>
+                  <a:lnTo>
+                    <a:pt x="1579709" y="2547204"/>
+                  </a:lnTo>
+                  <a:lnTo>
+                    <a:pt x="1503076" y="2542422"/>
+                  </a:lnTo>
+                  <a:lnTo>
+                    <a:pt x="1426444" y="2537616"/>
+                  </a:lnTo>
+                  <a:lnTo>
+                    <a:pt x="1349811" y="2532786"/>
+                  </a:lnTo>
+                  <a:lnTo>
+                    <a:pt x="1273179" y="2527931"/>
+                  </a:lnTo>
+                  <a:lnTo>
+                    <a:pt x="1196546" y="2523051"/>
+                  </a:lnTo>
+                  <a:lnTo>
+                    <a:pt x="1119914" y="2518146"/>
+                  </a:lnTo>
+                  <a:lnTo>
+                    <a:pt x="1043281" y="2513216"/>
+                  </a:lnTo>
+                  <a:lnTo>
+                    <a:pt x="966649" y="2508261"/>
+                  </a:lnTo>
+                  <a:lnTo>
+                    <a:pt x="890016" y="2503280"/>
+                  </a:lnTo>
+                  <a:lnTo>
+                    <a:pt x="813384" y="2498274"/>
+                  </a:lnTo>
+                  <a:lnTo>
+                    <a:pt x="736751" y="2493243"/>
+                  </a:lnTo>
+                  <a:lnTo>
+                    <a:pt x="660118" y="2488186"/>
+                  </a:lnTo>
+                  <a:lnTo>
+                    <a:pt x="583486" y="2483103"/>
+                  </a:lnTo>
+                  <a:lnTo>
+                    <a:pt x="506853" y="2477994"/>
+                  </a:lnTo>
+                  <a:lnTo>
+                    <a:pt x="430221" y="2472859"/>
+                  </a:lnTo>
+                  <a:lnTo>
+                    <a:pt x="353588" y="2467698"/>
+                  </a:lnTo>
+                  <a:lnTo>
+                    <a:pt x="276956" y="2462510"/>
+                  </a:lnTo>
+                  <a:lnTo>
+                    <a:pt x="200323" y="2457296"/>
+                  </a:lnTo>
+                  <a:lnTo>
+                    <a:pt x="123691" y="2452056"/>
+                  </a:lnTo>
+                  <a:lnTo>
+                    <a:pt x="47058" y="2446788"/>
+                  </a:lnTo>
+                  <a:lnTo>
+                    <a:pt x="0" y="2443537"/>
                   </a:lnTo>
                   <a:close/>
                 </a:path>
@@ -3597,282 +3597,282 @@
           </p:nvSpPr>
           <p:spPr>
             <a:xfrm>
-              <a:off x="1420334" y="1896563"/>
-              <a:ext cx="6800966" cy="2985837"/>
+              <a:off x="1420334" y="2073503"/>
+              <a:ext cx="6800966" cy="2847773"/>
             </a:xfrm>
             <a:custGeom>
               <a:avLst/>
               <a:pathLst>
-                <a:path w="6800966" h="2985837">
+                <a:path w="6800966" h="2847773">
                   <a:moveTo>
                     <a:pt x="0" y="0"/>
                   </a:moveTo>
                   <a:lnTo>
-                    <a:pt x="57302" y="106070"/>
-                  </a:lnTo>
-                  <a:lnTo>
-                    <a:pt x="133934" y="242465"/>
-                  </a:lnTo>
-                  <a:lnTo>
-                    <a:pt x="210567" y="373616"/>
-                  </a:lnTo>
-                  <a:lnTo>
-                    <a:pt x="287200" y="499722"/>
-                  </a:lnTo>
-                  <a:lnTo>
-                    <a:pt x="363832" y="620979"/>
-                  </a:lnTo>
-                  <a:lnTo>
-                    <a:pt x="440465" y="737572"/>
-                  </a:lnTo>
-                  <a:lnTo>
-                    <a:pt x="517097" y="849681"/>
-                  </a:lnTo>
-                  <a:lnTo>
-                    <a:pt x="593730" y="957479"/>
-                  </a:lnTo>
-                  <a:lnTo>
-                    <a:pt x="670362" y="1061131"/>
-                  </a:lnTo>
-                  <a:lnTo>
-                    <a:pt x="746995" y="1160797"/>
-                  </a:lnTo>
-                  <a:lnTo>
-                    <a:pt x="823627" y="1256629"/>
-                  </a:lnTo>
-                  <a:lnTo>
-                    <a:pt x="900260" y="1348776"/>
-                  </a:lnTo>
-                  <a:lnTo>
-                    <a:pt x="976893" y="1437380"/>
-                  </a:lnTo>
-                  <a:lnTo>
-                    <a:pt x="1053525" y="1522575"/>
-                  </a:lnTo>
-                  <a:lnTo>
-                    <a:pt x="1130158" y="1604494"/>
-                  </a:lnTo>
-                  <a:lnTo>
-                    <a:pt x="1206790" y="1683263"/>
-                  </a:lnTo>
-                  <a:lnTo>
-                    <a:pt x="1283423" y="1759003"/>
-                  </a:lnTo>
-                  <a:lnTo>
-                    <a:pt x="1360055" y="1831829"/>
-                  </a:lnTo>
-                  <a:lnTo>
-                    <a:pt x="1436688" y="1901855"/>
-                  </a:lnTo>
-                  <a:lnTo>
-                    <a:pt x="1513320" y="1969188"/>
-                  </a:lnTo>
-                  <a:lnTo>
-                    <a:pt x="1589953" y="2033931"/>
-                  </a:lnTo>
-                  <a:lnTo>
-                    <a:pt x="1666585" y="2096184"/>
-                  </a:lnTo>
-                  <a:lnTo>
-                    <a:pt x="1743218" y="2156043"/>
-                  </a:lnTo>
-                  <a:lnTo>
-                    <a:pt x="1819851" y="2213600"/>
-                  </a:lnTo>
-                  <a:lnTo>
-                    <a:pt x="1896483" y="2268943"/>
-                  </a:lnTo>
-                  <a:lnTo>
-                    <a:pt x="1973116" y="2322158"/>
-                  </a:lnTo>
-                  <a:lnTo>
-                    <a:pt x="2049748" y="2373327"/>
-                  </a:lnTo>
-                  <a:lnTo>
-                    <a:pt x="2126381" y="2422527"/>
-                  </a:lnTo>
-                  <a:lnTo>
-                    <a:pt x="2203013" y="2469836"/>
-                  </a:lnTo>
-                  <a:lnTo>
-                    <a:pt x="2279646" y="2515325"/>
-                  </a:lnTo>
-                  <a:lnTo>
-                    <a:pt x="2356278" y="2559064"/>
-                  </a:lnTo>
-                  <a:lnTo>
-                    <a:pt x="2432911" y="2601122"/>
-                  </a:lnTo>
-                  <a:lnTo>
-                    <a:pt x="2509544" y="2641562"/>
-                  </a:lnTo>
-                  <a:lnTo>
-                    <a:pt x="2586176" y="2680446"/>
-                  </a:lnTo>
-                  <a:lnTo>
-                    <a:pt x="2662809" y="2717836"/>
-                  </a:lnTo>
-                  <a:lnTo>
-                    <a:pt x="2739441" y="2753787"/>
-                  </a:lnTo>
-                  <a:lnTo>
-                    <a:pt x="2816074" y="2783668"/>
-                  </a:lnTo>
-                  <a:lnTo>
-                    <a:pt x="2892706" y="2788082"/>
-                  </a:lnTo>
-                  <a:lnTo>
-                    <a:pt x="2969339" y="2792474"/>
-                  </a:lnTo>
-                  <a:lnTo>
-                    <a:pt x="3045971" y="2796843"/>
-                  </a:lnTo>
-                  <a:lnTo>
-                    <a:pt x="3122604" y="2801190"/>
-                  </a:lnTo>
-                  <a:lnTo>
-                    <a:pt x="3199236" y="2805515"/>
-                  </a:lnTo>
-                  <a:lnTo>
-                    <a:pt x="3275869" y="2809819"/>
-                  </a:lnTo>
-                  <a:lnTo>
-                    <a:pt x="3352502" y="2814100"/>
-                  </a:lnTo>
-                  <a:lnTo>
-                    <a:pt x="3429134" y="2818359"/>
-                  </a:lnTo>
-                  <a:lnTo>
-                    <a:pt x="3505767" y="2822597"/>
-                  </a:lnTo>
-                  <a:lnTo>
-                    <a:pt x="3582399" y="2826814"/>
-                  </a:lnTo>
-                  <a:lnTo>
-                    <a:pt x="3659032" y="2831008"/>
-                  </a:lnTo>
-                  <a:lnTo>
-                    <a:pt x="3735664" y="2835182"/>
-                  </a:lnTo>
-                  <a:lnTo>
-                    <a:pt x="3812297" y="2839335"/>
-                  </a:lnTo>
-                  <a:lnTo>
-                    <a:pt x="3888929" y="2843466"/>
-                  </a:lnTo>
-                  <a:lnTo>
-                    <a:pt x="3965562" y="2847576"/>
-                  </a:lnTo>
-                  <a:lnTo>
-                    <a:pt x="4042194" y="2851666"/>
-                  </a:lnTo>
-                  <a:lnTo>
-                    <a:pt x="4118827" y="2855734"/>
-                  </a:lnTo>
-                  <a:lnTo>
-                    <a:pt x="4195460" y="2859782"/>
-                  </a:lnTo>
-                  <a:lnTo>
-                    <a:pt x="4272092" y="2863810"/>
-                  </a:lnTo>
-                  <a:lnTo>
-                    <a:pt x="4348725" y="2867817"/>
-                  </a:lnTo>
-                  <a:lnTo>
-                    <a:pt x="4425357" y="2871804"/>
-                  </a:lnTo>
-                  <a:lnTo>
-                    <a:pt x="4501990" y="2875770"/>
-                  </a:lnTo>
-                  <a:lnTo>
-                    <a:pt x="4578622" y="2879716"/>
-                  </a:lnTo>
-                  <a:lnTo>
-                    <a:pt x="4655255" y="2883642"/>
-                  </a:lnTo>
-                  <a:lnTo>
-                    <a:pt x="4731887" y="2887549"/>
-                  </a:lnTo>
-                  <a:lnTo>
-                    <a:pt x="4808520" y="2891435"/>
-                  </a:lnTo>
-                  <a:lnTo>
-                    <a:pt x="4885153" y="2895302"/>
-                  </a:lnTo>
-                  <a:lnTo>
-                    <a:pt x="4961785" y="2899149"/>
-                  </a:lnTo>
-                  <a:lnTo>
-                    <a:pt x="5038418" y="2902976"/>
-                  </a:lnTo>
-                  <a:lnTo>
-                    <a:pt x="5115050" y="2906784"/>
-                  </a:lnTo>
-                  <a:lnTo>
-                    <a:pt x="5191683" y="2910573"/>
-                  </a:lnTo>
-                  <a:lnTo>
-                    <a:pt x="5268315" y="2914343"/>
-                  </a:lnTo>
-                  <a:lnTo>
-                    <a:pt x="5344948" y="2918093"/>
-                  </a:lnTo>
-                  <a:lnTo>
-                    <a:pt x="5421580" y="2921824"/>
-                  </a:lnTo>
-                  <a:lnTo>
-                    <a:pt x="5498213" y="2925537"/>
-                  </a:lnTo>
-                  <a:lnTo>
-                    <a:pt x="5574845" y="2929230"/>
-                  </a:lnTo>
-                  <a:lnTo>
-                    <a:pt x="5651478" y="2932905"/>
-                  </a:lnTo>
-                  <a:lnTo>
-                    <a:pt x="5728111" y="2936561"/>
-                  </a:lnTo>
-                  <a:lnTo>
-                    <a:pt x="5804743" y="2940198"/>
-                  </a:lnTo>
-                  <a:lnTo>
-                    <a:pt x="5881376" y="2943817"/>
-                  </a:lnTo>
-                  <a:lnTo>
-                    <a:pt x="5958008" y="2947418"/>
-                  </a:lnTo>
-                  <a:lnTo>
-                    <a:pt x="6034641" y="2951000"/>
-                  </a:lnTo>
-                  <a:lnTo>
-                    <a:pt x="6111273" y="2954564"/>
-                  </a:lnTo>
-                  <a:lnTo>
-                    <a:pt x="6187906" y="2958110"/>
-                  </a:lnTo>
-                  <a:lnTo>
-                    <a:pt x="6264538" y="2961638"/>
-                  </a:lnTo>
-                  <a:lnTo>
-                    <a:pt x="6341171" y="2965148"/>
-                  </a:lnTo>
-                  <a:lnTo>
-                    <a:pt x="6417804" y="2968641"/>
-                  </a:lnTo>
-                  <a:lnTo>
-                    <a:pt x="6494436" y="2972115"/>
-                  </a:lnTo>
-                  <a:lnTo>
-                    <a:pt x="6571069" y="2975572"/>
-                  </a:lnTo>
-                  <a:lnTo>
-                    <a:pt x="6647701" y="2979011"/>
-                  </a:lnTo>
-                  <a:lnTo>
-                    <a:pt x="6724334" y="2982433"/>
-                  </a:lnTo>
-                  <a:lnTo>
-                    <a:pt x="6800966" y="2985837"/>
+                    <a:pt x="57302" y="101165"/>
+                  </a:lnTo>
+                  <a:lnTo>
+                    <a:pt x="133934" y="231254"/>
+                  </a:lnTo>
+                  <a:lnTo>
+                    <a:pt x="210567" y="356340"/>
+                  </a:lnTo>
+                  <a:lnTo>
+                    <a:pt x="287200" y="476615"/>
+                  </a:lnTo>
+                  <a:lnTo>
+                    <a:pt x="363832" y="592265"/>
+                  </a:lnTo>
+                  <a:lnTo>
+                    <a:pt x="440465" y="703467"/>
+                  </a:lnTo>
+                  <a:lnTo>
+                    <a:pt x="517097" y="810392"/>
+                  </a:lnTo>
+                  <a:lnTo>
+                    <a:pt x="593730" y="913205"/>
+                  </a:lnTo>
+                  <a:lnTo>
+                    <a:pt x="670362" y="1012065"/>
+                  </a:lnTo>
+                  <a:lnTo>
+                    <a:pt x="746995" y="1107122"/>
+                  </a:lnTo>
+                  <a:lnTo>
+                    <a:pt x="823627" y="1198523"/>
+                  </a:lnTo>
+                  <a:lnTo>
+                    <a:pt x="900260" y="1286409"/>
+                  </a:lnTo>
+                  <a:lnTo>
+                    <a:pt x="976893" y="1370916"/>
+                  </a:lnTo>
+                  <a:lnTo>
+                    <a:pt x="1053525" y="1452172"/>
+                  </a:lnTo>
+                  <a:lnTo>
+                    <a:pt x="1130158" y="1530303"/>
+                  </a:lnTo>
+                  <a:lnTo>
+                    <a:pt x="1206790" y="1605430"/>
+                  </a:lnTo>
+                  <a:lnTo>
+                    <a:pt x="1283423" y="1677667"/>
+                  </a:lnTo>
+                  <a:lnTo>
+                    <a:pt x="1360055" y="1747126"/>
+                  </a:lnTo>
+                  <a:lnTo>
+                    <a:pt x="1436688" y="1813914"/>
+                  </a:lnTo>
+                  <a:lnTo>
+                    <a:pt x="1513320" y="1878133"/>
+                  </a:lnTo>
+                  <a:lnTo>
+                    <a:pt x="1589953" y="1939882"/>
+                  </a:lnTo>
+                  <a:lnTo>
+                    <a:pt x="1666585" y="1999257"/>
+                  </a:lnTo>
+                  <a:lnTo>
+                    <a:pt x="1743218" y="2056348"/>
+                  </a:lnTo>
+                  <a:lnTo>
+                    <a:pt x="1819851" y="2111244"/>
+                  </a:lnTo>
+                  <a:lnTo>
+                    <a:pt x="1896483" y="2164028"/>
+                  </a:lnTo>
+                  <a:lnTo>
+                    <a:pt x="1973116" y="2214783"/>
+                  </a:lnTo>
+                  <a:lnTo>
+                    <a:pt x="2049748" y="2263585"/>
+                  </a:lnTo>
+                  <a:lnTo>
+                    <a:pt x="2126381" y="2310511"/>
+                  </a:lnTo>
+                  <a:lnTo>
+                    <a:pt x="2203013" y="2355632"/>
+                  </a:lnTo>
+                  <a:lnTo>
+                    <a:pt x="2279646" y="2399017"/>
+                  </a:lnTo>
+                  <a:lnTo>
+                    <a:pt x="2356278" y="2440734"/>
+                  </a:lnTo>
+                  <a:lnTo>
+                    <a:pt x="2432911" y="2480847"/>
+                  </a:lnTo>
+                  <a:lnTo>
+                    <a:pt x="2509544" y="2519417"/>
+                  </a:lnTo>
+                  <a:lnTo>
+                    <a:pt x="2586176" y="2556503"/>
+                  </a:lnTo>
+                  <a:lnTo>
+                    <a:pt x="2662809" y="2592164"/>
+                  </a:lnTo>
+                  <a:lnTo>
+                    <a:pt x="2739441" y="2626453"/>
+                  </a:lnTo>
+                  <a:lnTo>
+                    <a:pt x="2816074" y="2654952"/>
+                  </a:lnTo>
+                  <a:lnTo>
+                    <a:pt x="2892706" y="2659162"/>
+                  </a:lnTo>
+                  <a:lnTo>
+                    <a:pt x="2969339" y="2663351"/>
+                  </a:lnTo>
+                  <a:lnTo>
+                    <a:pt x="3045971" y="2667518"/>
+                  </a:lnTo>
+                  <a:lnTo>
+                    <a:pt x="3122604" y="2671664"/>
+                  </a:lnTo>
+                  <a:lnTo>
+                    <a:pt x="3199236" y="2675789"/>
+                  </a:lnTo>
+                  <a:lnTo>
+                    <a:pt x="3275869" y="2679894"/>
+                  </a:lnTo>
+                  <a:lnTo>
+                    <a:pt x="3352502" y="2683977"/>
+                  </a:lnTo>
+                  <a:lnTo>
+                    <a:pt x="3429134" y="2688039"/>
+                  </a:lnTo>
+                  <a:lnTo>
+                    <a:pt x="3505767" y="2692081"/>
+                  </a:lnTo>
+                  <a:lnTo>
+                    <a:pt x="3582399" y="2696103"/>
+                  </a:lnTo>
+                  <a:lnTo>
+                    <a:pt x="3659032" y="2700104"/>
+                  </a:lnTo>
+                  <a:lnTo>
+                    <a:pt x="3735664" y="2704084"/>
+                  </a:lnTo>
+                  <a:lnTo>
+                    <a:pt x="3812297" y="2708045"/>
+                  </a:lnTo>
+                  <a:lnTo>
+                    <a:pt x="3888929" y="2711985"/>
+                  </a:lnTo>
+                  <a:lnTo>
+                    <a:pt x="3965562" y="2715905"/>
+                  </a:lnTo>
+                  <a:lnTo>
+                    <a:pt x="4042194" y="2719806"/>
+                  </a:lnTo>
+                  <a:lnTo>
+                    <a:pt x="4118827" y="2723686"/>
+                  </a:lnTo>
+                  <a:lnTo>
+                    <a:pt x="4195460" y="2727547"/>
+                  </a:lnTo>
+                  <a:lnTo>
+                    <a:pt x="4272092" y="2731388"/>
+                  </a:lnTo>
+                  <a:lnTo>
+                    <a:pt x="4348725" y="2735210"/>
+                  </a:lnTo>
+                  <a:lnTo>
+                    <a:pt x="4425357" y="2739012"/>
+                  </a:lnTo>
+                  <a:lnTo>
+                    <a:pt x="4501990" y="2742795"/>
+                  </a:lnTo>
+                  <a:lnTo>
+                    <a:pt x="4578622" y="2746559"/>
+                  </a:lnTo>
+                  <a:lnTo>
+                    <a:pt x="4655255" y="2750304"/>
+                  </a:lnTo>
+                  <a:lnTo>
+                    <a:pt x="4731887" y="2754030"/>
+                  </a:lnTo>
+                  <a:lnTo>
+                    <a:pt x="4808520" y="2757736"/>
+                  </a:lnTo>
+                  <a:lnTo>
+                    <a:pt x="4885153" y="2761424"/>
+                  </a:lnTo>
+                  <a:lnTo>
+                    <a:pt x="4961785" y="2765093"/>
+                  </a:lnTo>
+                  <a:lnTo>
+                    <a:pt x="5038418" y="2768744"/>
+                  </a:lnTo>
+                  <a:lnTo>
+                    <a:pt x="5115050" y="2772376"/>
+                  </a:lnTo>
+                  <a:lnTo>
+                    <a:pt x="5191683" y="2775989"/>
+                  </a:lnTo>
+                  <a:lnTo>
+                    <a:pt x="5268315" y="2779584"/>
+                  </a:lnTo>
+                  <a:lnTo>
+                    <a:pt x="5344948" y="2783161"/>
+                  </a:lnTo>
+                  <a:lnTo>
+                    <a:pt x="5421580" y="2786720"/>
+                  </a:lnTo>
+                  <a:lnTo>
+                    <a:pt x="5498213" y="2790261"/>
+                  </a:lnTo>
+                  <a:lnTo>
+                    <a:pt x="5574845" y="2793783"/>
+                  </a:lnTo>
+                  <a:lnTo>
+                    <a:pt x="5651478" y="2797288"/>
+                  </a:lnTo>
+                  <a:lnTo>
+                    <a:pt x="5728111" y="2800775"/>
+                  </a:lnTo>
+                  <a:lnTo>
+                    <a:pt x="5804743" y="2804245"/>
+                  </a:lnTo>
+                  <a:lnTo>
+                    <a:pt x="5881376" y="2807696"/>
+                  </a:lnTo>
+                  <a:lnTo>
+                    <a:pt x="5958008" y="2811130"/>
+                  </a:lnTo>
+                  <a:lnTo>
+                    <a:pt x="6034641" y="2814547"/>
+                  </a:lnTo>
+                  <a:lnTo>
+                    <a:pt x="6111273" y="2817946"/>
+                  </a:lnTo>
+                  <a:lnTo>
+                    <a:pt x="6187906" y="2821328"/>
+                  </a:lnTo>
+                  <a:lnTo>
+                    <a:pt x="6264538" y="2824693"/>
+                  </a:lnTo>
+                  <a:lnTo>
+                    <a:pt x="6341171" y="2828041"/>
+                  </a:lnTo>
+                  <a:lnTo>
+                    <a:pt x="6417804" y="2831372"/>
+                  </a:lnTo>
+                  <a:lnTo>
+                    <a:pt x="6494436" y="2834686"/>
+                  </a:lnTo>
+                  <a:lnTo>
+                    <a:pt x="6571069" y="2837983"/>
+                  </a:lnTo>
+                  <a:lnTo>
+                    <a:pt x="6647701" y="2841263"/>
+                  </a:lnTo>
+                  <a:lnTo>
+                    <a:pt x="6724334" y="2844526"/>
+                  </a:lnTo>
+                  <a:lnTo>
+                    <a:pt x="6800966" y="2847773"/>
                   </a:lnTo>
                 </a:path>
               </a:pathLst>
@@ -3892,303 +3892,303 @@
           </p:nvSpPr>
           <p:spPr>
             <a:xfrm>
-              <a:off x="817517" y="4458567"/>
-              <a:ext cx="7403783" cy="978180"/>
+              <a:off x="817517" y="4517040"/>
+              <a:ext cx="7403783" cy="932949"/>
             </a:xfrm>
             <a:custGeom>
               <a:avLst/>
               <a:pathLst>
-                <a:path w="7403783" h="978180">
+                <a:path w="7403783" h="932949">
                   <a:moveTo>
-                    <a:pt x="7403783" y="978180"/>
+                    <a:pt x="7403783" y="932949"/>
                   </a:moveTo>
                   <a:lnTo>
-                    <a:pt x="7327150" y="973682"/>
-                  </a:lnTo>
-                  <a:lnTo>
-                    <a:pt x="7250518" y="969004"/>
-                  </a:lnTo>
-                  <a:lnTo>
-                    <a:pt x="7173885" y="964139"/>
-                  </a:lnTo>
-                  <a:lnTo>
-                    <a:pt x="7097253" y="959080"/>
-                  </a:lnTo>
-                  <a:lnTo>
-                    <a:pt x="7020620" y="953818"/>
-                  </a:lnTo>
-                  <a:lnTo>
-                    <a:pt x="6943987" y="948345"/>
-                  </a:lnTo>
-                  <a:lnTo>
-                    <a:pt x="6867355" y="942654"/>
-                  </a:lnTo>
-                  <a:lnTo>
-                    <a:pt x="6790722" y="936735"/>
-                  </a:lnTo>
-                  <a:lnTo>
-                    <a:pt x="6714090" y="930579"/>
-                  </a:lnTo>
-                  <a:lnTo>
-                    <a:pt x="6637457" y="924177"/>
-                  </a:lnTo>
-                  <a:lnTo>
-                    <a:pt x="6560825" y="917519"/>
-                  </a:lnTo>
-                  <a:lnTo>
-                    <a:pt x="6484192" y="910595"/>
-                  </a:lnTo>
-                  <a:lnTo>
-                    <a:pt x="6407560" y="903394"/>
-                  </a:lnTo>
-                  <a:lnTo>
-                    <a:pt x="6330927" y="895905"/>
-                  </a:lnTo>
-                  <a:lnTo>
-                    <a:pt x="6254294" y="888116"/>
-                  </a:lnTo>
-                  <a:lnTo>
-                    <a:pt x="6177662" y="880016"/>
-                  </a:lnTo>
-                  <a:lnTo>
-                    <a:pt x="6101029" y="871591"/>
-                  </a:lnTo>
-                  <a:lnTo>
-                    <a:pt x="6024397" y="862830"/>
-                  </a:lnTo>
-                  <a:lnTo>
-                    <a:pt x="5947764" y="853719"/>
-                  </a:lnTo>
-                  <a:lnTo>
-                    <a:pt x="5871132" y="844243"/>
-                  </a:lnTo>
-                  <a:lnTo>
-                    <a:pt x="5794499" y="834388"/>
-                  </a:lnTo>
-                  <a:lnTo>
-                    <a:pt x="5717867" y="824138"/>
-                  </a:lnTo>
-                  <a:lnTo>
-                    <a:pt x="5641234" y="813479"/>
-                  </a:lnTo>
-                  <a:lnTo>
-                    <a:pt x="5564602" y="802394"/>
-                  </a:lnTo>
-                  <a:lnTo>
-                    <a:pt x="5487969" y="790865"/>
-                  </a:lnTo>
-                  <a:lnTo>
-                    <a:pt x="5411336" y="778875"/>
-                  </a:lnTo>
-                  <a:lnTo>
-                    <a:pt x="5334704" y="766405"/>
-                  </a:lnTo>
-                  <a:lnTo>
-                    <a:pt x="5258071" y="753437"/>
-                  </a:lnTo>
-                  <a:lnTo>
-                    <a:pt x="5181439" y="739950"/>
-                  </a:lnTo>
-                  <a:lnTo>
-                    <a:pt x="5104806" y="725923"/>
-                  </a:lnTo>
-                  <a:lnTo>
-                    <a:pt x="5028174" y="711336"/>
-                  </a:lnTo>
-                  <a:lnTo>
-                    <a:pt x="4951541" y="696165"/>
-                  </a:lnTo>
-                  <a:lnTo>
-                    <a:pt x="4874909" y="680387"/>
-                  </a:lnTo>
-                  <a:lnTo>
-                    <a:pt x="4798276" y="663979"/>
-                  </a:lnTo>
-                  <a:lnTo>
-                    <a:pt x="4721644" y="646914"/>
-                  </a:lnTo>
-                  <a:lnTo>
-                    <a:pt x="4645011" y="629166"/>
-                  </a:lnTo>
-                  <a:lnTo>
-                    <a:pt x="4568378" y="610709"/>
-                  </a:lnTo>
-                  <a:lnTo>
-                    <a:pt x="4491746" y="591513"/>
-                  </a:lnTo>
-                  <a:lnTo>
-                    <a:pt x="4415113" y="571549"/>
-                  </a:lnTo>
-                  <a:lnTo>
-                    <a:pt x="4338481" y="550788"/>
-                  </a:lnTo>
-                  <a:lnTo>
-                    <a:pt x="4261848" y="529195"/>
-                  </a:lnTo>
-                  <a:lnTo>
-                    <a:pt x="4185216" y="506739"/>
-                  </a:lnTo>
-                  <a:lnTo>
-                    <a:pt x="4108583" y="483385"/>
-                  </a:lnTo>
-                  <a:lnTo>
-                    <a:pt x="4031951" y="459097"/>
-                  </a:lnTo>
-                  <a:lnTo>
-                    <a:pt x="3955318" y="433837"/>
-                  </a:lnTo>
-                  <a:lnTo>
-                    <a:pt x="3878685" y="407568"/>
-                  </a:lnTo>
-                  <a:lnTo>
-                    <a:pt x="3802053" y="380247"/>
-                  </a:lnTo>
-                  <a:lnTo>
-                    <a:pt x="3725420" y="351833"/>
-                  </a:lnTo>
-                  <a:lnTo>
-                    <a:pt x="3648788" y="322284"/>
-                  </a:lnTo>
-                  <a:lnTo>
-                    <a:pt x="3572155" y="291552"/>
-                  </a:lnTo>
-                  <a:lnTo>
-                    <a:pt x="3495523" y="259591"/>
-                  </a:lnTo>
-                  <a:lnTo>
-                    <a:pt x="3418890" y="226352"/>
-                  </a:lnTo>
-                  <a:lnTo>
-                    <a:pt x="3342258" y="217228"/>
-                  </a:lnTo>
-                  <a:lnTo>
-                    <a:pt x="3265625" y="212768"/>
-                  </a:lnTo>
-                  <a:lnTo>
-                    <a:pt x="3188993" y="208286"/>
-                  </a:lnTo>
-                  <a:lnTo>
-                    <a:pt x="3112360" y="203781"/>
-                  </a:lnTo>
-                  <a:lnTo>
-                    <a:pt x="3035727" y="199253"/>
-                  </a:lnTo>
-                  <a:lnTo>
-                    <a:pt x="2959095" y="194702"/>
-                  </a:lnTo>
-                  <a:lnTo>
-                    <a:pt x="2882462" y="190128"/>
-                  </a:lnTo>
-                  <a:lnTo>
-                    <a:pt x="2805830" y="185530"/>
-                  </a:lnTo>
-                  <a:lnTo>
-                    <a:pt x="2729197" y="180909"/>
-                  </a:lnTo>
-                  <a:lnTo>
-                    <a:pt x="2652565" y="176265"/>
-                  </a:lnTo>
-                  <a:lnTo>
-                    <a:pt x="2575932" y="171596"/>
-                  </a:lnTo>
-                  <a:lnTo>
-                    <a:pt x="2499300" y="166904"/>
-                  </a:lnTo>
-                  <a:lnTo>
-                    <a:pt x="2422667" y="162188"/>
-                  </a:lnTo>
-                  <a:lnTo>
-                    <a:pt x="2346034" y="157447"/>
-                  </a:lnTo>
-                  <a:lnTo>
-                    <a:pt x="2269402" y="152683"/>
-                  </a:lnTo>
-                  <a:lnTo>
-                    <a:pt x="2192769" y="147894"/>
-                  </a:lnTo>
-                  <a:lnTo>
-                    <a:pt x="2116137" y="143081"/>
-                  </a:lnTo>
-                  <a:lnTo>
-                    <a:pt x="2039504" y="138243"/>
-                  </a:lnTo>
-                  <a:lnTo>
-                    <a:pt x="1962872" y="133380"/>
-                  </a:lnTo>
-                  <a:lnTo>
-                    <a:pt x="1886239" y="128493"/>
-                  </a:lnTo>
-                  <a:lnTo>
-                    <a:pt x="1809607" y="123581"/>
-                  </a:lnTo>
-                  <a:lnTo>
-                    <a:pt x="1732974" y="118643"/>
-                  </a:lnTo>
-                  <a:lnTo>
-                    <a:pt x="1656342" y="113680"/>
-                  </a:lnTo>
-                  <a:lnTo>
-                    <a:pt x="1579709" y="108693"/>
-                  </a:lnTo>
-                  <a:lnTo>
-                    <a:pt x="1503076" y="103679"/>
-                  </a:lnTo>
-                  <a:lnTo>
-                    <a:pt x="1426444" y="98640"/>
-                  </a:lnTo>
-                  <a:lnTo>
-                    <a:pt x="1349811" y="93575"/>
-                  </a:lnTo>
-                  <a:lnTo>
-                    <a:pt x="1273179" y="88485"/>
-                  </a:lnTo>
-                  <a:lnTo>
-                    <a:pt x="1196546" y="83368"/>
-                  </a:lnTo>
-                  <a:lnTo>
-                    <a:pt x="1119914" y="78225"/>
-                  </a:lnTo>
-                  <a:lnTo>
-                    <a:pt x="1043281" y="73056"/>
-                  </a:lnTo>
-                  <a:lnTo>
-                    <a:pt x="966649" y="67861"/>
-                  </a:lnTo>
-                  <a:lnTo>
-                    <a:pt x="890016" y="62639"/>
-                  </a:lnTo>
-                  <a:lnTo>
-                    <a:pt x="813384" y="57391"/>
-                  </a:lnTo>
-                  <a:lnTo>
-                    <a:pt x="736751" y="52115"/>
-                  </a:lnTo>
-                  <a:lnTo>
-                    <a:pt x="660118" y="46813"/>
-                  </a:lnTo>
-                  <a:lnTo>
-                    <a:pt x="583486" y="41483"/>
-                  </a:lnTo>
-                  <a:lnTo>
-                    <a:pt x="506853" y="36127"/>
-                  </a:lnTo>
-                  <a:lnTo>
-                    <a:pt x="430221" y="30743"/>
-                  </a:lnTo>
-                  <a:lnTo>
-                    <a:pt x="353588" y="25332"/>
-                  </a:lnTo>
-                  <a:lnTo>
-                    <a:pt x="276956" y="19893"/>
-                  </a:lnTo>
-                  <a:lnTo>
-                    <a:pt x="200323" y="14426"/>
-                  </a:lnTo>
-                  <a:lnTo>
-                    <a:pt x="123691" y="8931"/>
-                  </a:lnTo>
-                  <a:lnTo>
-                    <a:pt x="47058" y="3408"/>
+                    <a:pt x="7327150" y="928659"/>
+                  </a:lnTo>
+                  <a:lnTo>
+                    <a:pt x="7250518" y="924198"/>
+                  </a:lnTo>
+                  <a:lnTo>
+                    <a:pt x="7173885" y="919558"/>
+                  </a:lnTo>
+                  <a:lnTo>
+                    <a:pt x="7097253" y="914732"/>
+                  </a:lnTo>
+                  <a:lnTo>
+                    <a:pt x="7020620" y="909713"/>
+                  </a:lnTo>
+                  <a:lnTo>
+                    <a:pt x="6943987" y="904494"/>
+                  </a:lnTo>
+                  <a:lnTo>
+                    <a:pt x="6867355" y="899066"/>
+                  </a:lnTo>
+                  <a:lnTo>
+                    <a:pt x="6790722" y="893421"/>
+                  </a:lnTo>
+                  <a:lnTo>
+                    <a:pt x="6714090" y="887550"/>
+                  </a:lnTo>
+                  <a:lnTo>
+                    <a:pt x="6637457" y="881444"/>
+                  </a:lnTo>
+                  <a:lnTo>
+                    <a:pt x="6560825" y="875094"/>
+                  </a:lnTo>
+                  <a:lnTo>
+                    <a:pt x="6484192" y="868490"/>
+                  </a:lnTo>
+                  <a:lnTo>
+                    <a:pt x="6407560" y="861621"/>
+                  </a:lnTo>
+                  <a:lnTo>
+                    <a:pt x="6330927" y="854478"/>
+                  </a:lnTo>
+                  <a:lnTo>
+                    <a:pt x="6254294" y="847050"/>
+                  </a:lnTo>
+                  <a:lnTo>
+                    <a:pt x="6177662" y="839324"/>
+                  </a:lnTo>
+                  <a:lnTo>
+                    <a:pt x="6101029" y="831289"/>
+                  </a:lnTo>
+                  <a:lnTo>
+                    <a:pt x="6024397" y="822933"/>
+                  </a:lnTo>
+                  <a:lnTo>
+                    <a:pt x="5947764" y="814243"/>
+                  </a:lnTo>
+                  <a:lnTo>
+                    <a:pt x="5871132" y="805205"/>
+                  </a:lnTo>
+                  <a:lnTo>
+                    <a:pt x="5794499" y="795806"/>
+                  </a:lnTo>
+                  <a:lnTo>
+                    <a:pt x="5717867" y="786030"/>
+                  </a:lnTo>
+                  <a:lnTo>
+                    <a:pt x="5641234" y="775864"/>
+                  </a:lnTo>
+                  <a:lnTo>
+                    <a:pt x="5564602" y="765291"/>
+                  </a:lnTo>
+                  <a:lnTo>
+                    <a:pt x="5487969" y="754295"/>
+                  </a:lnTo>
+                  <a:lnTo>
+                    <a:pt x="5411336" y="742860"/>
+                  </a:lnTo>
+                  <a:lnTo>
+                    <a:pt x="5334704" y="730967"/>
+                  </a:lnTo>
+                  <a:lnTo>
+                    <a:pt x="5258071" y="718598"/>
+                  </a:lnTo>
+                  <a:lnTo>
+                    <a:pt x="5181439" y="705735"/>
+                  </a:lnTo>
+                  <a:lnTo>
+                    <a:pt x="5104806" y="692357"/>
+                  </a:lnTo>
+                  <a:lnTo>
+                    <a:pt x="5028174" y="678444"/>
+                  </a:lnTo>
+                  <a:lnTo>
+                    <a:pt x="4951541" y="663975"/>
+                  </a:lnTo>
+                  <a:lnTo>
+                    <a:pt x="4874909" y="648926"/>
+                  </a:lnTo>
+                  <a:lnTo>
+                    <a:pt x="4798276" y="633276"/>
+                  </a:lnTo>
+                  <a:lnTo>
+                    <a:pt x="4721644" y="617000"/>
+                  </a:lnTo>
+                  <a:lnTo>
+                    <a:pt x="4645011" y="600074"/>
+                  </a:lnTo>
+                  <a:lnTo>
+                    <a:pt x="4568378" y="582470"/>
+                  </a:lnTo>
+                  <a:lnTo>
+                    <a:pt x="4491746" y="564162"/>
+                  </a:lnTo>
+                  <a:lnTo>
+                    <a:pt x="4415113" y="545121"/>
+                  </a:lnTo>
+                  <a:lnTo>
+                    <a:pt x="4338481" y="525319"/>
+                  </a:lnTo>
+                  <a:lnTo>
+                    <a:pt x="4261848" y="504725"/>
+                  </a:lnTo>
+                  <a:lnTo>
+                    <a:pt x="4185216" y="483308"/>
+                  </a:lnTo>
+                  <a:lnTo>
+                    <a:pt x="4108583" y="461034"/>
+                  </a:lnTo>
+                  <a:lnTo>
+                    <a:pt x="4031951" y="437869"/>
+                  </a:lnTo>
+                  <a:lnTo>
+                    <a:pt x="3955318" y="413777"/>
+                  </a:lnTo>
+                  <a:lnTo>
+                    <a:pt x="3878685" y="388722"/>
+                  </a:lnTo>
+                  <a:lnTo>
+                    <a:pt x="3802053" y="362664"/>
+                  </a:lnTo>
+                  <a:lnTo>
+                    <a:pt x="3725420" y="335565"/>
+                  </a:lnTo>
+                  <a:lnTo>
+                    <a:pt x="3648788" y="307381"/>
+                  </a:lnTo>
+                  <a:lnTo>
+                    <a:pt x="3572155" y="278071"/>
+                  </a:lnTo>
+                  <a:lnTo>
+                    <a:pt x="3495523" y="247588"/>
+                  </a:lnTo>
+                  <a:lnTo>
+                    <a:pt x="3418890" y="215885"/>
+                  </a:lnTo>
+                  <a:lnTo>
+                    <a:pt x="3342258" y="207183"/>
+                  </a:lnTo>
+                  <a:lnTo>
+                    <a:pt x="3265625" y="202930"/>
+                  </a:lnTo>
+                  <a:lnTo>
+                    <a:pt x="3188993" y="198655"/>
+                  </a:lnTo>
+                  <a:lnTo>
+                    <a:pt x="3112360" y="194359"/>
+                  </a:lnTo>
+                  <a:lnTo>
+                    <a:pt x="3035727" y="190040"/>
+                  </a:lnTo>
+                  <a:lnTo>
+                    <a:pt x="2959095" y="185699"/>
+                  </a:lnTo>
+                  <a:lnTo>
+                    <a:pt x="2882462" y="181337"/>
+                  </a:lnTo>
+                  <a:lnTo>
+                    <a:pt x="2805830" y="176952"/>
+                  </a:lnTo>
+                  <a:lnTo>
+                    <a:pt x="2729197" y="172544"/>
+                  </a:lnTo>
+                  <a:lnTo>
+                    <a:pt x="2652565" y="168114"/>
+                  </a:lnTo>
+                  <a:lnTo>
+                    <a:pt x="2575932" y="163662"/>
+                  </a:lnTo>
+                  <a:lnTo>
+                    <a:pt x="2499300" y="159186"/>
+                  </a:lnTo>
+                  <a:lnTo>
+                    <a:pt x="2422667" y="154688"/>
+                  </a:lnTo>
+                  <a:lnTo>
+                    <a:pt x="2346034" y="150167"/>
+                  </a:lnTo>
+                  <a:lnTo>
+                    <a:pt x="2269402" y="145623"/>
+                  </a:lnTo>
+                  <a:lnTo>
+                    <a:pt x="2192769" y="141055"/>
+                  </a:lnTo>
+                  <a:lnTo>
+                    <a:pt x="2116137" y="136465"/>
+                  </a:lnTo>
+                  <a:lnTo>
+                    <a:pt x="2039504" y="131850"/>
+                  </a:lnTo>
+                  <a:lnTo>
+                    <a:pt x="1962872" y="127213"/>
+                  </a:lnTo>
+                  <a:lnTo>
+                    <a:pt x="1886239" y="122551"/>
+                  </a:lnTo>
+                  <a:lnTo>
+                    <a:pt x="1809607" y="117866"/>
+                  </a:lnTo>
+                  <a:lnTo>
+                    <a:pt x="1732974" y="113157"/>
+                  </a:lnTo>
+                  <a:lnTo>
+                    <a:pt x="1656342" y="108424"/>
+                  </a:lnTo>
+                  <a:lnTo>
+                    <a:pt x="1579709" y="103667"/>
+                  </a:lnTo>
+                  <a:lnTo>
+                    <a:pt x="1503076" y="98885"/>
+                  </a:lnTo>
+                  <a:lnTo>
+                    <a:pt x="1426444" y="94079"/>
+                  </a:lnTo>
+                  <a:lnTo>
+                    <a:pt x="1349811" y="89248"/>
+                  </a:lnTo>
+                  <a:lnTo>
+                    <a:pt x="1273179" y="84393"/>
+                  </a:lnTo>
+                  <a:lnTo>
+                    <a:pt x="1196546" y="79513"/>
+                  </a:lnTo>
+                  <a:lnTo>
+                    <a:pt x="1119914" y="74608"/>
+                  </a:lnTo>
+                  <a:lnTo>
+                    <a:pt x="1043281" y="69678"/>
+                  </a:lnTo>
+                  <a:lnTo>
+                    <a:pt x="966649" y="64723"/>
+                  </a:lnTo>
+                  <a:lnTo>
+                    <a:pt x="890016" y="59743"/>
+                  </a:lnTo>
+                  <a:lnTo>
+                    <a:pt x="813384" y="54737"/>
+                  </a:lnTo>
+                  <a:lnTo>
+                    <a:pt x="736751" y="49705"/>
+                  </a:lnTo>
+                  <a:lnTo>
+                    <a:pt x="660118" y="44648"/>
+                  </a:lnTo>
+                  <a:lnTo>
+                    <a:pt x="583486" y="39565"/>
+                  </a:lnTo>
+                  <a:lnTo>
+                    <a:pt x="506853" y="34456"/>
+                  </a:lnTo>
+                  <a:lnTo>
+                    <a:pt x="430221" y="29321"/>
+                  </a:lnTo>
+                  <a:lnTo>
+                    <a:pt x="353588" y="24160"/>
+                  </a:lnTo>
+                  <a:lnTo>
+                    <a:pt x="276956" y="18973"/>
+                  </a:lnTo>
+                  <a:lnTo>
+                    <a:pt x="200323" y="13759"/>
+                  </a:lnTo>
+                  <a:lnTo>
+                    <a:pt x="123691" y="8518"/>
+                  </a:lnTo>
+                  <a:lnTo>
+                    <a:pt x="47058" y="3251"/>
                   </a:lnTo>
                   <a:lnTo>
                     <a:pt x="0" y="0"/>
@@ -4211,306 +4211,306 @@
           </p:nvSpPr>
           <p:spPr>
             <a:xfrm>
-              <a:off x="817517" y="3220434"/>
-              <a:ext cx="7403783" cy="2054932"/>
+              <a:off x="817517" y="3336158"/>
+              <a:ext cx="7403783" cy="1959912"/>
             </a:xfrm>
             <a:custGeom>
               <a:avLst/>
               <a:pathLst>
-                <a:path w="7403783" h="2054932">
+                <a:path w="7403783" h="1959912">
                   <a:moveTo>
                     <a:pt x="0" y="0"/>
                   </a:moveTo>
                   <a:lnTo>
-                    <a:pt x="47058" y="31601"/>
-                  </a:lnTo>
-                  <a:lnTo>
-                    <a:pt x="123691" y="81936"/>
-                  </a:lnTo>
-                  <a:lnTo>
-                    <a:pt x="200323" y="131167"/>
-                  </a:lnTo>
-                  <a:lnTo>
-                    <a:pt x="276956" y="179320"/>
-                  </a:lnTo>
-                  <a:lnTo>
-                    <a:pt x="353588" y="226417"/>
-                  </a:lnTo>
-                  <a:lnTo>
-                    <a:pt x="430221" y="272483"/>
-                  </a:lnTo>
-                  <a:lnTo>
-                    <a:pt x="506853" y="317539"/>
-                  </a:lnTo>
-                  <a:lnTo>
-                    <a:pt x="583486" y="361608"/>
-                  </a:lnTo>
-                  <a:lnTo>
-                    <a:pt x="660118" y="404712"/>
-                  </a:lnTo>
-                  <a:lnTo>
-                    <a:pt x="736751" y="446871"/>
-                  </a:lnTo>
-                  <a:lnTo>
-                    <a:pt x="813384" y="488106"/>
-                  </a:lnTo>
-                  <a:lnTo>
-                    <a:pt x="890016" y="528438"/>
-                  </a:lnTo>
-                  <a:lnTo>
-                    <a:pt x="966649" y="567886"/>
-                  </a:lnTo>
-                  <a:lnTo>
-                    <a:pt x="1043281" y="606469"/>
-                  </a:lnTo>
-                  <a:lnTo>
-                    <a:pt x="1119914" y="644207"/>
-                  </a:lnTo>
-                  <a:lnTo>
-                    <a:pt x="1196546" y="681119"/>
-                  </a:lnTo>
-                  <a:lnTo>
-                    <a:pt x="1273179" y="717221"/>
-                  </a:lnTo>
-                  <a:lnTo>
-                    <a:pt x="1349811" y="752533"/>
-                  </a:lnTo>
-                  <a:lnTo>
-                    <a:pt x="1426444" y="787070"/>
-                  </a:lnTo>
-                  <a:lnTo>
-                    <a:pt x="1503076" y="820851"/>
-                  </a:lnTo>
-                  <a:lnTo>
-                    <a:pt x="1579709" y="853892"/>
-                  </a:lnTo>
-                  <a:lnTo>
-                    <a:pt x="1656342" y="886209"/>
-                  </a:lnTo>
-                  <a:lnTo>
-                    <a:pt x="1732974" y="917817"/>
-                  </a:lnTo>
-                  <a:lnTo>
-                    <a:pt x="1809607" y="948734"/>
-                  </a:lnTo>
-                  <a:lnTo>
-                    <a:pt x="1886239" y="978972"/>
-                  </a:lnTo>
-                  <a:lnTo>
-                    <a:pt x="1962872" y="1008548"/>
-                  </a:lnTo>
-                  <a:lnTo>
-                    <a:pt x="2039504" y="1037476"/>
-                  </a:lnTo>
-                  <a:lnTo>
-                    <a:pt x="2116137" y="1065771"/>
-                  </a:lnTo>
-                  <a:lnTo>
-                    <a:pt x="2192769" y="1093445"/>
-                  </a:lnTo>
-                  <a:lnTo>
-                    <a:pt x="2269402" y="1120513"/>
-                  </a:lnTo>
-                  <a:lnTo>
-                    <a:pt x="2346034" y="1146987"/>
-                  </a:lnTo>
-                  <a:lnTo>
-                    <a:pt x="2422667" y="1172882"/>
-                  </a:lnTo>
-                  <a:lnTo>
-                    <a:pt x="2499300" y="1198209"/>
-                  </a:lnTo>
-                  <a:lnTo>
-                    <a:pt x="2575932" y="1222981"/>
-                  </a:lnTo>
-                  <a:lnTo>
-                    <a:pt x="2652565" y="1247211"/>
-                  </a:lnTo>
-                  <a:lnTo>
-                    <a:pt x="2729197" y="1270910"/>
-                  </a:lnTo>
-                  <a:lnTo>
-                    <a:pt x="2805830" y="1294089"/>
-                  </a:lnTo>
-                  <a:lnTo>
-                    <a:pt x="2882462" y="1316760"/>
-                  </a:lnTo>
-                  <a:lnTo>
-                    <a:pt x="2959095" y="1338935"/>
-                  </a:lnTo>
-                  <a:lnTo>
-                    <a:pt x="3035727" y="1360624"/>
-                  </a:lnTo>
-                  <a:lnTo>
-                    <a:pt x="3112360" y="1381837"/>
-                  </a:lnTo>
-                  <a:lnTo>
-                    <a:pt x="3188993" y="1402586"/>
-                  </a:lnTo>
-                  <a:lnTo>
-                    <a:pt x="3265625" y="1422880"/>
-                  </a:lnTo>
-                  <a:lnTo>
-                    <a:pt x="3342258" y="1442729"/>
-                  </a:lnTo>
-                  <a:lnTo>
-                    <a:pt x="3418890" y="1462144"/>
-                  </a:lnTo>
-                  <a:lnTo>
-                    <a:pt x="3495523" y="1481133"/>
-                  </a:lnTo>
-                  <a:lnTo>
-                    <a:pt x="3572155" y="1499706"/>
-                  </a:lnTo>
-                  <a:lnTo>
-                    <a:pt x="3648788" y="1517872"/>
-                  </a:lnTo>
-                  <a:lnTo>
-                    <a:pt x="3725420" y="1535640"/>
-                  </a:lnTo>
-                  <a:lnTo>
-                    <a:pt x="3802053" y="1553019"/>
-                  </a:lnTo>
-                  <a:lnTo>
-                    <a:pt x="3878685" y="1570017"/>
-                  </a:lnTo>
-                  <a:lnTo>
-                    <a:pt x="3955318" y="1586642"/>
-                  </a:lnTo>
-                  <a:lnTo>
-                    <a:pt x="4031951" y="1602903"/>
-                  </a:lnTo>
-                  <a:lnTo>
-                    <a:pt x="4108583" y="1618808"/>
-                  </a:lnTo>
-                  <a:lnTo>
-                    <a:pt x="4185216" y="1634364"/>
-                  </a:lnTo>
-                  <a:lnTo>
-                    <a:pt x="4261848" y="1649580"/>
-                  </a:lnTo>
-                  <a:lnTo>
-                    <a:pt x="4338481" y="1664462"/>
-                  </a:lnTo>
-                  <a:lnTo>
-                    <a:pt x="4415113" y="1679018"/>
-                  </a:lnTo>
-                  <a:lnTo>
-                    <a:pt x="4491746" y="1693255"/>
-                  </a:lnTo>
-                  <a:lnTo>
-                    <a:pt x="4568378" y="1707180"/>
-                  </a:lnTo>
-                  <a:lnTo>
-                    <a:pt x="4645011" y="1720800"/>
-                  </a:lnTo>
-                  <a:lnTo>
-                    <a:pt x="4721644" y="1734122"/>
-                  </a:lnTo>
-                  <a:lnTo>
-                    <a:pt x="4798276" y="1747151"/>
-                  </a:lnTo>
-                  <a:lnTo>
-                    <a:pt x="4874909" y="1759896"/>
-                  </a:lnTo>
-                  <a:lnTo>
-                    <a:pt x="4951541" y="1772361"/>
-                  </a:lnTo>
-                  <a:lnTo>
-                    <a:pt x="5028174" y="1784552"/>
-                  </a:lnTo>
-                  <a:lnTo>
-                    <a:pt x="5104806" y="1796477"/>
-                  </a:lnTo>
-                  <a:lnTo>
-                    <a:pt x="5181439" y="1808140"/>
-                  </a:lnTo>
-                  <a:lnTo>
-                    <a:pt x="5258071" y="1819548"/>
-                  </a:lnTo>
-                  <a:lnTo>
-                    <a:pt x="5334704" y="1830706"/>
-                  </a:lnTo>
-                  <a:lnTo>
-                    <a:pt x="5411336" y="1841619"/>
-                  </a:lnTo>
-                  <a:lnTo>
-                    <a:pt x="5487969" y="1852294"/>
-                  </a:lnTo>
-                  <a:lnTo>
-                    <a:pt x="5564602" y="1862734"/>
-                  </a:lnTo>
-                  <a:lnTo>
-                    <a:pt x="5641234" y="1872946"/>
-                  </a:lnTo>
-                  <a:lnTo>
-                    <a:pt x="5717867" y="1882933"/>
-                  </a:lnTo>
-                  <a:lnTo>
-                    <a:pt x="5794499" y="1892702"/>
-                  </a:lnTo>
-                  <a:lnTo>
-                    <a:pt x="5871132" y="1902257"/>
-                  </a:lnTo>
-                  <a:lnTo>
-                    <a:pt x="5947764" y="1911603"/>
-                  </a:lnTo>
-                  <a:lnTo>
-                    <a:pt x="6024397" y="1920744"/>
-                  </a:lnTo>
-                  <a:lnTo>
-                    <a:pt x="6101029" y="1929684"/>
-                  </a:lnTo>
-                  <a:lnTo>
-                    <a:pt x="6177662" y="1938429"/>
-                  </a:lnTo>
-                  <a:lnTo>
-                    <a:pt x="6254294" y="1946982"/>
-                  </a:lnTo>
-                  <a:lnTo>
-                    <a:pt x="6330927" y="1955347"/>
-                  </a:lnTo>
-                  <a:lnTo>
-                    <a:pt x="6407560" y="1963530"/>
-                  </a:lnTo>
-                  <a:lnTo>
-                    <a:pt x="6484192" y="1971533"/>
-                  </a:lnTo>
-                  <a:lnTo>
-                    <a:pt x="6560825" y="1979360"/>
-                  </a:lnTo>
-                  <a:lnTo>
-                    <a:pt x="6637457" y="1987016"/>
-                  </a:lnTo>
-                  <a:lnTo>
-                    <a:pt x="6714090" y="1994505"/>
-                  </a:lnTo>
-                  <a:lnTo>
-                    <a:pt x="6790722" y="2001829"/>
-                  </a:lnTo>
-                  <a:lnTo>
-                    <a:pt x="6867355" y="2008993"/>
-                  </a:lnTo>
-                  <a:lnTo>
-                    <a:pt x="6943987" y="2016000"/>
-                  </a:lnTo>
-                  <a:lnTo>
-                    <a:pt x="7020620" y="2022853"/>
-                  </a:lnTo>
-                  <a:lnTo>
-                    <a:pt x="7097253" y="2029556"/>
-                  </a:lnTo>
-                  <a:lnTo>
-                    <a:pt x="7173885" y="2036112"/>
-                  </a:lnTo>
-                  <a:lnTo>
-                    <a:pt x="7250518" y="2042525"/>
-                  </a:lnTo>
-                  <a:lnTo>
-                    <a:pt x="7327150" y="2048797"/>
-                  </a:lnTo>
-                  <a:lnTo>
-                    <a:pt x="7403783" y="2054932"/>
+                    <a:pt x="47058" y="30140"/>
+                  </a:lnTo>
+                  <a:lnTo>
+                    <a:pt x="123691" y="78147"/>
+                  </a:lnTo>
+                  <a:lnTo>
+                    <a:pt x="200323" y="125102"/>
+                  </a:lnTo>
+                  <a:lnTo>
+                    <a:pt x="276956" y="171028"/>
+                  </a:lnTo>
+                  <a:lnTo>
+                    <a:pt x="353588" y="215948"/>
+                  </a:lnTo>
+                  <a:lnTo>
+                    <a:pt x="430221" y="259884"/>
+                  </a:lnTo>
+                  <a:lnTo>
+                    <a:pt x="506853" y="302856"/>
+                  </a:lnTo>
+                  <a:lnTo>
+                    <a:pt x="583486" y="344888"/>
+                  </a:lnTo>
+                  <a:lnTo>
+                    <a:pt x="660118" y="385998"/>
+                  </a:lnTo>
+                  <a:lnTo>
+                    <a:pt x="736751" y="426208"/>
+                  </a:lnTo>
+                  <a:lnTo>
+                    <a:pt x="813384" y="465536"/>
+                  </a:lnTo>
+                  <a:lnTo>
+                    <a:pt x="890016" y="504003"/>
+                  </a:lnTo>
+                  <a:lnTo>
+                    <a:pt x="966649" y="541627"/>
+                  </a:lnTo>
+                  <a:lnTo>
+                    <a:pt x="1043281" y="578426"/>
+                  </a:lnTo>
+                  <a:lnTo>
+                    <a:pt x="1119914" y="614420"/>
+                  </a:lnTo>
+                  <a:lnTo>
+                    <a:pt x="1196546" y="649624"/>
+                  </a:lnTo>
+                  <a:lnTo>
+                    <a:pt x="1273179" y="684057"/>
+                  </a:lnTo>
+                  <a:lnTo>
+                    <a:pt x="1349811" y="717736"/>
+                  </a:lnTo>
+                  <a:lnTo>
+                    <a:pt x="1426444" y="750676"/>
+                  </a:lnTo>
+                  <a:lnTo>
+                    <a:pt x="1503076" y="782895"/>
+                  </a:lnTo>
+                  <a:lnTo>
+                    <a:pt x="1579709" y="814408"/>
+                  </a:lnTo>
+                  <a:lnTo>
+                    <a:pt x="1656342" y="845231"/>
+                  </a:lnTo>
+                  <a:lnTo>
+                    <a:pt x="1732974" y="875378"/>
+                  </a:lnTo>
+                  <a:lnTo>
+                    <a:pt x="1809607" y="904864"/>
+                  </a:lnTo>
+                  <a:lnTo>
+                    <a:pt x="1886239" y="933705"/>
+                  </a:lnTo>
+                  <a:lnTo>
+                    <a:pt x="1962872" y="961913"/>
+                  </a:lnTo>
+                  <a:lnTo>
+                    <a:pt x="2039504" y="989504"/>
+                  </a:lnTo>
+                  <a:lnTo>
+                    <a:pt x="2116137" y="1016490"/>
+                  </a:lnTo>
+                  <a:lnTo>
+                    <a:pt x="2192769" y="1042884"/>
+                  </a:lnTo>
+                  <a:lnTo>
+                    <a:pt x="2269402" y="1068700"/>
+                  </a:lnTo>
+                  <a:lnTo>
+                    <a:pt x="2346034" y="1093951"/>
+                  </a:lnTo>
+                  <a:lnTo>
+                    <a:pt x="2422667" y="1118648"/>
+                  </a:lnTo>
+                  <a:lnTo>
+                    <a:pt x="2499300" y="1142804"/>
+                  </a:lnTo>
+                  <a:lnTo>
+                    <a:pt x="2575932" y="1166431"/>
+                  </a:lnTo>
+                  <a:lnTo>
+                    <a:pt x="2652565" y="1189540"/>
+                  </a:lnTo>
+                  <a:lnTo>
+                    <a:pt x="2729197" y="1212143"/>
+                  </a:lnTo>
+                  <a:lnTo>
+                    <a:pt x="2805830" y="1234251"/>
+                  </a:lnTo>
+                  <a:lnTo>
+                    <a:pt x="2882462" y="1255874"/>
+                  </a:lnTo>
+                  <a:lnTo>
+                    <a:pt x="2959095" y="1277023"/>
+                  </a:lnTo>
+                  <a:lnTo>
+                    <a:pt x="3035727" y="1297709"/>
+                  </a:lnTo>
+                  <a:lnTo>
+                    <a:pt x="3112360" y="1317942"/>
+                  </a:lnTo>
+                  <a:lnTo>
+                    <a:pt x="3188993" y="1337731"/>
+                  </a:lnTo>
+                  <a:lnTo>
+                    <a:pt x="3265625" y="1357087"/>
+                  </a:lnTo>
+                  <a:lnTo>
+                    <a:pt x="3342258" y="1376018"/>
+                  </a:lnTo>
+                  <a:lnTo>
+                    <a:pt x="3418890" y="1394535"/>
+                  </a:lnTo>
+                  <a:lnTo>
+                    <a:pt x="3495523" y="1412646"/>
+                  </a:lnTo>
+                  <a:lnTo>
+                    <a:pt x="3572155" y="1430360"/>
+                  </a:lnTo>
+                  <a:lnTo>
+                    <a:pt x="3648788" y="1447686"/>
+                  </a:lnTo>
+                  <a:lnTo>
+                    <a:pt x="3725420" y="1464633"/>
+                  </a:lnTo>
+                  <a:lnTo>
+                    <a:pt x="3802053" y="1481208"/>
+                  </a:lnTo>
+                  <a:lnTo>
+                    <a:pt x="3878685" y="1497420"/>
+                  </a:lnTo>
+                  <a:lnTo>
+                    <a:pt x="3955318" y="1513276"/>
+                  </a:lnTo>
+                  <a:lnTo>
+                    <a:pt x="4031951" y="1528786"/>
+                  </a:lnTo>
+                  <a:lnTo>
+                    <a:pt x="4108583" y="1543955"/>
+                  </a:lnTo>
+                  <a:lnTo>
+                    <a:pt x="4185216" y="1558792"/>
+                  </a:lnTo>
+                  <a:lnTo>
+                    <a:pt x="4261848" y="1573304"/>
+                  </a:lnTo>
+                  <a:lnTo>
+                    <a:pt x="4338481" y="1587498"/>
+                  </a:lnTo>
+                  <a:lnTo>
+                    <a:pt x="4415113" y="1601381"/>
+                  </a:lnTo>
+                  <a:lnTo>
+                    <a:pt x="4491746" y="1614960"/>
+                  </a:lnTo>
+                  <a:lnTo>
+                    <a:pt x="4568378" y="1628241"/>
+                  </a:lnTo>
+                  <a:lnTo>
+                    <a:pt x="4645011" y="1641231"/>
+                  </a:lnTo>
+                  <a:lnTo>
+                    <a:pt x="4721644" y="1653937"/>
+                  </a:lnTo>
+                  <a:lnTo>
+                    <a:pt x="4798276" y="1666364"/>
+                  </a:lnTo>
+                  <a:lnTo>
+                    <a:pt x="4874909" y="1678519"/>
+                  </a:lnTo>
+                  <a:lnTo>
+                    <a:pt x="4951541" y="1690407"/>
+                  </a:lnTo>
+                  <a:lnTo>
+                    <a:pt x="5028174" y="1702035"/>
+                  </a:lnTo>
+                  <a:lnTo>
+                    <a:pt x="5104806" y="1713409"/>
+                  </a:lnTo>
+                  <a:lnTo>
+                    <a:pt x="5181439" y="1724533"/>
+                  </a:lnTo>
+                  <a:lnTo>
+                    <a:pt x="5258071" y="1735413"/>
+                  </a:lnTo>
+                  <a:lnTo>
+                    <a:pt x="5334704" y="1746055"/>
+                  </a:lnTo>
+                  <a:lnTo>
+                    <a:pt x="5411336" y="1756464"/>
+                  </a:lnTo>
+                  <a:lnTo>
+                    <a:pt x="5487969" y="1766644"/>
+                  </a:lnTo>
+                  <a:lnTo>
+                    <a:pt x="5564602" y="1776602"/>
+                  </a:lnTo>
+                  <a:lnTo>
+                    <a:pt x="5641234" y="1786341"/>
+                  </a:lnTo>
+                  <a:lnTo>
+                    <a:pt x="5717867" y="1795867"/>
+                  </a:lnTo>
+                  <a:lnTo>
+                    <a:pt x="5794499" y="1805184"/>
+                  </a:lnTo>
+                  <a:lnTo>
+                    <a:pt x="5871132" y="1814298"/>
+                  </a:lnTo>
+                  <a:lnTo>
+                    <a:pt x="5947764" y="1823211"/>
+                  </a:lnTo>
+                  <a:lnTo>
+                    <a:pt x="6024397" y="1831929"/>
+                  </a:lnTo>
+                  <a:lnTo>
+                    <a:pt x="6101029" y="1840456"/>
+                  </a:lnTo>
+                  <a:lnTo>
+                    <a:pt x="6177662" y="1848796"/>
+                  </a:lnTo>
+                  <a:lnTo>
+                    <a:pt x="6254294" y="1856954"/>
+                  </a:lnTo>
+                  <a:lnTo>
+                    <a:pt x="6330927" y="1864933"/>
+                  </a:lnTo>
+                  <a:lnTo>
+                    <a:pt x="6407560" y="1872737"/>
+                  </a:lnTo>
+                  <a:lnTo>
+                    <a:pt x="6484192" y="1880370"/>
+                  </a:lnTo>
+                  <a:lnTo>
+                    <a:pt x="6560825" y="1887835"/>
+                  </a:lnTo>
+                  <a:lnTo>
+                    <a:pt x="6637457" y="1895137"/>
+                  </a:lnTo>
+                  <a:lnTo>
+                    <a:pt x="6714090" y="1902280"/>
+                  </a:lnTo>
+                  <a:lnTo>
+                    <a:pt x="6790722" y="1909265"/>
+                  </a:lnTo>
+                  <a:lnTo>
+                    <a:pt x="6867355" y="1916098"/>
+                  </a:lnTo>
+                  <a:lnTo>
+                    <a:pt x="6943987" y="1922781"/>
+                  </a:lnTo>
+                  <a:lnTo>
+                    <a:pt x="7020620" y="1929317"/>
+                  </a:lnTo>
+                  <a:lnTo>
+                    <a:pt x="7097253" y="1935710"/>
+                  </a:lnTo>
+                  <a:lnTo>
+                    <a:pt x="7173885" y="1941963"/>
+                  </a:lnTo>
+                  <a:lnTo>
+                    <a:pt x="7250518" y="1948079"/>
+                  </a:lnTo>
+                  <a:lnTo>
+                    <a:pt x="7327150" y="1954061"/>
+                  </a:lnTo>
+                  <a:lnTo>
+                    <a:pt x="7403783" y="1959912"/>
                   </a:lnTo>
                 </a:path>
               </a:pathLst>
@@ -4539,7 +4539,7 @@
           </p:nvSpPr>
           <p:spPr>
             <a:xfrm>
-              <a:off x="817517" y="4679530"/>
+              <a:off x="817517" y="4727786"/>
               <a:ext cx="7799693" cy="0"/>
             </a:xfrm>
             <a:custGeom>
@@ -4582,15 +4582,15 @@
           </p:nvSpPr>
           <p:spPr>
             <a:xfrm>
-              <a:off x="4224261" y="1896563"/>
-              <a:ext cx="0" cy="3826579"/>
+              <a:off x="4224261" y="2073503"/>
+              <a:ext cx="0" cy="3649639"/>
             </a:xfrm>
             <a:custGeom>
               <a:avLst/>
               <a:pathLst>
-                <a:path w="0" h="3826579">
+                <a:path w="0" h="3649639">
                   <a:moveTo>
-                    <a:pt x="0" y="3826579"/>
+                    <a:pt x="0" y="3649639"/>
                   </a:moveTo>
                   <a:lnTo>
                     <a:pt x="0" y="0"/>
@@ -4625,7 +4625,7 @@
           </p:nvSpPr>
           <p:spPr>
             <a:xfrm>
-              <a:off x="692708" y="5509156"/>
+              <a:off x="692708" y="5517199"/>
               <a:ext cx="62179" cy="80101"/>
             </a:xfrm>
             <a:prstGeom prst="rect">
@@ -4671,7 +4671,7 @@
           </p:nvSpPr>
           <p:spPr>
             <a:xfrm>
-              <a:off x="692708" y="4639479"/>
+              <a:off x="692708" y="4687735"/>
               <a:ext cx="62179" cy="80101"/>
             </a:xfrm>
             <a:prstGeom prst="rect">
@@ -4717,7 +4717,7 @@
           </p:nvSpPr>
           <p:spPr>
             <a:xfrm>
-              <a:off x="692708" y="3769802"/>
+              <a:off x="692708" y="3858272"/>
               <a:ext cx="62179" cy="80101"/>
             </a:xfrm>
             <a:prstGeom prst="rect">
@@ -4763,7 +4763,7 @@
           </p:nvSpPr>
           <p:spPr>
             <a:xfrm>
-              <a:off x="692708" y="2900125"/>
+              <a:off x="692708" y="3028808"/>
               <a:ext cx="62179" cy="80101"/>
             </a:xfrm>
             <a:prstGeom prst="rect">
@@ -4809,7 +4809,7 @@
           </p:nvSpPr>
           <p:spPr>
             <a:xfrm>
-              <a:off x="692708" y="2030448"/>
+              <a:off x="692708" y="2199345"/>
               <a:ext cx="62179" cy="80101"/>
             </a:xfrm>
             <a:prstGeom prst="rect">
@@ -5085,7 +5085,7 @@
           </p:nvSpPr>
           <p:spPr>
             <a:xfrm rot="-5400000">
-              <a:off x="68446" y="3759743"/>
+              <a:off x="68446" y="3848213"/>
               <a:ext cx="1016904" cy="100218"/>
             </a:xfrm>
             <a:prstGeom prst="rect">
@@ -5126,6 +5126,52 @@
         <p:sp>
           <p:nvSpPr>
             <p:cNvPr id="38" name="tx38"/>
+            <p:cNvSpPr/>
+            <p:nvPr/>
+          </p:nvSpPr>
+          <p:spPr>
+            <a:xfrm>
+              <a:off x="817517" y="1896563"/>
+              <a:ext cx="5626211" cy="82021"/>
+            </a:xfrm>
+            <a:prstGeom prst="rect">
+              <a:avLst/>
+            </a:prstGeom>
+            <a:noFill/>
+          </p:spPr>
+          <p:txBody>
+            <a:bodyPr lIns="0" rIns="0" tIns="0" bIns="0" anchorCtr="1" anchor="ctr" wrap="none"/>
+            <a:lstStyle/>
+            <a:p>
+              <a:pPr algn="l" marL="0" marR="0" indent="0">
+                <a:lnSpc>
+                  <a:spcPts val="900"/>
+                </a:lnSpc>
+                <a:spcBef>
+                  <a:spcPts val="0"/>
+                </a:spcBef>
+                <a:spcAft>
+                  <a:spcPts val="0"/>
+                </a:spcAft>
+              </a:pPr>
+              <a:r>
+                <a:rPr sz="900">
+                  <a:solidFill>
+                    <a:srgbClr val="404040">
+                      <a:alpha val="100000"/>
+                    </a:srgbClr>
+                  </a:solidFill>
+                  <a:latin typeface="Helvetica"/>
+                  <a:cs typeface="Helvetica"/>
+                </a:rPr>
+                <a:t>subHR per 0.1 ratio decline: 1.29 (1.06-1.57)  |  per IQR decline (Δ = 0.30): 2.15 (1.19-3.88)  |  IQR: [0.85, 1.15]</a:t>
+              </a:r>
+            </a:p>
+          </p:txBody>
+        </p:sp>
+        <p:sp>
+          <p:nvSpPr>
+            <p:cNvPr id="39" name="tx39"/>
             <p:cNvSpPr/>
             <p:nvPr/>
           </p:nvSpPr>

--- a/docs/pptx/carbo/jx-carbo-linsubhr-ratio-akikdigo.pptx
+++ b/docs/pptx/carbo/jx-carbo-linsubhr-ratio-akikdigo.pptx
@@ -5132,7 +5132,7 @@
           <p:spPr>
             <a:xfrm>
               <a:off x="817517" y="1896563"/>
-              <a:ext cx="5626211" cy="82021"/>
+              <a:ext cx="6169365" cy="82021"/>
             </a:xfrm>
             <a:prstGeom prst="rect">
               <a:avLst/>
@@ -5164,7 +5164,7 @@
                   <a:latin typeface="Helvetica"/>
                   <a:cs typeface="Helvetica"/>
                 </a:rPr>
-                <a:t>subHR per 0.1 ratio decline: 1.29 (1.06-1.57)  |  per IQR decline (Δ = 0.30): 2.15 (1.19-3.88)  |  IQR: [0.85, 1.15]</a:t>
+                <a:t>subHR per 0.1 ratio decline: 1.29 (1.06-1.57), p = 0.011  |  per IQR decline (Δ = 0.30): 2.15 (1.19-3.88)  |  IQR: [0.85, 1.15]</a:t>
               </a:r>
             </a:p>
           </p:txBody>

--- a/docs/pptx/carbo/jx-carbo-linsubhr-ratio-akikdigo.pptx
+++ b/docs/pptx/carbo/jx-carbo-linsubhr-ratio-akikdigo.pptx
@@ -5132,7 +5132,7 @@
           <p:spPr>
             <a:xfrm>
               <a:off x="817517" y="1896563"/>
-              <a:ext cx="6169365" cy="82021"/>
+              <a:ext cx="6833128" cy="82021"/>
             </a:xfrm>
             <a:prstGeom prst="rect">
               <a:avLst/>
@@ -5164,7 +5164,7 @@
                   <a:latin typeface="Helvetica"/>
                   <a:cs typeface="Helvetica"/>
                 </a:rPr>
-                <a:t>subHR per 0.1 ratio decline: 1.29 (1.06-1.57), p = 0.011  |  per IQR decline (Δ = 0.30): 2.15 (1.19-3.88)  |  IQR: [0.85, 1.15]</a:t>
+                <a:t>subHR per 0.1 ratio decline: 1.29 (1.06-1.57), p_Bonf = 0.066 (n = 6)  |  per IQR decline (Δ = 0.30): 2.15 (1.19-3.88)  |  IQR: [0.85, 1.15]</a:t>
               </a:r>
             </a:p>
           </p:txBody>

--- a/docs/pptx/carbo/jx-carbo-linsubhr-ratio-akikdigo.pptx
+++ b/docs/pptx/carbo/jx-carbo-linsubhr-ratio-akikdigo.pptx
@@ -2443,7 +2443,7 @@
           </p:nvSpPr>
           <p:spPr>
             <a:xfrm>
-              <a:off x="1615213" y="2073503"/>
+              <a:off x="1467192" y="2073503"/>
               <a:ext cx="0" cy="3649639"/>
             </a:xfrm>
             <a:custGeom>
@@ -2486,7 +2486,7 @@
           </p:nvSpPr>
           <p:spPr>
             <a:xfrm>
-              <a:off x="3387871" y="2073503"/>
+              <a:off x="3538150" y="2073503"/>
               <a:ext cx="0" cy="3649639"/>
             </a:xfrm>
             <a:custGeom>
@@ -2529,7 +2529,7 @@
           </p:nvSpPr>
           <p:spPr>
             <a:xfrm>
-              <a:off x="5160528" y="2073503"/>
+              <a:off x="5609107" y="2073503"/>
               <a:ext cx="0" cy="3649639"/>
             </a:xfrm>
             <a:custGeom>
@@ -2572,7 +2572,7 @@
           </p:nvSpPr>
           <p:spPr>
             <a:xfrm>
-              <a:off x="6933186" y="2073503"/>
+              <a:off x="7680065" y="2073503"/>
               <a:ext cx="0" cy="3649639"/>
             </a:xfrm>
             <a:custGeom>
@@ -2830,7 +2830,7 @@
           </p:nvSpPr>
           <p:spPr>
             <a:xfrm>
-              <a:off x="2501542" y="2073503"/>
+              <a:off x="2502671" y="2073503"/>
               <a:ext cx="0" cy="3649639"/>
             </a:xfrm>
             <a:custGeom>
@@ -2873,7 +2873,7 @@
           </p:nvSpPr>
           <p:spPr>
             <a:xfrm>
-              <a:off x="4274200" y="2073503"/>
+              <a:off x="4573628" y="2073503"/>
               <a:ext cx="0" cy="3649639"/>
             </a:xfrm>
             <a:custGeom>
@@ -2916,7 +2916,7 @@
           </p:nvSpPr>
           <p:spPr>
             <a:xfrm>
-              <a:off x="6046857" y="2073503"/>
+              <a:off x="6644586" y="2073503"/>
               <a:ext cx="0" cy="3649639"/>
             </a:xfrm>
             <a:custGeom>
@@ -2953,625 +2953,588 @@
         </p:sp>
         <p:sp>
           <p:nvSpPr>
-            <p:cNvPr id="20" name="pl20"/>
+            <p:cNvPr id="20" name="pg20"/>
             <p:cNvSpPr/>
             <p:nvPr/>
           </p:nvSpPr>
           <p:spPr>
             <a:xfrm>
-              <a:off x="7819515" y="2073503"/>
-              <a:ext cx="0" cy="3649639"/>
+              <a:off x="1172049" y="2073503"/>
+              <a:ext cx="7090630" cy="3376487"/>
             </a:xfrm>
             <a:custGeom>
               <a:avLst/>
               <a:pathLst>
-                <a:path w="0" h="3649639">
+                <a:path w="7090630" h="3376487">
                   <a:moveTo>
-                    <a:pt x="0" y="3649639"/>
+                    <a:pt x="734291" y="0"/>
                   </a:moveTo>
                   <a:lnTo>
-                    <a:pt x="0" y="0"/>
-                  </a:lnTo>
-                  <a:lnTo>
-                    <a:pt x="0" y="0"/>
-                  </a:lnTo>
-                </a:path>
-              </a:pathLst>
-            </a:custGeom>
-            <a:ln w="13550" cap="flat">
-              <a:solidFill>
-                <a:srgbClr val="EBEBEB">
-                  <a:alpha val="100000"/>
-                </a:srgbClr>
-              </a:solidFill>
-              <a:prstDash val="solid"/>
-              <a:round/>
-            </a:ln>
-          </p:spPr>
-          <p:txBody>
-            <a:bodyPr/>
-            <a:lstStyle/>
-            <a:p/>
-          </p:txBody>
-        </p:sp>
-        <p:sp>
-          <p:nvSpPr>
-            <p:cNvPr id="21" name="pg21"/>
-            <p:cNvSpPr/>
-            <p:nvPr/>
-          </p:nvSpPr>
-          <p:spPr>
-            <a:xfrm>
-              <a:off x="817517" y="2073503"/>
-              <a:ext cx="7403783" cy="3376487"/>
-            </a:xfrm>
-            <a:custGeom>
-              <a:avLst/>
-              <a:pathLst>
-                <a:path w="7403783" h="3376487">
-                  <a:moveTo>
-                    <a:pt x="602816" y="0"/>
-                  </a:moveTo>
-                  <a:lnTo>
-                    <a:pt x="660118" y="101165"/>
-                  </a:lnTo>
-                  <a:lnTo>
-                    <a:pt x="736751" y="231254"/>
-                  </a:lnTo>
-                  <a:lnTo>
-                    <a:pt x="813384" y="356340"/>
-                  </a:lnTo>
-                  <a:lnTo>
-                    <a:pt x="890016" y="476615"/>
-                  </a:lnTo>
-                  <a:lnTo>
-                    <a:pt x="966649" y="592265"/>
-                  </a:lnTo>
-                  <a:lnTo>
-                    <a:pt x="1043281" y="703467"/>
-                  </a:lnTo>
-                  <a:lnTo>
-                    <a:pt x="1119914" y="810392"/>
-                  </a:lnTo>
-                  <a:lnTo>
-                    <a:pt x="1196546" y="913205"/>
-                  </a:lnTo>
-                  <a:lnTo>
-                    <a:pt x="1273179" y="1012065"/>
-                  </a:lnTo>
-                  <a:lnTo>
-                    <a:pt x="1349811" y="1107122"/>
-                  </a:lnTo>
-                  <a:lnTo>
-                    <a:pt x="1426444" y="1198523"/>
-                  </a:lnTo>
-                  <a:lnTo>
-                    <a:pt x="1503076" y="1286409"/>
-                  </a:lnTo>
-                  <a:lnTo>
-                    <a:pt x="1579709" y="1370916"/>
-                  </a:lnTo>
-                  <a:lnTo>
-                    <a:pt x="1656342" y="1452172"/>
-                  </a:lnTo>
-                  <a:lnTo>
-                    <a:pt x="1732974" y="1530303"/>
-                  </a:lnTo>
-                  <a:lnTo>
-                    <a:pt x="1809607" y="1605430"/>
-                  </a:lnTo>
-                  <a:lnTo>
-                    <a:pt x="1886239" y="1677667"/>
-                  </a:lnTo>
-                  <a:lnTo>
-                    <a:pt x="1962872" y="1747126"/>
-                  </a:lnTo>
-                  <a:lnTo>
-                    <a:pt x="2039504" y="1813914"/>
-                  </a:lnTo>
-                  <a:lnTo>
-                    <a:pt x="2116137" y="1878133"/>
-                  </a:lnTo>
-                  <a:lnTo>
-                    <a:pt x="2192769" y="1939882"/>
-                  </a:lnTo>
-                  <a:lnTo>
-                    <a:pt x="2269402" y="1999257"/>
-                  </a:lnTo>
-                  <a:lnTo>
-                    <a:pt x="2346034" y="2056348"/>
-                  </a:lnTo>
-                  <a:lnTo>
-                    <a:pt x="2422667" y="2111244"/>
-                  </a:lnTo>
-                  <a:lnTo>
-                    <a:pt x="2499300" y="2164028"/>
-                  </a:lnTo>
-                  <a:lnTo>
-                    <a:pt x="2575932" y="2214783"/>
-                  </a:lnTo>
-                  <a:lnTo>
-                    <a:pt x="2652565" y="2263585"/>
-                  </a:lnTo>
-                  <a:lnTo>
-                    <a:pt x="2729197" y="2310511"/>
-                  </a:lnTo>
-                  <a:lnTo>
-                    <a:pt x="2805830" y="2355632"/>
-                  </a:lnTo>
-                  <a:lnTo>
-                    <a:pt x="2882462" y="2399017"/>
-                  </a:lnTo>
-                  <a:lnTo>
-                    <a:pt x="2959095" y="2440734"/>
-                  </a:lnTo>
-                  <a:lnTo>
-                    <a:pt x="3035727" y="2480847"/>
-                  </a:lnTo>
-                  <a:lnTo>
-                    <a:pt x="3112360" y="2519417"/>
-                  </a:lnTo>
-                  <a:lnTo>
-                    <a:pt x="3188993" y="2556503"/>
-                  </a:lnTo>
-                  <a:lnTo>
-                    <a:pt x="3265625" y="2592164"/>
-                  </a:lnTo>
-                  <a:lnTo>
-                    <a:pt x="3342258" y="2626453"/>
-                  </a:lnTo>
-                  <a:lnTo>
-                    <a:pt x="3418890" y="2654952"/>
-                  </a:lnTo>
-                  <a:lnTo>
-                    <a:pt x="3495523" y="2659162"/>
-                  </a:lnTo>
-                  <a:lnTo>
-                    <a:pt x="3572155" y="2663351"/>
-                  </a:lnTo>
-                  <a:lnTo>
-                    <a:pt x="3648788" y="2667518"/>
-                  </a:lnTo>
-                  <a:lnTo>
-                    <a:pt x="3725420" y="2671664"/>
-                  </a:lnTo>
-                  <a:lnTo>
-                    <a:pt x="3802053" y="2675789"/>
-                  </a:lnTo>
-                  <a:lnTo>
-                    <a:pt x="3878685" y="2679894"/>
-                  </a:lnTo>
-                  <a:lnTo>
-                    <a:pt x="3955318" y="2683977"/>
-                  </a:lnTo>
-                  <a:lnTo>
-                    <a:pt x="4031951" y="2688039"/>
-                  </a:lnTo>
-                  <a:lnTo>
-                    <a:pt x="4108583" y="2692081"/>
-                  </a:lnTo>
-                  <a:lnTo>
-                    <a:pt x="4185216" y="2696103"/>
-                  </a:lnTo>
-                  <a:lnTo>
-                    <a:pt x="4261848" y="2700104"/>
-                  </a:lnTo>
-                  <a:lnTo>
-                    <a:pt x="4338481" y="2704084"/>
-                  </a:lnTo>
-                  <a:lnTo>
-                    <a:pt x="4415113" y="2708045"/>
-                  </a:lnTo>
-                  <a:lnTo>
-                    <a:pt x="4491746" y="2711985"/>
-                  </a:lnTo>
-                  <a:lnTo>
-                    <a:pt x="4568378" y="2715905"/>
-                  </a:lnTo>
-                  <a:lnTo>
-                    <a:pt x="4645011" y="2719806"/>
-                  </a:lnTo>
-                  <a:lnTo>
-                    <a:pt x="4721644" y="2723686"/>
-                  </a:lnTo>
-                  <a:lnTo>
-                    <a:pt x="4798276" y="2727547"/>
-                  </a:lnTo>
-                  <a:lnTo>
-                    <a:pt x="4874909" y="2731388"/>
-                  </a:lnTo>
-                  <a:lnTo>
-                    <a:pt x="4951541" y="2735210"/>
-                  </a:lnTo>
-                  <a:lnTo>
-                    <a:pt x="5028174" y="2739012"/>
-                  </a:lnTo>
-                  <a:lnTo>
-                    <a:pt x="5104806" y="2742795"/>
-                  </a:lnTo>
-                  <a:lnTo>
-                    <a:pt x="5181439" y="2746559"/>
-                  </a:lnTo>
-                  <a:lnTo>
-                    <a:pt x="5258071" y="2750304"/>
-                  </a:lnTo>
-                  <a:lnTo>
-                    <a:pt x="5334704" y="2754030"/>
-                  </a:lnTo>
-                  <a:lnTo>
-                    <a:pt x="5411336" y="2757736"/>
-                  </a:lnTo>
-                  <a:lnTo>
-                    <a:pt x="5487969" y="2761424"/>
-                  </a:lnTo>
-                  <a:lnTo>
-                    <a:pt x="5564602" y="2765093"/>
-                  </a:lnTo>
-                  <a:lnTo>
-                    <a:pt x="5641234" y="2768744"/>
-                  </a:lnTo>
-                  <a:lnTo>
-                    <a:pt x="5717867" y="2772376"/>
-                  </a:lnTo>
-                  <a:lnTo>
-                    <a:pt x="5794499" y="2775989"/>
-                  </a:lnTo>
-                  <a:lnTo>
-                    <a:pt x="5871132" y="2779584"/>
-                  </a:lnTo>
-                  <a:lnTo>
-                    <a:pt x="5947764" y="2783161"/>
-                  </a:lnTo>
-                  <a:lnTo>
-                    <a:pt x="6024397" y="2786720"/>
-                  </a:lnTo>
-                  <a:lnTo>
-                    <a:pt x="6101029" y="2790261"/>
-                  </a:lnTo>
-                  <a:lnTo>
-                    <a:pt x="6177662" y="2793783"/>
-                  </a:lnTo>
-                  <a:lnTo>
-                    <a:pt x="6254294" y="2797288"/>
-                  </a:lnTo>
-                  <a:lnTo>
-                    <a:pt x="6330927" y="2800775"/>
-                  </a:lnTo>
-                  <a:lnTo>
-                    <a:pt x="6407560" y="2804245"/>
-                  </a:lnTo>
-                  <a:lnTo>
-                    <a:pt x="6484192" y="2807696"/>
-                  </a:lnTo>
-                  <a:lnTo>
-                    <a:pt x="6560825" y="2811130"/>
-                  </a:lnTo>
-                  <a:lnTo>
-                    <a:pt x="6637457" y="2814547"/>
-                  </a:lnTo>
-                  <a:lnTo>
-                    <a:pt x="6714090" y="2817946"/>
-                  </a:lnTo>
-                  <a:lnTo>
-                    <a:pt x="6790722" y="2821328"/>
-                  </a:lnTo>
-                  <a:lnTo>
-                    <a:pt x="6867355" y="2824693"/>
-                  </a:lnTo>
-                  <a:lnTo>
-                    <a:pt x="6943987" y="2828041"/>
-                  </a:lnTo>
-                  <a:lnTo>
-                    <a:pt x="7020620" y="2831372"/>
-                  </a:lnTo>
-                  <a:lnTo>
-                    <a:pt x="7097253" y="2834686"/>
-                  </a:lnTo>
-                  <a:lnTo>
-                    <a:pt x="7173885" y="2837983"/>
-                  </a:lnTo>
-                  <a:lnTo>
-                    <a:pt x="7250518" y="2841263"/>
-                  </a:lnTo>
-                  <a:lnTo>
-                    <a:pt x="7327150" y="2844526"/>
-                  </a:lnTo>
-                  <a:lnTo>
-                    <a:pt x="7403783" y="2847773"/>
-                  </a:lnTo>
-                  <a:lnTo>
-                    <a:pt x="7403783" y="3376487"/>
-                  </a:lnTo>
-                  <a:lnTo>
-                    <a:pt x="7327150" y="3372197"/>
-                  </a:lnTo>
-                  <a:lnTo>
-                    <a:pt x="7250518" y="3367735"/>
-                  </a:lnTo>
-                  <a:lnTo>
-                    <a:pt x="7173885" y="3363095"/>
-                  </a:lnTo>
-                  <a:lnTo>
-                    <a:pt x="7097253" y="3358270"/>
-                  </a:lnTo>
-                  <a:lnTo>
-                    <a:pt x="7020620" y="3353251"/>
-                  </a:lnTo>
-                  <a:lnTo>
-                    <a:pt x="6943987" y="3348032"/>
-                  </a:lnTo>
-                  <a:lnTo>
-                    <a:pt x="6867355" y="3342603"/>
-                  </a:lnTo>
-                  <a:lnTo>
-                    <a:pt x="6790722" y="3336958"/>
-                  </a:lnTo>
-                  <a:lnTo>
-                    <a:pt x="6714090" y="3331087"/>
-                  </a:lnTo>
-                  <a:lnTo>
-                    <a:pt x="6637457" y="3324981"/>
-                  </a:lnTo>
-                  <a:lnTo>
-                    <a:pt x="6560825" y="3318631"/>
-                  </a:lnTo>
-                  <a:lnTo>
-                    <a:pt x="6484192" y="3312027"/>
-                  </a:lnTo>
-                  <a:lnTo>
-                    <a:pt x="6407560" y="3305159"/>
-                  </a:lnTo>
-                  <a:lnTo>
-                    <a:pt x="6330927" y="3298016"/>
-                  </a:lnTo>
-                  <a:lnTo>
-                    <a:pt x="6254294" y="3290587"/>
-                  </a:lnTo>
-                  <a:lnTo>
-                    <a:pt x="6177662" y="3282862"/>
-                  </a:lnTo>
-                  <a:lnTo>
-                    <a:pt x="6101029" y="3274827"/>
-                  </a:lnTo>
-                  <a:lnTo>
-                    <a:pt x="6024397" y="3266471"/>
-                  </a:lnTo>
-                  <a:lnTo>
-                    <a:pt x="5947764" y="3257781"/>
-                  </a:lnTo>
-                  <a:lnTo>
-                    <a:pt x="5871132" y="3248743"/>
-                  </a:lnTo>
-                  <a:lnTo>
-                    <a:pt x="5794499" y="3239343"/>
-                  </a:lnTo>
-                  <a:lnTo>
-                    <a:pt x="5717867" y="3229568"/>
-                  </a:lnTo>
-                  <a:lnTo>
-                    <a:pt x="5641234" y="3219402"/>
-                  </a:lnTo>
-                  <a:lnTo>
-                    <a:pt x="5564602" y="3208829"/>
-                  </a:lnTo>
-                  <a:lnTo>
-                    <a:pt x="5487969" y="3197833"/>
-                  </a:lnTo>
-                  <a:lnTo>
-                    <a:pt x="5411336" y="3186397"/>
-                  </a:lnTo>
-                  <a:lnTo>
-                    <a:pt x="5334704" y="3174504"/>
-                  </a:lnTo>
-                  <a:lnTo>
-                    <a:pt x="5258071" y="3162136"/>
-                  </a:lnTo>
-                  <a:lnTo>
-                    <a:pt x="5181439" y="3149272"/>
-                  </a:lnTo>
-                  <a:lnTo>
-                    <a:pt x="5104806" y="3135894"/>
-                  </a:lnTo>
-                  <a:lnTo>
-                    <a:pt x="5028174" y="3121981"/>
-                  </a:lnTo>
-                  <a:lnTo>
-                    <a:pt x="4951541" y="3107512"/>
-                  </a:lnTo>
-                  <a:lnTo>
-                    <a:pt x="4874909" y="3092464"/>
-                  </a:lnTo>
-                  <a:lnTo>
-                    <a:pt x="4798276" y="3076814"/>
-                  </a:lnTo>
-                  <a:lnTo>
-                    <a:pt x="4721644" y="3060538"/>
-                  </a:lnTo>
-                  <a:lnTo>
-                    <a:pt x="4645011" y="3043611"/>
-                  </a:lnTo>
-                  <a:lnTo>
-                    <a:pt x="4568378" y="3026007"/>
-                  </a:lnTo>
-                  <a:lnTo>
-                    <a:pt x="4491746" y="3007699"/>
-                  </a:lnTo>
-                  <a:lnTo>
-                    <a:pt x="4415113" y="2988659"/>
-                  </a:lnTo>
-                  <a:lnTo>
-                    <a:pt x="4338481" y="2968857"/>
-                  </a:lnTo>
-                  <a:lnTo>
-                    <a:pt x="4261848" y="2948263"/>
-                  </a:lnTo>
-                  <a:lnTo>
-                    <a:pt x="4185216" y="2926845"/>
-                  </a:lnTo>
-                  <a:lnTo>
-                    <a:pt x="4108583" y="2904571"/>
-                  </a:lnTo>
-                  <a:lnTo>
-                    <a:pt x="4031951" y="2881406"/>
-                  </a:lnTo>
-                  <a:lnTo>
-                    <a:pt x="3955318" y="2857314"/>
-                  </a:lnTo>
-                  <a:lnTo>
-                    <a:pt x="3878685" y="2832259"/>
-                  </a:lnTo>
-                  <a:lnTo>
-                    <a:pt x="3802053" y="2806202"/>
-                  </a:lnTo>
-                  <a:lnTo>
-                    <a:pt x="3725420" y="2779102"/>
-                  </a:lnTo>
-                  <a:lnTo>
-                    <a:pt x="3648788" y="2750919"/>
-                  </a:lnTo>
-                  <a:lnTo>
-                    <a:pt x="3572155" y="2721608"/>
-                  </a:lnTo>
-                  <a:lnTo>
-                    <a:pt x="3495523" y="2691125"/>
-                  </a:lnTo>
-                  <a:lnTo>
-                    <a:pt x="3418890" y="2659423"/>
-                  </a:lnTo>
-                  <a:lnTo>
-                    <a:pt x="3342258" y="2650721"/>
-                  </a:lnTo>
-                  <a:lnTo>
-                    <a:pt x="3265625" y="2646468"/>
-                  </a:lnTo>
-                  <a:lnTo>
-                    <a:pt x="3188993" y="2642193"/>
-                  </a:lnTo>
-                  <a:lnTo>
-                    <a:pt x="3112360" y="2637896"/>
-                  </a:lnTo>
-                  <a:lnTo>
-                    <a:pt x="3035727" y="2633578"/>
-                  </a:lnTo>
-                  <a:lnTo>
-                    <a:pt x="2959095" y="2629237"/>
-                  </a:lnTo>
-                  <a:lnTo>
-                    <a:pt x="2882462" y="2624874"/>
-                  </a:lnTo>
-                  <a:lnTo>
-                    <a:pt x="2805830" y="2620489"/>
-                  </a:lnTo>
-                  <a:lnTo>
-                    <a:pt x="2729197" y="2616082"/>
-                  </a:lnTo>
-                  <a:lnTo>
-                    <a:pt x="2652565" y="2611652"/>
-                  </a:lnTo>
-                  <a:lnTo>
-                    <a:pt x="2575932" y="2607199"/>
-                  </a:lnTo>
-                  <a:lnTo>
-                    <a:pt x="2499300" y="2602724"/>
-                  </a:lnTo>
-                  <a:lnTo>
-                    <a:pt x="2422667" y="2598226"/>
-                  </a:lnTo>
-                  <a:lnTo>
-                    <a:pt x="2346034" y="2593705"/>
-                  </a:lnTo>
-                  <a:lnTo>
-                    <a:pt x="2269402" y="2589160"/>
-                  </a:lnTo>
-                  <a:lnTo>
-                    <a:pt x="2192769" y="2584593"/>
-                  </a:lnTo>
-                  <a:lnTo>
-                    <a:pt x="2116137" y="2580002"/>
-                  </a:lnTo>
-                  <a:lnTo>
-                    <a:pt x="2039504" y="2575388"/>
-                  </a:lnTo>
-                  <a:lnTo>
-                    <a:pt x="1962872" y="2570750"/>
-                  </a:lnTo>
-                  <a:lnTo>
-                    <a:pt x="1886239" y="2566089"/>
-                  </a:lnTo>
-                  <a:lnTo>
-                    <a:pt x="1809607" y="2561404"/>
-                  </a:lnTo>
-                  <a:lnTo>
-                    <a:pt x="1732974" y="2556695"/>
-                  </a:lnTo>
-                  <a:lnTo>
-                    <a:pt x="1656342" y="2551961"/>
-                  </a:lnTo>
-                  <a:lnTo>
-                    <a:pt x="1579709" y="2547204"/>
-                  </a:lnTo>
-                  <a:lnTo>
-                    <a:pt x="1503076" y="2542422"/>
-                  </a:lnTo>
-                  <a:lnTo>
-                    <a:pt x="1426444" y="2537616"/>
-                  </a:lnTo>
-                  <a:lnTo>
-                    <a:pt x="1349811" y="2532786"/>
-                  </a:lnTo>
-                  <a:lnTo>
-                    <a:pt x="1273179" y="2527931"/>
-                  </a:lnTo>
-                  <a:lnTo>
-                    <a:pt x="1196546" y="2523051"/>
-                  </a:lnTo>
-                  <a:lnTo>
-                    <a:pt x="1119914" y="2518146"/>
-                  </a:lnTo>
-                  <a:lnTo>
-                    <a:pt x="1043281" y="2513216"/>
-                  </a:lnTo>
-                  <a:lnTo>
-                    <a:pt x="966649" y="2508261"/>
-                  </a:lnTo>
-                  <a:lnTo>
-                    <a:pt x="890016" y="2503280"/>
-                  </a:lnTo>
-                  <a:lnTo>
-                    <a:pt x="813384" y="2498274"/>
-                  </a:lnTo>
-                  <a:lnTo>
-                    <a:pt x="736751" y="2493243"/>
-                  </a:lnTo>
-                  <a:lnTo>
-                    <a:pt x="660118" y="2488186"/>
-                  </a:lnTo>
-                  <a:lnTo>
-                    <a:pt x="583486" y="2483103"/>
-                  </a:lnTo>
-                  <a:lnTo>
-                    <a:pt x="506853" y="2477994"/>
-                  </a:lnTo>
-                  <a:lnTo>
-                    <a:pt x="430221" y="2472859"/>
-                  </a:lnTo>
-                  <a:lnTo>
-                    <a:pt x="353588" y="2467698"/>
-                  </a:lnTo>
-                  <a:lnTo>
-                    <a:pt x="276956" y="2462510"/>
-                  </a:lnTo>
-                  <a:lnTo>
-                    <a:pt x="200323" y="2457296"/>
-                  </a:lnTo>
-                  <a:lnTo>
-                    <a:pt x="123691" y="2452056"/>
-                  </a:lnTo>
-                  <a:lnTo>
-                    <a:pt x="47058" y="2446788"/>
-                  </a:lnTo>
-                  <a:lnTo>
-                    <a:pt x="0" y="2443537"/>
+                    <a:pt x="787847" y="101165"/>
+                  </a:lnTo>
+                  <a:lnTo>
+                    <a:pt x="859470" y="231254"/>
+                  </a:lnTo>
+                  <a:lnTo>
+                    <a:pt x="931092" y="356340"/>
+                  </a:lnTo>
+                  <a:lnTo>
+                    <a:pt x="1002715" y="476615"/>
+                  </a:lnTo>
+                  <a:lnTo>
+                    <a:pt x="1074337" y="592265"/>
+                  </a:lnTo>
+                  <a:lnTo>
+                    <a:pt x="1145960" y="703467"/>
+                  </a:lnTo>
+                  <a:lnTo>
+                    <a:pt x="1217582" y="810392"/>
+                  </a:lnTo>
+                  <a:lnTo>
+                    <a:pt x="1289205" y="913205"/>
+                  </a:lnTo>
+                  <a:lnTo>
+                    <a:pt x="1360827" y="1012065"/>
+                  </a:lnTo>
+                  <a:lnTo>
+                    <a:pt x="1432450" y="1107122"/>
+                  </a:lnTo>
+                  <a:lnTo>
+                    <a:pt x="1504073" y="1198523"/>
+                  </a:lnTo>
+                  <a:lnTo>
+                    <a:pt x="1575695" y="1286409"/>
+                  </a:lnTo>
+                  <a:lnTo>
+                    <a:pt x="1647318" y="1370916"/>
+                  </a:lnTo>
+                  <a:lnTo>
+                    <a:pt x="1718940" y="1452172"/>
+                  </a:lnTo>
+                  <a:lnTo>
+                    <a:pt x="1790563" y="1530303"/>
+                  </a:lnTo>
+                  <a:lnTo>
+                    <a:pt x="1862185" y="1605430"/>
+                  </a:lnTo>
+                  <a:lnTo>
+                    <a:pt x="1933808" y="1677667"/>
+                  </a:lnTo>
+                  <a:lnTo>
+                    <a:pt x="2005430" y="1747126"/>
+                  </a:lnTo>
+                  <a:lnTo>
+                    <a:pt x="2077053" y="1813914"/>
+                  </a:lnTo>
+                  <a:lnTo>
+                    <a:pt x="2148675" y="1878133"/>
+                  </a:lnTo>
+                  <a:lnTo>
+                    <a:pt x="2220298" y="1939882"/>
+                  </a:lnTo>
+                  <a:lnTo>
+                    <a:pt x="2291920" y="1999257"/>
+                  </a:lnTo>
+                  <a:lnTo>
+                    <a:pt x="2363543" y="2056348"/>
+                  </a:lnTo>
+                  <a:lnTo>
+                    <a:pt x="2435165" y="2111244"/>
+                  </a:lnTo>
+                  <a:lnTo>
+                    <a:pt x="2506788" y="2164028"/>
+                  </a:lnTo>
+                  <a:lnTo>
+                    <a:pt x="2578410" y="2214783"/>
+                  </a:lnTo>
+                  <a:lnTo>
+                    <a:pt x="2650033" y="2263585"/>
+                  </a:lnTo>
+                  <a:lnTo>
+                    <a:pt x="2721655" y="2310511"/>
+                  </a:lnTo>
+                  <a:lnTo>
+                    <a:pt x="2793278" y="2355632"/>
+                  </a:lnTo>
+                  <a:lnTo>
+                    <a:pt x="2864901" y="2399017"/>
+                  </a:lnTo>
+                  <a:lnTo>
+                    <a:pt x="2936523" y="2440734"/>
+                  </a:lnTo>
+                  <a:lnTo>
+                    <a:pt x="3008146" y="2480847"/>
+                  </a:lnTo>
+                  <a:lnTo>
+                    <a:pt x="3079768" y="2519417"/>
+                  </a:lnTo>
+                  <a:lnTo>
+                    <a:pt x="3151391" y="2556503"/>
+                  </a:lnTo>
+                  <a:lnTo>
+                    <a:pt x="3223013" y="2592164"/>
+                  </a:lnTo>
+                  <a:lnTo>
+                    <a:pt x="3294636" y="2626453"/>
+                  </a:lnTo>
+                  <a:lnTo>
+                    <a:pt x="3366258" y="2654952"/>
+                  </a:lnTo>
+                  <a:lnTo>
+                    <a:pt x="3437881" y="2659162"/>
+                  </a:lnTo>
+                  <a:lnTo>
+                    <a:pt x="3509503" y="2663351"/>
+                  </a:lnTo>
+                  <a:lnTo>
+                    <a:pt x="3581126" y="2667518"/>
+                  </a:lnTo>
+                  <a:lnTo>
+                    <a:pt x="3652748" y="2671664"/>
+                  </a:lnTo>
+                  <a:lnTo>
+                    <a:pt x="3724371" y="2675789"/>
+                  </a:lnTo>
+                  <a:lnTo>
+                    <a:pt x="3795993" y="2679894"/>
+                  </a:lnTo>
+                  <a:lnTo>
+                    <a:pt x="3867616" y="2683977"/>
+                  </a:lnTo>
+                  <a:lnTo>
+                    <a:pt x="3939238" y="2688039"/>
+                  </a:lnTo>
+                  <a:lnTo>
+                    <a:pt x="4010861" y="2692081"/>
+                  </a:lnTo>
+                  <a:lnTo>
+                    <a:pt x="4082483" y="2696103"/>
+                  </a:lnTo>
+                  <a:lnTo>
+                    <a:pt x="4154106" y="2700104"/>
+                  </a:lnTo>
+                  <a:lnTo>
+                    <a:pt x="4225729" y="2704084"/>
+                  </a:lnTo>
+                  <a:lnTo>
+                    <a:pt x="4297351" y="2708045"/>
+                  </a:lnTo>
+                  <a:lnTo>
+                    <a:pt x="4368974" y="2711985"/>
+                  </a:lnTo>
+                  <a:lnTo>
+                    <a:pt x="4440596" y="2715905"/>
+                  </a:lnTo>
+                  <a:lnTo>
+                    <a:pt x="4512219" y="2719806"/>
+                  </a:lnTo>
+                  <a:lnTo>
+                    <a:pt x="4583841" y="2723686"/>
+                  </a:lnTo>
+                  <a:lnTo>
+                    <a:pt x="4655464" y="2727547"/>
+                  </a:lnTo>
+                  <a:lnTo>
+                    <a:pt x="4727086" y="2731388"/>
+                  </a:lnTo>
+                  <a:lnTo>
+                    <a:pt x="4798709" y="2735210"/>
+                  </a:lnTo>
+                  <a:lnTo>
+                    <a:pt x="4870331" y="2739012"/>
+                  </a:lnTo>
+                  <a:lnTo>
+                    <a:pt x="4941954" y="2742795"/>
+                  </a:lnTo>
+                  <a:lnTo>
+                    <a:pt x="5013576" y="2746559"/>
+                  </a:lnTo>
+                  <a:lnTo>
+                    <a:pt x="5085199" y="2750304"/>
+                  </a:lnTo>
+                  <a:lnTo>
+                    <a:pt x="5156821" y="2754030"/>
+                  </a:lnTo>
+                  <a:lnTo>
+                    <a:pt x="5228444" y="2757736"/>
+                  </a:lnTo>
+                  <a:lnTo>
+                    <a:pt x="5300066" y="2761424"/>
+                  </a:lnTo>
+                  <a:lnTo>
+                    <a:pt x="5371689" y="2765093"/>
+                  </a:lnTo>
+                  <a:lnTo>
+                    <a:pt x="5443311" y="2768744"/>
+                  </a:lnTo>
+                  <a:lnTo>
+                    <a:pt x="5514934" y="2772376"/>
+                  </a:lnTo>
+                  <a:lnTo>
+                    <a:pt x="5586557" y="2775989"/>
+                  </a:lnTo>
+                  <a:lnTo>
+                    <a:pt x="5658179" y="2779584"/>
+                  </a:lnTo>
+                  <a:lnTo>
+                    <a:pt x="5729802" y="2783161"/>
+                  </a:lnTo>
+                  <a:lnTo>
+                    <a:pt x="5801424" y="2786720"/>
+                  </a:lnTo>
+                  <a:lnTo>
+                    <a:pt x="5873047" y="2790261"/>
+                  </a:lnTo>
+                  <a:lnTo>
+                    <a:pt x="5944669" y="2793783"/>
+                  </a:lnTo>
+                  <a:lnTo>
+                    <a:pt x="6016292" y="2797288"/>
+                  </a:lnTo>
+                  <a:lnTo>
+                    <a:pt x="6087914" y="2800775"/>
+                  </a:lnTo>
+                  <a:lnTo>
+                    <a:pt x="6159537" y="2804245"/>
+                  </a:lnTo>
+                  <a:lnTo>
+                    <a:pt x="6231159" y="2807696"/>
+                  </a:lnTo>
+                  <a:lnTo>
+                    <a:pt x="6302782" y="2811130"/>
+                  </a:lnTo>
+                  <a:lnTo>
+                    <a:pt x="6374404" y="2814547"/>
+                  </a:lnTo>
+                  <a:lnTo>
+                    <a:pt x="6446027" y="2817946"/>
+                  </a:lnTo>
+                  <a:lnTo>
+                    <a:pt x="6517649" y="2821328"/>
+                  </a:lnTo>
+                  <a:lnTo>
+                    <a:pt x="6589272" y="2824693"/>
+                  </a:lnTo>
+                  <a:lnTo>
+                    <a:pt x="6660894" y="2828041"/>
+                  </a:lnTo>
+                  <a:lnTo>
+                    <a:pt x="6732517" y="2831372"/>
+                  </a:lnTo>
+                  <a:lnTo>
+                    <a:pt x="6804139" y="2834686"/>
+                  </a:lnTo>
+                  <a:lnTo>
+                    <a:pt x="6875762" y="2837983"/>
+                  </a:lnTo>
+                  <a:lnTo>
+                    <a:pt x="6947385" y="2841263"/>
+                  </a:lnTo>
+                  <a:lnTo>
+                    <a:pt x="7019007" y="2844526"/>
+                  </a:lnTo>
+                  <a:lnTo>
+                    <a:pt x="7090630" y="2847773"/>
+                  </a:lnTo>
+                  <a:lnTo>
+                    <a:pt x="7090630" y="3376487"/>
+                  </a:lnTo>
+                  <a:lnTo>
+                    <a:pt x="7019007" y="3372197"/>
+                  </a:lnTo>
+                  <a:lnTo>
+                    <a:pt x="6947385" y="3367735"/>
+                  </a:lnTo>
+                  <a:lnTo>
+                    <a:pt x="6875762" y="3363095"/>
+                  </a:lnTo>
+                  <a:lnTo>
+                    <a:pt x="6804139" y="3358270"/>
+                  </a:lnTo>
+                  <a:lnTo>
+                    <a:pt x="6732517" y="3353251"/>
+                  </a:lnTo>
+                  <a:lnTo>
+                    <a:pt x="6660894" y="3348032"/>
+                  </a:lnTo>
+                  <a:lnTo>
+                    <a:pt x="6589272" y="3342603"/>
+                  </a:lnTo>
+                  <a:lnTo>
+                    <a:pt x="6517649" y="3336958"/>
+                  </a:lnTo>
+                  <a:lnTo>
+                    <a:pt x="6446027" y="3331087"/>
+                  </a:lnTo>
+                  <a:lnTo>
+                    <a:pt x="6374404" y="3324981"/>
+                  </a:lnTo>
+                  <a:lnTo>
+                    <a:pt x="6302782" y="3318631"/>
+                  </a:lnTo>
+                  <a:lnTo>
+                    <a:pt x="6231159" y="3312027"/>
+                  </a:lnTo>
+                  <a:lnTo>
+                    <a:pt x="6159537" y="3305159"/>
+                  </a:lnTo>
+                  <a:lnTo>
+                    <a:pt x="6087914" y="3298016"/>
+                  </a:lnTo>
+                  <a:lnTo>
+                    <a:pt x="6016292" y="3290587"/>
+                  </a:lnTo>
+                  <a:lnTo>
+                    <a:pt x="5944669" y="3282862"/>
+                  </a:lnTo>
+                  <a:lnTo>
+                    <a:pt x="5873047" y="3274827"/>
+                  </a:lnTo>
+                  <a:lnTo>
+                    <a:pt x="5801424" y="3266471"/>
+                  </a:lnTo>
+                  <a:lnTo>
+                    <a:pt x="5729802" y="3257781"/>
+                  </a:lnTo>
+                  <a:lnTo>
+                    <a:pt x="5658179" y="3248743"/>
+                  </a:lnTo>
+                  <a:lnTo>
+                    <a:pt x="5586557" y="3239343"/>
+                  </a:lnTo>
+                  <a:lnTo>
+                    <a:pt x="5514934" y="3229568"/>
+                  </a:lnTo>
+                  <a:lnTo>
+                    <a:pt x="5443311" y="3219402"/>
+                  </a:lnTo>
+                  <a:lnTo>
+                    <a:pt x="5371689" y="3208829"/>
+                  </a:lnTo>
+                  <a:lnTo>
+                    <a:pt x="5300066" y="3197833"/>
+                  </a:lnTo>
+                  <a:lnTo>
+                    <a:pt x="5228444" y="3186397"/>
+                  </a:lnTo>
+                  <a:lnTo>
+                    <a:pt x="5156821" y="3174504"/>
+                  </a:lnTo>
+                  <a:lnTo>
+                    <a:pt x="5085199" y="3162136"/>
+                  </a:lnTo>
+                  <a:lnTo>
+                    <a:pt x="5013576" y="3149272"/>
+                  </a:lnTo>
+                  <a:lnTo>
+                    <a:pt x="4941954" y="3135894"/>
+                  </a:lnTo>
+                  <a:lnTo>
+                    <a:pt x="4870331" y="3121981"/>
+                  </a:lnTo>
+                  <a:lnTo>
+                    <a:pt x="4798709" y="3107512"/>
+                  </a:lnTo>
+                  <a:lnTo>
+                    <a:pt x="4727086" y="3092464"/>
+                  </a:lnTo>
+                  <a:lnTo>
+                    <a:pt x="4655464" y="3076814"/>
+                  </a:lnTo>
+                  <a:lnTo>
+                    <a:pt x="4583841" y="3060538"/>
+                  </a:lnTo>
+                  <a:lnTo>
+                    <a:pt x="4512219" y="3043611"/>
+                  </a:lnTo>
+                  <a:lnTo>
+                    <a:pt x="4440596" y="3026007"/>
+                  </a:lnTo>
+                  <a:lnTo>
+                    <a:pt x="4368974" y="3007699"/>
+                  </a:lnTo>
+                  <a:lnTo>
+                    <a:pt x="4297351" y="2988659"/>
+                  </a:lnTo>
+                  <a:lnTo>
+                    <a:pt x="4225729" y="2968857"/>
+                  </a:lnTo>
+                  <a:lnTo>
+                    <a:pt x="4154106" y="2948263"/>
+                  </a:lnTo>
+                  <a:lnTo>
+                    <a:pt x="4082483" y="2926845"/>
+                  </a:lnTo>
+                  <a:lnTo>
+                    <a:pt x="4010861" y="2904571"/>
+                  </a:lnTo>
+                  <a:lnTo>
+                    <a:pt x="3939238" y="2881406"/>
+                  </a:lnTo>
+                  <a:lnTo>
+                    <a:pt x="3867616" y="2857314"/>
+                  </a:lnTo>
+                  <a:lnTo>
+                    <a:pt x="3795993" y="2832259"/>
+                  </a:lnTo>
+                  <a:lnTo>
+                    <a:pt x="3724371" y="2806202"/>
+                  </a:lnTo>
+                  <a:lnTo>
+                    <a:pt x="3652748" y="2779102"/>
+                  </a:lnTo>
+                  <a:lnTo>
+                    <a:pt x="3581126" y="2750919"/>
+                  </a:lnTo>
+                  <a:lnTo>
+                    <a:pt x="3509503" y="2721608"/>
+                  </a:lnTo>
+                  <a:lnTo>
+                    <a:pt x="3437881" y="2691125"/>
+                  </a:lnTo>
+                  <a:lnTo>
+                    <a:pt x="3366258" y="2659423"/>
+                  </a:lnTo>
+                  <a:lnTo>
+                    <a:pt x="3294636" y="2650721"/>
+                  </a:lnTo>
+                  <a:lnTo>
+                    <a:pt x="3223013" y="2646468"/>
+                  </a:lnTo>
+                  <a:lnTo>
+                    <a:pt x="3151391" y="2642193"/>
+                  </a:lnTo>
+                  <a:lnTo>
+                    <a:pt x="3079768" y="2637896"/>
+                  </a:lnTo>
+                  <a:lnTo>
+                    <a:pt x="3008146" y="2633578"/>
+                  </a:lnTo>
+                  <a:lnTo>
+                    <a:pt x="2936523" y="2629237"/>
+                  </a:lnTo>
+                  <a:lnTo>
+                    <a:pt x="2864901" y="2624874"/>
+                  </a:lnTo>
+                  <a:lnTo>
+                    <a:pt x="2793278" y="2620489"/>
+                  </a:lnTo>
+                  <a:lnTo>
+                    <a:pt x="2721655" y="2616082"/>
+                  </a:lnTo>
+                  <a:lnTo>
+                    <a:pt x="2650033" y="2611652"/>
+                  </a:lnTo>
+                  <a:lnTo>
+                    <a:pt x="2578410" y="2607199"/>
+                  </a:lnTo>
+                  <a:lnTo>
+                    <a:pt x="2506788" y="2602724"/>
+                  </a:lnTo>
+                  <a:lnTo>
+                    <a:pt x="2435165" y="2598226"/>
+                  </a:lnTo>
+                  <a:lnTo>
+                    <a:pt x="2363543" y="2593705"/>
+                  </a:lnTo>
+                  <a:lnTo>
+                    <a:pt x="2291920" y="2589160"/>
+                  </a:lnTo>
+                  <a:lnTo>
+                    <a:pt x="2220298" y="2584593"/>
+                  </a:lnTo>
+                  <a:lnTo>
+                    <a:pt x="2148675" y="2580002"/>
+                  </a:lnTo>
+                  <a:lnTo>
+                    <a:pt x="2077053" y="2575388"/>
+                  </a:lnTo>
+                  <a:lnTo>
+                    <a:pt x="2005430" y="2570750"/>
+                  </a:lnTo>
+                  <a:lnTo>
+                    <a:pt x="1933808" y="2566089"/>
+                  </a:lnTo>
+                  <a:lnTo>
+                    <a:pt x="1862185" y="2561404"/>
+                  </a:lnTo>
+                  <a:lnTo>
+                    <a:pt x="1790563" y="2556695"/>
+                  </a:lnTo>
+                  <a:lnTo>
+                    <a:pt x="1718940" y="2551961"/>
+                  </a:lnTo>
+                  <a:lnTo>
+                    <a:pt x="1647318" y="2547204"/>
+                  </a:lnTo>
+                  <a:lnTo>
+                    <a:pt x="1575695" y="2542422"/>
+                  </a:lnTo>
+                  <a:lnTo>
+                    <a:pt x="1504073" y="2537616"/>
+                  </a:lnTo>
+                  <a:lnTo>
+                    <a:pt x="1432450" y="2532786"/>
+                  </a:lnTo>
+                  <a:lnTo>
+                    <a:pt x="1360827" y="2527931"/>
+                  </a:lnTo>
+                  <a:lnTo>
+                    <a:pt x="1289205" y="2523051"/>
+                  </a:lnTo>
+                  <a:lnTo>
+                    <a:pt x="1217582" y="2518146"/>
+                  </a:lnTo>
+                  <a:lnTo>
+                    <a:pt x="1145960" y="2513216"/>
+                  </a:lnTo>
+                  <a:lnTo>
+                    <a:pt x="1074337" y="2508261"/>
+                  </a:lnTo>
+                  <a:lnTo>
+                    <a:pt x="1002715" y="2503280"/>
+                  </a:lnTo>
+                  <a:lnTo>
+                    <a:pt x="931092" y="2498274"/>
+                  </a:lnTo>
+                  <a:lnTo>
+                    <a:pt x="859470" y="2493243"/>
+                  </a:lnTo>
+                  <a:lnTo>
+                    <a:pt x="787847" y="2488186"/>
+                  </a:lnTo>
+                  <a:lnTo>
+                    <a:pt x="716225" y="2483103"/>
+                  </a:lnTo>
+                  <a:lnTo>
+                    <a:pt x="644602" y="2477994"/>
+                  </a:lnTo>
+                  <a:lnTo>
+                    <a:pt x="572980" y="2472859"/>
+                  </a:lnTo>
+                  <a:lnTo>
+                    <a:pt x="501357" y="2467698"/>
+                  </a:lnTo>
+                  <a:lnTo>
+                    <a:pt x="429735" y="2462510"/>
+                  </a:lnTo>
+                  <a:lnTo>
+                    <a:pt x="358112" y="2457296"/>
+                  </a:lnTo>
+                  <a:lnTo>
+                    <a:pt x="286490" y="2452056"/>
+                  </a:lnTo>
+                  <a:lnTo>
+                    <a:pt x="214867" y="2446788"/>
+                  </a:lnTo>
+                  <a:lnTo>
+                    <a:pt x="143245" y="2441494"/>
+                  </a:lnTo>
+                  <a:lnTo>
+                    <a:pt x="71622" y="2436173"/>
+                  </a:lnTo>
+                  <a:lnTo>
+                    <a:pt x="0" y="2430824"/>
                   </a:lnTo>
                   <a:close/>
                 </a:path>
@@ -3591,288 +3554,613 @@
         </p:sp>
         <p:sp>
           <p:nvSpPr>
+            <p:cNvPr id="21" name="pl21"/>
+            <p:cNvSpPr/>
+            <p:nvPr/>
+          </p:nvSpPr>
+          <p:spPr>
+            <a:xfrm>
+              <a:off x="1906340" y="2073503"/>
+              <a:ext cx="6356338" cy="2847773"/>
+            </a:xfrm>
+            <a:custGeom>
+              <a:avLst/>
+              <a:pathLst>
+                <a:path w="6356338" h="2847773">
+                  <a:moveTo>
+                    <a:pt x="0" y="0"/>
+                  </a:moveTo>
+                  <a:lnTo>
+                    <a:pt x="53556" y="101165"/>
+                  </a:lnTo>
+                  <a:lnTo>
+                    <a:pt x="125178" y="231254"/>
+                  </a:lnTo>
+                  <a:lnTo>
+                    <a:pt x="196801" y="356340"/>
+                  </a:lnTo>
+                  <a:lnTo>
+                    <a:pt x="268423" y="476615"/>
+                  </a:lnTo>
+                  <a:lnTo>
+                    <a:pt x="340046" y="592265"/>
+                  </a:lnTo>
+                  <a:lnTo>
+                    <a:pt x="411668" y="703467"/>
+                  </a:lnTo>
+                  <a:lnTo>
+                    <a:pt x="483291" y="810392"/>
+                  </a:lnTo>
+                  <a:lnTo>
+                    <a:pt x="554913" y="913205"/>
+                  </a:lnTo>
+                  <a:lnTo>
+                    <a:pt x="626536" y="1012065"/>
+                  </a:lnTo>
+                  <a:lnTo>
+                    <a:pt x="698158" y="1107122"/>
+                  </a:lnTo>
+                  <a:lnTo>
+                    <a:pt x="769781" y="1198523"/>
+                  </a:lnTo>
+                  <a:lnTo>
+                    <a:pt x="841403" y="1286409"/>
+                  </a:lnTo>
+                  <a:lnTo>
+                    <a:pt x="913026" y="1370916"/>
+                  </a:lnTo>
+                  <a:lnTo>
+                    <a:pt x="984649" y="1452172"/>
+                  </a:lnTo>
+                  <a:lnTo>
+                    <a:pt x="1056271" y="1530303"/>
+                  </a:lnTo>
+                  <a:lnTo>
+                    <a:pt x="1127894" y="1605430"/>
+                  </a:lnTo>
+                  <a:lnTo>
+                    <a:pt x="1199516" y="1677667"/>
+                  </a:lnTo>
+                  <a:lnTo>
+                    <a:pt x="1271139" y="1747126"/>
+                  </a:lnTo>
+                  <a:lnTo>
+                    <a:pt x="1342761" y="1813914"/>
+                  </a:lnTo>
+                  <a:lnTo>
+                    <a:pt x="1414384" y="1878133"/>
+                  </a:lnTo>
+                  <a:lnTo>
+                    <a:pt x="1486006" y="1939882"/>
+                  </a:lnTo>
+                  <a:lnTo>
+                    <a:pt x="1557629" y="1999257"/>
+                  </a:lnTo>
+                  <a:lnTo>
+                    <a:pt x="1629251" y="2056348"/>
+                  </a:lnTo>
+                  <a:lnTo>
+                    <a:pt x="1700874" y="2111244"/>
+                  </a:lnTo>
+                  <a:lnTo>
+                    <a:pt x="1772496" y="2164028"/>
+                  </a:lnTo>
+                  <a:lnTo>
+                    <a:pt x="1844119" y="2214783"/>
+                  </a:lnTo>
+                  <a:lnTo>
+                    <a:pt x="1915741" y="2263585"/>
+                  </a:lnTo>
+                  <a:lnTo>
+                    <a:pt x="1987364" y="2310511"/>
+                  </a:lnTo>
+                  <a:lnTo>
+                    <a:pt x="2058986" y="2355632"/>
+                  </a:lnTo>
+                  <a:lnTo>
+                    <a:pt x="2130609" y="2399017"/>
+                  </a:lnTo>
+                  <a:lnTo>
+                    <a:pt x="2202231" y="2440734"/>
+                  </a:lnTo>
+                  <a:lnTo>
+                    <a:pt x="2273854" y="2480847"/>
+                  </a:lnTo>
+                  <a:lnTo>
+                    <a:pt x="2345477" y="2519417"/>
+                  </a:lnTo>
+                  <a:lnTo>
+                    <a:pt x="2417099" y="2556503"/>
+                  </a:lnTo>
+                  <a:lnTo>
+                    <a:pt x="2488722" y="2592164"/>
+                  </a:lnTo>
+                  <a:lnTo>
+                    <a:pt x="2560344" y="2626453"/>
+                  </a:lnTo>
+                  <a:lnTo>
+                    <a:pt x="2631967" y="2654952"/>
+                  </a:lnTo>
+                  <a:lnTo>
+                    <a:pt x="2703589" y="2659162"/>
+                  </a:lnTo>
+                  <a:lnTo>
+                    <a:pt x="2775212" y="2663351"/>
+                  </a:lnTo>
+                  <a:lnTo>
+                    <a:pt x="2846834" y="2667518"/>
+                  </a:lnTo>
+                  <a:lnTo>
+                    <a:pt x="2918457" y="2671664"/>
+                  </a:lnTo>
+                  <a:lnTo>
+                    <a:pt x="2990079" y="2675789"/>
+                  </a:lnTo>
+                  <a:lnTo>
+                    <a:pt x="3061702" y="2679894"/>
+                  </a:lnTo>
+                  <a:lnTo>
+                    <a:pt x="3133324" y="2683977"/>
+                  </a:lnTo>
+                  <a:lnTo>
+                    <a:pt x="3204947" y="2688039"/>
+                  </a:lnTo>
+                  <a:lnTo>
+                    <a:pt x="3276569" y="2692081"/>
+                  </a:lnTo>
+                  <a:lnTo>
+                    <a:pt x="3348192" y="2696103"/>
+                  </a:lnTo>
+                  <a:lnTo>
+                    <a:pt x="3419814" y="2700104"/>
+                  </a:lnTo>
+                  <a:lnTo>
+                    <a:pt x="3491437" y="2704084"/>
+                  </a:lnTo>
+                  <a:lnTo>
+                    <a:pt x="3563059" y="2708045"/>
+                  </a:lnTo>
+                  <a:lnTo>
+                    <a:pt x="3634682" y="2711985"/>
+                  </a:lnTo>
+                  <a:lnTo>
+                    <a:pt x="3706304" y="2715905"/>
+                  </a:lnTo>
+                  <a:lnTo>
+                    <a:pt x="3777927" y="2719806"/>
+                  </a:lnTo>
+                  <a:lnTo>
+                    <a:pt x="3849550" y="2723686"/>
+                  </a:lnTo>
+                  <a:lnTo>
+                    <a:pt x="3921172" y="2727547"/>
+                  </a:lnTo>
+                  <a:lnTo>
+                    <a:pt x="3992795" y="2731388"/>
+                  </a:lnTo>
+                  <a:lnTo>
+                    <a:pt x="4064417" y="2735210"/>
+                  </a:lnTo>
+                  <a:lnTo>
+                    <a:pt x="4136040" y="2739012"/>
+                  </a:lnTo>
+                  <a:lnTo>
+                    <a:pt x="4207662" y="2742795"/>
+                  </a:lnTo>
+                  <a:lnTo>
+                    <a:pt x="4279285" y="2746559"/>
+                  </a:lnTo>
+                  <a:lnTo>
+                    <a:pt x="4350907" y="2750304"/>
+                  </a:lnTo>
+                  <a:lnTo>
+                    <a:pt x="4422530" y="2754030"/>
+                  </a:lnTo>
+                  <a:lnTo>
+                    <a:pt x="4494152" y="2757736"/>
+                  </a:lnTo>
+                  <a:lnTo>
+                    <a:pt x="4565775" y="2761424"/>
+                  </a:lnTo>
+                  <a:lnTo>
+                    <a:pt x="4637397" y="2765093"/>
+                  </a:lnTo>
+                  <a:lnTo>
+                    <a:pt x="4709020" y="2768744"/>
+                  </a:lnTo>
+                  <a:lnTo>
+                    <a:pt x="4780642" y="2772376"/>
+                  </a:lnTo>
+                  <a:lnTo>
+                    <a:pt x="4852265" y="2775989"/>
+                  </a:lnTo>
+                  <a:lnTo>
+                    <a:pt x="4923887" y="2779584"/>
+                  </a:lnTo>
+                  <a:lnTo>
+                    <a:pt x="4995510" y="2783161"/>
+                  </a:lnTo>
+                  <a:lnTo>
+                    <a:pt x="5067132" y="2786720"/>
+                  </a:lnTo>
+                  <a:lnTo>
+                    <a:pt x="5138755" y="2790261"/>
+                  </a:lnTo>
+                  <a:lnTo>
+                    <a:pt x="5210378" y="2793783"/>
+                  </a:lnTo>
+                  <a:lnTo>
+                    <a:pt x="5282000" y="2797288"/>
+                  </a:lnTo>
+                  <a:lnTo>
+                    <a:pt x="5353623" y="2800775"/>
+                  </a:lnTo>
+                  <a:lnTo>
+                    <a:pt x="5425245" y="2804245"/>
+                  </a:lnTo>
+                  <a:lnTo>
+                    <a:pt x="5496868" y="2807696"/>
+                  </a:lnTo>
+                  <a:lnTo>
+                    <a:pt x="5568490" y="2811130"/>
+                  </a:lnTo>
+                  <a:lnTo>
+                    <a:pt x="5640113" y="2814547"/>
+                  </a:lnTo>
+                  <a:lnTo>
+                    <a:pt x="5711735" y="2817946"/>
+                  </a:lnTo>
+                  <a:lnTo>
+                    <a:pt x="5783358" y="2821328"/>
+                  </a:lnTo>
+                  <a:lnTo>
+                    <a:pt x="5854980" y="2824693"/>
+                  </a:lnTo>
+                  <a:lnTo>
+                    <a:pt x="5926603" y="2828041"/>
+                  </a:lnTo>
+                  <a:lnTo>
+                    <a:pt x="5998225" y="2831372"/>
+                  </a:lnTo>
+                  <a:lnTo>
+                    <a:pt x="6069848" y="2834686"/>
+                  </a:lnTo>
+                  <a:lnTo>
+                    <a:pt x="6141470" y="2837983"/>
+                  </a:lnTo>
+                  <a:lnTo>
+                    <a:pt x="6213093" y="2841263"/>
+                  </a:lnTo>
+                  <a:lnTo>
+                    <a:pt x="6284715" y="2844526"/>
+                  </a:lnTo>
+                  <a:lnTo>
+                    <a:pt x="6356338" y="2847773"/>
+                  </a:lnTo>
+                </a:path>
+              </a:pathLst>
+            </a:custGeom>
+          </p:spPr>
+          <p:txBody>
+            <a:bodyPr/>
+            <a:lstStyle/>
+            <a:p/>
+          </p:txBody>
+        </p:sp>
+        <p:sp>
+          <p:nvSpPr>
             <p:cNvPr id="22" name="pl22"/>
             <p:cNvSpPr/>
             <p:nvPr/>
           </p:nvSpPr>
           <p:spPr>
             <a:xfrm>
-              <a:off x="1420334" y="2073503"/>
-              <a:ext cx="6800966" cy="2847773"/>
+              <a:off x="1172049" y="4504327"/>
+              <a:ext cx="7090630" cy="945662"/>
             </a:xfrm>
             <a:custGeom>
               <a:avLst/>
               <a:pathLst>
-                <a:path w="6800966" h="2847773">
+                <a:path w="7090630" h="945662">
                   <a:moveTo>
+                    <a:pt x="7090630" y="945662"/>
+                  </a:moveTo>
+                  <a:lnTo>
+                    <a:pt x="7019007" y="941372"/>
+                  </a:lnTo>
+                  <a:lnTo>
+                    <a:pt x="6947385" y="936911"/>
+                  </a:lnTo>
+                  <a:lnTo>
+                    <a:pt x="6875762" y="932271"/>
+                  </a:lnTo>
+                  <a:lnTo>
+                    <a:pt x="6804139" y="927445"/>
+                  </a:lnTo>
+                  <a:lnTo>
+                    <a:pt x="6732517" y="922426"/>
+                  </a:lnTo>
+                  <a:lnTo>
+                    <a:pt x="6660894" y="917207"/>
+                  </a:lnTo>
+                  <a:lnTo>
+                    <a:pt x="6589272" y="911779"/>
+                  </a:lnTo>
+                  <a:lnTo>
+                    <a:pt x="6517649" y="906134"/>
+                  </a:lnTo>
+                  <a:lnTo>
+                    <a:pt x="6446027" y="900263"/>
+                  </a:lnTo>
+                  <a:lnTo>
+                    <a:pt x="6374404" y="894157"/>
+                  </a:lnTo>
+                  <a:lnTo>
+                    <a:pt x="6302782" y="887807"/>
+                  </a:lnTo>
+                  <a:lnTo>
+                    <a:pt x="6231159" y="881203"/>
+                  </a:lnTo>
+                  <a:lnTo>
+                    <a:pt x="6159537" y="874334"/>
+                  </a:lnTo>
+                  <a:lnTo>
+                    <a:pt x="6087914" y="867191"/>
+                  </a:lnTo>
+                  <a:lnTo>
+                    <a:pt x="6016292" y="859763"/>
+                  </a:lnTo>
+                  <a:lnTo>
+                    <a:pt x="5944669" y="852037"/>
+                  </a:lnTo>
+                  <a:lnTo>
+                    <a:pt x="5873047" y="844002"/>
+                  </a:lnTo>
+                  <a:lnTo>
+                    <a:pt x="5801424" y="835646"/>
+                  </a:lnTo>
+                  <a:lnTo>
+                    <a:pt x="5729802" y="826956"/>
+                  </a:lnTo>
+                  <a:lnTo>
+                    <a:pt x="5658179" y="817918"/>
+                  </a:lnTo>
+                  <a:lnTo>
+                    <a:pt x="5586557" y="808519"/>
+                  </a:lnTo>
+                  <a:lnTo>
+                    <a:pt x="5514934" y="798743"/>
+                  </a:lnTo>
+                  <a:lnTo>
+                    <a:pt x="5443311" y="788577"/>
+                  </a:lnTo>
+                  <a:lnTo>
+                    <a:pt x="5371689" y="778004"/>
+                  </a:lnTo>
+                  <a:lnTo>
+                    <a:pt x="5300066" y="767008"/>
+                  </a:lnTo>
+                  <a:lnTo>
+                    <a:pt x="5228444" y="755573"/>
+                  </a:lnTo>
+                  <a:lnTo>
+                    <a:pt x="5156821" y="743680"/>
+                  </a:lnTo>
+                  <a:lnTo>
+                    <a:pt x="5085199" y="731311"/>
+                  </a:lnTo>
+                  <a:lnTo>
+                    <a:pt x="5013576" y="718448"/>
+                  </a:lnTo>
+                  <a:lnTo>
+                    <a:pt x="4941954" y="705070"/>
+                  </a:lnTo>
+                  <a:lnTo>
+                    <a:pt x="4870331" y="691157"/>
+                  </a:lnTo>
+                  <a:lnTo>
+                    <a:pt x="4798709" y="676688"/>
+                  </a:lnTo>
+                  <a:lnTo>
+                    <a:pt x="4727086" y="661639"/>
+                  </a:lnTo>
+                  <a:lnTo>
+                    <a:pt x="4655464" y="645989"/>
+                  </a:lnTo>
+                  <a:lnTo>
+                    <a:pt x="4583841" y="629713"/>
+                  </a:lnTo>
+                  <a:lnTo>
+                    <a:pt x="4512219" y="612787"/>
+                  </a:lnTo>
+                  <a:lnTo>
+                    <a:pt x="4440596" y="595183"/>
+                  </a:lnTo>
+                  <a:lnTo>
+                    <a:pt x="4368974" y="576875"/>
+                  </a:lnTo>
+                  <a:lnTo>
+                    <a:pt x="4297351" y="557834"/>
+                  </a:lnTo>
+                  <a:lnTo>
+                    <a:pt x="4225729" y="538032"/>
+                  </a:lnTo>
+                  <a:lnTo>
+                    <a:pt x="4154106" y="517438"/>
+                  </a:lnTo>
+                  <a:lnTo>
+                    <a:pt x="4082483" y="496021"/>
+                  </a:lnTo>
+                  <a:lnTo>
+                    <a:pt x="4010861" y="473747"/>
+                  </a:lnTo>
+                  <a:lnTo>
+                    <a:pt x="3939238" y="450582"/>
+                  </a:lnTo>
+                  <a:lnTo>
+                    <a:pt x="3867616" y="426490"/>
+                  </a:lnTo>
+                  <a:lnTo>
+                    <a:pt x="3795993" y="401435"/>
+                  </a:lnTo>
+                  <a:lnTo>
+                    <a:pt x="3724371" y="375377"/>
+                  </a:lnTo>
+                  <a:lnTo>
+                    <a:pt x="3652748" y="348278"/>
+                  </a:lnTo>
+                  <a:lnTo>
+                    <a:pt x="3581126" y="320094"/>
+                  </a:lnTo>
+                  <a:lnTo>
+                    <a:pt x="3509503" y="290784"/>
+                  </a:lnTo>
+                  <a:lnTo>
+                    <a:pt x="3437881" y="260301"/>
+                  </a:lnTo>
+                  <a:lnTo>
+                    <a:pt x="3366258" y="228598"/>
+                  </a:lnTo>
+                  <a:lnTo>
+                    <a:pt x="3294636" y="219896"/>
+                  </a:lnTo>
+                  <a:lnTo>
+                    <a:pt x="3223013" y="215643"/>
+                  </a:lnTo>
+                  <a:lnTo>
+                    <a:pt x="3151391" y="211368"/>
+                  </a:lnTo>
+                  <a:lnTo>
+                    <a:pt x="3079768" y="207072"/>
+                  </a:lnTo>
+                  <a:lnTo>
+                    <a:pt x="3008146" y="202753"/>
+                  </a:lnTo>
+                  <a:lnTo>
+                    <a:pt x="2936523" y="198412"/>
+                  </a:lnTo>
+                  <a:lnTo>
+                    <a:pt x="2864901" y="194050"/>
+                  </a:lnTo>
+                  <a:lnTo>
+                    <a:pt x="2793278" y="189665"/>
+                  </a:lnTo>
+                  <a:lnTo>
+                    <a:pt x="2721655" y="185257"/>
+                  </a:lnTo>
+                  <a:lnTo>
+                    <a:pt x="2650033" y="180827"/>
+                  </a:lnTo>
+                  <a:lnTo>
+                    <a:pt x="2578410" y="176375"/>
+                  </a:lnTo>
+                  <a:lnTo>
+                    <a:pt x="2506788" y="171899"/>
+                  </a:lnTo>
+                  <a:lnTo>
+                    <a:pt x="2435165" y="167401"/>
+                  </a:lnTo>
+                  <a:lnTo>
+                    <a:pt x="2363543" y="162880"/>
+                  </a:lnTo>
+                  <a:lnTo>
+                    <a:pt x="2291920" y="158336"/>
+                  </a:lnTo>
+                  <a:lnTo>
+                    <a:pt x="2220298" y="153768"/>
+                  </a:lnTo>
+                  <a:lnTo>
+                    <a:pt x="2148675" y="149178"/>
+                  </a:lnTo>
+                  <a:lnTo>
+                    <a:pt x="2077053" y="144563"/>
+                  </a:lnTo>
+                  <a:lnTo>
+                    <a:pt x="2005430" y="139926"/>
+                  </a:lnTo>
+                  <a:lnTo>
+                    <a:pt x="1933808" y="135264"/>
+                  </a:lnTo>
+                  <a:lnTo>
+                    <a:pt x="1862185" y="130579"/>
+                  </a:lnTo>
+                  <a:lnTo>
+                    <a:pt x="1790563" y="125870"/>
+                  </a:lnTo>
+                  <a:lnTo>
+                    <a:pt x="1718940" y="121137"/>
+                  </a:lnTo>
+                  <a:lnTo>
+                    <a:pt x="1647318" y="116380"/>
+                  </a:lnTo>
+                  <a:lnTo>
+                    <a:pt x="1575695" y="111598"/>
+                  </a:lnTo>
+                  <a:lnTo>
+                    <a:pt x="1504073" y="106792"/>
+                  </a:lnTo>
+                  <a:lnTo>
+                    <a:pt x="1432450" y="101961"/>
+                  </a:lnTo>
+                  <a:lnTo>
+                    <a:pt x="1360827" y="97106"/>
+                  </a:lnTo>
+                  <a:lnTo>
+                    <a:pt x="1289205" y="92226"/>
+                  </a:lnTo>
+                  <a:lnTo>
+                    <a:pt x="1217582" y="87321"/>
+                  </a:lnTo>
+                  <a:lnTo>
+                    <a:pt x="1145960" y="82391"/>
+                  </a:lnTo>
+                  <a:lnTo>
+                    <a:pt x="1074337" y="77436"/>
+                  </a:lnTo>
+                  <a:lnTo>
+                    <a:pt x="1002715" y="72456"/>
+                  </a:lnTo>
+                  <a:lnTo>
+                    <a:pt x="931092" y="67450"/>
+                  </a:lnTo>
+                  <a:lnTo>
+                    <a:pt x="859470" y="62418"/>
+                  </a:lnTo>
+                  <a:lnTo>
+                    <a:pt x="787847" y="57361"/>
+                  </a:lnTo>
+                  <a:lnTo>
+                    <a:pt x="716225" y="52278"/>
+                  </a:lnTo>
+                  <a:lnTo>
+                    <a:pt x="644602" y="47169"/>
+                  </a:lnTo>
+                  <a:lnTo>
+                    <a:pt x="572980" y="42034"/>
+                  </a:lnTo>
+                  <a:lnTo>
+                    <a:pt x="501357" y="36873"/>
+                  </a:lnTo>
+                  <a:lnTo>
+                    <a:pt x="429735" y="31686"/>
+                  </a:lnTo>
+                  <a:lnTo>
+                    <a:pt x="358112" y="26472"/>
+                  </a:lnTo>
+                  <a:lnTo>
+                    <a:pt x="286490" y="21231"/>
+                  </a:lnTo>
+                  <a:lnTo>
+                    <a:pt x="214867" y="15964"/>
+                  </a:lnTo>
+                  <a:lnTo>
+                    <a:pt x="143245" y="10669"/>
+                  </a:lnTo>
+                  <a:lnTo>
+                    <a:pt x="71622" y="5348"/>
+                  </a:lnTo>
+                  <a:lnTo>
                     <a:pt x="0" y="0"/>
-                  </a:moveTo>
-                  <a:lnTo>
-                    <a:pt x="57302" y="101165"/>
-                  </a:lnTo>
-                  <a:lnTo>
-                    <a:pt x="133934" y="231254"/>
-                  </a:lnTo>
-                  <a:lnTo>
-                    <a:pt x="210567" y="356340"/>
-                  </a:lnTo>
-                  <a:lnTo>
-                    <a:pt x="287200" y="476615"/>
-                  </a:lnTo>
-                  <a:lnTo>
-                    <a:pt x="363832" y="592265"/>
-                  </a:lnTo>
-                  <a:lnTo>
-                    <a:pt x="440465" y="703467"/>
-                  </a:lnTo>
-                  <a:lnTo>
-                    <a:pt x="517097" y="810392"/>
-                  </a:lnTo>
-                  <a:lnTo>
-                    <a:pt x="593730" y="913205"/>
-                  </a:lnTo>
-                  <a:lnTo>
-                    <a:pt x="670362" y="1012065"/>
-                  </a:lnTo>
-                  <a:lnTo>
-                    <a:pt x="746995" y="1107122"/>
-                  </a:lnTo>
-                  <a:lnTo>
-                    <a:pt x="823627" y="1198523"/>
-                  </a:lnTo>
-                  <a:lnTo>
-                    <a:pt x="900260" y="1286409"/>
-                  </a:lnTo>
-                  <a:lnTo>
-                    <a:pt x="976893" y="1370916"/>
-                  </a:lnTo>
-                  <a:lnTo>
-                    <a:pt x="1053525" y="1452172"/>
-                  </a:lnTo>
-                  <a:lnTo>
-                    <a:pt x="1130158" y="1530303"/>
-                  </a:lnTo>
-                  <a:lnTo>
-                    <a:pt x="1206790" y="1605430"/>
-                  </a:lnTo>
-                  <a:lnTo>
-                    <a:pt x="1283423" y="1677667"/>
-                  </a:lnTo>
-                  <a:lnTo>
-                    <a:pt x="1360055" y="1747126"/>
-                  </a:lnTo>
-                  <a:lnTo>
-                    <a:pt x="1436688" y="1813914"/>
-                  </a:lnTo>
-                  <a:lnTo>
-                    <a:pt x="1513320" y="1878133"/>
-                  </a:lnTo>
-                  <a:lnTo>
-                    <a:pt x="1589953" y="1939882"/>
-                  </a:lnTo>
-                  <a:lnTo>
-                    <a:pt x="1666585" y="1999257"/>
-                  </a:lnTo>
-                  <a:lnTo>
-                    <a:pt x="1743218" y="2056348"/>
-                  </a:lnTo>
-                  <a:lnTo>
-                    <a:pt x="1819851" y="2111244"/>
-                  </a:lnTo>
-                  <a:lnTo>
-                    <a:pt x="1896483" y="2164028"/>
-                  </a:lnTo>
-                  <a:lnTo>
-                    <a:pt x="1973116" y="2214783"/>
-                  </a:lnTo>
-                  <a:lnTo>
-                    <a:pt x="2049748" y="2263585"/>
-                  </a:lnTo>
-                  <a:lnTo>
-                    <a:pt x="2126381" y="2310511"/>
-                  </a:lnTo>
-                  <a:lnTo>
-                    <a:pt x="2203013" y="2355632"/>
-                  </a:lnTo>
-                  <a:lnTo>
-                    <a:pt x="2279646" y="2399017"/>
-                  </a:lnTo>
-                  <a:lnTo>
-                    <a:pt x="2356278" y="2440734"/>
-                  </a:lnTo>
-                  <a:lnTo>
-                    <a:pt x="2432911" y="2480847"/>
-                  </a:lnTo>
-                  <a:lnTo>
-                    <a:pt x="2509544" y="2519417"/>
-                  </a:lnTo>
-                  <a:lnTo>
-                    <a:pt x="2586176" y="2556503"/>
-                  </a:lnTo>
-                  <a:lnTo>
-                    <a:pt x="2662809" y="2592164"/>
-                  </a:lnTo>
-                  <a:lnTo>
-                    <a:pt x="2739441" y="2626453"/>
-                  </a:lnTo>
-                  <a:lnTo>
-                    <a:pt x="2816074" y="2654952"/>
-                  </a:lnTo>
-                  <a:lnTo>
-                    <a:pt x="2892706" y="2659162"/>
-                  </a:lnTo>
-                  <a:lnTo>
-                    <a:pt x="2969339" y="2663351"/>
-                  </a:lnTo>
-                  <a:lnTo>
-                    <a:pt x="3045971" y="2667518"/>
-                  </a:lnTo>
-                  <a:lnTo>
-                    <a:pt x="3122604" y="2671664"/>
-                  </a:lnTo>
-                  <a:lnTo>
-                    <a:pt x="3199236" y="2675789"/>
-                  </a:lnTo>
-                  <a:lnTo>
-                    <a:pt x="3275869" y="2679894"/>
-                  </a:lnTo>
-                  <a:lnTo>
-                    <a:pt x="3352502" y="2683977"/>
-                  </a:lnTo>
-                  <a:lnTo>
-                    <a:pt x="3429134" y="2688039"/>
-                  </a:lnTo>
-                  <a:lnTo>
-                    <a:pt x="3505767" y="2692081"/>
-                  </a:lnTo>
-                  <a:lnTo>
-                    <a:pt x="3582399" y="2696103"/>
-                  </a:lnTo>
-                  <a:lnTo>
-                    <a:pt x="3659032" y="2700104"/>
-                  </a:lnTo>
-                  <a:lnTo>
-                    <a:pt x="3735664" y="2704084"/>
-                  </a:lnTo>
-                  <a:lnTo>
-                    <a:pt x="3812297" y="2708045"/>
-                  </a:lnTo>
-                  <a:lnTo>
-                    <a:pt x="3888929" y="2711985"/>
-                  </a:lnTo>
-                  <a:lnTo>
-                    <a:pt x="3965562" y="2715905"/>
-                  </a:lnTo>
-                  <a:lnTo>
-                    <a:pt x="4042194" y="2719806"/>
-                  </a:lnTo>
-                  <a:lnTo>
-                    <a:pt x="4118827" y="2723686"/>
-                  </a:lnTo>
-                  <a:lnTo>
-                    <a:pt x="4195460" y="2727547"/>
-                  </a:lnTo>
-                  <a:lnTo>
-                    <a:pt x="4272092" y="2731388"/>
-                  </a:lnTo>
-                  <a:lnTo>
-                    <a:pt x="4348725" y="2735210"/>
-                  </a:lnTo>
-                  <a:lnTo>
-                    <a:pt x="4425357" y="2739012"/>
-                  </a:lnTo>
-                  <a:lnTo>
-                    <a:pt x="4501990" y="2742795"/>
-                  </a:lnTo>
-                  <a:lnTo>
-                    <a:pt x="4578622" y="2746559"/>
-                  </a:lnTo>
-                  <a:lnTo>
-                    <a:pt x="4655255" y="2750304"/>
-                  </a:lnTo>
-                  <a:lnTo>
-                    <a:pt x="4731887" y="2754030"/>
-                  </a:lnTo>
-                  <a:lnTo>
-                    <a:pt x="4808520" y="2757736"/>
-                  </a:lnTo>
-                  <a:lnTo>
-                    <a:pt x="4885153" y="2761424"/>
-                  </a:lnTo>
-                  <a:lnTo>
-                    <a:pt x="4961785" y="2765093"/>
-                  </a:lnTo>
-                  <a:lnTo>
-                    <a:pt x="5038418" y="2768744"/>
-                  </a:lnTo>
-                  <a:lnTo>
-                    <a:pt x="5115050" y="2772376"/>
-                  </a:lnTo>
-                  <a:lnTo>
-                    <a:pt x="5191683" y="2775989"/>
-                  </a:lnTo>
-                  <a:lnTo>
-                    <a:pt x="5268315" y="2779584"/>
-                  </a:lnTo>
-                  <a:lnTo>
-                    <a:pt x="5344948" y="2783161"/>
-                  </a:lnTo>
-                  <a:lnTo>
-                    <a:pt x="5421580" y="2786720"/>
-                  </a:lnTo>
-                  <a:lnTo>
-                    <a:pt x="5498213" y="2790261"/>
-                  </a:lnTo>
-                  <a:lnTo>
-                    <a:pt x="5574845" y="2793783"/>
-                  </a:lnTo>
-                  <a:lnTo>
-                    <a:pt x="5651478" y="2797288"/>
-                  </a:lnTo>
-                  <a:lnTo>
-                    <a:pt x="5728111" y="2800775"/>
-                  </a:lnTo>
-                  <a:lnTo>
-                    <a:pt x="5804743" y="2804245"/>
-                  </a:lnTo>
-                  <a:lnTo>
-                    <a:pt x="5881376" y="2807696"/>
-                  </a:lnTo>
-                  <a:lnTo>
-                    <a:pt x="5958008" y="2811130"/>
-                  </a:lnTo>
-                  <a:lnTo>
-                    <a:pt x="6034641" y="2814547"/>
-                  </a:lnTo>
-                  <a:lnTo>
-                    <a:pt x="6111273" y="2817946"/>
-                  </a:lnTo>
-                  <a:lnTo>
-                    <a:pt x="6187906" y="2821328"/>
-                  </a:lnTo>
-                  <a:lnTo>
-                    <a:pt x="6264538" y="2824693"/>
-                  </a:lnTo>
-                  <a:lnTo>
-                    <a:pt x="6341171" y="2828041"/>
-                  </a:lnTo>
-                  <a:lnTo>
-                    <a:pt x="6417804" y="2831372"/>
-                  </a:lnTo>
-                  <a:lnTo>
-                    <a:pt x="6494436" y="2834686"/>
-                  </a:lnTo>
-                  <a:lnTo>
-                    <a:pt x="6571069" y="2837983"/>
-                  </a:lnTo>
-                  <a:lnTo>
-                    <a:pt x="6647701" y="2841263"/>
-                  </a:lnTo>
-                  <a:lnTo>
-                    <a:pt x="6724334" y="2844526"/>
-                  </a:lnTo>
-                  <a:lnTo>
-                    <a:pt x="6800966" y="2847773"/>
                   </a:lnTo>
                 </a:path>
               </a:pathLst>
@@ -3892,625 +4180,312 @@
           </p:nvSpPr>
           <p:spPr>
             <a:xfrm>
-              <a:off x="817517" y="4517040"/>
-              <a:ext cx="7403783" cy="932949"/>
+              <a:off x="1172049" y="3215728"/>
+              <a:ext cx="7090630" cy="2080342"/>
             </a:xfrm>
             <a:custGeom>
               <a:avLst/>
               <a:pathLst>
-                <a:path w="7403783" h="932949">
-                  <a:moveTo>
-                    <a:pt x="7403783" y="932949"/>
-                  </a:moveTo>
-                  <a:lnTo>
-                    <a:pt x="7327150" y="928659"/>
-                  </a:lnTo>
-                  <a:lnTo>
-                    <a:pt x="7250518" y="924198"/>
-                  </a:lnTo>
-                  <a:lnTo>
-                    <a:pt x="7173885" y="919558"/>
-                  </a:lnTo>
-                  <a:lnTo>
-                    <a:pt x="7097253" y="914732"/>
-                  </a:lnTo>
-                  <a:lnTo>
-                    <a:pt x="7020620" y="909713"/>
-                  </a:lnTo>
-                  <a:lnTo>
-                    <a:pt x="6943987" y="904494"/>
-                  </a:lnTo>
-                  <a:lnTo>
-                    <a:pt x="6867355" y="899066"/>
-                  </a:lnTo>
-                  <a:lnTo>
-                    <a:pt x="6790722" y="893421"/>
-                  </a:lnTo>
-                  <a:lnTo>
-                    <a:pt x="6714090" y="887550"/>
-                  </a:lnTo>
-                  <a:lnTo>
-                    <a:pt x="6637457" y="881444"/>
-                  </a:lnTo>
-                  <a:lnTo>
-                    <a:pt x="6560825" y="875094"/>
-                  </a:lnTo>
-                  <a:lnTo>
-                    <a:pt x="6484192" y="868490"/>
-                  </a:lnTo>
-                  <a:lnTo>
-                    <a:pt x="6407560" y="861621"/>
-                  </a:lnTo>
-                  <a:lnTo>
-                    <a:pt x="6330927" y="854478"/>
-                  </a:lnTo>
-                  <a:lnTo>
-                    <a:pt x="6254294" y="847050"/>
-                  </a:lnTo>
-                  <a:lnTo>
-                    <a:pt x="6177662" y="839324"/>
-                  </a:lnTo>
-                  <a:lnTo>
-                    <a:pt x="6101029" y="831289"/>
-                  </a:lnTo>
-                  <a:lnTo>
-                    <a:pt x="6024397" y="822933"/>
-                  </a:lnTo>
-                  <a:lnTo>
-                    <a:pt x="5947764" y="814243"/>
-                  </a:lnTo>
-                  <a:lnTo>
-                    <a:pt x="5871132" y="805205"/>
-                  </a:lnTo>
-                  <a:lnTo>
-                    <a:pt x="5794499" y="795806"/>
-                  </a:lnTo>
-                  <a:lnTo>
-                    <a:pt x="5717867" y="786030"/>
-                  </a:lnTo>
-                  <a:lnTo>
-                    <a:pt x="5641234" y="775864"/>
-                  </a:lnTo>
-                  <a:lnTo>
-                    <a:pt x="5564602" y="765291"/>
-                  </a:lnTo>
-                  <a:lnTo>
-                    <a:pt x="5487969" y="754295"/>
-                  </a:lnTo>
-                  <a:lnTo>
-                    <a:pt x="5411336" y="742860"/>
-                  </a:lnTo>
-                  <a:lnTo>
-                    <a:pt x="5334704" y="730967"/>
-                  </a:lnTo>
-                  <a:lnTo>
-                    <a:pt x="5258071" y="718598"/>
-                  </a:lnTo>
-                  <a:lnTo>
-                    <a:pt x="5181439" y="705735"/>
-                  </a:lnTo>
-                  <a:lnTo>
-                    <a:pt x="5104806" y="692357"/>
-                  </a:lnTo>
-                  <a:lnTo>
-                    <a:pt x="5028174" y="678444"/>
-                  </a:lnTo>
-                  <a:lnTo>
-                    <a:pt x="4951541" y="663975"/>
-                  </a:lnTo>
-                  <a:lnTo>
-                    <a:pt x="4874909" y="648926"/>
-                  </a:lnTo>
-                  <a:lnTo>
-                    <a:pt x="4798276" y="633276"/>
-                  </a:lnTo>
-                  <a:lnTo>
-                    <a:pt x="4721644" y="617000"/>
-                  </a:lnTo>
-                  <a:lnTo>
-                    <a:pt x="4645011" y="600074"/>
-                  </a:lnTo>
-                  <a:lnTo>
-                    <a:pt x="4568378" y="582470"/>
-                  </a:lnTo>
-                  <a:lnTo>
-                    <a:pt x="4491746" y="564162"/>
-                  </a:lnTo>
-                  <a:lnTo>
-                    <a:pt x="4415113" y="545121"/>
-                  </a:lnTo>
-                  <a:lnTo>
-                    <a:pt x="4338481" y="525319"/>
-                  </a:lnTo>
-                  <a:lnTo>
-                    <a:pt x="4261848" y="504725"/>
-                  </a:lnTo>
-                  <a:lnTo>
-                    <a:pt x="4185216" y="483308"/>
-                  </a:lnTo>
-                  <a:lnTo>
-                    <a:pt x="4108583" y="461034"/>
-                  </a:lnTo>
-                  <a:lnTo>
-                    <a:pt x="4031951" y="437869"/>
-                  </a:lnTo>
-                  <a:lnTo>
-                    <a:pt x="3955318" y="413777"/>
-                  </a:lnTo>
-                  <a:lnTo>
-                    <a:pt x="3878685" y="388722"/>
-                  </a:lnTo>
-                  <a:lnTo>
-                    <a:pt x="3802053" y="362664"/>
-                  </a:lnTo>
-                  <a:lnTo>
-                    <a:pt x="3725420" y="335565"/>
-                  </a:lnTo>
-                  <a:lnTo>
-                    <a:pt x="3648788" y="307381"/>
-                  </a:lnTo>
-                  <a:lnTo>
-                    <a:pt x="3572155" y="278071"/>
-                  </a:lnTo>
-                  <a:lnTo>
-                    <a:pt x="3495523" y="247588"/>
-                  </a:lnTo>
-                  <a:lnTo>
-                    <a:pt x="3418890" y="215885"/>
-                  </a:lnTo>
-                  <a:lnTo>
-                    <a:pt x="3342258" y="207183"/>
-                  </a:lnTo>
-                  <a:lnTo>
-                    <a:pt x="3265625" y="202930"/>
-                  </a:lnTo>
-                  <a:lnTo>
-                    <a:pt x="3188993" y="198655"/>
-                  </a:lnTo>
-                  <a:lnTo>
-                    <a:pt x="3112360" y="194359"/>
-                  </a:lnTo>
-                  <a:lnTo>
-                    <a:pt x="3035727" y="190040"/>
-                  </a:lnTo>
-                  <a:lnTo>
-                    <a:pt x="2959095" y="185699"/>
-                  </a:lnTo>
-                  <a:lnTo>
-                    <a:pt x="2882462" y="181337"/>
-                  </a:lnTo>
-                  <a:lnTo>
-                    <a:pt x="2805830" y="176952"/>
-                  </a:lnTo>
-                  <a:lnTo>
-                    <a:pt x="2729197" y="172544"/>
-                  </a:lnTo>
-                  <a:lnTo>
-                    <a:pt x="2652565" y="168114"/>
-                  </a:lnTo>
-                  <a:lnTo>
-                    <a:pt x="2575932" y="163662"/>
-                  </a:lnTo>
-                  <a:lnTo>
-                    <a:pt x="2499300" y="159186"/>
-                  </a:lnTo>
-                  <a:lnTo>
-                    <a:pt x="2422667" y="154688"/>
-                  </a:lnTo>
-                  <a:lnTo>
-                    <a:pt x="2346034" y="150167"/>
-                  </a:lnTo>
-                  <a:lnTo>
-                    <a:pt x="2269402" y="145623"/>
-                  </a:lnTo>
-                  <a:lnTo>
-                    <a:pt x="2192769" y="141055"/>
-                  </a:lnTo>
-                  <a:lnTo>
-                    <a:pt x="2116137" y="136465"/>
-                  </a:lnTo>
-                  <a:lnTo>
-                    <a:pt x="2039504" y="131850"/>
-                  </a:lnTo>
-                  <a:lnTo>
-                    <a:pt x="1962872" y="127213"/>
-                  </a:lnTo>
-                  <a:lnTo>
-                    <a:pt x="1886239" y="122551"/>
-                  </a:lnTo>
-                  <a:lnTo>
-                    <a:pt x="1809607" y="117866"/>
-                  </a:lnTo>
-                  <a:lnTo>
-                    <a:pt x="1732974" y="113157"/>
-                  </a:lnTo>
-                  <a:lnTo>
-                    <a:pt x="1656342" y="108424"/>
-                  </a:lnTo>
-                  <a:lnTo>
-                    <a:pt x="1579709" y="103667"/>
-                  </a:lnTo>
-                  <a:lnTo>
-                    <a:pt x="1503076" y="98885"/>
-                  </a:lnTo>
-                  <a:lnTo>
-                    <a:pt x="1426444" y="94079"/>
-                  </a:lnTo>
-                  <a:lnTo>
-                    <a:pt x="1349811" y="89248"/>
-                  </a:lnTo>
-                  <a:lnTo>
-                    <a:pt x="1273179" y="84393"/>
-                  </a:lnTo>
-                  <a:lnTo>
-                    <a:pt x="1196546" y="79513"/>
-                  </a:lnTo>
-                  <a:lnTo>
-                    <a:pt x="1119914" y="74608"/>
-                  </a:lnTo>
-                  <a:lnTo>
-                    <a:pt x="1043281" y="69678"/>
-                  </a:lnTo>
-                  <a:lnTo>
-                    <a:pt x="966649" y="64723"/>
-                  </a:lnTo>
-                  <a:lnTo>
-                    <a:pt x="890016" y="59743"/>
-                  </a:lnTo>
-                  <a:lnTo>
-                    <a:pt x="813384" y="54737"/>
-                  </a:lnTo>
-                  <a:lnTo>
-                    <a:pt x="736751" y="49705"/>
-                  </a:lnTo>
-                  <a:lnTo>
-                    <a:pt x="660118" y="44648"/>
-                  </a:lnTo>
-                  <a:lnTo>
-                    <a:pt x="583486" y="39565"/>
-                  </a:lnTo>
-                  <a:lnTo>
-                    <a:pt x="506853" y="34456"/>
-                  </a:lnTo>
-                  <a:lnTo>
-                    <a:pt x="430221" y="29321"/>
-                  </a:lnTo>
-                  <a:lnTo>
-                    <a:pt x="353588" y="24160"/>
-                  </a:lnTo>
-                  <a:lnTo>
-                    <a:pt x="276956" y="18973"/>
-                  </a:lnTo>
-                  <a:lnTo>
-                    <a:pt x="200323" y="13759"/>
-                  </a:lnTo>
-                  <a:lnTo>
-                    <a:pt x="123691" y="8518"/>
-                  </a:lnTo>
-                  <a:lnTo>
-                    <a:pt x="47058" y="3251"/>
-                  </a:lnTo>
-                  <a:lnTo>
-                    <a:pt x="0" y="0"/>
-                  </a:lnTo>
-                </a:path>
-              </a:pathLst>
-            </a:custGeom>
-          </p:spPr>
-          <p:txBody>
-            <a:bodyPr/>
-            <a:lstStyle/>
-            <a:p/>
-          </p:txBody>
-        </p:sp>
-        <p:sp>
-          <p:nvSpPr>
-            <p:cNvPr id="24" name="pl24"/>
-            <p:cNvSpPr/>
-            <p:nvPr/>
-          </p:nvSpPr>
-          <p:spPr>
-            <a:xfrm>
-              <a:off x="817517" y="3336158"/>
-              <a:ext cx="7403783" cy="1959912"/>
-            </a:xfrm>
-            <a:custGeom>
-              <a:avLst/>
-              <a:pathLst>
-                <a:path w="7403783" h="1959912">
+                <a:path w="7090630" h="2080342">
                   <a:moveTo>
                     <a:pt x="0" y="0"/>
                   </a:moveTo>
                   <a:lnTo>
-                    <a:pt x="47058" y="30140"/>
-                  </a:lnTo>
-                  <a:lnTo>
-                    <a:pt x="123691" y="78147"/>
-                  </a:lnTo>
-                  <a:lnTo>
-                    <a:pt x="200323" y="125102"/>
-                  </a:lnTo>
-                  <a:lnTo>
-                    <a:pt x="276956" y="171028"/>
-                  </a:lnTo>
-                  <a:lnTo>
-                    <a:pt x="353588" y="215948"/>
-                  </a:lnTo>
-                  <a:lnTo>
-                    <a:pt x="430221" y="259884"/>
-                  </a:lnTo>
-                  <a:lnTo>
-                    <a:pt x="506853" y="302856"/>
-                  </a:lnTo>
-                  <a:lnTo>
-                    <a:pt x="583486" y="344888"/>
-                  </a:lnTo>
-                  <a:lnTo>
-                    <a:pt x="660118" y="385998"/>
-                  </a:lnTo>
-                  <a:lnTo>
-                    <a:pt x="736751" y="426208"/>
-                  </a:lnTo>
-                  <a:lnTo>
-                    <a:pt x="813384" y="465536"/>
-                  </a:lnTo>
-                  <a:lnTo>
-                    <a:pt x="890016" y="504003"/>
-                  </a:lnTo>
-                  <a:lnTo>
-                    <a:pt x="966649" y="541627"/>
-                  </a:lnTo>
-                  <a:lnTo>
-                    <a:pt x="1043281" y="578426"/>
-                  </a:lnTo>
-                  <a:lnTo>
-                    <a:pt x="1119914" y="614420"/>
-                  </a:lnTo>
-                  <a:lnTo>
-                    <a:pt x="1196546" y="649624"/>
-                  </a:lnTo>
-                  <a:lnTo>
-                    <a:pt x="1273179" y="684057"/>
-                  </a:lnTo>
-                  <a:lnTo>
-                    <a:pt x="1349811" y="717736"/>
-                  </a:lnTo>
-                  <a:lnTo>
-                    <a:pt x="1426444" y="750676"/>
-                  </a:lnTo>
-                  <a:lnTo>
-                    <a:pt x="1503076" y="782895"/>
-                  </a:lnTo>
-                  <a:lnTo>
-                    <a:pt x="1579709" y="814408"/>
-                  </a:lnTo>
-                  <a:lnTo>
-                    <a:pt x="1656342" y="845231"/>
-                  </a:lnTo>
-                  <a:lnTo>
-                    <a:pt x="1732974" y="875378"/>
-                  </a:lnTo>
-                  <a:lnTo>
-                    <a:pt x="1809607" y="904864"/>
-                  </a:lnTo>
-                  <a:lnTo>
-                    <a:pt x="1886239" y="933705"/>
-                  </a:lnTo>
-                  <a:lnTo>
-                    <a:pt x="1962872" y="961913"/>
-                  </a:lnTo>
-                  <a:lnTo>
-                    <a:pt x="2039504" y="989504"/>
-                  </a:lnTo>
-                  <a:lnTo>
-                    <a:pt x="2116137" y="1016490"/>
-                  </a:lnTo>
-                  <a:lnTo>
-                    <a:pt x="2192769" y="1042884"/>
-                  </a:lnTo>
-                  <a:lnTo>
-                    <a:pt x="2269402" y="1068700"/>
-                  </a:lnTo>
-                  <a:lnTo>
-                    <a:pt x="2346034" y="1093951"/>
-                  </a:lnTo>
-                  <a:lnTo>
-                    <a:pt x="2422667" y="1118648"/>
-                  </a:lnTo>
-                  <a:lnTo>
-                    <a:pt x="2499300" y="1142804"/>
-                  </a:lnTo>
-                  <a:lnTo>
-                    <a:pt x="2575932" y="1166431"/>
-                  </a:lnTo>
-                  <a:lnTo>
-                    <a:pt x="2652565" y="1189540"/>
-                  </a:lnTo>
-                  <a:lnTo>
-                    <a:pt x="2729197" y="1212143"/>
-                  </a:lnTo>
-                  <a:lnTo>
-                    <a:pt x="2805830" y="1234251"/>
-                  </a:lnTo>
-                  <a:lnTo>
-                    <a:pt x="2882462" y="1255874"/>
-                  </a:lnTo>
-                  <a:lnTo>
-                    <a:pt x="2959095" y="1277023"/>
-                  </a:lnTo>
-                  <a:lnTo>
-                    <a:pt x="3035727" y="1297709"/>
-                  </a:lnTo>
-                  <a:lnTo>
-                    <a:pt x="3112360" y="1317942"/>
-                  </a:lnTo>
-                  <a:lnTo>
-                    <a:pt x="3188993" y="1337731"/>
-                  </a:lnTo>
-                  <a:lnTo>
-                    <a:pt x="3265625" y="1357087"/>
-                  </a:lnTo>
-                  <a:lnTo>
-                    <a:pt x="3342258" y="1376018"/>
-                  </a:lnTo>
-                  <a:lnTo>
-                    <a:pt x="3418890" y="1394535"/>
-                  </a:lnTo>
-                  <a:lnTo>
-                    <a:pt x="3495523" y="1412646"/>
-                  </a:lnTo>
-                  <a:lnTo>
-                    <a:pt x="3572155" y="1430360"/>
-                  </a:lnTo>
-                  <a:lnTo>
-                    <a:pt x="3648788" y="1447686"/>
-                  </a:lnTo>
-                  <a:lnTo>
-                    <a:pt x="3725420" y="1464633"/>
-                  </a:lnTo>
-                  <a:lnTo>
-                    <a:pt x="3802053" y="1481208"/>
-                  </a:lnTo>
-                  <a:lnTo>
-                    <a:pt x="3878685" y="1497420"/>
-                  </a:lnTo>
-                  <a:lnTo>
-                    <a:pt x="3955318" y="1513276"/>
-                  </a:lnTo>
-                  <a:lnTo>
-                    <a:pt x="4031951" y="1528786"/>
-                  </a:lnTo>
-                  <a:lnTo>
-                    <a:pt x="4108583" y="1543955"/>
-                  </a:lnTo>
-                  <a:lnTo>
-                    <a:pt x="4185216" y="1558792"/>
-                  </a:lnTo>
-                  <a:lnTo>
-                    <a:pt x="4261848" y="1573304"/>
-                  </a:lnTo>
-                  <a:lnTo>
-                    <a:pt x="4338481" y="1587498"/>
-                  </a:lnTo>
-                  <a:lnTo>
-                    <a:pt x="4415113" y="1601381"/>
-                  </a:lnTo>
-                  <a:lnTo>
-                    <a:pt x="4491746" y="1614960"/>
-                  </a:lnTo>
-                  <a:lnTo>
-                    <a:pt x="4568378" y="1628241"/>
-                  </a:lnTo>
-                  <a:lnTo>
-                    <a:pt x="4645011" y="1641231"/>
-                  </a:lnTo>
-                  <a:lnTo>
-                    <a:pt x="4721644" y="1653937"/>
-                  </a:lnTo>
-                  <a:lnTo>
-                    <a:pt x="4798276" y="1666364"/>
-                  </a:lnTo>
-                  <a:lnTo>
-                    <a:pt x="4874909" y="1678519"/>
-                  </a:lnTo>
-                  <a:lnTo>
-                    <a:pt x="4951541" y="1690407"/>
-                  </a:lnTo>
-                  <a:lnTo>
-                    <a:pt x="5028174" y="1702035"/>
-                  </a:lnTo>
-                  <a:lnTo>
-                    <a:pt x="5104806" y="1713409"/>
-                  </a:lnTo>
-                  <a:lnTo>
-                    <a:pt x="5181439" y="1724533"/>
-                  </a:lnTo>
-                  <a:lnTo>
-                    <a:pt x="5258071" y="1735413"/>
-                  </a:lnTo>
-                  <a:lnTo>
-                    <a:pt x="5334704" y="1746055"/>
-                  </a:lnTo>
-                  <a:lnTo>
-                    <a:pt x="5411336" y="1756464"/>
-                  </a:lnTo>
-                  <a:lnTo>
-                    <a:pt x="5487969" y="1766644"/>
-                  </a:lnTo>
-                  <a:lnTo>
-                    <a:pt x="5564602" y="1776602"/>
-                  </a:lnTo>
-                  <a:lnTo>
-                    <a:pt x="5641234" y="1786341"/>
-                  </a:lnTo>
-                  <a:lnTo>
-                    <a:pt x="5717867" y="1795867"/>
-                  </a:lnTo>
-                  <a:lnTo>
-                    <a:pt x="5794499" y="1805184"/>
-                  </a:lnTo>
-                  <a:lnTo>
-                    <a:pt x="5871132" y="1814298"/>
-                  </a:lnTo>
-                  <a:lnTo>
-                    <a:pt x="5947764" y="1823211"/>
-                  </a:lnTo>
-                  <a:lnTo>
-                    <a:pt x="6024397" y="1831929"/>
-                  </a:lnTo>
-                  <a:lnTo>
-                    <a:pt x="6101029" y="1840456"/>
-                  </a:lnTo>
-                  <a:lnTo>
-                    <a:pt x="6177662" y="1848796"/>
-                  </a:lnTo>
-                  <a:lnTo>
-                    <a:pt x="6254294" y="1856954"/>
-                  </a:lnTo>
-                  <a:lnTo>
-                    <a:pt x="6330927" y="1864933"/>
-                  </a:lnTo>
-                  <a:lnTo>
-                    <a:pt x="6407560" y="1872737"/>
-                  </a:lnTo>
-                  <a:lnTo>
-                    <a:pt x="6484192" y="1880370"/>
-                  </a:lnTo>
-                  <a:lnTo>
-                    <a:pt x="6560825" y="1887835"/>
-                  </a:lnTo>
-                  <a:lnTo>
-                    <a:pt x="6637457" y="1895137"/>
-                  </a:lnTo>
-                  <a:lnTo>
-                    <a:pt x="6714090" y="1902280"/>
-                  </a:lnTo>
-                  <a:lnTo>
-                    <a:pt x="6790722" y="1909265"/>
-                  </a:lnTo>
-                  <a:lnTo>
-                    <a:pt x="6867355" y="1916098"/>
-                  </a:lnTo>
-                  <a:lnTo>
-                    <a:pt x="6943987" y="1922781"/>
-                  </a:lnTo>
-                  <a:lnTo>
-                    <a:pt x="7020620" y="1929317"/>
-                  </a:lnTo>
-                  <a:lnTo>
-                    <a:pt x="7097253" y="1935710"/>
-                  </a:lnTo>
-                  <a:lnTo>
-                    <a:pt x="7173885" y="1941963"/>
-                  </a:lnTo>
-                  <a:lnTo>
-                    <a:pt x="7250518" y="1948079"/>
-                  </a:lnTo>
-                  <a:lnTo>
-                    <a:pt x="7327150" y="1954061"/>
-                  </a:lnTo>
-                  <a:lnTo>
-                    <a:pt x="7403783" y="1959912"/>
+                    <a:pt x="71622" y="51306"/>
+                  </a:lnTo>
+                  <a:lnTo>
+                    <a:pt x="143245" y="101488"/>
+                  </a:lnTo>
+                  <a:lnTo>
+                    <a:pt x="214867" y="150570"/>
+                  </a:lnTo>
+                  <a:lnTo>
+                    <a:pt x="286490" y="198577"/>
+                  </a:lnTo>
+                  <a:lnTo>
+                    <a:pt x="358112" y="245532"/>
+                  </a:lnTo>
+                  <a:lnTo>
+                    <a:pt x="429735" y="291458"/>
+                  </a:lnTo>
+                  <a:lnTo>
+                    <a:pt x="501357" y="336378"/>
+                  </a:lnTo>
+                  <a:lnTo>
+                    <a:pt x="572980" y="380314"/>
+                  </a:lnTo>
+                  <a:lnTo>
+                    <a:pt x="644602" y="423286"/>
+                  </a:lnTo>
+                  <a:lnTo>
+                    <a:pt x="716225" y="465318"/>
+                  </a:lnTo>
+                  <a:lnTo>
+                    <a:pt x="787847" y="506428"/>
+                  </a:lnTo>
+                  <a:lnTo>
+                    <a:pt x="859470" y="546638"/>
+                  </a:lnTo>
+                  <a:lnTo>
+                    <a:pt x="931092" y="585966"/>
+                  </a:lnTo>
+                  <a:lnTo>
+                    <a:pt x="1002715" y="624433"/>
+                  </a:lnTo>
+                  <a:lnTo>
+                    <a:pt x="1074337" y="662057"/>
+                  </a:lnTo>
+                  <a:lnTo>
+                    <a:pt x="1145960" y="698856"/>
+                  </a:lnTo>
+                  <a:lnTo>
+                    <a:pt x="1217582" y="734849"/>
+                  </a:lnTo>
+                  <a:lnTo>
+                    <a:pt x="1289205" y="770054"/>
+                  </a:lnTo>
+                  <a:lnTo>
+                    <a:pt x="1360827" y="804487"/>
+                  </a:lnTo>
+                  <a:lnTo>
+                    <a:pt x="1432450" y="838166"/>
+                  </a:lnTo>
+                  <a:lnTo>
+                    <a:pt x="1504073" y="871106"/>
+                  </a:lnTo>
+                  <a:lnTo>
+                    <a:pt x="1575695" y="903325"/>
+                  </a:lnTo>
+                  <a:lnTo>
+                    <a:pt x="1647318" y="934838"/>
+                  </a:lnTo>
+                  <a:lnTo>
+                    <a:pt x="1718940" y="965661"/>
+                  </a:lnTo>
+                  <a:lnTo>
+                    <a:pt x="1790563" y="995808"/>
+                  </a:lnTo>
+                  <a:lnTo>
+                    <a:pt x="1862185" y="1025294"/>
+                  </a:lnTo>
+                  <a:lnTo>
+                    <a:pt x="1933808" y="1054135"/>
+                  </a:lnTo>
+                  <a:lnTo>
+                    <a:pt x="2005430" y="1082343"/>
+                  </a:lnTo>
+                  <a:lnTo>
+                    <a:pt x="2077053" y="1109934"/>
+                  </a:lnTo>
+                  <a:lnTo>
+                    <a:pt x="2148675" y="1136920"/>
+                  </a:lnTo>
+                  <a:lnTo>
+                    <a:pt x="2220298" y="1163314"/>
+                  </a:lnTo>
+                  <a:lnTo>
+                    <a:pt x="2291920" y="1189130"/>
+                  </a:lnTo>
+                  <a:lnTo>
+                    <a:pt x="2363543" y="1214381"/>
+                  </a:lnTo>
+                  <a:lnTo>
+                    <a:pt x="2435165" y="1239078"/>
+                  </a:lnTo>
+                  <a:lnTo>
+                    <a:pt x="2506788" y="1263234"/>
+                  </a:lnTo>
+                  <a:lnTo>
+                    <a:pt x="2578410" y="1286861"/>
+                  </a:lnTo>
+                  <a:lnTo>
+                    <a:pt x="2650033" y="1309970"/>
+                  </a:lnTo>
+                  <a:lnTo>
+                    <a:pt x="2721655" y="1332573"/>
+                  </a:lnTo>
+                  <a:lnTo>
+                    <a:pt x="2793278" y="1354681"/>
+                  </a:lnTo>
+                  <a:lnTo>
+                    <a:pt x="2864901" y="1376304"/>
+                  </a:lnTo>
+                  <a:lnTo>
+                    <a:pt x="2936523" y="1397453"/>
+                  </a:lnTo>
+                  <a:lnTo>
+                    <a:pt x="3008146" y="1418139"/>
+                  </a:lnTo>
+                  <a:lnTo>
+                    <a:pt x="3079768" y="1438372"/>
+                  </a:lnTo>
+                  <a:lnTo>
+                    <a:pt x="3151391" y="1458161"/>
+                  </a:lnTo>
+                  <a:lnTo>
+                    <a:pt x="3223013" y="1477517"/>
+                  </a:lnTo>
+                  <a:lnTo>
+                    <a:pt x="3294636" y="1496448"/>
+                  </a:lnTo>
+                  <a:lnTo>
+                    <a:pt x="3366258" y="1514965"/>
+                  </a:lnTo>
+                  <a:lnTo>
+                    <a:pt x="3437881" y="1533076"/>
+                  </a:lnTo>
+                  <a:lnTo>
+                    <a:pt x="3509503" y="1550790"/>
+                  </a:lnTo>
+                  <a:lnTo>
+                    <a:pt x="3581126" y="1568116"/>
+                  </a:lnTo>
+                  <a:lnTo>
+                    <a:pt x="3652748" y="1585063"/>
+                  </a:lnTo>
+                  <a:lnTo>
+                    <a:pt x="3724371" y="1601638"/>
+                  </a:lnTo>
+                  <a:lnTo>
+                    <a:pt x="3795993" y="1617850"/>
+                  </a:lnTo>
+                  <a:lnTo>
+                    <a:pt x="3867616" y="1633706"/>
+                  </a:lnTo>
+                  <a:lnTo>
+                    <a:pt x="3939238" y="1649216"/>
+                  </a:lnTo>
+                  <a:lnTo>
+                    <a:pt x="4010861" y="1664385"/>
+                  </a:lnTo>
+                  <a:lnTo>
+                    <a:pt x="4082483" y="1679222"/>
+                  </a:lnTo>
+                  <a:lnTo>
+                    <a:pt x="4154106" y="1693734"/>
+                  </a:lnTo>
+                  <a:lnTo>
+                    <a:pt x="4225729" y="1707928"/>
+                  </a:lnTo>
+                  <a:lnTo>
+                    <a:pt x="4297351" y="1721811"/>
+                  </a:lnTo>
+                  <a:lnTo>
+                    <a:pt x="4368974" y="1735390"/>
+                  </a:lnTo>
+                  <a:lnTo>
+                    <a:pt x="4440596" y="1748671"/>
+                  </a:lnTo>
+                  <a:lnTo>
+                    <a:pt x="4512219" y="1761661"/>
+                  </a:lnTo>
+                  <a:lnTo>
+                    <a:pt x="4583841" y="1774367"/>
+                  </a:lnTo>
+                  <a:lnTo>
+                    <a:pt x="4655464" y="1786794"/>
+                  </a:lnTo>
+                  <a:lnTo>
+                    <a:pt x="4727086" y="1798949"/>
+                  </a:lnTo>
+                  <a:lnTo>
+                    <a:pt x="4798709" y="1810837"/>
+                  </a:lnTo>
+                  <a:lnTo>
+                    <a:pt x="4870331" y="1822465"/>
+                  </a:lnTo>
+                  <a:lnTo>
+                    <a:pt x="4941954" y="1833838"/>
+                  </a:lnTo>
+                  <a:lnTo>
+                    <a:pt x="5013576" y="1844963"/>
+                  </a:lnTo>
+                  <a:lnTo>
+                    <a:pt x="5085199" y="1855843"/>
+                  </a:lnTo>
+                  <a:lnTo>
+                    <a:pt x="5156821" y="1866485"/>
+                  </a:lnTo>
+                  <a:lnTo>
+                    <a:pt x="5228444" y="1876893"/>
+                  </a:lnTo>
+                  <a:lnTo>
+                    <a:pt x="5300066" y="1887074"/>
+                  </a:lnTo>
+                  <a:lnTo>
+                    <a:pt x="5371689" y="1897032"/>
+                  </a:lnTo>
+                  <a:lnTo>
+                    <a:pt x="5443311" y="1906771"/>
+                  </a:lnTo>
+                  <a:lnTo>
+                    <a:pt x="5514934" y="1916297"/>
+                  </a:lnTo>
+                  <a:lnTo>
+                    <a:pt x="5586557" y="1925614"/>
+                  </a:lnTo>
+                  <a:lnTo>
+                    <a:pt x="5658179" y="1934728"/>
+                  </a:lnTo>
+                  <a:lnTo>
+                    <a:pt x="5729802" y="1943641"/>
+                  </a:lnTo>
+                  <a:lnTo>
+                    <a:pt x="5801424" y="1952359"/>
+                  </a:lnTo>
+                  <a:lnTo>
+                    <a:pt x="5873047" y="1960886"/>
+                  </a:lnTo>
+                  <a:lnTo>
+                    <a:pt x="5944669" y="1969226"/>
+                  </a:lnTo>
+                  <a:lnTo>
+                    <a:pt x="6016292" y="1977384"/>
+                  </a:lnTo>
+                  <a:lnTo>
+                    <a:pt x="6087914" y="1985363"/>
+                  </a:lnTo>
+                  <a:lnTo>
+                    <a:pt x="6159537" y="1993167"/>
+                  </a:lnTo>
+                  <a:lnTo>
+                    <a:pt x="6231159" y="2000800"/>
+                  </a:lnTo>
+                  <a:lnTo>
+                    <a:pt x="6302782" y="2008265"/>
+                  </a:lnTo>
+                  <a:lnTo>
+                    <a:pt x="6374404" y="2015567"/>
+                  </a:lnTo>
+                  <a:lnTo>
+                    <a:pt x="6446027" y="2022710"/>
+                  </a:lnTo>
+                  <a:lnTo>
+                    <a:pt x="6517649" y="2029695"/>
+                  </a:lnTo>
+                  <a:lnTo>
+                    <a:pt x="6589272" y="2036528"/>
+                  </a:lnTo>
+                  <a:lnTo>
+                    <a:pt x="6660894" y="2043211"/>
+                  </a:lnTo>
+                  <a:lnTo>
+                    <a:pt x="6732517" y="2049747"/>
+                  </a:lnTo>
+                  <a:lnTo>
+                    <a:pt x="6804139" y="2056140"/>
+                  </a:lnTo>
+                  <a:lnTo>
+                    <a:pt x="6875762" y="2062393"/>
+                  </a:lnTo>
+                  <a:lnTo>
+                    <a:pt x="6947385" y="2068509"/>
+                  </a:lnTo>
+                  <a:lnTo>
+                    <a:pt x="7019007" y="2074491"/>
+                  </a:lnTo>
+                  <a:lnTo>
+                    <a:pt x="7090630" y="2080342"/>
                   </a:lnTo>
                 </a:path>
               </a:pathLst>
@@ -4533,7 +4508,7 @@
         </p:sp>
         <p:sp>
           <p:nvSpPr>
-            <p:cNvPr id="25" name="pl25"/>
+            <p:cNvPr id="24" name="pl24"/>
             <p:cNvSpPr/>
             <p:nvPr/>
           </p:nvSpPr>
@@ -4576,13 +4551,13 @@
         </p:sp>
         <p:sp>
           <p:nvSpPr>
-            <p:cNvPr id="26" name="pl26"/>
+            <p:cNvPr id="25" name="pl25"/>
             <p:cNvSpPr/>
             <p:nvPr/>
           </p:nvSpPr>
           <p:spPr>
             <a:xfrm>
-              <a:off x="4224261" y="2073503"/>
+              <a:off x="4526955" y="2073503"/>
               <a:ext cx="0" cy="3649639"/>
             </a:xfrm>
             <a:custGeom>
@@ -4619,7 +4594,7 @@
         </p:sp>
         <p:sp>
           <p:nvSpPr>
-            <p:cNvPr id="27" name="tx27"/>
+            <p:cNvPr id="26" name="tx26"/>
             <p:cNvSpPr/>
             <p:nvPr/>
           </p:nvSpPr>
@@ -4665,7 +4640,7 @@
         </p:sp>
         <p:sp>
           <p:nvSpPr>
-            <p:cNvPr id="28" name="tx28"/>
+            <p:cNvPr id="27" name="tx27"/>
             <p:cNvSpPr/>
             <p:nvPr/>
           </p:nvSpPr>
@@ -4711,7 +4686,7 @@
         </p:sp>
         <p:sp>
           <p:nvSpPr>
-            <p:cNvPr id="29" name="tx29"/>
+            <p:cNvPr id="28" name="tx28"/>
             <p:cNvSpPr/>
             <p:nvPr/>
           </p:nvSpPr>
@@ -4757,7 +4732,7 @@
         </p:sp>
         <p:sp>
           <p:nvSpPr>
-            <p:cNvPr id="30" name="tx30"/>
+            <p:cNvPr id="29" name="tx29"/>
             <p:cNvSpPr/>
             <p:nvPr/>
           </p:nvSpPr>
@@ -4803,7 +4778,7 @@
         </p:sp>
         <p:sp>
           <p:nvSpPr>
-            <p:cNvPr id="31" name="tx31"/>
+            <p:cNvPr id="30" name="tx30"/>
             <p:cNvSpPr/>
             <p:nvPr/>
           </p:nvSpPr>
@@ -4849,14 +4824,14 @@
         </p:sp>
         <p:sp>
           <p:nvSpPr>
-            <p:cNvPr id="32" name="tx32"/>
+            <p:cNvPr id="31" name="tx31"/>
             <p:cNvSpPr/>
             <p:nvPr/>
           </p:nvSpPr>
           <p:spPr>
             <a:xfrm>
-              <a:off x="2423864" y="5785772"/>
-              <a:ext cx="155356" cy="80101"/>
+              <a:off x="2421884" y="5785772"/>
+              <a:ext cx="161574" cy="80101"/>
             </a:xfrm>
             <a:prstGeom prst="rect">
               <a:avLst/>
@@ -4888,21 +4863,21 @@
                   <a:latin typeface="Helvetica"/>
                   <a:cs typeface="Helvetica"/>
                 </a:rPr>
-                <a:t>0.8</a:t>
+                <a:t>-25</a:t>
               </a:r>
             </a:p>
           </p:txBody>
         </p:sp>
         <p:sp>
           <p:nvSpPr>
-            <p:cNvPr id="33" name="tx33"/>
+            <p:cNvPr id="32" name="tx32"/>
             <p:cNvSpPr/>
             <p:nvPr/>
           </p:nvSpPr>
           <p:spPr>
             <a:xfrm>
-              <a:off x="4196521" y="5785772"/>
-              <a:ext cx="155356" cy="80101"/>
+              <a:off x="4542539" y="5785772"/>
+              <a:ext cx="62179" cy="80101"/>
             </a:xfrm>
             <a:prstGeom prst="rect">
               <a:avLst/>
@@ -4934,21 +4909,21 @@
                   <a:latin typeface="Helvetica"/>
                   <a:cs typeface="Helvetica"/>
                 </a:rPr>
-                <a:t>1.0</a:t>
+                <a:t>0</a:t>
               </a:r>
             </a:p>
           </p:txBody>
         </p:sp>
         <p:sp>
           <p:nvSpPr>
-            <p:cNvPr id="34" name="tx34"/>
+            <p:cNvPr id="33" name="tx33"/>
             <p:cNvSpPr/>
             <p:nvPr/>
           </p:nvSpPr>
           <p:spPr>
             <a:xfrm>
-              <a:off x="5969179" y="5785772"/>
-              <a:ext cx="155356" cy="80101"/>
+              <a:off x="6582407" y="5785772"/>
+              <a:ext cx="124358" cy="80101"/>
             </a:xfrm>
             <a:prstGeom prst="rect">
               <a:avLst/>
@@ -4980,67 +4955,21 @@
                   <a:latin typeface="Helvetica"/>
                   <a:cs typeface="Helvetica"/>
                 </a:rPr>
-                <a:t>1.2</a:t>
+                <a:t>25</a:t>
               </a:r>
             </a:p>
           </p:txBody>
         </p:sp>
         <p:sp>
           <p:nvSpPr>
-            <p:cNvPr id="35" name="tx35"/>
+            <p:cNvPr id="34" name="tx34"/>
             <p:cNvSpPr/>
             <p:nvPr/>
           </p:nvSpPr>
           <p:spPr>
             <a:xfrm>
-              <a:off x="7741836" y="5785772"/>
-              <a:ext cx="155356" cy="80101"/>
-            </a:xfrm>
-            <a:prstGeom prst="rect">
-              <a:avLst/>
-            </a:prstGeom>
-            <a:noFill/>
-          </p:spPr>
-          <p:txBody>
-            <a:bodyPr lIns="0" rIns="0" tIns="0" bIns="0" anchorCtr="1" anchor="ctr" wrap="none"/>
-            <a:lstStyle/>
-            <a:p>
-              <a:pPr algn="l" marL="0" marR="0" indent="0">
-                <a:lnSpc>
-                  <a:spcPts val="880"/>
-                </a:lnSpc>
-                <a:spcBef>
-                  <a:spcPts val="0"/>
-                </a:spcBef>
-                <a:spcAft>
-                  <a:spcPts val="0"/>
-                </a:spcAft>
-              </a:pPr>
-              <a:r>
-                <a:rPr sz="880">
-                  <a:solidFill>
-                    <a:srgbClr val="4D4D4D">
-                      <a:alpha val="100000"/>
-                    </a:srgbClr>
-                  </a:solidFill>
-                  <a:latin typeface="Helvetica"/>
-                  <a:cs typeface="Helvetica"/>
-                </a:rPr>
-                <a:t>1.4</a:t>
-              </a:r>
-            </a:p>
-          </p:txBody>
-        </p:sp>
-        <p:sp>
-          <p:nvSpPr>
-            <p:cNvPr id="36" name="tx36"/>
-            <p:cNvSpPr/>
-            <p:nvPr/>
-          </p:nvSpPr>
-          <p:spPr>
-            <a:xfrm>
-              <a:off x="3879271" y="5925448"/>
-              <a:ext cx="1676186" cy="100218"/>
+              <a:off x="2928340" y="5925448"/>
+              <a:ext cx="3578047" cy="100218"/>
             </a:xfrm>
             <a:prstGeom prst="rect">
               <a:avLst/>
@@ -5072,14 +5001,14 @@
                   <a:latin typeface="Helvetica"/>
                   <a:cs typeface="Helvetica"/>
                 </a:rPr>
-                <a:t>CKD-EPI Cr-Cys / CG ratio</a:t>
+                <a:t>eGFR difference (%): 100 × (CKD-EPI Cr-Cys − CG) / CG</a:t>
               </a:r>
             </a:p>
           </p:txBody>
         </p:sp>
         <p:sp>
           <p:nvSpPr>
-            <p:cNvPr id="37" name="tx37"/>
+            <p:cNvPr id="35" name="tx35"/>
             <p:cNvSpPr/>
             <p:nvPr/>
           </p:nvSpPr>
@@ -5125,14 +5054,14 @@
         </p:sp>
         <p:sp>
           <p:nvSpPr>
-            <p:cNvPr id="38" name="tx38"/>
+            <p:cNvPr id="36" name="tx36"/>
             <p:cNvSpPr/>
             <p:nvPr/>
           </p:nvSpPr>
           <p:spPr>
             <a:xfrm>
               <a:off x="817517" y="1896563"/>
-              <a:ext cx="6833128" cy="82021"/>
+              <a:ext cx="6985375" cy="82021"/>
             </a:xfrm>
             <a:prstGeom prst="rect">
               <a:avLst/>
@@ -5164,14 +5093,14 @@
                   <a:latin typeface="Helvetica"/>
                   <a:cs typeface="Helvetica"/>
                 </a:rPr>
-                <a:t>subHR per 0.1 ratio decline: 1.29 (1.06-1.57), p_Bonf = 0.066 (n = 6)  |  per IQR decline (Δ = 0.30): 2.15 (1.19-3.88)  |  IQR: [0.85, 1.15]</a:t>
+                <a:t>subHR per 10 % decline: 1.29 (1.06-1.57), p_Bonf = 0.066 (n = 6)  |  per IQR decline (Δ = 29.9 %): 2.15 (1.19-3.88)  |  IQR: [-15.0, 14.9] %</a:t>
               </a:r>
             </a:p>
           </p:txBody>
         </p:sp>
         <p:sp>
           <p:nvSpPr>
-            <p:cNvPr id="39" name="tx39"/>
+            <p:cNvPr id="37" name="tx37"/>
             <p:cNvSpPr/>
             <p:nvPr/>
           </p:nvSpPr>

--- a/docs/pptx/carbo/jx-carbo-linsubhr-ratio-akikdigo.pptx
+++ b/docs/pptx/carbo/jx-carbo-linsubhr-ratio-akikdigo.pptx
@@ -2265,34 +2265,26 @@
         </p:sp>
         <p:sp>
           <p:nvSpPr>
-            <p:cNvPr id="4" name="pl4"/>
+            <p:cNvPr id="4" name="rc4"/>
             <p:cNvSpPr/>
             <p:nvPr/>
           </p:nvSpPr>
           <p:spPr>
             <a:xfrm>
-              <a:off x="817517" y="5142518"/>
-              <a:ext cx="7799693" cy="0"/>
+              <a:off x="457200" y="1600200"/>
+              <a:ext cx="8229600" cy="4525962"/>
             </a:xfrm>
-            <a:custGeom>
+            <a:prstGeom prst="rect">
               <a:avLst/>
-              <a:pathLst>
-                <a:path w="7799693" h="0">
-                  <a:moveTo>
-                    <a:pt x="0" y="0"/>
-                  </a:moveTo>
-                  <a:lnTo>
-                    <a:pt x="7799693" y="0"/>
-                  </a:lnTo>
-                  <a:lnTo>
-                    <a:pt x="7799693" y="0"/>
-                  </a:lnTo>
-                </a:path>
-              </a:pathLst>
-            </a:custGeom>
-            <a:ln w="6775" cap="flat">
+            </a:prstGeom>
+            <a:solidFill>
+              <a:srgbClr val="FFFFFF">
+                <a:alpha val="100000"/>
+              </a:srgbClr>
+            </a:solidFill>
+            <a:ln w="13550" cap="rnd">
               <a:solidFill>
-                <a:srgbClr val="EBEBEB">
+                <a:srgbClr val="FFFFFF">
                   <a:alpha val="100000"/>
                 </a:srgbClr>
               </a:solidFill>
@@ -2314,21 +2306,21 @@
           </p:nvSpPr>
           <p:spPr>
             <a:xfrm>
-              <a:off x="817517" y="4313054"/>
-              <a:ext cx="7799693" cy="0"/>
+              <a:off x="887106" y="3250627"/>
+              <a:ext cx="7660515" cy="0"/>
             </a:xfrm>
             <a:custGeom>
               <a:avLst/>
               <a:pathLst>
-                <a:path w="7799693" h="0">
+                <a:path w="7660515" h="0">
                   <a:moveTo>
                     <a:pt x="0" y="0"/>
                   </a:moveTo>
                   <a:lnTo>
-                    <a:pt x="7799693" y="0"/>
-                  </a:lnTo>
-                  <a:lnTo>
-                    <a:pt x="7799693" y="0"/>
+                    <a:pt x="7660515" y="0"/>
+                  </a:lnTo>
+                  <a:lnTo>
+                    <a:pt x="7660515" y="0"/>
                   </a:lnTo>
                 </a:path>
               </a:pathLst>
@@ -2357,21 +2349,21 @@
           </p:nvSpPr>
           <p:spPr>
             <a:xfrm>
-              <a:off x="817517" y="3483591"/>
-              <a:ext cx="7799693" cy="0"/>
+              <a:off x="887106" y="2951293"/>
+              <a:ext cx="7660515" cy="0"/>
             </a:xfrm>
             <a:custGeom>
               <a:avLst/>
               <a:pathLst>
-                <a:path w="7799693" h="0">
+                <a:path w="7660515" h="0">
                   <a:moveTo>
                     <a:pt x="0" y="0"/>
                   </a:moveTo>
                   <a:lnTo>
-                    <a:pt x="7799693" y="0"/>
-                  </a:lnTo>
-                  <a:lnTo>
-                    <a:pt x="7799693" y="0"/>
+                    <a:pt x="7660515" y="0"/>
+                  </a:lnTo>
+                  <a:lnTo>
+                    <a:pt x="7660515" y="0"/>
                   </a:lnTo>
                 </a:path>
               </a:pathLst>
@@ -2400,21 +2392,21 @@
           </p:nvSpPr>
           <p:spPr>
             <a:xfrm>
-              <a:off x="817517" y="2654127"/>
-              <a:ext cx="7799693" cy="0"/>
+              <a:off x="887106" y="2651959"/>
+              <a:ext cx="7660515" cy="0"/>
             </a:xfrm>
             <a:custGeom>
               <a:avLst/>
               <a:pathLst>
-                <a:path w="7799693" h="0">
+                <a:path w="7660515" h="0">
                   <a:moveTo>
                     <a:pt x="0" y="0"/>
                   </a:moveTo>
                   <a:lnTo>
-                    <a:pt x="7799693" y="0"/>
-                  </a:lnTo>
-                  <a:lnTo>
-                    <a:pt x="7799693" y="0"/>
+                    <a:pt x="7660515" y="0"/>
+                  </a:lnTo>
+                  <a:lnTo>
+                    <a:pt x="7660515" y="0"/>
                   </a:lnTo>
                 </a:path>
               </a:pathLst>
@@ -2443,21 +2435,21 @@
           </p:nvSpPr>
           <p:spPr>
             <a:xfrm>
-              <a:off x="1467192" y="2073503"/>
-              <a:ext cx="0" cy="3649639"/>
+              <a:off x="887106" y="2352625"/>
+              <a:ext cx="7660515" cy="0"/>
             </a:xfrm>
             <a:custGeom>
               <a:avLst/>
               <a:pathLst>
-                <a:path w="0" h="3649639">
+                <a:path w="7660515" h="0">
                   <a:moveTo>
-                    <a:pt x="0" y="3649639"/>
+                    <a:pt x="0" y="0"/>
                   </a:moveTo>
                   <a:lnTo>
-                    <a:pt x="0" y="0"/>
-                  </a:lnTo>
-                  <a:lnTo>
-                    <a:pt x="0" y="0"/>
+                    <a:pt x="7660515" y="0"/>
+                  </a:lnTo>
+                  <a:lnTo>
+                    <a:pt x="7660515" y="0"/>
                   </a:lnTo>
                 </a:path>
               </a:pathLst>
@@ -2486,15 +2478,15 @@
           </p:nvSpPr>
           <p:spPr>
             <a:xfrm>
-              <a:off x="3538150" y="2073503"/>
-              <a:ext cx="0" cy="3649639"/>
+              <a:off x="1525188" y="2143092"/>
+              <a:ext cx="0" cy="1317069"/>
             </a:xfrm>
             <a:custGeom>
               <a:avLst/>
               <a:pathLst>
-                <a:path w="0" h="3649639">
+                <a:path w="0" h="1317069">
                   <a:moveTo>
-                    <a:pt x="0" y="3649639"/>
+                    <a:pt x="0" y="1317069"/>
                   </a:moveTo>
                   <a:lnTo>
                     <a:pt x="0" y="0"/>
@@ -2529,15 +2521,15 @@
           </p:nvSpPr>
           <p:spPr>
             <a:xfrm>
-              <a:off x="5609107" y="2073503"/>
-              <a:ext cx="0" cy="3649639"/>
+              <a:off x="3559192" y="2143092"/>
+              <a:ext cx="0" cy="1317069"/>
             </a:xfrm>
             <a:custGeom>
               <a:avLst/>
               <a:pathLst>
-                <a:path w="0" h="3649639">
+                <a:path w="0" h="1317069">
                   <a:moveTo>
-                    <a:pt x="0" y="3649639"/>
+                    <a:pt x="0" y="1317069"/>
                   </a:moveTo>
                   <a:lnTo>
                     <a:pt x="0" y="0"/>
@@ -2572,15 +2564,15 @@
           </p:nvSpPr>
           <p:spPr>
             <a:xfrm>
-              <a:off x="7680065" y="2073503"/>
-              <a:ext cx="0" cy="3649639"/>
+              <a:off x="5593195" y="2143092"/>
+              <a:ext cx="0" cy="1317069"/>
             </a:xfrm>
             <a:custGeom>
               <a:avLst/>
               <a:pathLst>
-                <a:path w="0" h="3649639">
+                <a:path w="0" h="1317069">
                   <a:moveTo>
-                    <a:pt x="0" y="3649639"/>
+                    <a:pt x="0" y="1317069"/>
                   </a:moveTo>
                   <a:lnTo>
                     <a:pt x="0" y="0"/>
@@ -2615,26 +2607,26 @@
           </p:nvSpPr>
           <p:spPr>
             <a:xfrm>
-              <a:off x="817517" y="5557249"/>
-              <a:ext cx="7799693" cy="0"/>
+              <a:off x="7627198" y="2143092"/>
+              <a:ext cx="0" cy="1317069"/>
             </a:xfrm>
             <a:custGeom>
               <a:avLst/>
               <a:pathLst>
-                <a:path w="7799693" h="0">
+                <a:path w="0" h="1317069">
                   <a:moveTo>
+                    <a:pt x="0" y="1317069"/>
+                  </a:moveTo>
+                  <a:lnTo>
                     <a:pt x="0" y="0"/>
-                  </a:moveTo>
-                  <a:lnTo>
-                    <a:pt x="7799693" y="0"/>
-                  </a:lnTo>
-                  <a:lnTo>
-                    <a:pt x="7799693" y="0"/>
+                  </a:lnTo>
+                  <a:lnTo>
+                    <a:pt x="0" y="0"/>
                   </a:lnTo>
                 </a:path>
               </a:pathLst>
             </a:custGeom>
-            <a:ln w="13550" cap="flat">
+            <a:ln w="6775" cap="flat">
               <a:solidFill>
                 <a:srgbClr val="EBEBEB">
                   <a:alpha val="100000"/>
@@ -2658,21 +2650,21 @@
           </p:nvSpPr>
           <p:spPr>
             <a:xfrm>
-              <a:off x="817517" y="4727786"/>
-              <a:ext cx="7799693" cy="0"/>
+              <a:off x="887106" y="3400294"/>
+              <a:ext cx="7660515" cy="0"/>
             </a:xfrm>
             <a:custGeom>
               <a:avLst/>
               <a:pathLst>
-                <a:path w="7799693" h="0">
+                <a:path w="7660515" h="0">
                   <a:moveTo>
                     <a:pt x="0" y="0"/>
                   </a:moveTo>
                   <a:lnTo>
-                    <a:pt x="7799693" y="0"/>
-                  </a:lnTo>
-                  <a:lnTo>
-                    <a:pt x="7799693" y="0"/>
+                    <a:pt x="7660515" y="0"/>
+                  </a:lnTo>
+                  <a:lnTo>
+                    <a:pt x="7660515" y="0"/>
                   </a:lnTo>
                 </a:path>
               </a:pathLst>
@@ -2701,21 +2693,21 @@
           </p:nvSpPr>
           <p:spPr>
             <a:xfrm>
-              <a:off x="817517" y="3898322"/>
-              <a:ext cx="7799693" cy="0"/>
+              <a:off x="887106" y="3100960"/>
+              <a:ext cx="7660515" cy="0"/>
             </a:xfrm>
             <a:custGeom>
               <a:avLst/>
               <a:pathLst>
-                <a:path w="7799693" h="0">
+                <a:path w="7660515" h="0">
                   <a:moveTo>
                     <a:pt x="0" y="0"/>
                   </a:moveTo>
                   <a:lnTo>
-                    <a:pt x="7799693" y="0"/>
-                  </a:lnTo>
-                  <a:lnTo>
-                    <a:pt x="7799693" y="0"/>
+                    <a:pt x="7660515" y="0"/>
+                  </a:lnTo>
+                  <a:lnTo>
+                    <a:pt x="7660515" y="0"/>
                   </a:lnTo>
                 </a:path>
               </a:pathLst>
@@ -2744,21 +2736,21 @@
           </p:nvSpPr>
           <p:spPr>
             <a:xfrm>
-              <a:off x="817517" y="3068859"/>
-              <a:ext cx="7799693" cy="0"/>
+              <a:off x="887106" y="2801626"/>
+              <a:ext cx="7660515" cy="0"/>
             </a:xfrm>
             <a:custGeom>
               <a:avLst/>
               <a:pathLst>
-                <a:path w="7799693" h="0">
+                <a:path w="7660515" h="0">
                   <a:moveTo>
                     <a:pt x="0" y="0"/>
                   </a:moveTo>
                   <a:lnTo>
-                    <a:pt x="7799693" y="0"/>
-                  </a:lnTo>
-                  <a:lnTo>
-                    <a:pt x="7799693" y="0"/>
+                    <a:pt x="7660515" y="0"/>
+                  </a:lnTo>
+                  <a:lnTo>
+                    <a:pt x="7660515" y="0"/>
                   </a:lnTo>
                 </a:path>
               </a:pathLst>
@@ -2787,21 +2779,21 @@
           </p:nvSpPr>
           <p:spPr>
             <a:xfrm>
-              <a:off x="817517" y="2239395"/>
-              <a:ext cx="7799693" cy="0"/>
+              <a:off x="887106" y="2502292"/>
+              <a:ext cx="7660515" cy="0"/>
             </a:xfrm>
             <a:custGeom>
               <a:avLst/>
               <a:pathLst>
-                <a:path w="7799693" h="0">
+                <a:path w="7660515" h="0">
                   <a:moveTo>
                     <a:pt x="0" y="0"/>
                   </a:moveTo>
                   <a:lnTo>
-                    <a:pt x="7799693" y="0"/>
-                  </a:lnTo>
-                  <a:lnTo>
-                    <a:pt x="7799693" y="0"/>
+                    <a:pt x="7660515" y="0"/>
+                  </a:lnTo>
+                  <a:lnTo>
+                    <a:pt x="7660515" y="0"/>
                   </a:lnTo>
                 </a:path>
               </a:pathLst>
@@ -2830,21 +2822,21 @@
           </p:nvSpPr>
           <p:spPr>
             <a:xfrm>
-              <a:off x="2502671" y="2073503"/>
-              <a:ext cx="0" cy="3649639"/>
+              <a:off x="887106" y="2202958"/>
+              <a:ext cx="7660515" cy="0"/>
             </a:xfrm>
             <a:custGeom>
               <a:avLst/>
               <a:pathLst>
-                <a:path w="0" h="3649639">
+                <a:path w="7660515" h="0">
                   <a:moveTo>
-                    <a:pt x="0" y="3649639"/>
+                    <a:pt x="0" y="0"/>
                   </a:moveTo>
                   <a:lnTo>
-                    <a:pt x="0" y="0"/>
-                  </a:lnTo>
-                  <a:lnTo>
-                    <a:pt x="0" y="0"/>
+                    <a:pt x="7660515" y="0"/>
+                  </a:lnTo>
+                  <a:lnTo>
+                    <a:pt x="7660515" y="0"/>
                   </a:lnTo>
                 </a:path>
               </a:pathLst>
@@ -2873,15 +2865,15 @@
           </p:nvSpPr>
           <p:spPr>
             <a:xfrm>
-              <a:off x="4573628" y="2073503"/>
-              <a:ext cx="0" cy="3649639"/>
+              <a:off x="2542190" y="2143092"/>
+              <a:ext cx="0" cy="1317069"/>
             </a:xfrm>
             <a:custGeom>
               <a:avLst/>
               <a:pathLst>
-                <a:path w="0" h="3649639">
+                <a:path w="0" h="1317069">
                   <a:moveTo>
-                    <a:pt x="0" y="3649639"/>
+                    <a:pt x="0" y="1317069"/>
                   </a:moveTo>
                   <a:lnTo>
                     <a:pt x="0" y="0"/>
@@ -2916,15 +2908,15 @@
           </p:nvSpPr>
           <p:spPr>
             <a:xfrm>
-              <a:off x="6644586" y="2073503"/>
-              <a:ext cx="0" cy="3649639"/>
+              <a:off x="4576193" y="2143092"/>
+              <a:ext cx="0" cy="1317069"/>
             </a:xfrm>
             <a:custGeom>
               <a:avLst/>
               <a:pathLst>
-                <a:path w="0" h="3649639">
+                <a:path w="0" h="1317069">
                   <a:moveTo>
-                    <a:pt x="0" y="3649639"/>
+                    <a:pt x="0" y="1317069"/>
                   </a:moveTo>
                   <a:lnTo>
                     <a:pt x="0" y="0"/>
@@ -2953,588 +2945,631 @@
         </p:sp>
         <p:sp>
           <p:nvSpPr>
-            <p:cNvPr id="20" name="pg20"/>
+            <p:cNvPr id="20" name="pl20"/>
             <p:cNvSpPr/>
             <p:nvPr/>
           </p:nvSpPr>
           <p:spPr>
             <a:xfrm>
-              <a:off x="1172049" y="2073503"/>
-              <a:ext cx="7090630" cy="3376487"/>
+              <a:off x="6610197" y="2143092"/>
+              <a:ext cx="0" cy="1317069"/>
             </a:xfrm>
             <a:custGeom>
               <a:avLst/>
               <a:pathLst>
-                <a:path w="7090630" h="3376487">
+                <a:path w="0" h="1317069">
                   <a:moveTo>
-                    <a:pt x="734291" y="0"/>
+                    <a:pt x="0" y="1317069"/>
                   </a:moveTo>
                   <a:lnTo>
-                    <a:pt x="787847" y="101165"/>
-                  </a:lnTo>
-                  <a:lnTo>
-                    <a:pt x="859470" y="231254"/>
-                  </a:lnTo>
-                  <a:lnTo>
-                    <a:pt x="931092" y="356340"/>
-                  </a:lnTo>
-                  <a:lnTo>
-                    <a:pt x="1002715" y="476615"/>
-                  </a:lnTo>
-                  <a:lnTo>
-                    <a:pt x="1074337" y="592265"/>
-                  </a:lnTo>
-                  <a:lnTo>
-                    <a:pt x="1145960" y="703467"/>
-                  </a:lnTo>
-                  <a:lnTo>
-                    <a:pt x="1217582" y="810392"/>
-                  </a:lnTo>
-                  <a:lnTo>
-                    <a:pt x="1289205" y="913205"/>
-                  </a:lnTo>
-                  <a:lnTo>
-                    <a:pt x="1360827" y="1012065"/>
-                  </a:lnTo>
-                  <a:lnTo>
-                    <a:pt x="1432450" y="1107122"/>
-                  </a:lnTo>
-                  <a:lnTo>
-                    <a:pt x="1504073" y="1198523"/>
-                  </a:lnTo>
-                  <a:lnTo>
-                    <a:pt x="1575695" y="1286409"/>
-                  </a:lnTo>
-                  <a:lnTo>
-                    <a:pt x="1647318" y="1370916"/>
-                  </a:lnTo>
-                  <a:lnTo>
-                    <a:pt x="1718940" y="1452172"/>
-                  </a:lnTo>
-                  <a:lnTo>
-                    <a:pt x="1790563" y="1530303"/>
-                  </a:lnTo>
-                  <a:lnTo>
-                    <a:pt x="1862185" y="1605430"/>
-                  </a:lnTo>
-                  <a:lnTo>
-                    <a:pt x="1933808" y="1677667"/>
-                  </a:lnTo>
-                  <a:lnTo>
-                    <a:pt x="2005430" y="1747126"/>
-                  </a:lnTo>
-                  <a:lnTo>
-                    <a:pt x="2077053" y="1813914"/>
-                  </a:lnTo>
-                  <a:lnTo>
-                    <a:pt x="2148675" y="1878133"/>
-                  </a:lnTo>
-                  <a:lnTo>
-                    <a:pt x="2220298" y="1939882"/>
-                  </a:lnTo>
-                  <a:lnTo>
-                    <a:pt x="2291920" y="1999257"/>
-                  </a:lnTo>
-                  <a:lnTo>
-                    <a:pt x="2363543" y="2056348"/>
-                  </a:lnTo>
-                  <a:lnTo>
-                    <a:pt x="2435165" y="2111244"/>
-                  </a:lnTo>
-                  <a:lnTo>
-                    <a:pt x="2506788" y="2164028"/>
-                  </a:lnTo>
-                  <a:lnTo>
-                    <a:pt x="2578410" y="2214783"/>
-                  </a:lnTo>
-                  <a:lnTo>
-                    <a:pt x="2650033" y="2263585"/>
-                  </a:lnTo>
-                  <a:lnTo>
-                    <a:pt x="2721655" y="2310511"/>
-                  </a:lnTo>
-                  <a:lnTo>
-                    <a:pt x="2793278" y="2355632"/>
-                  </a:lnTo>
-                  <a:lnTo>
-                    <a:pt x="2864901" y="2399017"/>
-                  </a:lnTo>
-                  <a:lnTo>
-                    <a:pt x="2936523" y="2440734"/>
-                  </a:lnTo>
-                  <a:lnTo>
-                    <a:pt x="3008146" y="2480847"/>
-                  </a:lnTo>
-                  <a:lnTo>
-                    <a:pt x="3079768" y="2519417"/>
-                  </a:lnTo>
-                  <a:lnTo>
-                    <a:pt x="3151391" y="2556503"/>
-                  </a:lnTo>
-                  <a:lnTo>
-                    <a:pt x="3223013" y="2592164"/>
-                  </a:lnTo>
-                  <a:lnTo>
-                    <a:pt x="3294636" y="2626453"/>
-                  </a:lnTo>
-                  <a:lnTo>
-                    <a:pt x="3366258" y="2654952"/>
-                  </a:lnTo>
-                  <a:lnTo>
-                    <a:pt x="3437881" y="2659162"/>
-                  </a:lnTo>
-                  <a:lnTo>
-                    <a:pt x="3509503" y="2663351"/>
-                  </a:lnTo>
-                  <a:lnTo>
-                    <a:pt x="3581126" y="2667518"/>
-                  </a:lnTo>
-                  <a:lnTo>
-                    <a:pt x="3652748" y="2671664"/>
-                  </a:lnTo>
-                  <a:lnTo>
-                    <a:pt x="3724371" y="2675789"/>
-                  </a:lnTo>
-                  <a:lnTo>
-                    <a:pt x="3795993" y="2679894"/>
-                  </a:lnTo>
-                  <a:lnTo>
-                    <a:pt x="3867616" y="2683977"/>
-                  </a:lnTo>
-                  <a:lnTo>
-                    <a:pt x="3939238" y="2688039"/>
-                  </a:lnTo>
-                  <a:lnTo>
-                    <a:pt x="4010861" y="2692081"/>
-                  </a:lnTo>
-                  <a:lnTo>
-                    <a:pt x="4082483" y="2696103"/>
-                  </a:lnTo>
-                  <a:lnTo>
-                    <a:pt x="4154106" y="2700104"/>
-                  </a:lnTo>
-                  <a:lnTo>
-                    <a:pt x="4225729" y="2704084"/>
-                  </a:lnTo>
-                  <a:lnTo>
-                    <a:pt x="4297351" y="2708045"/>
-                  </a:lnTo>
-                  <a:lnTo>
-                    <a:pt x="4368974" y="2711985"/>
-                  </a:lnTo>
-                  <a:lnTo>
-                    <a:pt x="4440596" y="2715905"/>
-                  </a:lnTo>
-                  <a:lnTo>
-                    <a:pt x="4512219" y="2719806"/>
-                  </a:lnTo>
-                  <a:lnTo>
-                    <a:pt x="4583841" y="2723686"/>
-                  </a:lnTo>
-                  <a:lnTo>
-                    <a:pt x="4655464" y="2727547"/>
-                  </a:lnTo>
-                  <a:lnTo>
-                    <a:pt x="4727086" y="2731388"/>
-                  </a:lnTo>
-                  <a:lnTo>
-                    <a:pt x="4798709" y="2735210"/>
-                  </a:lnTo>
-                  <a:lnTo>
-                    <a:pt x="4870331" y="2739012"/>
-                  </a:lnTo>
-                  <a:lnTo>
-                    <a:pt x="4941954" y="2742795"/>
-                  </a:lnTo>
-                  <a:lnTo>
-                    <a:pt x="5013576" y="2746559"/>
-                  </a:lnTo>
-                  <a:lnTo>
-                    <a:pt x="5085199" y="2750304"/>
-                  </a:lnTo>
-                  <a:lnTo>
-                    <a:pt x="5156821" y="2754030"/>
-                  </a:lnTo>
-                  <a:lnTo>
-                    <a:pt x="5228444" y="2757736"/>
-                  </a:lnTo>
-                  <a:lnTo>
-                    <a:pt x="5300066" y="2761424"/>
-                  </a:lnTo>
-                  <a:lnTo>
-                    <a:pt x="5371689" y="2765093"/>
-                  </a:lnTo>
-                  <a:lnTo>
-                    <a:pt x="5443311" y="2768744"/>
-                  </a:lnTo>
-                  <a:lnTo>
-                    <a:pt x="5514934" y="2772376"/>
-                  </a:lnTo>
-                  <a:lnTo>
-                    <a:pt x="5586557" y="2775989"/>
-                  </a:lnTo>
-                  <a:lnTo>
-                    <a:pt x="5658179" y="2779584"/>
-                  </a:lnTo>
-                  <a:lnTo>
-                    <a:pt x="5729802" y="2783161"/>
-                  </a:lnTo>
-                  <a:lnTo>
-                    <a:pt x="5801424" y="2786720"/>
-                  </a:lnTo>
-                  <a:lnTo>
-                    <a:pt x="5873047" y="2790261"/>
-                  </a:lnTo>
-                  <a:lnTo>
-                    <a:pt x="5944669" y="2793783"/>
-                  </a:lnTo>
-                  <a:lnTo>
-                    <a:pt x="6016292" y="2797288"/>
-                  </a:lnTo>
-                  <a:lnTo>
-                    <a:pt x="6087914" y="2800775"/>
-                  </a:lnTo>
-                  <a:lnTo>
-                    <a:pt x="6159537" y="2804245"/>
-                  </a:lnTo>
-                  <a:lnTo>
-                    <a:pt x="6231159" y="2807696"/>
-                  </a:lnTo>
-                  <a:lnTo>
-                    <a:pt x="6302782" y="2811130"/>
-                  </a:lnTo>
-                  <a:lnTo>
-                    <a:pt x="6374404" y="2814547"/>
-                  </a:lnTo>
-                  <a:lnTo>
-                    <a:pt x="6446027" y="2817946"/>
-                  </a:lnTo>
-                  <a:lnTo>
-                    <a:pt x="6517649" y="2821328"/>
-                  </a:lnTo>
-                  <a:lnTo>
-                    <a:pt x="6589272" y="2824693"/>
-                  </a:lnTo>
-                  <a:lnTo>
-                    <a:pt x="6660894" y="2828041"/>
-                  </a:lnTo>
-                  <a:lnTo>
-                    <a:pt x="6732517" y="2831372"/>
-                  </a:lnTo>
-                  <a:lnTo>
-                    <a:pt x="6804139" y="2834686"/>
-                  </a:lnTo>
-                  <a:lnTo>
-                    <a:pt x="6875762" y="2837983"/>
-                  </a:lnTo>
-                  <a:lnTo>
-                    <a:pt x="6947385" y="2841263"/>
-                  </a:lnTo>
-                  <a:lnTo>
-                    <a:pt x="7019007" y="2844526"/>
-                  </a:lnTo>
-                  <a:lnTo>
-                    <a:pt x="7090630" y="2847773"/>
-                  </a:lnTo>
-                  <a:lnTo>
-                    <a:pt x="7090630" y="3376487"/>
-                  </a:lnTo>
-                  <a:lnTo>
-                    <a:pt x="7019007" y="3372197"/>
-                  </a:lnTo>
-                  <a:lnTo>
-                    <a:pt x="6947385" y="3367735"/>
-                  </a:lnTo>
-                  <a:lnTo>
-                    <a:pt x="6875762" y="3363095"/>
-                  </a:lnTo>
-                  <a:lnTo>
-                    <a:pt x="6804139" y="3358270"/>
-                  </a:lnTo>
-                  <a:lnTo>
-                    <a:pt x="6732517" y="3353251"/>
-                  </a:lnTo>
-                  <a:lnTo>
-                    <a:pt x="6660894" y="3348032"/>
-                  </a:lnTo>
-                  <a:lnTo>
-                    <a:pt x="6589272" y="3342603"/>
-                  </a:lnTo>
-                  <a:lnTo>
-                    <a:pt x="6517649" y="3336958"/>
-                  </a:lnTo>
-                  <a:lnTo>
-                    <a:pt x="6446027" y="3331087"/>
-                  </a:lnTo>
-                  <a:lnTo>
-                    <a:pt x="6374404" y="3324981"/>
-                  </a:lnTo>
-                  <a:lnTo>
-                    <a:pt x="6302782" y="3318631"/>
-                  </a:lnTo>
-                  <a:lnTo>
-                    <a:pt x="6231159" y="3312027"/>
-                  </a:lnTo>
-                  <a:lnTo>
-                    <a:pt x="6159537" y="3305159"/>
-                  </a:lnTo>
-                  <a:lnTo>
-                    <a:pt x="6087914" y="3298016"/>
-                  </a:lnTo>
-                  <a:lnTo>
-                    <a:pt x="6016292" y="3290587"/>
-                  </a:lnTo>
-                  <a:lnTo>
-                    <a:pt x="5944669" y="3282862"/>
-                  </a:lnTo>
-                  <a:lnTo>
-                    <a:pt x="5873047" y="3274827"/>
-                  </a:lnTo>
-                  <a:lnTo>
-                    <a:pt x="5801424" y="3266471"/>
-                  </a:lnTo>
-                  <a:lnTo>
-                    <a:pt x="5729802" y="3257781"/>
-                  </a:lnTo>
-                  <a:lnTo>
-                    <a:pt x="5658179" y="3248743"/>
-                  </a:lnTo>
-                  <a:lnTo>
-                    <a:pt x="5586557" y="3239343"/>
-                  </a:lnTo>
-                  <a:lnTo>
-                    <a:pt x="5514934" y="3229568"/>
-                  </a:lnTo>
-                  <a:lnTo>
-                    <a:pt x="5443311" y="3219402"/>
-                  </a:lnTo>
-                  <a:lnTo>
-                    <a:pt x="5371689" y="3208829"/>
-                  </a:lnTo>
-                  <a:lnTo>
-                    <a:pt x="5300066" y="3197833"/>
-                  </a:lnTo>
-                  <a:lnTo>
-                    <a:pt x="5228444" y="3186397"/>
-                  </a:lnTo>
-                  <a:lnTo>
-                    <a:pt x="5156821" y="3174504"/>
-                  </a:lnTo>
-                  <a:lnTo>
-                    <a:pt x="5085199" y="3162136"/>
-                  </a:lnTo>
-                  <a:lnTo>
-                    <a:pt x="5013576" y="3149272"/>
-                  </a:lnTo>
-                  <a:lnTo>
-                    <a:pt x="4941954" y="3135894"/>
-                  </a:lnTo>
-                  <a:lnTo>
-                    <a:pt x="4870331" y="3121981"/>
-                  </a:lnTo>
-                  <a:lnTo>
-                    <a:pt x="4798709" y="3107512"/>
-                  </a:lnTo>
-                  <a:lnTo>
-                    <a:pt x="4727086" y="3092464"/>
-                  </a:lnTo>
-                  <a:lnTo>
-                    <a:pt x="4655464" y="3076814"/>
-                  </a:lnTo>
-                  <a:lnTo>
-                    <a:pt x="4583841" y="3060538"/>
-                  </a:lnTo>
-                  <a:lnTo>
-                    <a:pt x="4512219" y="3043611"/>
-                  </a:lnTo>
-                  <a:lnTo>
-                    <a:pt x="4440596" y="3026007"/>
-                  </a:lnTo>
-                  <a:lnTo>
-                    <a:pt x="4368974" y="3007699"/>
-                  </a:lnTo>
-                  <a:lnTo>
-                    <a:pt x="4297351" y="2988659"/>
-                  </a:lnTo>
-                  <a:lnTo>
-                    <a:pt x="4225729" y="2968857"/>
-                  </a:lnTo>
-                  <a:lnTo>
-                    <a:pt x="4154106" y="2948263"/>
-                  </a:lnTo>
-                  <a:lnTo>
-                    <a:pt x="4082483" y="2926845"/>
-                  </a:lnTo>
-                  <a:lnTo>
-                    <a:pt x="4010861" y="2904571"/>
-                  </a:lnTo>
-                  <a:lnTo>
-                    <a:pt x="3939238" y="2881406"/>
-                  </a:lnTo>
-                  <a:lnTo>
-                    <a:pt x="3867616" y="2857314"/>
-                  </a:lnTo>
-                  <a:lnTo>
-                    <a:pt x="3795993" y="2832259"/>
-                  </a:lnTo>
-                  <a:lnTo>
-                    <a:pt x="3724371" y="2806202"/>
-                  </a:lnTo>
-                  <a:lnTo>
-                    <a:pt x="3652748" y="2779102"/>
-                  </a:lnTo>
-                  <a:lnTo>
-                    <a:pt x="3581126" y="2750919"/>
-                  </a:lnTo>
-                  <a:lnTo>
-                    <a:pt x="3509503" y="2721608"/>
-                  </a:lnTo>
-                  <a:lnTo>
-                    <a:pt x="3437881" y="2691125"/>
-                  </a:lnTo>
-                  <a:lnTo>
-                    <a:pt x="3366258" y="2659423"/>
-                  </a:lnTo>
-                  <a:lnTo>
-                    <a:pt x="3294636" y="2650721"/>
-                  </a:lnTo>
-                  <a:lnTo>
-                    <a:pt x="3223013" y="2646468"/>
-                  </a:lnTo>
-                  <a:lnTo>
-                    <a:pt x="3151391" y="2642193"/>
-                  </a:lnTo>
-                  <a:lnTo>
-                    <a:pt x="3079768" y="2637896"/>
-                  </a:lnTo>
-                  <a:lnTo>
-                    <a:pt x="3008146" y="2633578"/>
-                  </a:lnTo>
-                  <a:lnTo>
-                    <a:pt x="2936523" y="2629237"/>
-                  </a:lnTo>
-                  <a:lnTo>
-                    <a:pt x="2864901" y="2624874"/>
-                  </a:lnTo>
-                  <a:lnTo>
-                    <a:pt x="2793278" y="2620489"/>
-                  </a:lnTo>
-                  <a:lnTo>
-                    <a:pt x="2721655" y="2616082"/>
-                  </a:lnTo>
-                  <a:lnTo>
-                    <a:pt x="2650033" y="2611652"/>
-                  </a:lnTo>
-                  <a:lnTo>
-                    <a:pt x="2578410" y="2607199"/>
-                  </a:lnTo>
-                  <a:lnTo>
-                    <a:pt x="2506788" y="2602724"/>
-                  </a:lnTo>
-                  <a:lnTo>
-                    <a:pt x="2435165" y="2598226"/>
-                  </a:lnTo>
-                  <a:lnTo>
-                    <a:pt x="2363543" y="2593705"/>
-                  </a:lnTo>
-                  <a:lnTo>
-                    <a:pt x="2291920" y="2589160"/>
-                  </a:lnTo>
-                  <a:lnTo>
-                    <a:pt x="2220298" y="2584593"/>
-                  </a:lnTo>
-                  <a:lnTo>
-                    <a:pt x="2148675" y="2580002"/>
-                  </a:lnTo>
-                  <a:lnTo>
-                    <a:pt x="2077053" y="2575388"/>
-                  </a:lnTo>
-                  <a:lnTo>
-                    <a:pt x="2005430" y="2570750"/>
-                  </a:lnTo>
-                  <a:lnTo>
-                    <a:pt x="1933808" y="2566089"/>
-                  </a:lnTo>
-                  <a:lnTo>
-                    <a:pt x="1862185" y="2561404"/>
-                  </a:lnTo>
-                  <a:lnTo>
-                    <a:pt x="1790563" y="2556695"/>
-                  </a:lnTo>
-                  <a:lnTo>
-                    <a:pt x="1718940" y="2551961"/>
-                  </a:lnTo>
-                  <a:lnTo>
-                    <a:pt x="1647318" y="2547204"/>
-                  </a:lnTo>
-                  <a:lnTo>
-                    <a:pt x="1575695" y="2542422"/>
-                  </a:lnTo>
-                  <a:lnTo>
-                    <a:pt x="1504073" y="2537616"/>
-                  </a:lnTo>
-                  <a:lnTo>
-                    <a:pt x="1432450" y="2532786"/>
-                  </a:lnTo>
-                  <a:lnTo>
-                    <a:pt x="1360827" y="2527931"/>
-                  </a:lnTo>
-                  <a:lnTo>
-                    <a:pt x="1289205" y="2523051"/>
-                  </a:lnTo>
-                  <a:lnTo>
-                    <a:pt x="1217582" y="2518146"/>
-                  </a:lnTo>
-                  <a:lnTo>
-                    <a:pt x="1145960" y="2513216"/>
-                  </a:lnTo>
-                  <a:lnTo>
-                    <a:pt x="1074337" y="2508261"/>
-                  </a:lnTo>
-                  <a:lnTo>
-                    <a:pt x="1002715" y="2503280"/>
-                  </a:lnTo>
-                  <a:lnTo>
-                    <a:pt x="931092" y="2498274"/>
-                  </a:lnTo>
-                  <a:lnTo>
-                    <a:pt x="859470" y="2493243"/>
-                  </a:lnTo>
-                  <a:lnTo>
-                    <a:pt x="787847" y="2488186"/>
-                  </a:lnTo>
-                  <a:lnTo>
-                    <a:pt x="716225" y="2483103"/>
-                  </a:lnTo>
-                  <a:lnTo>
-                    <a:pt x="644602" y="2477994"/>
-                  </a:lnTo>
-                  <a:lnTo>
-                    <a:pt x="572980" y="2472859"/>
-                  </a:lnTo>
-                  <a:lnTo>
-                    <a:pt x="501357" y="2467698"/>
-                  </a:lnTo>
-                  <a:lnTo>
-                    <a:pt x="429735" y="2462510"/>
-                  </a:lnTo>
-                  <a:lnTo>
-                    <a:pt x="358112" y="2457296"/>
-                  </a:lnTo>
-                  <a:lnTo>
-                    <a:pt x="286490" y="2452056"/>
-                  </a:lnTo>
-                  <a:lnTo>
-                    <a:pt x="214867" y="2446788"/>
-                  </a:lnTo>
-                  <a:lnTo>
-                    <a:pt x="143245" y="2441494"/>
-                  </a:lnTo>
-                  <a:lnTo>
-                    <a:pt x="71622" y="2436173"/>
-                  </a:lnTo>
-                  <a:lnTo>
-                    <a:pt x="0" y="2430824"/>
+                    <a:pt x="0" y="0"/>
+                  </a:lnTo>
+                  <a:lnTo>
+                    <a:pt x="0" y="0"/>
+                  </a:lnTo>
+                </a:path>
+              </a:pathLst>
+            </a:custGeom>
+            <a:ln w="13550" cap="flat">
+              <a:solidFill>
+                <a:srgbClr val="EBEBEB">
+                  <a:alpha val="100000"/>
+                </a:srgbClr>
+              </a:solidFill>
+              <a:prstDash val="solid"/>
+              <a:round/>
+            </a:ln>
+          </p:spPr>
+          <p:txBody>
+            <a:bodyPr/>
+            <a:lstStyle/>
+            <a:p/>
+          </p:txBody>
+        </p:sp>
+        <p:sp>
+          <p:nvSpPr>
+            <p:cNvPr id="21" name="pg21"/>
+            <p:cNvSpPr/>
+            <p:nvPr/>
+          </p:nvSpPr>
+          <p:spPr>
+            <a:xfrm>
+              <a:off x="1235312" y="2143092"/>
+              <a:ext cx="6964104" cy="1218494"/>
+            </a:xfrm>
+            <a:custGeom>
+              <a:avLst/>
+              <a:pathLst>
+                <a:path w="6964104" h="1218494">
+                  <a:moveTo>
+                    <a:pt x="721188" y="0"/>
+                  </a:moveTo>
+                  <a:lnTo>
+                    <a:pt x="773789" y="36508"/>
+                  </a:lnTo>
+                  <a:lnTo>
+                    <a:pt x="844133" y="83454"/>
+                  </a:lnTo>
+                  <a:lnTo>
+                    <a:pt x="914478" y="128594"/>
+                  </a:lnTo>
+                  <a:lnTo>
+                    <a:pt x="984822" y="171999"/>
+                  </a:lnTo>
+                  <a:lnTo>
+                    <a:pt x="1055167" y="213734"/>
+                  </a:lnTo>
+                  <a:lnTo>
+                    <a:pt x="1125511" y="253864"/>
+                  </a:lnTo>
+                  <a:lnTo>
+                    <a:pt x="1195856" y="292451"/>
+                  </a:lnTo>
+                  <a:lnTo>
+                    <a:pt x="1266200" y="329554"/>
+                  </a:lnTo>
+                  <a:lnTo>
+                    <a:pt x="1336545" y="365230"/>
+                  </a:lnTo>
+                  <a:lnTo>
+                    <a:pt x="1406889" y="399534"/>
+                  </a:lnTo>
+                  <a:lnTo>
+                    <a:pt x="1477234" y="432518"/>
+                  </a:lnTo>
+                  <a:lnTo>
+                    <a:pt x="1547578" y="464235"/>
+                  </a:lnTo>
+                  <a:lnTo>
+                    <a:pt x="1617923" y="494731"/>
+                  </a:lnTo>
+                  <a:lnTo>
+                    <a:pt x="1688267" y="524054"/>
+                  </a:lnTo>
+                  <a:lnTo>
+                    <a:pt x="1758612" y="552250"/>
+                  </a:lnTo>
+                  <a:lnTo>
+                    <a:pt x="1828956" y="579361"/>
+                  </a:lnTo>
+                  <a:lnTo>
+                    <a:pt x="1899301" y="605430"/>
+                  </a:lnTo>
+                  <a:lnTo>
+                    <a:pt x="1969645" y="630496"/>
+                  </a:lnTo>
+                  <a:lnTo>
+                    <a:pt x="2039990" y="654598"/>
+                  </a:lnTo>
+                  <a:lnTo>
+                    <a:pt x="2110334" y="677774"/>
+                  </a:lnTo>
+                  <a:lnTo>
+                    <a:pt x="2180679" y="700058"/>
+                  </a:lnTo>
+                  <a:lnTo>
+                    <a:pt x="2251023" y="721485"/>
+                  </a:lnTo>
+                  <a:lnTo>
+                    <a:pt x="2321368" y="742087"/>
+                  </a:lnTo>
+                  <a:lnTo>
+                    <a:pt x="2391712" y="761898"/>
+                  </a:lnTo>
+                  <a:lnTo>
+                    <a:pt x="2462057" y="780947"/>
+                  </a:lnTo>
+                  <a:lnTo>
+                    <a:pt x="2532401" y="799263"/>
+                  </a:lnTo>
+                  <a:lnTo>
+                    <a:pt x="2602746" y="816874"/>
+                  </a:lnTo>
+                  <a:lnTo>
+                    <a:pt x="2673090" y="833809"/>
+                  </a:lnTo>
+                  <a:lnTo>
+                    <a:pt x="2743435" y="850092"/>
+                  </a:lnTo>
+                  <a:lnTo>
+                    <a:pt x="2813779" y="865749"/>
+                  </a:lnTo>
+                  <a:lnTo>
+                    <a:pt x="2884124" y="880803"/>
+                  </a:lnTo>
+                  <a:lnTo>
+                    <a:pt x="2954468" y="895279"/>
+                  </a:lnTo>
+                  <a:lnTo>
+                    <a:pt x="3024813" y="909198"/>
+                  </a:lnTo>
+                  <a:lnTo>
+                    <a:pt x="3095157" y="922582"/>
+                  </a:lnTo>
+                  <a:lnTo>
+                    <a:pt x="3165502" y="935451"/>
+                  </a:lnTo>
+                  <a:lnTo>
+                    <a:pt x="3235846" y="947825"/>
+                  </a:lnTo>
+                  <a:lnTo>
+                    <a:pt x="3306191" y="958109"/>
+                  </a:lnTo>
+                  <a:lnTo>
+                    <a:pt x="3376535" y="959629"/>
+                  </a:lnTo>
+                  <a:lnTo>
+                    <a:pt x="3446880" y="961140"/>
+                  </a:lnTo>
+                  <a:lnTo>
+                    <a:pt x="3517224" y="962644"/>
+                  </a:lnTo>
+                  <a:lnTo>
+                    <a:pt x="3587569" y="964140"/>
+                  </a:lnTo>
+                  <a:lnTo>
+                    <a:pt x="3657913" y="965629"/>
+                  </a:lnTo>
+                  <a:lnTo>
+                    <a:pt x="3728257" y="967110"/>
+                  </a:lnTo>
+                  <a:lnTo>
+                    <a:pt x="3798602" y="968584"/>
+                  </a:lnTo>
+                  <a:lnTo>
+                    <a:pt x="3868946" y="970050"/>
+                  </a:lnTo>
+                  <a:lnTo>
+                    <a:pt x="3939291" y="971508"/>
+                  </a:lnTo>
+                  <a:lnTo>
+                    <a:pt x="4009635" y="972960"/>
+                  </a:lnTo>
+                  <a:lnTo>
+                    <a:pt x="4079980" y="974404"/>
+                  </a:lnTo>
+                  <a:lnTo>
+                    <a:pt x="4150324" y="975840"/>
+                  </a:lnTo>
+                  <a:lnTo>
+                    <a:pt x="4220669" y="977269"/>
+                  </a:lnTo>
+                  <a:lnTo>
+                    <a:pt x="4291013" y="978691"/>
+                  </a:lnTo>
+                  <a:lnTo>
+                    <a:pt x="4361358" y="980106"/>
+                  </a:lnTo>
+                  <a:lnTo>
+                    <a:pt x="4431702" y="981514"/>
+                  </a:lnTo>
+                  <a:lnTo>
+                    <a:pt x="4502047" y="982914"/>
+                  </a:lnTo>
+                  <a:lnTo>
+                    <a:pt x="4572391" y="984307"/>
+                  </a:lnTo>
+                  <a:lnTo>
+                    <a:pt x="4642736" y="985693"/>
+                  </a:lnTo>
+                  <a:lnTo>
+                    <a:pt x="4713080" y="987073"/>
+                  </a:lnTo>
+                  <a:lnTo>
+                    <a:pt x="4783425" y="988445"/>
+                  </a:lnTo>
+                  <a:lnTo>
+                    <a:pt x="4853769" y="989810"/>
+                  </a:lnTo>
+                  <a:lnTo>
+                    <a:pt x="4924114" y="991168"/>
+                  </a:lnTo>
+                  <a:lnTo>
+                    <a:pt x="4994458" y="992520"/>
+                  </a:lnTo>
+                  <a:lnTo>
+                    <a:pt x="5064803" y="993864"/>
+                  </a:lnTo>
+                  <a:lnTo>
+                    <a:pt x="5135147" y="995202"/>
+                  </a:lnTo>
+                  <a:lnTo>
+                    <a:pt x="5205492" y="996533"/>
+                  </a:lnTo>
+                  <a:lnTo>
+                    <a:pt x="5275836" y="997857"/>
+                  </a:lnTo>
+                  <a:lnTo>
+                    <a:pt x="5346181" y="999174"/>
+                  </a:lnTo>
+                  <a:lnTo>
+                    <a:pt x="5416525" y="1000485"/>
+                  </a:lnTo>
+                  <a:lnTo>
+                    <a:pt x="5486870" y="1001789"/>
+                  </a:lnTo>
+                  <a:lnTo>
+                    <a:pt x="5557214" y="1003086"/>
+                  </a:lnTo>
+                  <a:lnTo>
+                    <a:pt x="5627559" y="1004377"/>
+                  </a:lnTo>
+                  <a:lnTo>
+                    <a:pt x="5697903" y="1005661"/>
+                  </a:lnTo>
+                  <a:lnTo>
+                    <a:pt x="5768248" y="1006939"/>
+                  </a:lnTo>
+                  <a:lnTo>
+                    <a:pt x="5838592" y="1008210"/>
+                  </a:lnTo>
+                  <a:lnTo>
+                    <a:pt x="5908937" y="1009475"/>
+                  </a:lnTo>
+                  <a:lnTo>
+                    <a:pt x="5979281" y="1010734"/>
+                  </a:lnTo>
+                  <a:lnTo>
+                    <a:pt x="6049626" y="1011986"/>
+                  </a:lnTo>
+                  <a:lnTo>
+                    <a:pt x="6119970" y="1013231"/>
+                  </a:lnTo>
+                  <a:lnTo>
+                    <a:pt x="6190315" y="1014470"/>
+                  </a:lnTo>
+                  <a:lnTo>
+                    <a:pt x="6260659" y="1015703"/>
+                  </a:lnTo>
+                  <a:lnTo>
+                    <a:pt x="6331004" y="1016930"/>
+                  </a:lnTo>
+                  <a:lnTo>
+                    <a:pt x="6401348" y="1018151"/>
+                  </a:lnTo>
+                  <a:lnTo>
+                    <a:pt x="6471693" y="1019365"/>
+                  </a:lnTo>
+                  <a:lnTo>
+                    <a:pt x="6542037" y="1020573"/>
+                  </a:lnTo>
+                  <a:lnTo>
+                    <a:pt x="6612382" y="1021775"/>
+                  </a:lnTo>
+                  <a:lnTo>
+                    <a:pt x="6682726" y="1022971"/>
+                  </a:lnTo>
+                  <a:lnTo>
+                    <a:pt x="6753071" y="1024161"/>
+                  </a:lnTo>
+                  <a:lnTo>
+                    <a:pt x="6823415" y="1025345"/>
+                  </a:lnTo>
+                  <a:lnTo>
+                    <a:pt x="6893760" y="1026522"/>
+                  </a:lnTo>
+                  <a:lnTo>
+                    <a:pt x="6964104" y="1027694"/>
+                  </a:lnTo>
+                  <a:lnTo>
+                    <a:pt x="6964104" y="1218494"/>
+                  </a:lnTo>
+                  <a:lnTo>
+                    <a:pt x="6893760" y="1216946"/>
+                  </a:lnTo>
+                  <a:lnTo>
+                    <a:pt x="6823415" y="1215336"/>
+                  </a:lnTo>
+                  <a:lnTo>
+                    <a:pt x="6753071" y="1213662"/>
+                  </a:lnTo>
+                  <a:lnTo>
+                    <a:pt x="6682726" y="1211920"/>
+                  </a:lnTo>
+                  <a:lnTo>
+                    <a:pt x="6612382" y="1210109"/>
+                  </a:lnTo>
+                  <a:lnTo>
+                    <a:pt x="6542037" y="1208226"/>
+                  </a:lnTo>
+                  <a:lnTo>
+                    <a:pt x="6471693" y="1206267"/>
+                  </a:lnTo>
+                  <a:lnTo>
+                    <a:pt x="6401348" y="1204229"/>
+                  </a:lnTo>
+                  <a:lnTo>
+                    <a:pt x="6331004" y="1202111"/>
+                  </a:lnTo>
+                  <a:lnTo>
+                    <a:pt x="6260659" y="1199907"/>
+                  </a:lnTo>
+                  <a:lnTo>
+                    <a:pt x="6190315" y="1197616"/>
+                  </a:lnTo>
+                  <a:lnTo>
+                    <a:pt x="6119970" y="1195232"/>
+                  </a:lnTo>
+                  <a:lnTo>
+                    <a:pt x="6049626" y="1192754"/>
+                  </a:lnTo>
+                  <a:lnTo>
+                    <a:pt x="5979281" y="1190176"/>
+                  </a:lnTo>
+                  <a:lnTo>
+                    <a:pt x="5908937" y="1187495"/>
+                  </a:lnTo>
+                  <a:lnTo>
+                    <a:pt x="5838592" y="1184707"/>
+                  </a:lnTo>
+                  <a:lnTo>
+                    <a:pt x="5768248" y="1181808"/>
+                  </a:lnTo>
+                  <a:lnTo>
+                    <a:pt x="5697903" y="1178792"/>
+                  </a:lnTo>
+                  <a:lnTo>
+                    <a:pt x="5627559" y="1175656"/>
+                  </a:lnTo>
+                  <a:lnTo>
+                    <a:pt x="5557214" y="1172394"/>
+                  </a:lnTo>
+                  <a:lnTo>
+                    <a:pt x="5486870" y="1169002"/>
+                  </a:lnTo>
+                  <a:lnTo>
+                    <a:pt x="5416525" y="1165475"/>
+                  </a:lnTo>
+                  <a:lnTo>
+                    <a:pt x="5346181" y="1161806"/>
+                  </a:lnTo>
+                  <a:lnTo>
+                    <a:pt x="5275836" y="1157990"/>
+                  </a:lnTo>
+                  <a:lnTo>
+                    <a:pt x="5205492" y="1154022"/>
+                  </a:lnTo>
+                  <a:lnTo>
+                    <a:pt x="5135147" y="1149896"/>
+                  </a:lnTo>
+                  <a:lnTo>
+                    <a:pt x="5064803" y="1145604"/>
+                  </a:lnTo>
+                  <a:lnTo>
+                    <a:pt x="4994458" y="1141140"/>
+                  </a:lnTo>
+                  <a:lnTo>
+                    <a:pt x="4924114" y="1136498"/>
+                  </a:lnTo>
+                  <a:lnTo>
+                    <a:pt x="4853769" y="1131670"/>
+                  </a:lnTo>
+                  <a:lnTo>
+                    <a:pt x="4783425" y="1126649"/>
+                  </a:lnTo>
+                  <a:lnTo>
+                    <a:pt x="4713080" y="1121428"/>
+                  </a:lnTo>
+                  <a:lnTo>
+                    <a:pt x="4642736" y="1115997"/>
+                  </a:lnTo>
+                  <a:lnTo>
+                    <a:pt x="4572391" y="1110349"/>
+                  </a:lnTo>
+                  <a:lnTo>
+                    <a:pt x="4502047" y="1104476"/>
+                  </a:lnTo>
+                  <a:lnTo>
+                    <a:pt x="4431702" y="1098367"/>
+                  </a:lnTo>
+                  <a:lnTo>
+                    <a:pt x="4361358" y="1092014"/>
+                  </a:lnTo>
+                  <a:lnTo>
+                    <a:pt x="4291013" y="1085408"/>
+                  </a:lnTo>
+                  <a:lnTo>
+                    <a:pt x="4220669" y="1078536"/>
+                  </a:lnTo>
+                  <a:lnTo>
+                    <a:pt x="4150324" y="1071390"/>
+                  </a:lnTo>
+                  <a:lnTo>
+                    <a:pt x="4079980" y="1063958"/>
+                  </a:lnTo>
+                  <a:lnTo>
+                    <a:pt x="4009635" y="1056229"/>
+                  </a:lnTo>
+                  <a:lnTo>
+                    <a:pt x="3939291" y="1048191"/>
+                  </a:lnTo>
+                  <a:lnTo>
+                    <a:pt x="3868946" y="1039831"/>
+                  </a:lnTo>
+                  <a:lnTo>
+                    <a:pt x="3798602" y="1031137"/>
+                  </a:lnTo>
+                  <a:lnTo>
+                    <a:pt x="3728257" y="1022095"/>
+                  </a:lnTo>
+                  <a:lnTo>
+                    <a:pt x="3657913" y="1012692"/>
+                  </a:lnTo>
+                  <a:lnTo>
+                    <a:pt x="3587569" y="1002912"/>
+                  </a:lnTo>
+                  <a:lnTo>
+                    <a:pt x="3517224" y="992742"/>
+                  </a:lnTo>
+                  <a:lnTo>
+                    <a:pt x="3446880" y="982164"/>
+                  </a:lnTo>
+                  <a:lnTo>
+                    <a:pt x="3376535" y="971163"/>
+                  </a:lnTo>
+                  <a:lnTo>
+                    <a:pt x="3306191" y="959723"/>
+                  </a:lnTo>
+                  <a:lnTo>
+                    <a:pt x="3235846" y="956582"/>
+                  </a:lnTo>
+                  <a:lnTo>
+                    <a:pt x="3165502" y="955048"/>
+                  </a:lnTo>
+                  <a:lnTo>
+                    <a:pt x="3095157" y="953505"/>
+                  </a:lnTo>
+                  <a:lnTo>
+                    <a:pt x="3024813" y="951954"/>
+                  </a:lnTo>
+                  <a:lnTo>
+                    <a:pt x="2954468" y="950396"/>
+                  </a:lnTo>
+                  <a:lnTo>
+                    <a:pt x="2884124" y="948829"/>
+                  </a:lnTo>
+                  <a:lnTo>
+                    <a:pt x="2813779" y="947255"/>
+                  </a:lnTo>
+                  <a:lnTo>
+                    <a:pt x="2743435" y="945673"/>
+                  </a:lnTo>
+                  <a:lnTo>
+                    <a:pt x="2673090" y="944082"/>
+                  </a:lnTo>
+                  <a:lnTo>
+                    <a:pt x="2602746" y="942483"/>
+                  </a:lnTo>
+                  <a:lnTo>
+                    <a:pt x="2532401" y="940876"/>
+                  </a:lnTo>
+                  <a:lnTo>
+                    <a:pt x="2462057" y="939261"/>
+                  </a:lnTo>
+                  <a:lnTo>
+                    <a:pt x="2391712" y="937638"/>
+                  </a:lnTo>
+                  <a:lnTo>
+                    <a:pt x="2321368" y="936007"/>
+                  </a:lnTo>
+                  <a:lnTo>
+                    <a:pt x="2251023" y="934367"/>
+                  </a:lnTo>
+                  <a:lnTo>
+                    <a:pt x="2180679" y="932718"/>
+                  </a:lnTo>
+                  <a:lnTo>
+                    <a:pt x="2110334" y="931062"/>
+                  </a:lnTo>
+                  <a:lnTo>
+                    <a:pt x="2039990" y="929397"/>
+                  </a:lnTo>
+                  <a:lnTo>
+                    <a:pt x="1969645" y="927723"/>
+                  </a:lnTo>
+                  <a:lnTo>
+                    <a:pt x="1899301" y="926041"/>
+                  </a:lnTo>
+                  <a:lnTo>
+                    <a:pt x="1828956" y="924350"/>
+                  </a:lnTo>
+                  <a:lnTo>
+                    <a:pt x="1758612" y="922651"/>
+                  </a:lnTo>
+                  <a:lnTo>
+                    <a:pt x="1688267" y="920943"/>
+                  </a:lnTo>
+                  <a:lnTo>
+                    <a:pt x="1617923" y="919226"/>
+                  </a:lnTo>
+                  <a:lnTo>
+                    <a:pt x="1547578" y="917500"/>
+                  </a:lnTo>
+                  <a:lnTo>
+                    <a:pt x="1477234" y="915766"/>
+                  </a:lnTo>
+                  <a:lnTo>
+                    <a:pt x="1406889" y="914023"/>
+                  </a:lnTo>
+                  <a:lnTo>
+                    <a:pt x="1336545" y="912270"/>
+                  </a:lnTo>
+                  <a:lnTo>
+                    <a:pt x="1266200" y="910509"/>
+                  </a:lnTo>
+                  <a:lnTo>
+                    <a:pt x="1195856" y="908739"/>
+                  </a:lnTo>
+                  <a:lnTo>
+                    <a:pt x="1125511" y="906960"/>
+                  </a:lnTo>
+                  <a:lnTo>
+                    <a:pt x="1055167" y="905172"/>
+                  </a:lnTo>
+                  <a:lnTo>
+                    <a:pt x="984822" y="903375"/>
+                  </a:lnTo>
+                  <a:lnTo>
+                    <a:pt x="914478" y="901568"/>
+                  </a:lnTo>
+                  <a:lnTo>
+                    <a:pt x="844133" y="899752"/>
+                  </a:lnTo>
+                  <a:lnTo>
+                    <a:pt x="773789" y="897927"/>
+                  </a:lnTo>
+                  <a:lnTo>
+                    <a:pt x="703444" y="896093"/>
+                  </a:lnTo>
+                  <a:lnTo>
+                    <a:pt x="633100" y="894249"/>
+                  </a:lnTo>
+                  <a:lnTo>
+                    <a:pt x="562755" y="892396"/>
+                  </a:lnTo>
+                  <a:lnTo>
+                    <a:pt x="492411" y="890534"/>
+                  </a:lnTo>
+                  <a:lnTo>
+                    <a:pt x="422066" y="888662"/>
+                  </a:lnTo>
+                  <a:lnTo>
+                    <a:pt x="351722" y="886780"/>
+                  </a:lnTo>
+                  <a:lnTo>
+                    <a:pt x="281377" y="884889"/>
+                  </a:lnTo>
+                  <a:lnTo>
+                    <a:pt x="211033" y="882988"/>
+                  </a:lnTo>
+                  <a:lnTo>
+                    <a:pt x="140688" y="881077"/>
+                  </a:lnTo>
+                  <a:lnTo>
+                    <a:pt x="70344" y="879157"/>
+                  </a:lnTo>
+                  <a:lnTo>
+                    <a:pt x="0" y="877227"/>
                   </a:lnTo>
                   <a:close/>
                 </a:path>
@@ -3554,613 +3589,288 @@
         </p:sp>
         <p:sp>
           <p:nvSpPr>
-            <p:cNvPr id="21" name="pl21"/>
-            <p:cNvSpPr/>
-            <p:nvPr/>
-          </p:nvSpPr>
-          <p:spPr>
-            <a:xfrm>
-              <a:off x="1906340" y="2073503"/>
-              <a:ext cx="6356338" cy="2847773"/>
-            </a:xfrm>
-            <a:custGeom>
-              <a:avLst/>
-              <a:pathLst>
-                <a:path w="6356338" h="2847773">
-                  <a:moveTo>
-                    <a:pt x="0" y="0"/>
-                  </a:moveTo>
-                  <a:lnTo>
-                    <a:pt x="53556" y="101165"/>
-                  </a:lnTo>
-                  <a:lnTo>
-                    <a:pt x="125178" y="231254"/>
-                  </a:lnTo>
-                  <a:lnTo>
-                    <a:pt x="196801" y="356340"/>
-                  </a:lnTo>
-                  <a:lnTo>
-                    <a:pt x="268423" y="476615"/>
-                  </a:lnTo>
-                  <a:lnTo>
-                    <a:pt x="340046" y="592265"/>
-                  </a:lnTo>
-                  <a:lnTo>
-                    <a:pt x="411668" y="703467"/>
-                  </a:lnTo>
-                  <a:lnTo>
-                    <a:pt x="483291" y="810392"/>
-                  </a:lnTo>
-                  <a:lnTo>
-                    <a:pt x="554913" y="913205"/>
-                  </a:lnTo>
-                  <a:lnTo>
-                    <a:pt x="626536" y="1012065"/>
-                  </a:lnTo>
-                  <a:lnTo>
-                    <a:pt x="698158" y="1107122"/>
-                  </a:lnTo>
-                  <a:lnTo>
-                    <a:pt x="769781" y="1198523"/>
-                  </a:lnTo>
-                  <a:lnTo>
-                    <a:pt x="841403" y="1286409"/>
-                  </a:lnTo>
-                  <a:lnTo>
-                    <a:pt x="913026" y="1370916"/>
-                  </a:lnTo>
-                  <a:lnTo>
-                    <a:pt x="984649" y="1452172"/>
-                  </a:lnTo>
-                  <a:lnTo>
-                    <a:pt x="1056271" y="1530303"/>
-                  </a:lnTo>
-                  <a:lnTo>
-                    <a:pt x="1127894" y="1605430"/>
-                  </a:lnTo>
-                  <a:lnTo>
-                    <a:pt x="1199516" y="1677667"/>
-                  </a:lnTo>
-                  <a:lnTo>
-                    <a:pt x="1271139" y="1747126"/>
-                  </a:lnTo>
-                  <a:lnTo>
-                    <a:pt x="1342761" y="1813914"/>
-                  </a:lnTo>
-                  <a:lnTo>
-                    <a:pt x="1414384" y="1878133"/>
-                  </a:lnTo>
-                  <a:lnTo>
-                    <a:pt x="1486006" y="1939882"/>
-                  </a:lnTo>
-                  <a:lnTo>
-                    <a:pt x="1557629" y="1999257"/>
-                  </a:lnTo>
-                  <a:lnTo>
-                    <a:pt x="1629251" y="2056348"/>
-                  </a:lnTo>
-                  <a:lnTo>
-                    <a:pt x="1700874" y="2111244"/>
-                  </a:lnTo>
-                  <a:lnTo>
-                    <a:pt x="1772496" y="2164028"/>
-                  </a:lnTo>
-                  <a:lnTo>
-                    <a:pt x="1844119" y="2214783"/>
-                  </a:lnTo>
-                  <a:lnTo>
-                    <a:pt x="1915741" y="2263585"/>
-                  </a:lnTo>
-                  <a:lnTo>
-                    <a:pt x="1987364" y="2310511"/>
-                  </a:lnTo>
-                  <a:lnTo>
-                    <a:pt x="2058986" y="2355632"/>
-                  </a:lnTo>
-                  <a:lnTo>
-                    <a:pt x="2130609" y="2399017"/>
-                  </a:lnTo>
-                  <a:lnTo>
-                    <a:pt x="2202231" y="2440734"/>
-                  </a:lnTo>
-                  <a:lnTo>
-                    <a:pt x="2273854" y="2480847"/>
-                  </a:lnTo>
-                  <a:lnTo>
-                    <a:pt x="2345477" y="2519417"/>
-                  </a:lnTo>
-                  <a:lnTo>
-                    <a:pt x="2417099" y="2556503"/>
-                  </a:lnTo>
-                  <a:lnTo>
-                    <a:pt x="2488722" y="2592164"/>
-                  </a:lnTo>
-                  <a:lnTo>
-                    <a:pt x="2560344" y="2626453"/>
-                  </a:lnTo>
-                  <a:lnTo>
-                    <a:pt x="2631967" y="2654952"/>
-                  </a:lnTo>
-                  <a:lnTo>
-                    <a:pt x="2703589" y="2659162"/>
-                  </a:lnTo>
-                  <a:lnTo>
-                    <a:pt x="2775212" y="2663351"/>
-                  </a:lnTo>
-                  <a:lnTo>
-                    <a:pt x="2846834" y="2667518"/>
-                  </a:lnTo>
-                  <a:lnTo>
-                    <a:pt x="2918457" y="2671664"/>
-                  </a:lnTo>
-                  <a:lnTo>
-                    <a:pt x="2990079" y="2675789"/>
-                  </a:lnTo>
-                  <a:lnTo>
-                    <a:pt x="3061702" y="2679894"/>
-                  </a:lnTo>
-                  <a:lnTo>
-                    <a:pt x="3133324" y="2683977"/>
-                  </a:lnTo>
-                  <a:lnTo>
-                    <a:pt x="3204947" y="2688039"/>
-                  </a:lnTo>
-                  <a:lnTo>
-                    <a:pt x="3276569" y="2692081"/>
-                  </a:lnTo>
-                  <a:lnTo>
-                    <a:pt x="3348192" y="2696103"/>
-                  </a:lnTo>
-                  <a:lnTo>
-                    <a:pt x="3419814" y="2700104"/>
-                  </a:lnTo>
-                  <a:lnTo>
-                    <a:pt x="3491437" y="2704084"/>
-                  </a:lnTo>
-                  <a:lnTo>
-                    <a:pt x="3563059" y="2708045"/>
-                  </a:lnTo>
-                  <a:lnTo>
-                    <a:pt x="3634682" y="2711985"/>
-                  </a:lnTo>
-                  <a:lnTo>
-                    <a:pt x="3706304" y="2715905"/>
-                  </a:lnTo>
-                  <a:lnTo>
-                    <a:pt x="3777927" y="2719806"/>
-                  </a:lnTo>
-                  <a:lnTo>
-                    <a:pt x="3849550" y="2723686"/>
-                  </a:lnTo>
-                  <a:lnTo>
-                    <a:pt x="3921172" y="2727547"/>
-                  </a:lnTo>
-                  <a:lnTo>
-                    <a:pt x="3992795" y="2731388"/>
-                  </a:lnTo>
-                  <a:lnTo>
-                    <a:pt x="4064417" y="2735210"/>
-                  </a:lnTo>
-                  <a:lnTo>
-                    <a:pt x="4136040" y="2739012"/>
-                  </a:lnTo>
-                  <a:lnTo>
-                    <a:pt x="4207662" y="2742795"/>
-                  </a:lnTo>
-                  <a:lnTo>
-                    <a:pt x="4279285" y="2746559"/>
-                  </a:lnTo>
-                  <a:lnTo>
-                    <a:pt x="4350907" y="2750304"/>
-                  </a:lnTo>
-                  <a:lnTo>
-                    <a:pt x="4422530" y="2754030"/>
-                  </a:lnTo>
-                  <a:lnTo>
-                    <a:pt x="4494152" y="2757736"/>
-                  </a:lnTo>
-                  <a:lnTo>
-                    <a:pt x="4565775" y="2761424"/>
-                  </a:lnTo>
-                  <a:lnTo>
-                    <a:pt x="4637397" y="2765093"/>
-                  </a:lnTo>
-                  <a:lnTo>
-                    <a:pt x="4709020" y="2768744"/>
-                  </a:lnTo>
-                  <a:lnTo>
-                    <a:pt x="4780642" y="2772376"/>
-                  </a:lnTo>
-                  <a:lnTo>
-                    <a:pt x="4852265" y="2775989"/>
-                  </a:lnTo>
-                  <a:lnTo>
-                    <a:pt x="4923887" y="2779584"/>
-                  </a:lnTo>
-                  <a:lnTo>
-                    <a:pt x="4995510" y="2783161"/>
-                  </a:lnTo>
-                  <a:lnTo>
-                    <a:pt x="5067132" y="2786720"/>
-                  </a:lnTo>
-                  <a:lnTo>
-                    <a:pt x="5138755" y="2790261"/>
-                  </a:lnTo>
-                  <a:lnTo>
-                    <a:pt x="5210378" y="2793783"/>
-                  </a:lnTo>
-                  <a:lnTo>
-                    <a:pt x="5282000" y="2797288"/>
-                  </a:lnTo>
-                  <a:lnTo>
-                    <a:pt x="5353623" y="2800775"/>
-                  </a:lnTo>
-                  <a:lnTo>
-                    <a:pt x="5425245" y="2804245"/>
-                  </a:lnTo>
-                  <a:lnTo>
-                    <a:pt x="5496868" y="2807696"/>
-                  </a:lnTo>
-                  <a:lnTo>
-                    <a:pt x="5568490" y="2811130"/>
-                  </a:lnTo>
-                  <a:lnTo>
-                    <a:pt x="5640113" y="2814547"/>
-                  </a:lnTo>
-                  <a:lnTo>
-                    <a:pt x="5711735" y="2817946"/>
-                  </a:lnTo>
-                  <a:lnTo>
-                    <a:pt x="5783358" y="2821328"/>
-                  </a:lnTo>
-                  <a:lnTo>
-                    <a:pt x="5854980" y="2824693"/>
-                  </a:lnTo>
-                  <a:lnTo>
-                    <a:pt x="5926603" y="2828041"/>
-                  </a:lnTo>
-                  <a:lnTo>
-                    <a:pt x="5998225" y="2831372"/>
-                  </a:lnTo>
-                  <a:lnTo>
-                    <a:pt x="6069848" y="2834686"/>
-                  </a:lnTo>
-                  <a:lnTo>
-                    <a:pt x="6141470" y="2837983"/>
-                  </a:lnTo>
-                  <a:lnTo>
-                    <a:pt x="6213093" y="2841263"/>
-                  </a:lnTo>
-                  <a:lnTo>
-                    <a:pt x="6284715" y="2844526"/>
-                  </a:lnTo>
-                  <a:lnTo>
-                    <a:pt x="6356338" y="2847773"/>
-                  </a:lnTo>
-                </a:path>
-              </a:pathLst>
-            </a:custGeom>
-          </p:spPr>
-          <p:txBody>
-            <a:bodyPr/>
-            <a:lstStyle/>
-            <a:p/>
-          </p:txBody>
-        </p:sp>
-        <p:sp>
-          <p:nvSpPr>
             <p:cNvPr id="22" name="pl22"/>
             <p:cNvSpPr/>
             <p:nvPr/>
           </p:nvSpPr>
           <p:spPr>
             <a:xfrm>
-              <a:off x="1172049" y="4504327"/>
-              <a:ext cx="7090630" cy="945662"/>
+              <a:off x="1956501" y="2143092"/>
+              <a:ext cx="6242915" cy="1027694"/>
             </a:xfrm>
             <a:custGeom>
               <a:avLst/>
               <a:pathLst>
-                <a:path w="7090630" h="945662">
+                <a:path w="6242915" h="1027694">
                   <a:moveTo>
-                    <a:pt x="7090630" y="945662"/>
+                    <a:pt x="0" y="0"/>
                   </a:moveTo>
                   <a:lnTo>
-                    <a:pt x="7019007" y="941372"/>
-                  </a:lnTo>
-                  <a:lnTo>
-                    <a:pt x="6947385" y="936911"/>
-                  </a:lnTo>
-                  <a:lnTo>
-                    <a:pt x="6875762" y="932271"/>
-                  </a:lnTo>
-                  <a:lnTo>
-                    <a:pt x="6804139" y="927445"/>
-                  </a:lnTo>
-                  <a:lnTo>
-                    <a:pt x="6732517" y="922426"/>
-                  </a:lnTo>
-                  <a:lnTo>
-                    <a:pt x="6660894" y="917207"/>
-                  </a:lnTo>
-                  <a:lnTo>
-                    <a:pt x="6589272" y="911779"/>
-                  </a:lnTo>
-                  <a:lnTo>
-                    <a:pt x="6517649" y="906134"/>
-                  </a:lnTo>
-                  <a:lnTo>
-                    <a:pt x="6446027" y="900263"/>
-                  </a:lnTo>
-                  <a:lnTo>
-                    <a:pt x="6374404" y="894157"/>
-                  </a:lnTo>
-                  <a:lnTo>
-                    <a:pt x="6302782" y="887807"/>
-                  </a:lnTo>
-                  <a:lnTo>
-                    <a:pt x="6231159" y="881203"/>
-                  </a:lnTo>
-                  <a:lnTo>
-                    <a:pt x="6159537" y="874334"/>
-                  </a:lnTo>
-                  <a:lnTo>
-                    <a:pt x="6087914" y="867191"/>
-                  </a:lnTo>
-                  <a:lnTo>
-                    <a:pt x="6016292" y="859763"/>
-                  </a:lnTo>
-                  <a:lnTo>
-                    <a:pt x="5944669" y="852037"/>
-                  </a:lnTo>
-                  <a:lnTo>
-                    <a:pt x="5873047" y="844002"/>
-                  </a:lnTo>
-                  <a:lnTo>
-                    <a:pt x="5801424" y="835646"/>
-                  </a:lnTo>
-                  <a:lnTo>
-                    <a:pt x="5729802" y="826956"/>
-                  </a:lnTo>
-                  <a:lnTo>
-                    <a:pt x="5658179" y="817918"/>
-                  </a:lnTo>
-                  <a:lnTo>
-                    <a:pt x="5586557" y="808519"/>
-                  </a:lnTo>
-                  <a:lnTo>
-                    <a:pt x="5514934" y="798743"/>
-                  </a:lnTo>
-                  <a:lnTo>
-                    <a:pt x="5443311" y="788577"/>
-                  </a:lnTo>
-                  <a:lnTo>
-                    <a:pt x="5371689" y="778004"/>
-                  </a:lnTo>
-                  <a:lnTo>
-                    <a:pt x="5300066" y="767008"/>
-                  </a:lnTo>
-                  <a:lnTo>
-                    <a:pt x="5228444" y="755573"/>
-                  </a:lnTo>
-                  <a:lnTo>
-                    <a:pt x="5156821" y="743680"/>
-                  </a:lnTo>
-                  <a:lnTo>
-                    <a:pt x="5085199" y="731311"/>
-                  </a:lnTo>
-                  <a:lnTo>
-                    <a:pt x="5013576" y="718448"/>
-                  </a:lnTo>
-                  <a:lnTo>
-                    <a:pt x="4941954" y="705070"/>
-                  </a:lnTo>
-                  <a:lnTo>
-                    <a:pt x="4870331" y="691157"/>
-                  </a:lnTo>
-                  <a:lnTo>
-                    <a:pt x="4798709" y="676688"/>
-                  </a:lnTo>
-                  <a:lnTo>
-                    <a:pt x="4727086" y="661639"/>
-                  </a:lnTo>
-                  <a:lnTo>
-                    <a:pt x="4655464" y="645989"/>
-                  </a:lnTo>
-                  <a:lnTo>
-                    <a:pt x="4583841" y="629713"/>
-                  </a:lnTo>
-                  <a:lnTo>
-                    <a:pt x="4512219" y="612787"/>
-                  </a:lnTo>
-                  <a:lnTo>
-                    <a:pt x="4440596" y="595183"/>
-                  </a:lnTo>
-                  <a:lnTo>
-                    <a:pt x="4368974" y="576875"/>
-                  </a:lnTo>
-                  <a:lnTo>
-                    <a:pt x="4297351" y="557834"/>
-                  </a:lnTo>
-                  <a:lnTo>
-                    <a:pt x="4225729" y="538032"/>
-                  </a:lnTo>
-                  <a:lnTo>
-                    <a:pt x="4154106" y="517438"/>
-                  </a:lnTo>
-                  <a:lnTo>
-                    <a:pt x="4082483" y="496021"/>
-                  </a:lnTo>
-                  <a:lnTo>
-                    <a:pt x="4010861" y="473747"/>
-                  </a:lnTo>
-                  <a:lnTo>
-                    <a:pt x="3939238" y="450582"/>
-                  </a:lnTo>
-                  <a:lnTo>
-                    <a:pt x="3867616" y="426490"/>
-                  </a:lnTo>
-                  <a:lnTo>
-                    <a:pt x="3795993" y="401435"/>
-                  </a:lnTo>
-                  <a:lnTo>
-                    <a:pt x="3724371" y="375377"/>
-                  </a:lnTo>
-                  <a:lnTo>
-                    <a:pt x="3652748" y="348278"/>
-                  </a:lnTo>
-                  <a:lnTo>
-                    <a:pt x="3581126" y="320094"/>
-                  </a:lnTo>
-                  <a:lnTo>
-                    <a:pt x="3509503" y="290784"/>
-                  </a:lnTo>
-                  <a:lnTo>
-                    <a:pt x="3437881" y="260301"/>
-                  </a:lnTo>
-                  <a:lnTo>
-                    <a:pt x="3366258" y="228598"/>
-                  </a:lnTo>
-                  <a:lnTo>
-                    <a:pt x="3294636" y="219896"/>
-                  </a:lnTo>
-                  <a:lnTo>
-                    <a:pt x="3223013" y="215643"/>
-                  </a:lnTo>
-                  <a:lnTo>
-                    <a:pt x="3151391" y="211368"/>
-                  </a:lnTo>
-                  <a:lnTo>
-                    <a:pt x="3079768" y="207072"/>
-                  </a:lnTo>
-                  <a:lnTo>
-                    <a:pt x="3008146" y="202753"/>
-                  </a:lnTo>
-                  <a:lnTo>
-                    <a:pt x="2936523" y="198412"/>
-                  </a:lnTo>
-                  <a:lnTo>
-                    <a:pt x="2864901" y="194050"/>
-                  </a:lnTo>
-                  <a:lnTo>
-                    <a:pt x="2793278" y="189665"/>
-                  </a:lnTo>
-                  <a:lnTo>
-                    <a:pt x="2721655" y="185257"/>
-                  </a:lnTo>
-                  <a:lnTo>
-                    <a:pt x="2650033" y="180827"/>
-                  </a:lnTo>
-                  <a:lnTo>
-                    <a:pt x="2578410" y="176375"/>
-                  </a:lnTo>
-                  <a:lnTo>
-                    <a:pt x="2506788" y="171899"/>
-                  </a:lnTo>
-                  <a:lnTo>
-                    <a:pt x="2435165" y="167401"/>
-                  </a:lnTo>
-                  <a:lnTo>
-                    <a:pt x="2363543" y="162880"/>
-                  </a:lnTo>
-                  <a:lnTo>
-                    <a:pt x="2291920" y="158336"/>
-                  </a:lnTo>
-                  <a:lnTo>
-                    <a:pt x="2220298" y="153768"/>
-                  </a:lnTo>
-                  <a:lnTo>
-                    <a:pt x="2148675" y="149178"/>
-                  </a:lnTo>
-                  <a:lnTo>
-                    <a:pt x="2077053" y="144563"/>
-                  </a:lnTo>
-                  <a:lnTo>
-                    <a:pt x="2005430" y="139926"/>
-                  </a:lnTo>
-                  <a:lnTo>
-                    <a:pt x="1933808" y="135264"/>
-                  </a:lnTo>
-                  <a:lnTo>
-                    <a:pt x="1862185" y="130579"/>
-                  </a:lnTo>
-                  <a:lnTo>
-                    <a:pt x="1790563" y="125870"/>
-                  </a:lnTo>
-                  <a:lnTo>
-                    <a:pt x="1718940" y="121137"/>
-                  </a:lnTo>
-                  <a:lnTo>
-                    <a:pt x="1647318" y="116380"/>
-                  </a:lnTo>
-                  <a:lnTo>
-                    <a:pt x="1575695" y="111598"/>
-                  </a:lnTo>
-                  <a:lnTo>
-                    <a:pt x="1504073" y="106792"/>
-                  </a:lnTo>
-                  <a:lnTo>
-                    <a:pt x="1432450" y="101961"/>
-                  </a:lnTo>
-                  <a:lnTo>
-                    <a:pt x="1360827" y="97106"/>
-                  </a:lnTo>
-                  <a:lnTo>
-                    <a:pt x="1289205" y="92226"/>
-                  </a:lnTo>
-                  <a:lnTo>
-                    <a:pt x="1217582" y="87321"/>
-                  </a:lnTo>
-                  <a:lnTo>
-                    <a:pt x="1145960" y="82391"/>
-                  </a:lnTo>
-                  <a:lnTo>
-                    <a:pt x="1074337" y="77436"/>
-                  </a:lnTo>
-                  <a:lnTo>
-                    <a:pt x="1002715" y="72456"/>
-                  </a:lnTo>
-                  <a:lnTo>
-                    <a:pt x="931092" y="67450"/>
-                  </a:lnTo>
-                  <a:lnTo>
-                    <a:pt x="859470" y="62418"/>
-                  </a:lnTo>
-                  <a:lnTo>
-                    <a:pt x="787847" y="57361"/>
-                  </a:lnTo>
-                  <a:lnTo>
-                    <a:pt x="716225" y="52278"/>
-                  </a:lnTo>
-                  <a:lnTo>
-                    <a:pt x="644602" y="47169"/>
-                  </a:lnTo>
-                  <a:lnTo>
-                    <a:pt x="572980" y="42034"/>
-                  </a:lnTo>
-                  <a:lnTo>
-                    <a:pt x="501357" y="36873"/>
-                  </a:lnTo>
-                  <a:lnTo>
-                    <a:pt x="429735" y="31686"/>
-                  </a:lnTo>
-                  <a:lnTo>
-                    <a:pt x="358112" y="26472"/>
-                  </a:lnTo>
-                  <a:lnTo>
-                    <a:pt x="286490" y="21231"/>
-                  </a:lnTo>
-                  <a:lnTo>
-                    <a:pt x="214867" y="15964"/>
-                  </a:lnTo>
-                  <a:lnTo>
-                    <a:pt x="143245" y="10669"/>
-                  </a:lnTo>
-                  <a:lnTo>
-                    <a:pt x="71622" y="5348"/>
-                  </a:lnTo>
-                  <a:lnTo>
-                    <a:pt x="0" y="0"/>
+                    <a:pt x="52600" y="36508"/>
+                  </a:lnTo>
+                  <a:lnTo>
+                    <a:pt x="122944" y="83454"/>
+                  </a:lnTo>
+                  <a:lnTo>
+                    <a:pt x="193289" y="128594"/>
+                  </a:lnTo>
+                  <a:lnTo>
+                    <a:pt x="263633" y="171999"/>
+                  </a:lnTo>
+                  <a:lnTo>
+                    <a:pt x="333978" y="213734"/>
+                  </a:lnTo>
+                  <a:lnTo>
+                    <a:pt x="404322" y="253864"/>
+                  </a:lnTo>
+                  <a:lnTo>
+                    <a:pt x="474667" y="292451"/>
+                  </a:lnTo>
+                  <a:lnTo>
+                    <a:pt x="545011" y="329554"/>
+                  </a:lnTo>
+                  <a:lnTo>
+                    <a:pt x="615356" y="365230"/>
+                  </a:lnTo>
+                  <a:lnTo>
+                    <a:pt x="685700" y="399534"/>
+                  </a:lnTo>
+                  <a:lnTo>
+                    <a:pt x="756045" y="432518"/>
+                  </a:lnTo>
+                  <a:lnTo>
+                    <a:pt x="826389" y="464235"/>
+                  </a:lnTo>
+                  <a:lnTo>
+                    <a:pt x="896734" y="494731"/>
+                  </a:lnTo>
+                  <a:lnTo>
+                    <a:pt x="967078" y="524054"/>
+                  </a:lnTo>
+                  <a:lnTo>
+                    <a:pt x="1037423" y="552250"/>
+                  </a:lnTo>
+                  <a:lnTo>
+                    <a:pt x="1107767" y="579361"/>
+                  </a:lnTo>
+                  <a:lnTo>
+                    <a:pt x="1178112" y="605430"/>
+                  </a:lnTo>
+                  <a:lnTo>
+                    <a:pt x="1248456" y="630496"/>
+                  </a:lnTo>
+                  <a:lnTo>
+                    <a:pt x="1318801" y="654598"/>
+                  </a:lnTo>
+                  <a:lnTo>
+                    <a:pt x="1389145" y="677774"/>
+                  </a:lnTo>
+                  <a:lnTo>
+                    <a:pt x="1459490" y="700058"/>
+                  </a:lnTo>
+                  <a:lnTo>
+                    <a:pt x="1529834" y="721485"/>
+                  </a:lnTo>
+                  <a:lnTo>
+                    <a:pt x="1600179" y="742087"/>
+                  </a:lnTo>
+                  <a:lnTo>
+                    <a:pt x="1670523" y="761898"/>
+                  </a:lnTo>
+                  <a:lnTo>
+                    <a:pt x="1740868" y="780947"/>
+                  </a:lnTo>
+                  <a:lnTo>
+                    <a:pt x="1811212" y="799263"/>
+                  </a:lnTo>
+                  <a:lnTo>
+                    <a:pt x="1881557" y="816874"/>
+                  </a:lnTo>
+                  <a:lnTo>
+                    <a:pt x="1951901" y="833809"/>
+                  </a:lnTo>
+                  <a:lnTo>
+                    <a:pt x="2022246" y="850092"/>
+                  </a:lnTo>
+                  <a:lnTo>
+                    <a:pt x="2092590" y="865749"/>
+                  </a:lnTo>
+                  <a:lnTo>
+                    <a:pt x="2162935" y="880803"/>
+                  </a:lnTo>
+                  <a:lnTo>
+                    <a:pt x="2233279" y="895279"/>
+                  </a:lnTo>
+                  <a:lnTo>
+                    <a:pt x="2303624" y="909198"/>
+                  </a:lnTo>
+                  <a:lnTo>
+                    <a:pt x="2373968" y="922582"/>
+                  </a:lnTo>
+                  <a:lnTo>
+                    <a:pt x="2444313" y="935451"/>
+                  </a:lnTo>
+                  <a:lnTo>
+                    <a:pt x="2514657" y="947825"/>
+                  </a:lnTo>
+                  <a:lnTo>
+                    <a:pt x="2585002" y="958109"/>
+                  </a:lnTo>
+                  <a:lnTo>
+                    <a:pt x="2655346" y="959629"/>
+                  </a:lnTo>
+                  <a:lnTo>
+                    <a:pt x="2725691" y="961140"/>
+                  </a:lnTo>
+                  <a:lnTo>
+                    <a:pt x="2796035" y="962644"/>
+                  </a:lnTo>
+                  <a:lnTo>
+                    <a:pt x="2866380" y="964140"/>
+                  </a:lnTo>
+                  <a:lnTo>
+                    <a:pt x="2936724" y="965629"/>
+                  </a:lnTo>
+                  <a:lnTo>
+                    <a:pt x="3007069" y="967110"/>
+                  </a:lnTo>
+                  <a:lnTo>
+                    <a:pt x="3077413" y="968584"/>
+                  </a:lnTo>
+                  <a:lnTo>
+                    <a:pt x="3147758" y="970050"/>
+                  </a:lnTo>
+                  <a:lnTo>
+                    <a:pt x="3218102" y="971508"/>
+                  </a:lnTo>
+                  <a:lnTo>
+                    <a:pt x="3288447" y="972960"/>
+                  </a:lnTo>
+                  <a:lnTo>
+                    <a:pt x="3358791" y="974404"/>
+                  </a:lnTo>
+                  <a:lnTo>
+                    <a:pt x="3429136" y="975840"/>
+                  </a:lnTo>
+                  <a:lnTo>
+                    <a:pt x="3499480" y="977269"/>
+                  </a:lnTo>
+                  <a:lnTo>
+                    <a:pt x="3569825" y="978691"/>
+                  </a:lnTo>
+                  <a:lnTo>
+                    <a:pt x="3640169" y="980106"/>
+                  </a:lnTo>
+                  <a:lnTo>
+                    <a:pt x="3710514" y="981514"/>
+                  </a:lnTo>
+                  <a:lnTo>
+                    <a:pt x="3780858" y="982914"/>
+                  </a:lnTo>
+                  <a:lnTo>
+                    <a:pt x="3851202" y="984307"/>
+                  </a:lnTo>
+                  <a:lnTo>
+                    <a:pt x="3921547" y="985693"/>
+                  </a:lnTo>
+                  <a:lnTo>
+                    <a:pt x="3991891" y="987073"/>
+                  </a:lnTo>
+                  <a:lnTo>
+                    <a:pt x="4062236" y="988445"/>
+                  </a:lnTo>
+                  <a:lnTo>
+                    <a:pt x="4132580" y="989810"/>
+                  </a:lnTo>
+                  <a:lnTo>
+                    <a:pt x="4202925" y="991168"/>
+                  </a:lnTo>
+                  <a:lnTo>
+                    <a:pt x="4273269" y="992520"/>
+                  </a:lnTo>
+                  <a:lnTo>
+                    <a:pt x="4343614" y="993864"/>
+                  </a:lnTo>
+                  <a:lnTo>
+                    <a:pt x="4413958" y="995202"/>
+                  </a:lnTo>
+                  <a:lnTo>
+                    <a:pt x="4484303" y="996533"/>
+                  </a:lnTo>
+                  <a:lnTo>
+                    <a:pt x="4554647" y="997857"/>
+                  </a:lnTo>
+                  <a:lnTo>
+                    <a:pt x="4624992" y="999174"/>
+                  </a:lnTo>
+                  <a:lnTo>
+                    <a:pt x="4695336" y="1000485"/>
+                  </a:lnTo>
+                  <a:lnTo>
+                    <a:pt x="4765681" y="1001789"/>
+                  </a:lnTo>
+                  <a:lnTo>
+                    <a:pt x="4836025" y="1003086"/>
+                  </a:lnTo>
+                  <a:lnTo>
+                    <a:pt x="4906370" y="1004377"/>
+                  </a:lnTo>
+                  <a:lnTo>
+                    <a:pt x="4976714" y="1005661"/>
+                  </a:lnTo>
+                  <a:lnTo>
+                    <a:pt x="5047059" y="1006939"/>
+                  </a:lnTo>
+                  <a:lnTo>
+                    <a:pt x="5117403" y="1008210"/>
+                  </a:lnTo>
+                  <a:lnTo>
+                    <a:pt x="5187748" y="1009475"/>
+                  </a:lnTo>
+                  <a:lnTo>
+                    <a:pt x="5258092" y="1010734"/>
+                  </a:lnTo>
+                  <a:lnTo>
+                    <a:pt x="5328437" y="1011986"/>
+                  </a:lnTo>
+                  <a:lnTo>
+                    <a:pt x="5398781" y="1013231"/>
+                  </a:lnTo>
+                  <a:lnTo>
+                    <a:pt x="5469126" y="1014470"/>
+                  </a:lnTo>
+                  <a:lnTo>
+                    <a:pt x="5539470" y="1015703"/>
+                  </a:lnTo>
+                  <a:lnTo>
+                    <a:pt x="5609815" y="1016930"/>
+                  </a:lnTo>
+                  <a:lnTo>
+                    <a:pt x="5680159" y="1018151"/>
+                  </a:lnTo>
+                  <a:lnTo>
+                    <a:pt x="5750504" y="1019365"/>
+                  </a:lnTo>
+                  <a:lnTo>
+                    <a:pt x="5820848" y="1020573"/>
+                  </a:lnTo>
+                  <a:lnTo>
+                    <a:pt x="5891193" y="1021775"/>
+                  </a:lnTo>
+                  <a:lnTo>
+                    <a:pt x="5961537" y="1022971"/>
+                  </a:lnTo>
+                  <a:lnTo>
+                    <a:pt x="6031882" y="1024161"/>
+                  </a:lnTo>
+                  <a:lnTo>
+                    <a:pt x="6102226" y="1025345"/>
+                  </a:lnTo>
+                  <a:lnTo>
+                    <a:pt x="6172571" y="1026522"/>
+                  </a:lnTo>
+                  <a:lnTo>
+                    <a:pt x="6242915" y="1027694"/>
                   </a:lnTo>
                 </a:path>
               </a:pathLst>
@@ -4180,312 +3890,637 @@
           </p:nvSpPr>
           <p:spPr>
             <a:xfrm>
-              <a:off x="1172049" y="3215728"/>
-              <a:ext cx="7090630" cy="2080342"/>
+              <a:off x="1235312" y="3020319"/>
+              <a:ext cx="6964104" cy="341267"/>
             </a:xfrm>
             <a:custGeom>
               <a:avLst/>
               <a:pathLst>
-                <a:path w="7090630" h="2080342">
+                <a:path w="6964104" h="341267">
+                  <a:moveTo>
+                    <a:pt x="6964104" y="341267"/>
+                  </a:moveTo>
+                  <a:lnTo>
+                    <a:pt x="6893760" y="339719"/>
+                  </a:lnTo>
+                  <a:lnTo>
+                    <a:pt x="6823415" y="338109"/>
+                  </a:lnTo>
+                  <a:lnTo>
+                    <a:pt x="6753071" y="336434"/>
+                  </a:lnTo>
+                  <a:lnTo>
+                    <a:pt x="6682726" y="334693"/>
+                  </a:lnTo>
+                  <a:lnTo>
+                    <a:pt x="6612382" y="332882"/>
+                  </a:lnTo>
+                  <a:lnTo>
+                    <a:pt x="6542037" y="330998"/>
+                  </a:lnTo>
+                  <a:lnTo>
+                    <a:pt x="6471693" y="329039"/>
+                  </a:lnTo>
+                  <a:lnTo>
+                    <a:pt x="6401348" y="327002"/>
+                  </a:lnTo>
+                  <a:lnTo>
+                    <a:pt x="6331004" y="324883"/>
+                  </a:lnTo>
+                  <a:lnTo>
+                    <a:pt x="6260659" y="322680"/>
+                  </a:lnTo>
+                  <a:lnTo>
+                    <a:pt x="6190315" y="320388"/>
+                  </a:lnTo>
+                  <a:lnTo>
+                    <a:pt x="6119970" y="318005"/>
+                  </a:lnTo>
+                  <a:lnTo>
+                    <a:pt x="6049626" y="315526"/>
+                  </a:lnTo>
+                  <a:lnTo>
+                    <a:pt x="5979281" y="312949"/>
+                  </a:lnTo>
+                  <a:lnTo>
+                    <a:pt x="5908937" y="310268"/>
+                  </a:lnTo>
+                  <a:lnTo>
+                    <a:pt x="5838592" y="307480"/>
+                  </a:lnTo>
+                  <a:lnTo>
+                    <a:pt x="5768248" y="304580"/>
+                  </a:lnTo>
+                  <a:lnTo>
+                    <a:pt x="5697903" y="301565"/>
+                  </a:lnTo>
+                  <a:lnTo>
+                    <a:pt x="5627559" y="298429"/>
+                  </a:lnTo>
+                  <a:lnTo>
+                    <a:pt x="5557214" y="295167"/>
+                  </a:lnTo>
+                  <a:lnTo>
+                    <a:pt x="5486870" y="291775"/>
+                  </a:lnTo>
+                  <a:lnTo>
+                    <a:pt x="5416525" y="288247"/>
+                  </a:lnTo>
+                  <a:lnTo>
+                    <a:pt x="5346181" y="284579"/>
+                  </a:lnTo>
+                  <a:lnTo>
+                    <a:pt x="5275836" y="280763"/>
+                  </a:lnTo>
+                  <a:lnTo>
+                    <a:pt x="5205492" y="276795"/>
+                  </a:lnTo>
+                  <a:lnTo>
+                    <a:pt x="5135147" y="272668"/>
+                  </a:lnTo>
+                  <a:lnTo>
+                    <a:pt x="5064803" y="268376"/>
+                  </a:lnTo>
+                  <a:lnTo>
+                    <a:pt x="4994458" y="263913"/>
+                  </a:lnTo>
+                  <a:lnTo>
+                    <a:pt x="4924114" y="259271"/>
+                  </a:lnTo>
+                  <a:lnTo>
+                    <a:pt x="4853769" y="254443"/>
+                  </a:lnTo>
+                  <a:lnTo>
+                    <a:pt x="4783425" y="249422"/>
+                  </a:lnTo>
+                  <a:lnTo>
+                    <a:pt x="4713080" y="244200"/>
+                  </a:lnTo>
+                  <a:lnTo>
+                    <a:pt x="4642736" y="238770"/>
+                  </a:lnTo>
+                  <a:lnTo>
+                    <a:pt x="4572391" y="233122"/>
+                  </a:lnTo>
+                  <a:lnTo>
+                    <a:pt x="4502047" y="227248"/>
+                  </a:lnTo>
+                  <a:lnTo>
+                    <a:pt x="4431702" y="221140"/>
+                  </a:lnTo>
+                  <a:lnTo>
+                    <a:pt x="4361358" y="214787"/>
+                  </a:lnTo>
+                  <a:lnTo>
+                    <a:pt x="4291013" y="208180"/>
+                  </a:lnTo>
+                  <a:lnTo>
+                    <a:pt x="4220669" y="201309"/>
+                  </a:lnTo>
+                  <a:lnTo>
+                    <a:pt x="4150324" y="194163"/>
+                  </a:lnTo>
+                  <a:lnTo>
+                    <a:pt x="4079980" y="186731"/>
+                  </a:lnTo>
+                  <a:lnTo>
+                    <a:pt x="4009635" y="179002"/>
+                  </a:lnTo>
+                  <a:lnTo>
+                    <a:pt x="3939291" y="170964"/>
+                  </a:lnTo>
+                  <a:lnTo>
+                    <a:pt x="3868946" y="162604"/>
+                  </a:lnTo>
+                  <a:lnTo>
+                    <a:pt x="3798602" y="153910"/>
+                  </a:lnTo>
+                  <a:lnTo>
+                    <a:pt x="3728257" y="144868"/>
+                  </a:lnTo>
+                  <a:lnTo>
+                    <a:pt x="3657913" y="135465"/>
+                  </a:lnTo>
+                  <a:lnTo>
+                    <a:pt x="3587569" y="125685"/>
+                  </a:lnTo>
+                  <a:lnTo>
+                    <a:pt x="3517224" y="115514"/>
+                  </a:lnTo>
+                  <a:lnTo>
+                    <a:pt x="3446880" y="104937"/>
+                  </a:lnTo>
+                  <a:lnTo>
+                    <a:pt x="3376535" y="93936"/>
+                  </a:lnTo>
+                  <a:lnTo>
+                    <a:pt x="3306191" y="82495"/>
+                  </a:lnTo>
+                  <a:lnTo>
+                    <a:pt x="3235846" y="79355"/>
+                  </a:lnTo>
+                  <a:lnTo>
+                    <a:pt x="3165502" y="77820"/>
+                  </a:lnTo>
+                  <a:lnTo>
+                    <a:pt x="3095157" y="76277"/>
+                  </a:lnTo>
+                  <a:lnTo>
+                    <a:pt x="3024813" y="74727"/>
+                  </a:lnTo>
+                  <a:lnTo>
+                    <a:pt x="2954468" y="73168"/>
+                  </a:lnTo>
+                  <a:lnTo>
+                    <a:pt x="2884124" y="71602"/>
+                  </a:lnTo>
+                  <a:lnTo>
+                    <a:pt x="2813779" y="70028"/>
+                  </a:lnTo>
+                  <a:lnTo>
+                    <a:pt x="2743435" y="68445"/>
+                  </a:lnTo>
+                  <a:lnTo>
+                    <a:pt x="2673090" y="66855"/>
+                  </a:lnTo>
+                  <a:lnTo>
+                    <a:pt x="2602746" y="65256"/>
+                  </a:lnTo>
+                  <a:lnTo>
+                    <a:pt x="2532401" y="63649"/>
+                  </a:lnTo>
+                  <a:lnTo>
+                    <a:pt x="2462057" y="62034"/>
+                  </a:lnTo>
+                  <a:lnTo>
+                    <a:pt x="2391712" y="60411"/>
+                  </a:lnTo>
+                  <a:lnTo>
+                    <a:pt x="2321368" y="58779"/>
+                  </a:lnTo>
+                  <a:lnTo>
+                    <a:pt x="2251023" y="57139"/>
+                  </a:lnTo>
+                  <a:lnTo>
+                    <a:pt x="2180679" y="55491"/>
+                  </a:lnTo>
+                  <a:lnTo>
+                    <a:pt x="2110334" y="53834"/>
+                  </a:lnTo>
+                  <a:lnTo>
+                    <a:pt x="2039990" y="52169"/>
+                  </a:lnTo>
+                  <a:lnTo>
+                    <a:pt x="1969645" y="50496"/>
+                  </a:lnTo>
+                  <a:lnTo>
+                    <a:pt x="1899301" y="48813"/>
+                  </a:lnTo>
+                  <a:lnTo>
+                    <a:pt x="1828956" y="47123"/>
+                  </a:lnTo>
+                  <a:lnTo>
+                    <a:pt x="1758612" y="45423"/>
+                  </a:lnTo>
+                  <a:lnTo>
+                    <a:pt x="1688267" y="43715"/>
+                  </a:lnTo>
+                  <a:lnTo>
+                    <a:pt x="1617923" y="41998"/>
+                  </a:lnTo>
+                  <a:lnTo>
+                    <a:pt x="1547578" y="40273"/>
+                  </a:lnTo>
+                  <a:lnTo>
+                    <a:pt x="1477234" y="38538"/>
+                  </a:lnTo>
+                  <a:lnTo>
+                    <a:pt x="1406889" y="36795"/>
+                  </a:lnTo>
+                  <a:lnTo>
+                    <a:pt x="1336545" y="35043"/>
+                  </a:lnTo>
+                  <a:lnTo>
+                    <a:pt x="1266200" y="33282"/>
+                  </a:lnTo>
+                  <a:lnTo>
+                    <a:pt x="1195856" y="31512"/>
+                  </a:lnTo>
+                  <a:lnTo>
+                    <a:pt x="1125511" y="29733"/>
+                  </a:lnTo>
+                  <a:lnTo>
+                    <a:pt x="1055167" y="27945"/>
+                  </a:lnTo>
+                  <a:lnTo>
+                    <a:pt x="984822" y="26147"/>
+                  </a:lnTo>
+                  <a:lnTo>
+                    <a:pt x="914478" y="24341"/>
+                  </a:lnTo>
+                  <a:lnTo>
+                    <a:pt x="844133" y="22525"/>
+                  </a:lnTo>
+                  <a:lnTo>
+                    <a:pt x="773789" y="20700"/>
+                  </a:lnTo>
+                  <a:lnTo>
+                    <a:pt x="703444" y="18866"/>
+                  </a:lnTo>
+                  <a:lnTo>
+                    <a:pt x="633100" y="17022"/>
+                  </a:lnTo>
+                  <a:lnTo>
+                    <a:pt x="562755" y="15169"/>
+                  </a:lnTo>
+                  <a:lnTo>
+                    <a:pt x="492411" y="13306"/>
+                  </a:lnTo>
+                  <a:lnTo>
+                    <a:pt x="422066" y="11434"/>
+                  </a:lnTo>
+                  <a:lnTo>
+                    <a:pt x="351722" y="9553"/>
+                  </a:lnTo>
+                  <a:lnTo>
+                    <a:pt x="281377" y="7661"/>
+                  </a:lnTo>
+                  <a:lnTo>
+                    <a:pt x="211033" y="5761"/>
+                  </a:lnTo>
+                  <a:lnTo>
+                    <a:pt x="140688" y="3850"/>
+                  </a:lnTo>
+                  <a:lnTo>
+                    <a:pt x="70344" y="1930"/>
+                  </a:lnTo>
+                  <a:lnTo>
+                    <a:pt x="0" y="0"/>
+                  </a:lnTo>
+                </a:path>
+              </a:pathLst>
+            </a:custGeom>
+          </p:spPr>
+          <p:txBody>
+            <a:bodyPr/>
+            <a:lstStyle/>
+            <a:p/>
+          </p:txBody>
+        </p:sp>
+        <p:sp>
+          <p:nvSpPr>
+            <p:cNvPr id="24" name="pl24"/>
+            <p:cNvSpPr/>
+            <p:nvPr/>
+          </p:nvSpPr>
+          <p:spPr>
+            <a:xfrm>
+              <a:off x="1235312" y="2555294"/>
+              <a:ext cx="6964104" cy="750746"/>
+            </a:xfrm>
+            <a:custGeom>
+              <a:avLst/>
+              <a:pathLst>
+                <a:path w="6964104" h="750746">
                   <a:moveTo>
                     <a:pt x="0" y="0"/>
                   </a:moveTo>
                   <a:lnTo>
-                    <a:pt x="71622" y="51306"/>
-                  </a:lnTo>
-                  <a:lnTo>
-                    <a:pt x="143245" y="101488"/>
-                  </a:lnTo>
-                  <a:lnTo>
-                    <a:pt x="214867" y="150570"/>
-                  </a:lnTo>
-                  <a:lnTo>
-                    <a:pt x="286490" y="198577"/>
-                  </a:lnTo>
-                  <a:lnTo>
-                    <a:pt x="358112" y="245532"/>
-                  </a:lnTo>
-                  <a:lnTo>
-                    <a:pt x="429735" y="291458"/>
-                  </a:lnTo>
-                  <a:lnTo>
-                    <a:pt x="501357" y="336378"/>
-                  </a:lnTo>
-                  <a:lnTo>
-                    <a:pt x="572980" y="380314"/>
-                  </a:lnTo>
-                  <a:lnTo>
-                    <a:pt x="644602" y="423286"/>
-                  </a:lnTo>
-                  <a:lnTo>
-                    <a:pt x="716225" y="465318"/>
-                  </a:lnTo>
-                  <a:lnTo>
-                    <a:pt x="787847" y="506428"/>
-                  </a:lnTo>
-                  <a:lnTo>
-                    <a:pt x="859470" y="546638"/>
-                  </a:lnTo>
-                  <a:lnTo>
-                    <a:pt x="931092" y="585966"/>
-                  </a:lnTo>
-                  <a:lnTo>
-                    <a:pt x="1002715" y="624433"/>
-                  </a:lnTo>
-                  <a:lnTo>
-                    <a:pt x="1074337" y="662057"/>
-                  </a:lnTo>
-                  <a:lnTo>
-                    <a:pt x="1145960" y="698856"/>
-                  </a:lnTo>
-                  <a:lnTo>
-                    <a:pt x="1217582" y="734849"/>
-                  </a:lnTo>
-                  <a:lnTo>
-                    <a:pt x="1289205" y="770054"/>
-                  </a:lnTo>
-                  <a:lnTo>
-                    <a:pt x="1360827" y="804487"/>
-                  </a:lnTo>
-                  <a:lnTo>
-                    <a:pt x="1432450" y="838166"/>
-                  </a:lnTo>
-                  <a:lnTo>
-                    <a:pt x="1504073" y="871106"/>
-                  </a:lnTo>
-                  <a:lnTo>
-                    <a:pt x="1575695" y="903325"/>
-                  </a:lnTo>
-                  <a:lnTo>
-                    <a:pt x="1647318" y="934838"/>
-                  </a:lnTo>
-                  <a:lnTo>
-                    <a:pt x="1718940" y="965661"/>
-                  </a:lnTo>
-                  <a:lnTo>
-                    <a:pt x="1790563" y="995808"/>
-                  </a:lnTo>
-                  <a:lnTo>
-                    <a:pt x="1862185" y="1025294"/>
-                  </a:lnTo>
-                  <a:lnTo>
-                    <a:pt x="1933808" y="1054135"/>
-                  </a:lnTo>
-                  <a:lnTo>
-                    <a:pt x="2005430" y="1082343"/>
-                  </a:lnTo>
-                  <a:lnTo>
-                    <a:pt x="2077053" y="1109934"/>
-                  </a:lnTo>
-                  <a:lnTo>
-                    <a:pt x="2148675" y="1136920"/>
-                  </a:lnTo>
-                  <a:lnTo>
-                    <a:pt x="2220298" y="1163314"/>
-                  </a:lnTo>
-                  <a:lnTo>
-                    <a:pt x="2291920" y="1189130"/>
-                  </a:lnTo>
-                  <a:lnTo>
-                    <a:pt x="2363543" y="1214381"/>
-                  </a:lnTo>
-                  <a:lnTo>
-                    <a:pt x="2435165" y="1239078"/>
-                  </a:lnTo>
-                  <a:lnTo>
-                    <a:pt x="2506788" y="1263234"/>
-                  </a:lnTo>
-                  <a:lnTo>
-                    <a:pt x="2578410" y="1286861"/>
-                  </a:lnTo>
-                  <a:lnTo>
-                    <a:pt x="2650033" y="1309970"/>
-                  </a:lnTo>
-                  <a:lnTo>
-                    <a:pt x="2721655" y="1332573"/>
-                  </a:lnTo>
-                  <a:lnTo>
-                    <a:pt x="2793278" y="1354681"/>
-                  </a:lnTo>
-                  <a:lnTo>
-                    <a:pt x="2864901" y="1376304"/>
-                  </a:lnTo>
-                  <a:lnTo>
-                    <a:pt x="2936523" y="1397453"/>
-                  </a:lnTo>
-                  <a:lnTo>
-                    <a:pt x="3008146" y="1418139"/>
-                  </a:lnTo>
-                  <a:lnTo>
-                    <a:pt x="3079768" y="1438372"/>
-                  </a:lnTo>
-                  <a:lnTo>
-                    <a:pt x="3151391" y="1458161"/>
-                  </a:lnTo>
-                  <a:lnTo>
-                    <a:pt x="3223013" y="1477517"/>
-                  </a:lnTo>
-                  <a:lnTo>
-                    <a:pt x="3294636" y="1496448"/>
-                  </a:lnTo>
-                  <a:lnTo>
-                    <a:pt x="3366258" y="1514965"/>
-                  </a:lnTo>
-                  <a:lnTo>
-                    <a:pt x="3437881" y="1533076"/>
-                  </a:lnTo>
-                  <a:lnTo>
-                    <a:pt x="3509503" y="1550790"/>
-                  </a:lnTo>
-                  <a:lnTo>
-                    <a:pt x="3581126" y="1568116"/>
-                  </a:lnTo>
-                  <a:lnTo>
-                    <a:pt x="3652748" y="1585063"/>
-                  </a:lnTo>
-                  <a:lnTo>
-                    <a:pt x="3724371" y="1601638"/>
-                  </a:lnTo>
-                  <a:lnTo>
-                    <a:pt x="3795993" y="1617850"/>
-                  </a:lnTo>
-                  <a:lnTo>
-                    <a:pt x="3867616" y="1633706"/>
-                  </a:lnTo>
-                  <a:lnTo>
-                    <a:pt x="3939238" y="1649216"/>
-                  </a:lnTo>
-                  <a:lnTo>
-                    <a:pt x="4010861" y="1664385"/>
-                  </a:lnTo>
-                  <a:lnTo>
-                    <a:pt x="4082483" y="1679222"/>
-                  </a:lnTo>
-                  <a:lnTo>
-                    <a:pt x="4154106" y="1693734"/>
-                  </a:lnTo>
-                  <a:lnTo>
-                    <a:pt x="4225729" y="1707928"/>
-                  </a:lnTo>
-                  <a:lnTo>
-                    <a:pt x="4297351" y="1721811"/>
-                  </a:lnTo>
-                  <a:lnTo>
-                    <a:pt x="4368974" y="1735390"/>
-                  </a:lnTo>
-                  <a:lnTo>
-                    <a:pt x="4440596" y="1748671"/>
-                  </a:lnTo>
-                  <a:lnTo>
-                    <a:pt x="4512219" y="1761661"/>
-                  </a:lnTo>
-                  <a:lnTo>
-                    <a:pt x="4583841" y="1774367"/>
-                  </a:lnTo>
-                  <a:lnTo>
-                    <a:pt x="4655464" y="1786794"/>
-                  </a:lnTo>
-                  <a:lnTo>
-                    <a:pt x="4727086" y="1798949"/>
-                  </a:lnTo>
-                  <a:lnTo>
-                    <a:pt x="4798709" y="1810837"/>
-                  </a:lnTo>
-                  <a:lnTo>
-                    <a:pt x="4870331" y="1822465"/>
-                  </a:lnTo>
-                  <a:lnTo>
-                    <a:pt x="4941954" y="1833838"/>
-                  </a:lnTo>
-                  <a:lnTo>
-                    <a:pt x="5013576" y="1844963"/>
-                  </a:lnTo>
-                  <a:lnTo>
-                    <a:pt x="5085199" y="1855843"/>
-                  </a:lnTo>
-                  <a:lnTo>
-                    <a:pt x="5156821" y="1866485"/>
-                  </a:lnTo>
-                  <a:lnTo>
-                    <a:pt x="5228444" y="1876893"/>
-                  </a:lnTo>
-                  <a:lnTo>
-                    <a:pt x="5300066" y="1887074"/>
-                  </a:lnTo>
-                  <a:lnTo>
-                    <a:pt x="5371689" y="1897032"/>
-                  </a:lnTo>
-                  <a:lnTo>
-                    <a:pt x="5443311" y="1906771"/>
-                  </a:lnTo>
-                  <a:lnTo>
-                    <a:pt x="5514934" y="1916297"/>
-                  </a:lnTo>
-                  <a:lnTo>
-                    <a:pt x="5586557" y="1925614"/>
-                  </a:lnTo>
-                  <a:lnTo>
-                    <a:pt x="5658179" y="1934728"/>
-                  </a:lnTo>
-                  <a:lnTo>
-                    <a:pt x="5729802" y="1943641"/>
-                  </a:lnTo>
-                  <a:lnTo>
-                    <a:pt x="5801424" y="1952359"/>
-                  </a:lnTo>
-                  <a:lnTo>
-                    <a:pt x="5873047" y="1960886"/>
-                  </a:lnTo>
-                  <a:lnTo>
-                    <a:pt x="5944669" y="1969226"/>
-                  </a:lnTo>
-                  <a:lnTo>
-                    <a:pt x="6016292" y="1977384"/>
-                  </a:lnTo>
-                  <a:lnTo>
-                    <a:pt x="6087914" y="1985363"/>
-                  </a:lnTo>
-                  <a:lnTo>
-                    <a:pt x="6159537" y="1993167"/>
-                  </a:lnTo>
-                  <a:lnTo>
-                    <a:pt x="6231159" y="2000800"/>
-                  </a:lnTo>
-                  <a:lnTo>
-                    <a:pt x="6302782" y="2008265"/>
-                  </a:lnTo>
-                  <a:lnTo>
-                    <a:pt x="6374404" y="2015567"/>
-                  </a:lnTo>
-                  <a:lnTo>
-                    <a:pt x="6446027" y="2022710"/>
-                  </a:lnTo>
-                  <a:lnTo>
-                    <a:pt x="6517649" y="2029695"/>
-                  </a:lnTo>
-                  <a:lnTo>
-                    <a:pt x="6589272" y="2036528"/>
-                  </a:lnTo>
-                  <a:lnTo>
-                    <a:pt x="6660894" y="2043211"/>
-                  </a:lnTo>
-                  <a:lnTo>
-                    <a:pt x="6732517" y="2049747"/>
-                  </a:lnTo>
-                  <a:lnTo>
-                    <a:pt x="6804139" y="2056140"/>
-                  </a:lnTo>
-                  <a:lnTo>
-                    <a:pt x="6875762" y="2062393"/>
-                  </a:lnTo>
-                  <a:lnTo>
-                    <a:pt x="6947385" y="2068509"/>
-                  </a:lnTo>
-                  <a:lnTo>
-                    <a:pt x="7019007" y="2074491"/>
-                  </a:lnTo>
-                  <a:lnTo>
-                    <a:pt x="7090630" y="2080342"/>
+                    <a:pt x="70344" y="18515"/>
+                  </a:lnTo>
+                  <a:lnTo>
+                    <a:pt x="140688" y="36624"/>
+                  </a:lnTo>
+                  <a:lnTo>
+                    <a:pt x="211033" y="54337"/>
+                  </a:lnTo>
+                  <a:lnTo>
+                    <a:pt x="281377" y="71661"/>
+                  </a:lnTo>
+                  <a:lnTo>
+                    <a:pt x="351722" y="88606"/>
+                  </a:lnTo>
+                  <a:lnTo>
+                    <a:pt x="422066" y="105180"/>
+                  </a:lnTo>
+                  <a:lnTo>
+                    <a:pt x="492411" y="121391"/>
+                  </a:lnTo>
+                  <a:lnTo>
+                    <a:pt x="562755" y="137246"/>
+                  </a:lnTo>
+                  <a:lnTo>
+                    <a:pt x="633100" y="152754"/>
+                  </a:lnTo>
+                  <a:lnTo>
+                    <a:pt x="703444" y="167922"/>
+                  </a:lnTo>
+                  <a:lnTo>
+                    <a:pt x="773789" y="182758"/>
+                  </a:lnTo>
+                  <a:lnTo>
+                    <a:pt x="844133" y="197268"/>
+                  </a:lnTo>
+                  <a:lnTo>
+                    <a:pt x="914478" y="211461"/>
+                  </a:lnTo>
+                  <a:lnTo>
+                    <a:pt x="984822" y="225343"/>
+                  </a:lnTo>
+                  <a:lnTo>
+                    <a:pt x="1055167" y="238920"/>
+                  </a:lnTo>
+                  <a:lnTo>
+                    <a:pt x="1125511" y="252200"/>
+                  </a:lnTo>
+                  <a:lnTo>
+                    <a:pt x="1195856" y="265190"/>
+                  </a:lnTo>
+                  <a:lnTo>
+                    <a:pt x="1266200" y="277894"/>
+                  </a:lnTo>
+                  <a:lnTo>
+                    <a:pt x="1336545" y="290320"/>
+                  </a:lnTo>
+                  <a:lnTo>
+                    <a:pt x="1406889" y="302474"/>
+                  </a:lnTo>
+                  <a:lnTo>
+                    <a:pt x="1477234" y="314362"/>
+                  </a:lnTo>
+                  <a:lnTo>
+                    <a:pt x="1547578" y="325989"/>
+                  </a:lnTo>
+                  <a:lnTo>
+                    <a:pt x="1617923" y="337361"/>
+                  </a:lnTo>
+                  <a:lnTo>
+                    <a:pt x="1688267" y="348484"/>
+                  </a:lnTo>
+                  <a:lnTo>
+                    <a:pt x="1758612" y="359363"/>
+                  </a:lnTo>
+                  <a:lnTo>
+                    <a:pt x="1828956" y="370004"/>
+                  </a:lnTo>
+                  <a:lnTo>
+                    <a:pt x="1899301" y="380412"/>
+                  </a:lnTo>
+                  <a:lnTo>
+                    <a:pt x="1969645" y="390592"/>
+                  </a:lnTo>
+                  <a:lnTo>
+                    <a:pt x="2039990" y="400549"/>
+                  </a:lnTo>
+                  <a:lnTo>
+                    <a:pt x="2110334" y="410287"/>
+                  </a:lnTo>
+                  <a:lnTo>
+                    <a:pt x="2180679" y="419812"/>
+                  </a:lnTo>
+                  <a:lnTo>
+                    <a:pt x="2251023" y="429129"/>
+                  </a:lnTo>
+                  <a:lnTo>
+                    <a:pt x="2321368" y="438241"/>
+                  </a:lnTo>
+                  <a:lnTo>
+                    <a:pt x="2391712" y="447154"/>
+                  </a:lnTo>
+                  <a:lnTo>
+                    <a:pt x="2462057" y="455871"/>
+                  </a:lnTo>
+                  <a:lnTo>
+                    <a:pt x="2532401" y="464398"/>
+                  </a:lnTo>
+                  <a:lnTo>
+                    <a:pt x="2602746" y="472737"/>
+                  </a:lnTo>
+                  <a:lnTo>
+                    <a:pt x="2673090" y="480894"/>
+                  </a:lnTo>
+                  <a:lnTo>
+                    <a:pt x="2743435" y="488872"/>
+                  </a:lnTo>
+                  <a:lnTo>
+                    <a:pt x="2813779" y="496675"/>
+                  </a:lnTo>
+                  <a:lnTo>
+                    <a:pt x="2884124" y="504308"/>
+                  </a:lnTo>
+                  <a:lnTo>
+                    <a:pt x="2954468" y="511773"/>
+                  </a:lnTo>
+                  <a:lnTo>
+                    <a:pt x="3024813" y="519074"/>
+                  </a:lnTo>
+                  <a:lnTo>
+                    <a:pt x="3095157" y="526216"/>
+                  </a:lnTo>
+                  <a:lnTo>
+                    <a:pt x="3165502" y="533201"/>
+                  </a:lnTo>
+                  <a:lnTo>
+                    <a:pt x="3235846" y="540033"/>
+                  </a:lnTo>
+                  <a:lnTo>
+                    <a:pt x="3306191" y="546715"/>
+                  </a:lnTo>
+                  <a:lnTo>
+                    <a:pt x="3376535" y="553251"/>
+                  </a:lnTo>
+                  <a:lnTo>
+                    <a:pt x="3446880" y="559643"/>
+                  </a:lnTo>
+                  <a:lnTo>
+                    <a:pt x="3517224" y="565896"/>
+                  </a:lnTo>
+                  <a:lnTo>
+                    <a:pt x="3587569" y="572011"/>
+                  </a:lnTo>
+                  <a:lnTo>
+                    <a:pt x="3657913" y="577993"/>
+                  </a:lnTo>
+                  <a:lnTo>
+                    <a:pt x="3728257" y="583844"/>
+                  </a:lnTo>
+                  <a:lnTo>
+                    <a:pt x="3798602" y="589566"/>
+                  </a:lnTo>
+                  <a:lnTo>
+                    <a:pt x="3868946" y="595163"/>
+                  </a:lnTo>
+                  <a:lnTo>
+                    <a:pt x="3939291" y="600637"/>
+                  </a:lnTo>
+                  <a:lnTo>
+                    <a:pt x="4009635" y="605991"/>
+                  </a:lnTo>
+                  <a:lnTo>
+                    <a:pt x="4079980" y="611228"/>
+                  </a:lnTo>
+                  <a:lnTo>
+                    <a:pt x="4150324" y="616351"/>
+                  </a:lnTo>
+                  <a:lnTo>
+                    <a:pt x="4220669" y="621361"/>
+                  </a:lnTo>
+                  <a:lnTo>
+                    <a:pt x="4291013" y="626261"/>
+                  </a:lnTo>
+                  <a:lnTo>
+                    <a:pt x="4361358" y="631054"/>
+                  </a:lnTo>
+                  <a:lnTo>
+                    <a:pt x="4431702" y="635742"/>
+                  </a:lnTo>
+                  <a:lnTo>
+                    <a:pt x="4502047" y="640327"/>
+                  </a:lnTo>
+                  <a:lnTo>
+                    <a:pt x="4572391" y="644812"/>
+                  </a:lnTo>
+                  <a:lnTo>
+                    <a:pt x="4642736" y="649198"/>
+                  </a:lnTo>
+                  <a:lnTo>
+                    <a:pt x="4713080" y="653488"/>
+                  </a:lnTo>
+                  <a:lnTo>
+                    <a:pt x="4783425" y="657685"/>
+                  </a:lnTo>
+                  <a:lnTo>
+                    <a:pt x="4853769" y="661789"/>
+                  </a:lnTo>
+                  <a:lnTo>
+                    <a:pt x="4924114" y="665803"/>
+                  </a:lnTo>
+                  <a:lnTo>
+                    <a:pt x="4994458" y="669730"/>
+                  </a:lnTo>
+                  <a:lnTo>
+                    <a:pt x="5064803" y="673570"/>
+                  </a:lnTo>
+                  <a:lnTo>
+                    <a:pt x="5135147" y="677326"/>
+                  </a:lnTo>
+                  <a:lnTo>
+                    <a:pt x="5205492" y="681000"/>
+                  </a:lnTo>
+                  <a:lnTo>
+                    <a:pt x="5275836" y="684594"/>
+                  </a:lnTo>
+                  <a:lnTo>
+                    <a:pt x="5346181" y="688109"/>
+                  </a:lnTo>
+                  <a:lnTo>
+                    <a:pt x="5416525" y="691546"/>
+                  </a:lnTo>
+                  <a:lnTo>
+                    <a:pt x="5486870" y="694909"/>
+                  </a:lnTo>
+                  <a:lnTo>
+                    <a:pt x="5557214" y="698197"/>
+                  </a:lnTo>
+                  <a:lnTo>
+                    <a:pt x="5627559" y="701414"/>
+                  </a:lnTo>
+                  <a:lnTo>
+                    <a:pt x="5697903" y="704560"/>
+                  </a:lnTo>
+                  <a:lnTo>
+                    <a:pt x="5768248" y="707637"/>
+                  </a:lnTo>
+                  <a:lnTo>
+                    <a:pt x="5838592" y="710647"/>
+                  </a:lnTo>
+                  <a:lnTo>
+                    <a:pt x="5908937" y="713591"/>
+                  </a:lnTo>
+                  <a:lnTo>
+                    <a:pt x="5979281" y="716470"/>
+                  </a:lnTo>
+                  <a:lnTo>
+                    <a:pt x="6049626" y="719287"/>
+                  </a:lnTo>
+                  <a:lnTo>
+                    <a:pt x="6119970" y="722041"/>
+                  </a:lnTo>
+                  <a:lnTo>
+                    <a:pt x="6190315" y="724735"/>
+                  </a:lnTo>
+                  <a:lnTo>
+                    <a:pt x="6260659" y="727371"/>
+                  </a:lnTo>
+                  <a:lnTo>
+                    <a:pt x="6331004" y="729948"/>
+                  </a:lnTo>
+                  <a:lnTo>
+                    <a:pt x="6401348" y="732469"/>
+                  </a:lnTo>
+                  <a:lnTo>
+                    <a:pt x="6471693" y="734935"/>
+                  </a:lnTo>
+                  <a:lnTo>
+                    <a:pt x="6542037" y="737346"/>
+                  </a:lnTo>
+                  <a:lnTo>
+                    <a:pt x="6612382" y="739705"/>
+                  </a:lnTo>
+                  <a:lnTo>
+                    <a:pt x="6682726" y="742012"/>
+                  </a:lnTo>
+                  <a:lnTo>
+                    <a:pt x="6753071" y="744269"/>
+                  </a:lnTo>
+                  <a:lnTo>
+                    <a:pt x="6823415" y="746476"/>
+                  </a:lnTo>
+                  <a:lnTo>
+                    <a:pt x="6893760" y="748635"/>
+                  </a:lnTo>
+                  <a:lnTo>
+                    <a:pt x="6964104" y="750746"/>
                   </a:lnTo>
                 </a:path>
               </a:pathLst>
@@ -4508,27 +4543,27 @@
         </p:sp>
         <p:sp>
           <p:nvSpPr>
-            <p:cNvPr id="24" name="pl24"/>
+            <p:cNvPr id="25" name="pl25"/>
             <p:cNvSpPr/>
             <p:nvPr/>
           </p:nvSpPr>
           <p:spPr>
             <a:xfrm>
-              <a:off x="817517" y="4727786"/>
-              <a:ext cx="7799693" cy="0"/>
+              <a:off x="887106" y="3100960"/>
+              <a:ext cx="7660515" cy="0"/>
             </a:xfrm>
             <a:custGeom>
               <a:avLst/>
               <a:pathLst>
-                <a:path w="7799693" h="0">
+                <a:path w="7660515" h="0">
                   <a:moveTo>
                     <a:pt x="0" y="0"/>
                   </a:moveTo>
                   <a:lnTo>
-                    <a:pt x="7799693" y="0"/>
-                  </a:lnTo>
-                  <a:lnTo>
-                    <a:pt x="7799693" y="0"/>
+                    <a:pt x="7660515" y="0"/>
+                  </a:lnTo>
+                  <a:lnTo>
+                    <a:pt x="7660515" y="0"/>
                   </a:lnTo>
                 </a:path>
               </a:pathLst>
@@ -4551,21 +4586,21 @@
         </p:sp>
         <p:sp>
           <p:nvSpPr>
-            <p:cNvPr id="25" name="pl25"/>
+            <p:cNvPr id="26" name="pl26"/>
             <p:cNvSpPr/>
             <p:nvPr/>
           </p:nvSpPr>
           <p:spPr>
             <a:xfrm>
-              <a:off x="4526955" y="2073503"/>
-              <a:ext cx="0" cy="3649639"/>
+              <a:off x="4530353" y="2143092"/>
+              <a:ext cx="0" cy="1317069"/>
             </a:xfrm>
             <a:custGeom>
               <a:avLst/>
               <a:pathLst>
-                <a:path w="0" h="3649639">
+                <a:path w="0" h="1317069">
                   <a:moveTo>
-                    <a:pt x="0" y="3649639"/>
+                    <a:pt x="0" y="1317069"/>
                   </a:moveTo>
                   <a:lnTo>
                     <a:pt x="0" y="0"/>
@@ -4594,13 +4629,13 @@
         </p:sp>
         <p:sp>
           <p:nvSpPr>
-            <p:cNvPr id="26" name="tx26"/>
+            <p:cNvPr id="27" name="tx27"/>
             <p:cNvSpPr/>
             <p:nvPr/>
           </p:nvSpPr>
           <p:spPr>
             <a:xfrm>
-              <a:off x="692708" y="5517199"/>
+              <a:off x="762297" y="3360243"/>
               <a:ext cx="62179" cy="80101"/>
             </a:xfrm>
             <a:prstGeom prst="rect">
@@ -4640,13 +4675,13 @@
         </p:sp>
         <p:sp>
           <p:nvSpPr>
-            <p:cNvPr id="27" name="tx27"/>
+            <p:cNvPr id="28" name="tx28"/>
             <p:cNvSpPr/>
             <p:nvPr/>
           </p:nvSpPr>
           <p:spPr>
             <a:xfrm>
-              <a:off x="692708" y="4687735"/>
+              <a:off x="762297" y="3060909"/>
               <a:ext cx="62179" cy="80101"/>
             </a:xfrm>
             <a:prstGeom prst="rect">
@@ -4686,13 +4721,13 @@
         </p:sp>
         <p:sp>
           <p:nvSpPr>
-            <p:cNvPr id="28" name="tx28"/>
+            <p:cNvPr id="29" name="tx29"/>
             <p:cNvSpPr/>
             <p:nvPr/>
           </p:nvSpPr>
           <p:spPr>
             <a:xfrm>
-              <a:off x="692708" y="3858272"/>
+              <a:off x="762297" y="2761575"/>
               <a:ext cx="62179" cy="80101"/>
             </a:xfrm>
             <a:prstGeom prst="rect">
@@ -4732,13 +4767,13 @@
         </p:sp>
         <p:sp>
           <p:nvSpPr>
-            <p:cNvPr id="29" name="tx29"/>
+            <p:cNvPr id="30" name="tx30"/>
             <p:cNvSpPr/>
             <p:nvPr/>
           </p:nvSpPr>
           <p:spPr>
             <a:xfrm>
-              <a:off x="692708" y="3028808"/>
+              <a:off x="762297" y="2462242"/>
               <a:ext cx="62179" cy="80101"/>
             </a:xfrm>
             <a:prstGeom prst="rect">
@@ -4778,13 +4813,13 @@
         </p:sp>
         <p:sp>
           <p:nvSpPr>
-            <p:cNvPr id="30" name="tx30"/>
+            <p:cNvPr id="31" name="tx31"/>
             <p:cNvSpPr/>
             <p:nvPr/>
           </p:nvSpPr>
           <p:spPr>
             <a:xfrm>
-              <a:off x="692708" y="2199345"/>
+              <a:off x="762297" y="2162908"/>
               <a:ext cx="62179" cy="80101"/>
             </a:xfrm>
             <a:prstGeom prst="rect">
@@ -4824,13 +4859,13 @@
         </p:sp>
         <p:sp>
           <p:nvSpPr>
-            <p:cNvPr id="31" name="tx31"/>
+            <p:cNvPr id="32" name="tx32"/>
             <p:cNvSpPr/>
             <p:nvPr/>
           </p:nvSpPr>
           <p:spPr>
             <a:xfrm>
-              <a:off x="2421884" y="5785772"/>
+              <a:off x="2461403" y="3522791"/>
               <a:ext cx="161574" cy="80101"/>
             </a:xfrm>
             <a:prstGeom prst="rect">
@@ -4870,13 +4905,13 @@
         </p:sp>
         <p:sp>
           <p:nvSpPr>
-            <p:cNvPr id="32" name="tx32"/>
+            <p:cNvPr id="33" name="tx33"/>
             <p:cNvSpPr/>
             <p:nvPr/>
           </p:nvSpPr>
           <p:spPr>
             <a:xfrm>
-              <a:off x="4542539" y="5785772"/>
+              <a:off x="4545104" y="3522791"/>
               <a:ext cx="62179" cy="80101"/>
             </a:xfrm>
             <a:prstGeom prst="rect">
@@ -4916,13 +4951,13 @@
         </p:sp>
         <p:sp>
           <p:nvSpPr>
-            <p:cNvPr id="33" name="tx33"/>
+            <p:cNvPr id="34" name="tx34"/>
             <p:cNvSpPr/>
             <p:nvPr/>
           </p:nvSpPr>
           <p:spPr>
             <a:xfrm>
-              <a:off x="6582407" y="5785772"/>
+              <a:off x="6548017" y="3522791"/>
               <a:ext cx="124358" cy="80101"/>
             </a:xfrm>
             <a:prstGeom prst="rect">
@@ -4962,13 +4997,13 @@
         </p:sp>
         <p:sp>
           <p:nvSpPr>
-            <p:cNvPr id="34" name="tx34"/>
+            <p:cNvPr id="35" name="tx35"/>
             <p:cNvSpPr/>
             <p:nvPr/>
           </p:nvSpPr>
           <p:spPr>
             <a:xfrm>
-              <a:off x="2928340" y="5925448"/>
+              <a:off x="2928340" y="3662467"/>
               <a:ext cx="3578047" cy="100218"/>
             </a:xfrm>
             <a:prstGeom prst="rect">
@@ -5008,13 +5043,13 @@
         </p:sp>
         <p:sp>
           <p:nvSpPr>
-            <p:cNvPr id="35" name="tx35"/>
+            <p:cNvPr id="36" name="tx36"/>
             <p:cNvSpPr/>
             <p:nvPr/>
           </p:nvSpPr>
           <p:spPr>
             <a:xfrm rot="-5400000">
-              <a:off x="68446" y="3848213"/>
+              <a:off x="138035" y="2751517"/>
               <a:ext cx="1016904" cy="100218"/>
             </a:xfrm>
             <a:prstGeom prst="rect">
@@ -5054,13 +5089,13 @@
         </p:sp>
         <p:sp>
           <p:nvSpPr>
-            <p:cNvPr id="36" name="tx36"/>
+            <p:cNvPr id="37" name="tx37"/>
             <p:cNvSpPr/>
             <p:nvPr/>
           </p:nvSpPr>
           <p:spPr>
             <a:xfrm>
-              <a:off x="817517" y="1896563"/>
+              <a:off x="887106" y="1966152"/>
               <a:ext cx="6985375" cy="82021"/>
             </a:xfrm>
             <a:prstGeom prst="rect">
@@ -5100,13 +5135,3686 @@
         </p:sp>
         <p:sp>
           <p:nvSpPr>
-            <p:cNvPr id="37" name="tx37"/>
+            <p:cNvPr id="38" name="tx38"/>
             <p:cNvSpPr/>
             <p:nvPr/>
           </p:nvSpPr>
           <p:spPr>
             <a:xfrm>
-              <a:off x="817517" y="1669789"/>
+              <a:off x="887106" y="1739378"/>
+              <a:ext cx="1982876" cy="120152"/>
+            </a:xfrm>
+            <a:prstGeom prst="rect">
+              <a:avLst/>
+            </a:prstGeom>
+            <a:noFill/>
+          </p:spPr>
+          <p:txBody>
+            <a:bodyPr lIns="0" rIns="0" tIns="0" bIns="0" anchorCtr="1" anchor="ctr" wrap="none"/>
+            <a:lstStyle/>
+            <a:p>
+              <a:pPr algn="l" marL="0" marR="0" indent="0">
+                <a:lnSpc>
+                  <a:spcPts val="1320"/>
+                </a:lnSpc>
+                <a:spcBef>
+                  <a:spcPts val="0"/>
+                </a:spcBef>
+                <a:spcAft>
+                  <a:spcPts val="0"/>
+                </a:spcAft>
+              </a:pPr>
+              <a:r>
+                <a:rPr sz="1320">
+                  <a:solidFill>
+                    <a:srgbClr val="000000">
+                      <a:alpha val="100000"/>
+                    </a:srgbClr>
+                  </a:solidFill>
+                  <a:latin typeface="Helvetica"/>
+                  <a:cs typeface="Helvetica"/>
+                </a:rPr>
+                <a:t>AKI (KDIGO) (Carboplatin)</a:t>
+              </a:r>
+            </a:p>
+          </p:txBody>
+        </p:sp>
+        <p:sp>
+          <p:nvSpPr>
+            <p:cNvPr id="39" name="pl39"/>
+            <p:cNvSpPr/>
+            <p:nvPr/>
+          </p:nvSpPr>
+          <p:spPr>
+            <a:xfrm>
+              <a:off x="887106" y="5444019"/>
+              <a:ext cx="7660515" cy="0"/>
+            </a:xfrm>
+            <a:custGeom>
+              <a:avLst/>
+              <a:pathLst>
+                <a:path w="7660515" h="0">
+                  <a:moveTo>
+                    <a:pt x="0" y="0"/>
+                  </a:moveTo>
+                  <a:lnTo>
+                    <a:pt x="7660515" y="0"/>
+                  </a:lnTo>
+                  <a:lnTo>
+                    <a:pt x="7660515" y="0"/>
+                  </a:lnTo>
+                </a:path>
+              </a:pathLst>
+            </a:custGeom>
+            <a:ln w="6775" cap="flat">
+              <a:solidFill>
+                <a:srgbClr val="EBEBEB">
+                  <a:alpha val="100000"/>
+                </a:srgbClr>
+              </a:solidFill>
+              <a:prstDash val="solid"/>
+              <a:round/>
+            </a:ln>
+          </p:spPr>
+          <p:txBody>
+            <a:bodyPr/>
+            <a:lstStyle/>
+            <a:p/>
+          </p:txBody>
+        </p:sp>
+        <p:sp>
+          <p:nvSpPr>
+            <p:cNvPr id="40" name="pl40"/>
+            <p:cNvSpPr/>
+            <p:nvPr/>
+          </p:nvSpPr>
+          <p:spPr>
+            <a:xfrm>
+              <a:off x="887106" y="5144686"/>
+              <a:ext cx="7660515" cy="0"/>
+            </a:xfrm>
+            <a:custGeom>
+              <a:avLst/>
+              <a:pathLst>
+                <a:path w="7660515" h="0">
+                  <a:moveTo>
+                    <a:pt x="0" y="0"/>
+                  </a:moveTo>
+                  <a:lnTo>
+                    <a:pt x="7660515" y="0"/>
+                  </a:lnTo>
+                  <a:lnTo>
+                    <a:pt x="7660515" y="0"/>
+                  </a:lnTo>
+                </a:path>
+              </a:pathLst>
+            </a:custGeom>
+            <a:ln w="6775" cap="flat">
+              <a:solidFill>
+                <a:srgbClr val="EBEBEB">
+                  <a:alpha val="100000"/>
+                </a:srgbClr>
+              </a:solidFill>
+              <a:prstDash val="solid"/>
+              <a:round/>
+            </a:ln>
+          </p:spPr>
+          <p:txBody>
+            <a:bodyPr/>
+            <a:lstStyle/>
+            <a:p/>
+          </p:txBody>
+        </p:sp>
+        <p:sp>
+          <p:nvSpPr>
+            <p:cNvPr id="41" name="pl41"/>
+            <p:cNvSpPr/>
+            <p:nvPr/>
+          </p:nvSpPr>
+          <p:spPr>
+            <a:xfrm>
+              <a:off x="887106" y="4845352"/>
+              <a:ext cx="7660515" cy="0"/>
+            </a:xfrm>
+            <a:custGeom>
+              <a:avLst/>
+              <a:pathLst>
+                <a:path w="7660515" h="0">
+                  <a:moveTo>
+                    <a:pt x="0" y="0"/>
+                  </a:moveTo>
+                  <a:lnTo>
+                    <a:pt x="7660515" y="0"/>
+                  </a:lnTo>
+                  <a:lnTo>
+                    <a:pt x="7660515" y="0"/>
+                  </a:lnTo>
+                </a:path>
+              </a:pathLst>
+            </a:custGeom>
+            <a:ln w="6775" cap="flat">
+              <a:solidFill>
+                <a:srgbClr val="EBEBEB">
+                  <a:alpha val="100000"/>
+                </a:srgbClr>
+              </a:solidFill>
+              <a:prstDash val="solid"/>
+              <a:round/>
+            </a:ln>
+          </p:spPr>
+          <p:txBody>
+            <a:bodyPr/>
+            <a:lstStyle/>
+            <a:p/>
+          </p:txBody>
+        </p:sp>
+        <p:sp>
+          <p:nvSpPr>
+            <p:cNvPr id="42" name="pl42"/>
+            <p:cNvSpPr/>
+            <p:nvPr/>
+          </p:nvSpPr>
+          <p:spPr>
+            <a:xfrm>
+              <a:off x="887106" y="4546018"/>
+              <a:ext cx="7660515" cy="0"/>
+            </a:xfrm>
+            <a:custGeom>
+              <a:avLst/>
+              <a:pathLst>
+                <a:path w="7660515" h="0">
+                  <a:moveTo>
+                    <a:pt x="0" y="0"/>
+                  </a:moveTo>
+                  <a:lnTo>
+                    <a:pt x="7660515" y="0"/>
+                  </a:lnTo>
+                  <a:lnTo>
+                    <a:pt x="7660515" y="0"/>
+                  </a:lnTo>
+                </a:path>
+              </a:pathLst>
+            </a:custGeom>
+            <a:ln w="6775" cap="flat">
+              <a:solidFill>
+                <a:srgbClr val="EBEBEB">
+                  <a:alpha val="100000"/>
+                </a:srgbClr>
+              </a:solidFill>
+              <a:prstDash val="solid"/>
+              <a:round/>
+            </a:ln>
+          </p:spPr>
+          <p:txBody>
+            <a:bodyPr/>
+            <a:lstStyle/>
+            <a:p/>
+          </p:txBody>
+        </p:sp>
+        <p:sp>
+          <p:nvSpPr>
+            <p:cNvPr id="43" name="pl43"/>
+            <p:cNvSpPr/>
+            <p:nvPr/>
+          </p:nvSpPr>
+          <p:spPr>
+            <a:xfrm>
+              <a:off x="914987" y="4336484"/>
+              <a:ext cx="0" cy="1317069"/>
+            </a:xfrm>
+            <a:custGeom>
+              <a:avLst/>
+              <a:pathLst>
+                <a:path w="0" h="1317069">
+                  <a:moveTo>
+                    <a:pt x="0" y="1317069"/>
+                  </a:moveTo>
+                  <a:lnTo>
+                    <a:pt x="0" y="0"/>
+                  </a:lnTo>
+                  <a:lnTo>
+                    <a:pt x="0" y="0"/>
+                  </a:lnTo>
+                </a:path>
+              </a:pathLst>
+            </a:custGeom>
+            <a:ln w="6775" cap="flat">
+              <a:solidFill>
+                <a:srgbClr val="EBEBEB">
+                  <a:alpha val="100000"/>
+                </a:srgbClr>
+              </a:solidFill>
+              <a:prstDash val="solid"/>
+              <a:round/>
+            </a:ln>
+          </p:spPr>
+          <p:txBody>
+            <a:bodyPr/>
+            <a:lstStyle/>
+            <a:p/>
+          </p:txBody>
+        </p:sp>
+        <p:sp>
+          <p:nvSpPr>
+            <p:cNvPr id="44" name="pl44"/>
+            <p:cNvSpPr/>
+            <p:nvPr/>
+          </p:nvSpPr>
+          <p:spPr>
+            <a:xfrm>
+              <a:off x="1728588" y="4336484"/>
+              <a:ext cx="0" cy="1317069"/>
+            </a:xfrm>
+            <a:custGeom>
+              <a:avLst/>
+              <a:pathLst>
+                <a:path w="0" h="1317069">
+                  <a:moveTo>
+                    <a:pt x="0" y="1317069"/>
+                  </a:moveTo>
+                  <a:lnTo>
+                    <a:pt x="0" y="0"/>
+                  </a:lnTo>
+                  <a:lnTo>
+                    <a:pt x="0" y="0"/>
+                  </a:lnTo>
+                </a:path>
+              </a:pathLst>
+            </a:custGeom>
+            <a:ln w="6775" cap="flat">
+              <a:solidFill>
+                <a:srgbClr val="EBEBEB">
+                  <a:alpha val="100000"/>
+                </a:srgbClr>
+              </a:solidFill>
+              <a:prstDash val="solid"/>
+              <a:round/>
+            </a:ln>
+          </p:spPr>
+          <p:txBody>
+            <a:bodyPr/>
+            <a:lstStyle/>
+            <a:p/>
+          </p:txBody>
+        </p:sp>
+        <p:sp>
+          <p:nvSpPr>
+            <p:cNvPr id="45" name="pl45"/>
+            <p:cNvSpPr/>
+            <p:nvPr/>
+          </p:nvSpPr>
+          <p:spPr>
+            <a:xfrm>
+              <a:off x="2542190" y="4336484"/>
+              <a:ext cx="0" cy="1317069"/>
+            </a:xfrm>
+            <a:custGeom>
+              <a:avLst/>
+              <a:pathLst>
+                <a:path w="0" h="1317069">
+                  <a:moveTo>
+                    <a:pt x="0" y="1317069"/>
+                  </a:moveTo>
+                  <a:lnTo>
+                    <a:pt x="0" y="0"/>
+                  </a:lnTo>
+                  <a:lnTo>
+                    <a:pt x="0" y="0"/>
+                  </a:lnTo>
+                </a:path>
+              </a:pathLst>
+            </a:custGeom>
+            <a:ln w="6775" cap="flat">
+              <a:solidFill>
+                <a:srgbClr val="EBEBEB">
+                  <a:alpha val="100000"/>
+                </a:srgbClr>
+              </a:solidFill>
+              <a:prstDash val="solid"/>
+              <a:round/>
+            </a:ln>
+          </p:spPr>
+          <p:txBody>
+            <a:bodyPr/>
+            <a:lstStyle/>
+            <a:p/>
+          </p:txBody>
+        </p:sp>
+        <p:sp>
+          <p:nvSpPr>
+            <p:cNvPr id="46" name="pl46"/>
+            <p:cNvSpPr/>
+            <p:nvPr/>
+          </p:nvSpPr>
+          <p:spPr>
+            <a:xfrm>
+              <a:off x="3355791" y="4336484"/>
+              <a:ext cx="0" cy="1317069"/>
+            </a:xfrm>
+            <a:custGeom>
+              <a:avLst/>
+              <a:pathLst>
+                <a:path w="0" h="1317069">
+                  <a:moveTo>
+                    <a:pt x="0" y="1317069"/>
+                  </a:moveTo>
+                  <a:lnTo>
+                    <a:pt x="0" y="0"/>
+                  </a:lnTo>
+                  <a:lnTo>
+                    <a:pt x="0" y="0"/>
+                  </a:lnTo>
+                </a:path>
+              </a:pathLst>
+            </a:custGeom>
+            <a:ln w="6775" cap="flat">
+              <a:solidFill>
+                <a:srgbClr val="EBEBEB">
+                  <a:alpha val="100000"/>
+                </a:srgbClr>
+              </a:solidFill>
+              <a:prstDash val="solid"/>
+              <a:round/>
+            </a:ln>
+          </p:spPr>
+          <p:txBody>
+            <a:bodyPr/>
+            <a:lstStyle/>
+            <a:p/>
+          </p:txBody>
+        </p:sp>
+        <p:sp>
+          <p:nvSpPr>
+            <p:cNvPr id="47" name="pl47"/>
+            <p:cNvSpPr/>
+            <p:nvPr/>
+          </p:nvSpPr>
+          <p:spPr>
+            <a:xfrm>
+              <a:off x="4169393" y="4336484"/>
+              <a:ext cx="0" cy="1317069"/>
+            </a:xfrm>
+            <a:custGeom>
+              <a:avLst/>
+              <a:pathLst>
+                <a:path w="0" h="1317069">
+                  <a:moveTo>
+                    <a:pt x="0" y="1317069"/>
+                  </a:moveTo>
+                  <a:lnTo>
+                    <a:pt x="0" y="0"/>
+                  </a:lnTo>
+                  <a:lnTo>
+                    <a:pt x="0" y="0"/>
+                  </a:lnTo>
+                </a:path>
+              </a:pathLst>
+            </a:custGeom>
+            <a:ln w="6775" cap="flat">
+              <a:solidFill>
+                <a:srgbClr val="EBEBEB">
+                  <a:alpha val="100000"/>
+                </a:srgbClr>
+              </a:solidFill>
+              <a:prstDash val="solid"/>
+              <a:round/>
+            </a:ln>
+          </p:spPr>
+          <p:txBody>
+            <a:bodyPr/>
+            <a:lstStyle/>
+            <a:p/>
+          </p:txBody>
+        </p:sp>
+        <p:sp>
+          <p:nvSpPr>
+            <p:cNvPr id="48" name="pl48"/>
+            <p:cNvSpPr/>
+            <p:nvPr/>
+          </p:nvSpPr>
+          <p:spPr>
+            <a:xfrm>
+              <a:off x="4982994" y="4336484"/>
+              <a:ext cx="0" cy="1317069"/>
+            </a:xfrm>
+            <a:custGeom>
+              <a:avLst/>
+              <a:pathLst>
+                <a:path w="0" h="1317069">
+                  <a:moveTo>
+                    <a:pt x="0" y="1317069"/>
+                  </a:moveTo>
+                  <a:lnTo>
+                    <a:pt x="0" y="0"/>
+                  </a:lnTo>
+                  <a:lnTo>
+                    <a:pt x="0" y="0"/>
+                  </a:lnTo>
+                </a:path>
+              </a:pathLst>
+            </a:custGeom>
+            <a:ln w="6775" cap="flat">
+              <a:solidFill>
+                <a:srgbClr val="EBEBEB">
+                  <a:alpha val="100000"/>
+                </a:srgbClr>
+              </a:solidFill>
+              <a:prstDash val="solid"/>
+              <a:round/>
+            </a:ln>
+          </p:spPr>
+          <p:txBody>
+            <a:bodyPr/>
+            <a:lstStyle/>
+            <a:p/>
+          </p:txBody>
+        </p:sp>
+        <p:sp>
+          <p:nvSpPr>
+            <p:cNvPr id="49" name="pl49"/>
+            <p:cNvSpPr/>
+            <p:nvPr/>
+          </p:nvSpPr>
+          <p:spPr>
+            <a:xfrm>
+              <a:off x="5796595" y="4336484"/>
+              <a:ext cx="0" cy="1317069"/>
+            </a:xfrm>
+            <a:custGeom>
+              <a:avLst/>
+              <a:pathLst>
+                <a:path w="0" h="1317069">
+                  <a:moveTo>
+                    <a:pt x="0" y="1317069"/>
+                  </a:moveTo>
+                  <a:lnTo>
+                    <a:pt x="0" y="0"/>
+                  </a:lnTo>
+                  <a:lnTo>
+                    <a:pt x="0" y="0"/>
+                  </a:lnTo>
+                </a:path>
+              </a:pathLst>
+            </a:custGeom>
+            <a:ln w="6775" cap="flat">
+              <a:solidFill>
+                <a:srgbClr val="EBEBEB">
+                  <a:alpha val="100000"/>
+                </a:srgbClr>
+              </a:solidFill>
+              <a:prstDash val="solid"/>
+              <a:round/>
+            </a:ln>
+          </p:spPr>
+          <p:txBody>
+            <a:bodyPr/>
+            <a:lstStyle/>
+            <a:p/>
+          </p:txBody>
+        </p:sp>
+        <p:sp>
+          <p:nvSpPr>
+            <p:cNvPr id="50" name="pl50"/>
+            <p:cNvSpPr/>
+            <p:nvPr/>
+          </p:nvSpPr>
+          <p:spPr>
+            <a:xfrm>
+              <a:off x="6610197" y="4336484"/>
+              <a:ext cx="0" cy="1317069"/>
+            </a:xfrm>
+            <a:custGeom>
+              <a:avLst/>
+              <a:pathLst>
+                <a:path w="0" h="1317069">
+                  <a:moveTo>
+                    <a:pt x="0" y="1317069"/>
+                  </a:moveTo>
+                  <a:lnTo>
+                    <a:pt x="0" y="0"/>
+                  </a:lnTo>
+                  <a:lnTo>
+                    <a:pt x="0" y="0"/>
+                  </a:lnTo>
+                </a:path>
+              </a:pathLst>
+            </a:custGeom>
+            <a:ln w="6775" cap="flat">
+              <a:solidFill>
+                <a:srgbClr val="EBEBEB">
+                  <a:alpha val="100000"/>
+                </a:srgbClr>
+              </a:solidFill>
+              <a:prstDash val="solid"/>
+              <a:round/>
+            </a:ln>
+          </p:spPr>
+          <p:txBody>
+            <a:bodyPr/>
+            <a:lstStyle/>
+            <a:p/>
+          </p:txBody>
+        </p:sp>
+        <p:sp>
+          <p:nvSpPr>
+            <p:cNvPr id="51" name="pl51"/>
+            <p:cNvSpPr/>
+            <p:nvPr/>
+          </p:nvSpPr>
+          <p:spPr>
+            <a:xfrm>
+              <a:off x="7423798" y="4336484"/>
+              <a:ext cx="0" cy="1317069"/>
+            </a:xfrm>
+            <a:custGeom>
+              <a:avLst/>
+              <a:pathLst>
+                <a:path w="0" h="1317069">
+                  <a:moveTo>
+                    <a:pt x="0" y="1317069"/>
+                  </a:moveTo>
+                  <a:lnTo>
+                    <a:pt x="0" y="0"/>
+                  </a:lnTo>
+                  <a:lnTo>
+                    <a:pt x="0" y="0"/>
+                  </a:lnTo>
+                </a:path>
+              </a:pathLst>
+            </a:custGeom>
+            <a:ln w="6775" cap="flat">
+              <a:solidFill>
+                <a:srgbClr val="EBEBEB">
+                  <a:alpha val="100000"/>
+                </a:srgbClr>
+              </a:solidFill>
+              <a:prstDash val="solid"/>
+              <a:round/>
+            </a:ln>
+          </p:spPr>
+          <p:txBody>
+            <a:bodyPr/>
+            <a:lstStyle/>
+            <a:p/>
+          </p:txBody>
+        </p:sp>
+        <p:sp>
+          <p:nvSpPr>
+            <p:cNvPr id="52" name="pl52"/>
+            <p:cNvSpPr/>
+            <p:nvPr/>
+          </p:nvSpPr>
+          <p:spPr>
+            <a:xfrm>
+              <a:off x="8237399" y="4336484"/>
+              <a:ext cx="0" cy="1317069"/>
+            </a:xfrm>
+            <a:custGeom>
+              <a:avLst/>
+              <a:pathLst>
+                <a:path w="0" h="1317069">
+                  <a:moveTo>
+                    <a:pt x="0" y="1317069"/>
+                  </a:moveTo>
+                  <a:lnTo>
+                    <a:pt x="0" y="0"/>
+                  </a:lnTo>
+                  <a:lnTo>
+                    <a:pt x="0" y="0"/>
+                  </a:lnTo>
+                </a:path>
+              </a:pathLst>
+            </a:custGeom>
+            <a:ln w="6775" cap="flat">
+              <a:solidFill>
+                <a:srgbClr val="EBEBEB">
+                  <a:alpha val="100000"/>
+                </a:srgbClr>
+              </a:solidFill>
+              <a:prstDash val="solid"/>
+              <a:round/>
+            </a:ln>
+          </p:spPr>
+          <p:txBody>
+            <a:bodyPr/>
+            <a:lstStyle/>
+            <a:p/>
+          </p:txBody>
+        </p:sp>
+        <p:sp>
+          <p:nvSpPr>
+            <p:cNvPr id="53" name="pl53"/>
+            <p:cNvSpPr/>
+            <p:nvPr/>
+          </p:nvSpPr>
+          <p:spPr>
+            <a:xfrm>
+              <a:off x="887106" y="5593686"/>
+              <a:ext cx="7660515" cy="0"/>
+            </a:xfrm>
+            <a:custGeom>
+              <a:avLst/>
+              <a:pathLst>
+                <a:path w="7660515" h="0">
+                  <a:moveTo>
+                    <a:pt x="0" y="0"/>
+                  </a:moveTo>
+                  <a:lnTo>
+                    <a:pt x="7660515" y="0"/>
+                  </a:lnTo>
+                  <a:lnTo>
+                    <a:pt x="7660515" y="0"/>
+                  </a:lnTo>
+                </a:path>
+              </a:pathLst>
+            </a:custGeom>
+            <a:ln w="13550" cap="flat">
+              <a:solidFill>
+                <a:srgbClr val="EBEBEB">
+                  <a:alpha val="100000"/>
+                </a:srgbClr>
+              </a:solidFill>
+              <a:prstDash val="solid"/>
+              <a:round/>
+            </a:ln>
+          </p:spPr>
+          <p:txBody>
+            <a:bodyPr/>
+            <a:lstStyle/>
+            <a:p/>
+          </p:txBody>
+        </p:sp>
+        <p:sp>
+          <p:nvSpPr>
+            <p:cNvPr id="54" name="pl54"/>
+            <p:cNvSpPr/>
+            <p:nvPr/>
+          </p:nvSpPr>
+          <p:spPr>
+            <a:xfrm>
+              <a:off x="887106" y="5294352"/>
+              <a:ext cx="7660515" cy="0"/>
+            </a:xfrm>
+            <a:custGeom>
+              <a:avLst/>
+              <a:pathLst>
+                <a:path w="7660515" h="0">
+                  <a:moveTo>
+                    <a:pt x="0" y="0"/>
+                  </a:moveTo>
+                  <a:lnTo>
+                    <a:pt x="7660515" y="0"/>
+                  </a:lnTo>
+                  <a:lnTo>
+                    <a:pt x="7660515" y="0"/>
+                  </a:lnTo>
+                </a:path>
+              </a:pathLst>
+            </a:custGeom>
+            <a:ln w="13550" cap="flat">
+              <a:solidFill>
+                <a:srgbClr val="EBEBEB">
+                  <a:alpha val="100000"/>
+                </a:srgbClr>
+              </a:solidFill>
+              <a:prstDash val="solid"/>
+              <a:round/>
+            </a:ln>
+          </p:spPr>
+          <p:txBody>
+            <a:bodyPr/>
+            <a:lstStyle/>
+            <a:p/>
+          </p:txBody>
+        </p:sp>
+        <p:sp>
+          <p:nvSpPr>
+            <p:cNvPr id="55" name="pl55"/>
+            <p:cNvSpPr/>
+            <p:nvPr/>
+          </p:nvSpPr>
+          <p:spPr>
+            <a:xfrm>
+              <a:off x="887106" y="4995019"/>
+              <a:ext cx="7660515" cy="0"/>
+            </a:xfrm>
+            <a:custGeom>
+              <a:avLst/>
+              <a:pathLst>
+                <a:path w="7660515" h="0">
+                  <a:moveTo>
+                    <a:pt x="0" y="0"/>
+                  </a:moveTo>
+                  <a:lnTo>
+                    <a:pt x="7660515" y="0"/>
+                  </a:lnTo>
+                  <a:lnTo>
+                    <a:pt x="7660515" y="0"/>
+                  </a:lnTo>
+                </a:path>
+              </a:pathLst>
+            </a:custGeom>
+            <a:ln w="13550" cap="flat">
+              <a:solidFill>
+                <a:srgbClr val="EBEBEB">
+                  <a:alpha val="100000"/>
+                </a:srgbClr>
+              </a:solidFill>
+              <a:prstDash val="solid"/>
+              <a:round/>
+            </a:ln>
+          </p:spPr>
+          <p:txBody>
+            <a:bodyPr/>
+            <a:lstStyle/>
+            <a:p/>
+          </p:txBody>
+        </p:sp>
+        <p:sp>
+          <p:nvSpPr>
+            <p:cNvPr id="56" name="pl56"/>
+            <p:cNvSpPr/>
+            <p:nvPr/>
+          </p:nvSpPr>
+          <p:spPr>
+            <a:xfrm>
+              <a:off x="887106" y="4695685"/>
+              <a:ext cx="7660515" cy="0"/>
+            </a:xfrm>
+            <a:custGeom>
+              <a:avLst/>
+              <a:pathLst>
+                <a:path w="7660515" h="0">
+                  <a:moveTo>
+                    <a:pt x="0" y="0"/>
+                  </a:moveTo>
+                  <a:lnTo>
+                    <a:pt x="7660515" y="0"/>
+                  </a:lnTo>
+                  <a:lnTo>
+                    <a:pt x="7660515" y="0"/>
+                  </a:lnTo>
+                </a:path>
+              </a:pathLst>
+            </a:custGeom>
+            <a:ln w="13550" cap="flat">
+              <a:solidFill>
+                <a:srgbClr val="EBEBEB">
+                  <a:alpha val="100000"/>
+                </a:srgbClr>
+              </a:solidFill>
+              <a:prstDash val="solid"/>
+              <a:round/>
+            </a:ln>
+          </p:spPr>
+          <p:txBody>
+            <a:bodyPr/>
+            <a:lstStyle/>
+            <a:p/>
+          </p:txBody>
+        </p:sp>
+        <p:sp>
+          <p:nvSpPr>
+            <p:cNvPr id="57" name="pl57"/>
+            <p:cNvSpPr/>
+            <p:nvPr/>
+          </p:nvSpPr>
+          <p:spPr>
+            <a:xfrm>
+              <a:off x="887106" y="4396351"/>
+              <a:ext cx="7660515" cy="0"/>
+            </a:xfrm>
+            <a:custGeom>
+              <a:avLst/>
+              <a:pathLst>
+                <a:path w="7660515" h="0">
+                  <a:moveTo>
+                    <a:pt x="0" y="0"/>
+                  </a:moveTo>
+                  <a:lnTo>
+                    <a:pt x="7660515" y="0"/>
+                  </a:lnTo>
+                  <a:lnTo>
+                    <a:pt x="7660515" y="0"/>
+                  </a:lnTo>
+                </a:path>
+              </a:pathLst>
+            </a:custGeom>
+            <a:ln w="13550" cap="flat">
+              <a:solidFill>
+                <a:srgbClr val="EBEBEB">
+                  <a:alpha val="100000"/>
+                </a:srgbClr>
+              </a:solidFill>
+              <a:prstDash val="solid"/>
+              <a:round/>
+            </a:ln>
+          </p:spPr>
+          <p:txBody>
+            <a:bodyPr/>
+            <a:lstStyle/>
+            <a:p/>
+          </p:txBody>
+        </p:sp>
+        <p:sp>
+          <p:nvSpPr>
+            <p:cNvPr id="58" name="pl58"/>
+            <p:cNvSpPr/>
+            <p:nvPr/>
+          </p:nvSpPr>
+          <p:spPr>
+            <a:xfrm>
+              <a:off x="1321788" y="4336484"/>
+              <a:ext cx="0" cy="1317069"/>
+            </a:xfrm>
+            <a:custGeom>
+              <a:avLst/>
+              <a:pathLst>
+                <a:path w="0" h="1317069">
+                  <a:moveTo>
+                    <a:pt x="0" y="1317069"/>
+                  </a:moveTo>
+                  <a:lnTo>
+                    <a:pt x="0" y="0"/>
+                  </a:lnTo>
+                  <a:lnTo>
+                    <a:pt x="0" y="0"/>
+                  </a:lnTo>
+                </a:path>
+              </a:pathLst>
+            </a:custGeom>
+            <a:ln w="13550" cap="flat">
+              <a:solidFill>
+                <a:srgbClr val="EBEBEB">
+                  <a:alpha val="100000"/>
+                </a:srgbClr>
+              </a:solidFill>
+              <a:prstDash val="solid"/>
+              <a:round/>
+            </a:ln>
+          </p:spPr>
+          <p:txBody>
+            <a:bodyPr/>
+            <a:lstStyle/>
+            <a:p/>
+          </p:txBody>
+        </p:sp>
+        <p:sp>
+          <p:nvSpPr>
+            <p:cNvPr id="59" name="pl59"/>
+            <p:cNvSpPr/>
+            <p:nvPr/>
+          </p:nvSpPr>
+          <p:spPr>
+            <a:xfrm>
+              <a:off x="2135389" y="4336484"/>
+              <a:ext cx="0" cy="1317069"/>
+            </a:xfrm>
+            <a:custGeom>
+              <a:avLst/>
+              <a:pathLst>
+                <a:path w="0" h="1317069">
+                  <a:moveTo>
+                    <a:pt x="0" y="1317069"/>
+                  </a:moveTo>
+                  <a:lnTo>
+                    <a:pt x="0" y="0"/>
+                  </a:lnTo>
+                  <a:lnTo>
+                    <a:pt x="0" y="0"/>
+                  </a:lnTo>
+                </a:path>
+              </a:pathLst>
+            </a:custGeom>
+            <a:ln w="13550" cap="flat">
+              <a:solidFill>
+                <a:srgbClr val="EBEBEB">
+                  <a:alpha val="100000"/>
+                </a:srgbClr>
+              </a:solidFill>
+              <a:prstDash val="solid"/>
+              <a:round/>
+            </a:ln>
+          </p:spPr>
+          <p:txBody>
+            <a:bodyPr/>
+            <a:lstStyle/>
+            <a:p/>
+          </p:txBody>
+        </p:sp>
+        <p:sp>
+          <p:nvSpPr>
+            <p:cNvPr id="60" name="pl60"/>
+            <p:cNvSpPr/>
+            <p:nvPr/>
+          </p:nvSpPr>
+          <p:spPr>
+            <a:xfrm>
+              <a:off x="2948991" y="4336484"/>
+              <a:ext cx="0" cy="1317069"/>
+            </a:xfrm>
+            <a:custGeom>
+              <a:avLst/>
+              <a:pathLst>
+                <a:path w="0" h="1317069">
+                  <a:moveTo>
+                    <a:pt x="0" y="1317069"/>
+                  </a:moveTo>
+                  <a:lnTo>
+                    <a:pt x="0" y="0"/>
+                  </a:lnTo>
+                  <a:lnTo>
+                    <a:pt x="0" y="0"/>
+                  </a:lnTo>
+                </a:path>
+              </a:pathLst>
+            </a:custGeom>
+            <a:ln w="13550" cap="flat">
+              <a:solidFill>
+                <a:srgbClr val="EBEBEB">
+                  <a:alpha val="100000"/>
+                </a:srgbClr>
+              </a:solidFill>
+              <a:prstDash val="solid"/>
+              <a:round/>
+            </a:ln>
+          </p:spPr>
+          <p:txBody>
+            <a:bodyPr/>
+            <a:lstStyle/>
+            <a:p/>
+          </p:txBody>
+        </p:sp>
+        <p:sp>
+          <p:nvSpPr>
+            <p:cNvPr id="61" name="pl61"/>
+            <p:cNvSpPr/>
+            <p:nvPr/>
+          </p:nvSpPr>
+          <p:spPr>
+            <a:xfrm>
+              <a:off x="3762592" y="4336484"/>
+              <a:ext cx="0" cy="1317069"/>
+            </a:xfrm>
+            <a:custGeom>
+              <a:avLst/>
+              <a:pathLst>
+                <a:path w="0" h="1317069">
+                  <a:moveTo>
+                    <a:pt x="0" y="1317069"/>
+                  </a:moveTo>
+                  <a:lnTo>
+                    <a:pt x="0" y="0"/>
+                  </a:lnTo>
+                  <a:lnTo>
+                    <a:pt x="0" y="0"/>
+                  </a:lnTo>
+                </a:path>
+              </a:pathLst>
+            </a:custGeom>
+            <a:ln w="13550" cap="flat">
+              <a:solidFill>
+                <a:srgbClr val="EBEBEB">
+                  <a:alpha val="100000"/>
+                </a:srgbClr>
+              </a:solidFill>
+              <a:prstDash val="solid"/>
+              <a:round/>
+            </a:ln>
+          </p:spPr>
+          <p:txBody>
+            <a:bodyPr/>
+            <a:lstStyle/>
+            <a:p/>
+          </p:txBody>
+        </p:sp>
+        <p:sp>
+          <p:nvSpPr>
+            <p:cNvPr id="62" name="pl62"/>
+            <p:cNvSpPr/>
+            <p:nvPr/>
+          </p:nvSpPr>
+          <p:spPr>
+            <a:xfrm>
+              <a:off x="4576193" y="4336484"/>
+              <a:ext cx="0" cy="1317069"/>
+            </a:xfrm>
+            <a:custGeom>
+              <a:avLst/>
+              <a:pathLst>
+                <a:path w="0" h="1317069">
+                  <a:moveTo>
+                    <a:pt x="0" y="1317069"/>
+                  </a:moveTo>
+                  <a:lnTo>
+                    <a:pt x="0" y="0"/>
+                  </a:lnTo>
+                  <a:lnTo>
+                    <a:pt x="0" y="0"/>
+                  </a:lnTo>
+                </a:path>
+              </a:pathLst>
+            </a:custGeom>
+            <a:ln w="13550" cap="flat">
+              <a:solidFill>
+                <a:srgbClr val="EBEBEB">
+                  <a:alpha val="100000"/>
+                </a:srgbClr>
+              </a:solidFill>
+              <a:prstDash val="solid"/>
+              <a:round/>
+            </a:ln>
+          </p:spPr>
+          <p:txBody>
+            <a:bodyPr/>
+            <a:lstStyle/>
+            <a:p/>
+          </p:txBody>
+        </p:sp>
+        <p:sp>
+          <p:nvSpPr>
+            <p:cNvPr id="63" name="pl63"/>
+            <p:cNvSpPr/>
+            <p:nvPr/>
+          </p:nvSpPr>
+          <p:spPr>
+            <a:xfrm>
+              <a:off x="5389795" y="4336484"/>
+              <a:ext cx="0" cy="1317069"/>
+            </a:xfrm>
+            <a:custGeom>
+              <a:avLst/>
+              <a:pathLst>
+                <a:path w="0" h="1317069">
+                  <a:moveTo>
+                    <a:pt x="0" y="1317069"/>
+                  </a:moveTo>
+                  <a:lnTo>
+                    <a:pt x="0" y="0"/>
+                  </a:lnTo>
+                  <a:lnTo>
+                    <a:pt x="0" y="0"/>
+                  </a:lnTo>
+                </a:path>
+              </a:pathLst>
+            </a:custGeom>
+            <a:ln w="13550" cap="flat">
+              <a:solidFill>
+                <a:srgbClr val="EBEBEB">
+                  <a:alpha val="100000"/>
+                </a:srgbClr>
+              </a:solidFill>
+              <a:prstDash val="solid"/>
+              <a:round/>
+            </a:ln>
+          </p:spPr>
+          <p:txBody>
+            <a:bodyPr/>
+            <a:lstStyle/>
+            <a:p/>
+          </p:txBody>
+        </p:sp>
+        <p:sp>
+          <p:nvSpPr>
+            <p:cNvPr id="64" name="pl64"/>
+            <p:cNvSpPr/>
+            <p:nvPr/>
+          </p:nvSpPr>
+          <p:spPr>
+            <a:xfrm>
+              <a:off x="6203396" y="4336484"/>
+              <a:ext cx="0" cy="1317069"/>
+            </a:xfrm>
+            <a:custGeom>
+              <a:avLst/>
+              <a:pathLst>
+                <a:path w="0" h="1317069">
+                  <a:moveTo>
+                    <a:pt x="0" y="1317069"/>
+                  </a:moveTo>
+                  <a:lnTo>
+                    <a:pt x="0" y="0"/>
+                  </a:lnTo>
+                  <a:lnTo>
+                    <a:pt x="0" y="0"/>
+                  </a:lnTo>
+                </a:path>
+              </a:pathLst>
+            </a:custGeom>
+            <a:ln w="13550" cap="flat">
+              <a:solidFill>
+                <a:srgbClr val="EBEBEB">
+                  <a:alpha val="100000"/>
+                </a:srgbClr>
+              </a:solidFill>
+              <a:prstDash val="solid"/>
+              <a:round/>
+            </a:ln>
+          </p:spPr>
+          <p:txBody>
+            <a:bodyPr/>
+            <a:lstStyle/>
+            <a:p/>
+          </p:txBody>
+        </p:sp>
+        <p:sp>
+          <p:nvSpPr>
+            <p:cNvPr id="65" name="pl65"/>
+            <p:cNvSpPr/>
+            <p:nvPr/>
+          </p:nvSpPr>
+          <p:spPr>
+            <a:xfrm>
+              <a:off x="7016997" y="4336484"/>
+              <a:ext cx="0" cy="1317069"/>
+            </a:xfrm>
+            <a:custGeom>
+              <a:avLst/>
+              <a:pathLst>
+                <a:path w="0" h="1317069">
+                  <a:moveTo>
+                    <a:pt x="0" y="1317069"/>
+                  </a:moveTo>
+                  <a:lnTo>
+                    <a:pt x="0" y="0"/>
+                  </a:lnTo>
+                  <a:lnTo>
+                    <a:pt x="0" y="0"/>
+                  </a:lnTo>
+                </a:path>
+              </a:pathLst>
+            </a:custGeom>
+            <a:ln w="13550" cap="flat">
+              <a:solidFill>
+                <a:srgbClr val="EBEBEB">
+                  <a:alpha val="100000"/>
+                </a:srgbClr>
+              </a:solidFill>
+              <a:prstDash val="solid"/>
+              <a:round/>
+            </a:ln>
+          </p:spPr>
+          <p:txBody>
+            <a:bodyPr/>
+            <a:lstStyle/>
+            <a:p/>
+          </p:txBody>
+        </p:sp>
+        <p:sp>
+          <p:nvSpPr>
+            <p:cNvPr id="66" name="pl66"/>
+            <p:cNvSpPr/>
+            <p:nvPr/>
+          </p:nvSpPr>
+          <p:spPr>
+            <a:xfrm>
+              <a:off x="7830599" y="4336484"/>
+              <a:ext cx="0" cy="1317069"/>
+            </a:xfrm>
+            <a:custGeom>
+              <a:avLst/>
+              <a:pathLst>
+                <a:path w="0" h="1317069">
+                  <a:moveTo>
+                    <a:pt x="0" y="1317069"/>
+                  </a:moveTo>
+                  <a:lnTo>
+                    <a:pt x="0" y="0"/>
+                  </a:lnTo>
+                  <a:lnTo>
+                    <a:pt x="0" y="0"/>
+                  </a:lnTo>
+                </a:path>
+              </a:pathLst>
+            </a:custGeom>
+            <a:ln w="13550" cap="flat">
+              <a:solidFill>
+                <a:srgbClr val="EBEBEB">
+                  <a:alpha val="100000"/>
+                </a:srgbClr>
+              </a:solidFill>
+              <a:prstDash val="solid"/>
+              <a:round/>
+            </a:ln>
+          </p:spPr>
+          <p:txBody>
+            <a:bodyPr/>
+            <a:lstStyle/>
+            <a:p/>
+          </p:txBody>
+        </p:sp>
+        <p:sp>
+          <p:nvSpPr>
+            <p:cNvPr id="67" name="pg67"/>
+            <p:cNvSpPr/>
+            <p:nvPr/>
+          </p:nvSpPr>
+          <p:spPr>
+            <a:xfrm>
+              <a:off x="1235312" y="4336484"/>
+              <a:ext cx="6964104" cy="1218494"/>
+            </a:xfrm>
+            <a:custGeom>
+              <a:avLst/>
+              <a:pathLst>
+                <a:path w="6964104" h="1218494">
+                  <a:moveTo>
+                    <a:pt x="721188" y="0"/>
+                  </a:moveTo>
+                  <a:lnTo>
+                    <a:pt x="773789" y="36508"/>
+                  </a:lnTo>
+                  <a:lnTo>
+                    <a:pt x="844133" y="83454"/>
+                  </a:lnTo>
+                  <a:lnTo>
+                    <a:pt x="914478" y="128594"/>
+                  </a:lnTo>
+                  <a:lnTo>
+                    <a:pt x="984822" y="171999"/>
+                  </a:lnTo>
+                  <a:lnTo>
+                    <a:pt x="1055167" y="213734"/>
+                  </a:lnTo>
+                  <a:lnTo>
+                    <a:pt x="1125511" y="253864"/>
+                  </a:lnTo>
+                  <a:lnTo>
+                    <a:pt x="1195856" y="292451"/>
+                  </a:lnTo>
+                  <a:lnTo>
+                    <a:pt x="1266200" y="329554"/>
+                  </a:lnTo>
+                  <a:lnTo>
+                    <a:pt x="1336545" y="365230"/>
+                  </a:lnTo>
+                  <a:lnTo>
+                    <a:pt x="1406889" y="399534"/>
+                  </a:lnTo>
+                  <a:lnTo>
+                    <a:pt x="1477234" y="432518"/>
+                  </a:lnTo>
+                  <a:lnTo>
+                    <a:pt x="1547578" y="464235"/>
+                  </a:lnTo>
+                  <a:lnTo>
+                    <a:pt x="1617923" y="494731"/>
+                  </a:lnTo>
+                  <a:lnTo>
+                    <a:pt x="1688267" y="524054"/>
+                  </a:lnTo>
+                  <a:lnTo>
+                    <a:pt x="1758612" y="552250"/>
+                  </a:lnTo>
+                  <a:lnTo>
+                    <a:pt x="1828956" y="579361"/>
+                  </a:lnTo>
+                  <a:lnTo>
+                    <a:pt x="1899301" y="605430"/>
+                  </a:lnTo>
+                  <a:lnTo>
+                    <a:pt x="1969645" y="630496"/>
+                  </a:lnTo>
+                  <a:lnTo>
+                    <a:pt x="2039990" y="654598"/>
+                  </a:lnTo>
+                  <a:lnTo>
+                    <a:pt x="2110334" y="677774"/>
+                  </a:lnTo>
+                  <a:lnTo>
+                    <a:pt x="2180679" y="700058"/>
+                  </a:lnTo>
+                  <a:lnTo>
+                    <a:pt x="2251023" y="721485"/>
+                  </a:lnTo>
+                  <a:lnTo>
+                    <a:pt x="2321368" y="742087"/>
+                  </a:lnTo>
+                  <a:lnTo>
+                    <a:pt x="2391712" y="761898"/>
+                  </a:lnTo>
+                  <a:lnTo>
+                    <a:pt x="2462057" y="780947"/>
+                  </a:lnTo>
+                  <a:lnTo>
+                    <a:pt x="2532401" y="799263"/>
+                  </a:lnTo>
+                  <a:lnTo>
+                    <a:pt x="2602746" y="816874"/>
+                  </a:lnTo>
+                  <a:lnTo>
+                    <a:pt x="2673090" y="833809"/>
+                  </a:lnTo>
+                  <a:lnTo>
+                    <a:pt x="2743435" y="850092"/>
+                  </a:lnTo>
+                  <a:lnTo>
+                    <a:pt x="2813779" y="865749"/>
+                  </a:lnTo>
+                  <a:lnTo>
+                    <a:pt x="2884124" y="880803"/>
+                  </a:lnTo>
+                  <a:lnTo>
+                    <a:pt x="2954468" y="895279"/>
+                  </a:lnTo>
+                  <a:lnTo>
+                    <a:pt x="3024813" y="909198"/>
+                  </a:lnTo>
+                  <a:lnTo>
+                    <a:pt x="3095157" y="922582"/>
+                  </a:lnTo>
+                  <a:lnTo>
+                    <a:pt x="3165502" y="935451"/>
+                  </a:lnTo>
+                  <a:lnTo>
+                    <a:pt x="3235846" y="947825"/>
+                  </a:lnTo>
+                  <a:lnTo>
+                    <a:pt x="3306191" y="958109"/>
+                  </a:lnTo>
+                  <a:lnTo>
+                    <a:pt x="3376535" y="959629"/>
+                  </a:lnTo>
+                  <a:lnTo>
+                    <a:pt x="3446880" y="961140"/>
+                  </a:lnTo>
+                  <a:lnTo>
+                    <a:pt x="3517224" y="962644"/>
+                  </a:lnTo>
+                  <a:lnTo>
+                    <a:pt x="3587569" y="964140"/>
+                  </a:lnTo>
+                  <a:lnTo>
+                    <a:pt x="3657913" y="965629"/>
+                  </a:lnTo>
+                  <a:lnTo>
+                    <a:pt x="3728257" y="967110"/>
+                  </a:lnTo>
+                  <a:lnTo>
+                    <a:pt x="3798602" y="968584"/>
+                  </a:lnTo>
+                  <a:lnTo>
+                    <a:pt x="3868946" y="970050"/>
+                  </a:lnTo>
+                  <a:lnTo>
+                    <a:pt x="3939291" y="971508"/>
+                  </a:lnTo>
+                  <a:lnTo>
+                    <a:pt x="4009635" y="972960"/>
+                  </a:lnTo>
+                  <a:lnTo>
+                    <a:pt x="4079980" y="974404"/>
+                  </a:lnTo>
+                  <a:lnTo>
+                    <a:pt x="4150324" y="975840"/>
+                  </a:lnTo>
+                  <a:lnTo>
+                    <a:pt x="4220669" y="977269"/>
+                  </a:lnTo>
+                  <a:lnTo>
+                    <a:pt x="4291013" y="978691"/>
+                  </a:lnTo>
+                  <a:lnTo>
+                    <a:pt x="4361358" y="980106"/>
+                  </a:lnTo>
+                  <a:lnTo>
+                    <a:pt x="4431702" y="981514"/>
+                  </a:lnTo>
+                  <a:lnTo>
+                    <a:pt x="4502047" y="982914"/>
+                  </a:lnTo>
+                  <a:lnTo>
+                    <a:pt x="4572391" y="984307"/>
+                  </a:lnTo>
+                  <a:lnTo>
+                    <a:pt x="4642736" y="985693"/>
+                  </a:lnTo>
+                  <a:lnTo>
+                    <a:pt x="4713080" y="987073"/>
+                  </a:lnTo>
+                  <a:lnTo>
+                    <a:pt x="4783425" y="988445"/>
+                  </a:lnTo>
+                  <a:lnTo>
+                    <a:pt x="4853769" y="989810"/>
+                  </a:lnTo>
+                  <a:lnTo>
+                    <a:pt x="4924114" y="991168"/>
+                  </a:lnTo>
+                  <a:lnTo>
+                    <a:pt x="4994458" y="992520"/>
+                  </a:lnTo>
+                  <a:lnTo>
+                    <a:pt x="5064803" y="993864"/>
+                  </a:lnTo>
+                  <a:lnTo>
+                    <a:pt x="5135147" y="995202"/>
+                  </a:lnTo>
+                  <a:lnTo>
+                    <a:pt x="5205492" y="996533"/>
+                  </a:lnTo>
+                  <a:lnTo>
+                    <a:pt x="5275836" y="997857"/>
+                  </a:lnTo>
+                  <a:lnTo>
+                    <a:pt x="5346181" y="999174"/>
+                  </a:lnTo>
+                  <a:lnTo>
+                    <a:pt x="5416525" y="1000485"/>
+                  </a:lnTo>
+                  <a:lnTo>
+                    <a:pt x="5486870" y="1001789"/>
+                  </a:lnTo>
+                  <a:lnTo>
+                    <a:pt x="5557214" y="1003086"/>
+                  </a:lnTo>
+                  <a:lnTo>
+                    <a:pt x="5627559" y="1004377"/>
+                  </a:lnTo>
+                  <a:lnTo>
+                    <a:pt x="5697903" y="1005661"/>
+                  </a:lnTo>
+                  <a:lnTo>
+                    <a:pt x="5768248" y="1006939"/>
+                  </a:lnTo>
+                  <a:lnTo>
+                    <a:pt x="5838592" y="1008210"/>
+                  </a:lnTo>
+                  <a:lnTo>
+                    <a:pt x="5908937" y="1009475"/>
+                  </a:lnTo>
+                  <a:lnTo>
+                    <a:pt x="5979281" y="1010734"/>
+                  </a:lnTo>
+                  <a:lnTo>
+                    <a:pt x="6049626" y="1011986"/>
+                  </a:lnTo>
+                  <a:lnTo>
+                    <a:pt x="6119970" y="1013231"/>
+                  </a:lnTo>
+                  <a:lnTo>
+                    <a:pt x="6190315" y="1014470"/>
+                  </a:lnTo>
+                  <a:lnTo>
+                    <a:pt x="6260659" y="1015703"/>
+                  </a:lnTo>
+                  <a:lnTo>
+                    <a:pt x="6331004" y="1016930"/>
+                  </a:lnTo>
+                  <a:lnTo>
+                    <a:pt x="6401348" y="1018151"/>
+                  </a:lnTo>
+                  <a:lnTo>
+                    <a:pt x="6471693" y="1019365"/>
+                  </a:lnTo>
+                  <a:lnTo>
+                    <a:pt x="6542037" y="1020573"/>
+                  </a:lnTo>
+                  <a:lnTo>
+                    <a:pt x="6612382" y="1021775"/>
+                  </a:lnTo>
+                  <a:lnTo>
+                    <a:pt x="6682726" y="1022971"/>
+                  </a:lnTo>
+                  <a:lnTo>
+                    <a:pt x="6753071" y="1024161"/>
+                  </a:lnTo>
+                  <a:lnTo>
+                    <a:pt x="6823415" y="1025345"/>
+                  </a:lnTo>
+                  <a:lnTo>
+                    <a:pt x="6893760" y="1026522"/>
+                  </a:lnTo>
+                  <a:lnTo>
+                    <a:pt x="6964104" y="1027694"/>
+                  </a:lnTo>
+                  <a:lnTo>
+                    <a:pt x="6964104" y="1218494"/>
+                  </a:lnTo>
+                  <a:lnTo>
+                    <a:pt x="6893760" y="1216946"/>
+                  </a:lnTo>
+                  <a:lnTo>
+                    <a:pt x="6823415" y="1215336"/>
+                  </a:lnTo>
+                  <a:lnTo>
+                    <a:pt x="6753071" y="1213662"/>
+                  </a:lnTo>
+                  <a:lnTo>
+                    <a:pt x="6682726" y="1211920"/>
+                  </a:lnTo>
+                  <a:lnTo>
+                    <a:pt x="6612382" y="1210109"/>
+                  </a:lnTo>
+                  <a:lnTo>
+                    <a:pt x="6542037" y="1208226"/>
+                  </a:lnTo>
+                  <a:lnTo>
+                    <a:pt x="6471693" y="1206267"/>
+                  </a:lnTo>
+                  <a:lnTo>
+                    <a:pt x="6401348" y="1204229"/>
+                  </a:lnTo>
+                  <a:lnTo>
+                    <a:pt x="6331004" y="1202111"/>
+                  </a:lnTo>
+                  <a:lnTo>
+                    <a:pt x="6260659" y="1199907"/>
+                  </a:lnTo>
+                  <a:lnTo>
+                    <a:pt x="6190315" y="1197616"/>
+                  </a:lnTo>
+                  <a:lnTo>
+                    <a:pt x="6119970" y="1195232"/>
+                  </a:lnTo>
+                  <a:lnTo>
+                    <a:pt x="6049626" y="1192754"/>
+                  </a:lnTo>
+                  <a:lnTo>
+                    <a:pt x="5979281" y="1190176"/>
+                  </a:lnTo>
+                  <a:lnTo>
+                    <a:pt x="5908937" y="1187495"/>
+                  </a:lnTo>
+                  <a:lnTo>
+                    <a:pt x="5838592" y="1184707"/>
+                  </a:lnTo>
+                  <a:lnTo>
+                    <a:pt x="5768248" y="1181808"/>
+                  </a:lnTo>
+                  <a:lnTo>
+                    <a:pt x="5697903" y="1178792"/>
+                  </a:lnTo>
+                  <a:lnTo>
+                    <a:pt x="5627559" y="1175656"/>
+                  </a:lnTo>
+                  <a:lnTo>
+                    <a:pt x="5557214" y="1172394"/>
+                  </a:lnTo>
+                  <a:lnTo>
+                    <a:pt x="5486870" y="1169002"/>
+                  </a:lnTo>
+                  <a:lnTo>
+                    <a:pt x="5416525" y="1165475"/>
+                  </a:lnTo>
+                  <a:lnTo>
+                    <a:pt x="5346181" y="1161806"/>
+                  </a:lnTo>
+                  <a:lnTo>
+                    <a:pt x="5275836" y="1157990"/>
+                  </a:lnTo>
+                  <a:lnTo>
+                    <a:pt x="5205492" y="1154022"/>
+                  </a:lnTo>
+                  <a:lnTo>
+                    <a:pt x="5135147" y="1149896"/>
+                  </a:lnTo>
+                  <a:lnTo>
+                    <a:pt x="5064803" y="1145604"/>
+                  </a:lnTo>
+                  <a:lnTo>
+                    <a:pt x="4994458" y="1141140"/>
+                  </a:lnTo>
+                  <a:lnTo>
+                    <a:pt x="4924114" y="1136498"/>
+                  </a:lnTo>
+                  <a:lnTo>
+                    <a:pt x="4853769" y="1131670"/>
+                  </a:lnTo>
+                  <a:lnTo>
+                    <a:pt x="4783425" y="1126649"/>
+                  </a:lnTo>
+                  <a:lnTo>
+                    <a:pt x="4713080" y="1121428"/>
+                  </a:lnTo>
+                  <a:lnTo>
+                    <a:pt x="4642736" y="1115997"/>
+                  </a:lnTo>
+                  <a:lnTo>
+                    <a:pt x="4572391" y="1110349"/>
+                  </a:lnTo>
+                  <a:lnTo>
+                    <a:pt x="4502047" y="1104476"/>
+                  </a:lnTo>
+                  <a:lnTo>
+                    <a:pt x="4431702" y="1098367"/>
+                  </a:lnTo>
+                  <a:lnTo>
+                    <a:pt x="4361358" y="1092014"/>
+                  </a:lnTo>
+                  <a:lnTo>
+                    <a:pt x="4291013" y="1085408"/>
+                  </a:lnTo>
+                  <a:lnTo>
+                    <a:pt x="4220669" y="1078536"/>
+                  </a:lnTo>
+                  <a:lnTo>
+                    <a:pt x="4150324" y="1071390"/>
+                  </a:lnTo>
+                  <a:lnTo>
+                    <a:pt x="4079980" y="1063958"/>
+                  </a:lnTo>
+                  <a:lnTo>
+                    <a:pt x="4009635" y="1056229"/>
+                  </a:lnTo>
+                  <a:lnTo>
+                    <a:pt x="3939291" y="1048191"/>
+                  </a:lnTo>
+                  <a:lnTo>
+                    <a:pt x="3868946" y="1039831"/>
+                  </a:lnTo>
+                  <a:lnTo>
+                    <a:pt x="3798602" y="1031137"/>
+                  </a:lnTo>
+                  <a:lnTo>
+                    <a:pt x="3728257" y="1022095"/>
+                  </a:lnTo>
+                  <a:lnTo>
+                    <a:pt x="3657913" y="1012692"/>
+                  </a:lnTo>
+                  <a:lnTo>
+                    <a:pt x="3587569" y="1002912"/>
+                  </a:lnTo>
+                  <a:lnTo>
+                    <a:pt x="3517224" y="992742"/>
+                  </a:lnTo>
+                  <a:lnTo>
+                    <a:pt x="3446880" y="982164"/>
+                  </a:lnTo>
+                  <a:lnTo>
+                    <a:pt x="3376535" y="971163"/>
+                  </a:lnTo>
+                  <a:lnTo>
+                    <a:pt x="3306191" y="959723"/>
+                  </a:lnTo>
+                  <a:lnTo>
+                    <a:pt x="3235846" y="956582"/>
+                  </a:lnTo>
+                  <a:lnTo>
+                    <a:pt x="3165502" y="955048"/>
+                  </a:lnTo>
+                  <a:lnTo>
+                    <a:pt x="3095157" y="953505"/>
+                  </a:lnTo>
+                  <a:lnTo>
+                    <a:pt x="3024813" y="951954"/>
+                  </a:lnTo>
+                  <a:lnTo>
+                    <a:pt x="2954468" y="950396"/>
+                  </a:lnTo>
+                  <a:lnTo>
+                    <a:pt x="2884124" y="948829"/>
+                  </a:lnTo>
+                  <a:lnTo>
+                    <a:pt x="2813779" y="947255"/>
+                  </a:lnTo>
+                  <a:lnTo>
+                    <a:pt x="2743435" y="945673"/>
+                  </a:lnTo>
+                  <a:lnTo>
+                    <a:pt x="2673090" y="944082"/>
+                  </a:lnTo>
+                  <a:lnTo>
+                    <a:pt x="2602746" y="942483"/>
+                  </a:lnTo>
+                  <a:lnTo>
+                    <a:pt x="2532401" y="940876"/>
+                  </a:lnTo>
+                  <a:lnTo>
+                    <a:pt x="2462057" y="939261"/>
+                  </a:lnTo>
+                  <a:lnTo>
+                    <a:pt x="2391712" y="937638"/>
+                  </a:lnTo>
+                  <a:lnTo>
+                    <a:pt x="2321368" y="936007"/>
+                  </a:lnTo>
+                  <a:lnTo>
+                    <a:pt x="2251023" y="934367"/>
+                  </a:lnTo>
+                  <a:lnTo>
+                    <a:pt x="2180679" y="932718"/>
+                  </a:lnTo>
+                  <a:lnTo>
+                    <a:pt x="2110334" y="931062"/>
+                  </a:lnTo>
+                  <a:lnTo>
+                    <a:pt x="2039990" y="929397"/>
+                  </a:lnTo>
+                  <a:lnTo>
+                    <a:pt x="1969645" y="927723"/>
+                  </a:lnTo>
+                  <a:lnTo>
+                    <a:pt x="1899301" y="926041"/>
+                  </a:lnTo>
+                  <a:lnTo>
+                    <a:pt x="1828956" y="924350"/>
+                  </a:lnTo>
+                  <a:lnTo>
+                    <a:pt x="1758612" y="922651"/>
+                  </a:lnTo>
+                  <a:lnTo>
+                    <a:pt x="1688267" y="920943"/>
+                  </a:lnTo>
+                  <a:lnTo>
+                    <a:pt x="1617923" y="919226"/>
+                  </a:lnTo>
+                  <a:lnTo>
+                    <a:pt x="1547578" y="917500"/>
+                  </a:lnTo>
+                  <a:lnTo>
+                    <a:pt x="1477234" y="915766"/>
+                  </a:lnTo>
+                  <a:lnTo>
+                    <a:pt x="1406889" y="914023"/>
+                  </a:lnTo>
+                  <a:lnTo>
+                    <a:pt x="1336545" y="912270"/>
+                  </a:lnTo>
+                  <a:lnTo>
+                    <a:pt x="1266200" y="910509"/>
+                  </a:lnTo>
+                  <a:lnTo>
+                    <a:pt x="1195856" y="908739"/>
+                  </a:lnTo>
+                  <a:lnTo>
+                    <a:pt x="1125511" y="906960"/>
+                  </a:lnTo>
+                  <a:lnTo>
+                    <a:pt x="1055167" y="905172"/>
+                  </a:lnTo>
+                  <a:lnTo>
+                    <a:pt x="984822" y="903375"/>
+                  </a:lnTo>
+                  <a:lnTo>
+                    <a:pt x="914478" y="901568"/>
+                  </a:lnTo>
+                  <a:lnTo>
+                    <a:pt x="844133" y="899752"/>
+                  </a:lnTo>
+                  <a:lnTo>
+                    <a:pt x="773789" y="897927"/>
+                  </a:lnTo>
+                  <a:lnTo>
+                    <a:pt x="703444" y="896093"/>
+                  </a:lnTo>
+                  <a:lnTo>
+                    <a:pt x="633100" y="894249"/>
+                  </a:lnTo>
+                  <a:lnTo>
+                    <a:pt x="562755" y="892396"/>
+                  </a:lnTo>
+                  <a:lnTo>
+                    <a:pt x="492411" y="890534"/>
+                  </a:lnTo>
+                  <a:lnTo>
+                    <a:pt x="422066" y="888662"/>
+                  </a:lnTo>
+                  <a:lnTo>
+                    <a:pt x="351722" y="886780"/>
+                  </a:lnTo>
+                  <a:lnTo>
+                    <a:pt x="281377" y="884889"/>
+                  </a:lnTo>
+                  <a:lnTo>
+                    <a:pt x="211033" y="882988"/>
+                  </a:lnTo>
+                  <a:lnTo>
+                    <a:pt x="140688" y="881077"/>
+                  </a:lnTo>
+                  <a:lnTo>
+                    <a:pt x="70344" y="879157"/>
+                  </a:lnTo>
+                  <a:lnTo>
+                    <a:pt x="0" y="877227"/>
+                  </a:lnTo>
+                  <a:close/>
+                </a:path>
+              </a:pathLst>
+            </a:custGeom>
+            <a:solidFill>
+              <a:srgbClr val="FF8C00">
+                <a:alpha val="20000"/>
+              </a:srgbClr>
+            </a:solidFill>
+          </p:spPr>
+          <p:txBody>
+            <a:bodyPr/>
+            <a:lstStyle/>
+            <a:p/>
+          </p:txBody>
+        </p:sp>
+        <p:sp>
+          <p:nvSpPr>
+            <p:cNvPr id="68" name="pl68"/>
+            <p:cNvSpPr/>
+            <p:nvPr/>
+          </p:nvSpPr>
+          <p:spPr>
+            <a:xfrm>
+              <a:off x="1956501" y="4336484"/>
+              <a:ext cx="6242915" cy="1027694"/>
+            </a:xfrm>
+            <a:custGeom>
+              <a:avLst/>
+              <a:pathLst>
+                <a:path w="6242915" h="1027694">
+                  <a:moveTo>
+                    <a:pt x="0" y="0"/>
+                  </a:moveTo>
+                  <a:lnTo>
+                    <a:pt x="52600" y="36508"/>
+                  </a:lnTo>
+                  <a:lnTo>
+                    <a:pt x="122944" y="83454"/>
+                  </a:lnTo>
+                  <a:lnTo>
+                    <a:pt x="193289" y="128594"/>
+                  </a:lnTo>
+                  <a:lnTo>
+                    <a:pt x="263633" y="171999"/>
+                  </a:lnTo>
+                  <a:lnTo>
+                    <a:pt x="333978" y="213734"/>
+                  </a:lnTo>
+                  <a:lnTo>
+                    <a:pt x="404322" y="253864"/>
+                  </a:lnTo>
+                  <a:lnTo>
+                    <a:pt x="474667" y="292451"/>
+                  </a:lnTo>
+                  <a:lnTo>
+                    <a:pt x="545011" y="329554"/>
+                  </a:lnTo>
+                  <a:lnTo>
+                    <a:pt x="615356" y="365230"/>
+                  </a:lnTo>
+                  <a:lnTo>
+                    <a:pt x="685700" y="399534"/>
+                  </a:lnTo>
+                  <a:lnTo>
+                    <a:pt x="756045" y="432518"/>
+                  </a:lnTo>
+                  <a:lnTo>
+                    <a:pt x="826389" y="464235"/>
+                  </a:lnTo>
+                  <a:lnTo>
+                    <a:pt x="896734" y="494731"/>
+                  </a:lnTo>
+                  <a:lnTo>
+                    <a:pt x="967078" y="524054"/>
+                  </a:lnTo>
+                  <a:lnTo>
+                    <a:pt x="1037423" y="552250"/>
+                  </a:lnTo>
+                  <a:lnTo>
+                    <a:pt x="1107767" y="579361"/>
+                  </a:lnTo>
+                  <a:lnTo>
+                    <a:pt x="1178112" y="605430"/>
+                  </a:lnTo>
+                  <a:lnTo>
+                    <a:pt x="1248456" y="630496"/>
+                  </a:lnTo>
+                  <a:lnTo>
+                    <a:pt x="1318801" y="654598"/>
+                  </a:lnTo>
+                  <a:lnTo>
+                    <a:pt x="1389145" y="677774"/>
+                  </a:lnTo>
+                  <a:lnTo>
+                    <a:pt x="1459490" y="700058"/>
+                  </a:lnTo>
+                  <a:lnTo>
+                    <a:pt x="1529834" y="721485"/>
+                  </a:lnTo>
+                  <a:lnTo>
+                    <a:pt x="1600179" y="742087"/>
+                  </a:lnTo>
+                  <a:lnTo>
+                    <a:pt x="1670523" y="761898"/>
+                  </a:lnTo>
+                  <a:lnTo>
+                    <a:pt x="1740868" y="780947"/>
+                  </a:lnTo>
+                  <a:lnTo>
+                    <a:pt x="1811212" y="799263"/>
+                  </a:lnTo>
+                  <a:lnTo>
+                    <a:pt x="1881557" y="816874"/>
+                  </a:lnTo>
+                  <a:lnTo>
+                    <a:pt x="1951901" y="833809"/>
+                  </a:lnTo>
+                  <a:lnTo>
+                    <a:pt x="2022246" y="850092"/>
+                  </a:lnTo>
+                  <a:lnTo>
+                    <a:pt x="2092590" y="865749"/>
+                  </a:lnTo>
+                  <a:lnTo>
+                    <a:pt x="2162935" y="880803"/>
+                  </a:lnTo>
+                  <a:lnTo>
+                    <a:pt x="2233279" y="895279"/>
+                  </a:lnTo>
+                  <a:lnTo>
+                    <a:pt x="2303624" y="909198"/>
+                  </a:lnTo>
+                  <a:lnTo>
+                    <a:pt x="2373968" y="922582"/>
+                  </a:lnTo>
+                  <a:lnTo>
+                    <a:pt x="2444313" y="935451"/>
+                  </a:lnTo>
+                  <a:lnTo>
+                    <a:pt x="2514657" y="947825"/>
+                  </a:lnTo>
+                  <a:lnTo>
+                    <a:pt x="2585002" y="958109"/>
+                  </a:lnTo>
+                  <a:lnTo>
+                    <a:pt x="2655346" y="959629"/>
+                  </a:lnTo>
+                  <a:lnTo>
+                    <a:pt x="2725691" y="961140"/>
+                  </a:lnTo>
+                  <a:lnTo>
+                    <a:pt x="2796035" y="962644"/>
+                  </a:lnTo>
+                  <a:lnTo>
+                    <a:pt x="2866380" y="964140"/>
+                  </a:lnTo>
+                  <a:lnTo>
+                    <a:pt x="2936724" y="965629"/>
+                  </a:lnTo>
+                  <a:lnTo>
+                    <a:pt x="3007069" y="967110"/>
+                  </a:lnTo>
+                  <a:lnTo>
+                    <a:pt x="3077413" y="968584"/>
+                  </a:lnTo>
+                  <a:lnTo>
+                    <a:pt x="3147758" y="970050"/>
+                  </a:lnTo>
+                  <a:lnTo>
+                    <a:pt x="3218102" y="971508"/>
+                  </a:lnTo>
+                  <a:lnTo>
+                    <a:pt x="3288447" y="972960"/>
+                  </a:lnTo>
+                  <a:lnTo>
+                    <a:pt x="3358791" y="974404"/>
+                  </a:lnTo>
+                  <a:lnTo>
+                    <a:pt x="3429136" y="975840"/>
+                  </a:lnTo>
+                  <a:lnTo>
+                    <a:pt x="3499480" y="977269"/>
+                  </a:lnTo>
+                  <a:lnTo>
+                    <a:pt x="3569825" y="978691"/>
+                  </a:lnTo>
+                  <a:lnTo>
+                    <a:pt x="3640169" y="980106"/>
+                  </a:lnTo>
+                  <a:lnTo>
+                    <a:pt x="3710514" y="981514"/>
+                  </a:lnTo>
+                  <a:lnTo>
+                    <a:pt x="3780858" y="982914"/>
+                  </a:lnTo>
+                  <a:lnTo>
+                    <a:pt x="3851202" y="984307"/>
+                  </a:lnTo>
+                  <a:lnTo>
+                    <a:pt x="3921547" y="985693"/>
+                  </a:lnTo>
+                  <a:lnTo>
+                    <a:pt x="3991891" y="987073"/>
+                  </a:lnTo>
+                  <a:lnTo>
+                    <a:pt x="4062236" y="988445"/>
+                  </a:lnTo>
+                  <a:lnTo>
+                    <a:pt x="4132580" y="989810"/>
+                  </a:lnTo>
+                  <a:lnTo>
+                    <a:pt x="4202925" y="991168"/>
+                  </a:lnTo>
+                  <a:lnTo>
+                    <a:pt x="4273269" y="992520"/>
+                  </a:lnTo>
+                  <a:lnTo>
+                    <a:pt x="4343614" y="993864"/>
+                  </a:lnTo>
+                  <a:lnTo>
+                    <a:pt x="4413958" y="995202"/>
+                  </a:lnTo>
+                  <a:lnTo>
+                    <a:pt x="4484303" y="996533"/>
+                  </a:lnTo>
+                  <a:lnTo>
+                    <a:pt x="4554647" y="997857"/>
+                  </a:lnTo>
+                  <a:lnTo>
+                    <a:pt x="4624992" y="999174"/>
+                  </a:lnTo>
+                  <a:lnTo>
+                    <a:pt x="4695336" y="1000485"/>
+                  </a:lnTo>
+                  <a:lnTo>
+                    <a:pt x="4765681" y="1001789"/>
+                  </a:lnTo>
+                  <a:lnTo>
+                    <a:pt x="4836025" y="1003086"/>
+                  </a:lnTo>
+                  <a:lnTo>
+                    <a:pt x="4906370" y="1004377"/>
+                  </a:lnTo>
+                  <a:lnTo>
+                    <a:pt x="4976714" y="1005661"/>
+                  </a:lnTo>
+                  <a:lnTo>
+                    <a:pt x="5047059" y="1006939"/>
+                  </a:lnTo>
+                  <a:lnTo>
+                    <a:pt x="5117403" y="1008210"/>
+                  </a:lnTo>
+                  <a:lnTo>
+                    <a:pt x="5187748" y="1009475"/>
+                  </a:lnTo>
+                  <a:lnTo>
+                    <a:pt x="5258092" y="1010734"/>
+                  </a:lnTo>
+                  <a:lnTo>
+                    <a:pt x="5328437" y="1011986"/>
+                  </a:lnTo>
+                  <a:lnTo>
+                    <a:pt x="5398781" y="1013231"/>
+                  </a:lnTo>
+                  <a:lnTo>
+                    <a:pt x="5469126" y="1014470"/>
+                  </a:lnTo>
+                  <a:lnTo>
+                    <a:pt x="5539470" y="1015703"/>
+                  </a:lnTo>
+                  <a:lnTo>
+                    <a:pt x="5609815" y="1016930"/>
+                  </a:lnTo>
+                  <a:lnTo>
+                    <a:pt x="5680159" y="1018151"/>
+                  </a:lnTo>
+                  <a:lnTo>
+                    <a:pt x="5750504" y="1019365"/>
+                  </a:lnTo>
+                  <a:lnTo>
+                    <a:pt x="5820848" y="1020573"/>
+                  </a:lnTo>
+                  <a:lnTo>
+                    <a:pt x="5891193" y="1021775"/>
+                  </a:lnTo>
+                  <a:lnTo>
+                    <a:pt x="5961537" y="1022971"/>
+                  </a:lnTo>
+                  <a:lnTo>
+                    <a:pt x="6031882" y="1024161"/>
+                  </a:lnTo>
+                  <a:lnTo>
+                    <a:pt x="6102226" y="1025345"/>
+                  </a:lnTo>
+                  <a:lnTo>
+                    <a:pt x="6172571" y="1026522"/>
+                  </a:lnTo>
+                  <a:lnTo>
+                    <a:pt x="6242915" y="1027694"/>
+                  </a:lnTo>
+                </a:path>
+              </a:pathLst>
+            </a:custGeom>
+          </p:spPr>
+          <p:txBody>
+            <a:bodyPr/>
+            <a:lstStyle/>
+            <a:p/>
+          </p:txBody>
+        </p:sp>
+        <p:sp>
+          <p:nvSpPr>
+            <p:cNvPr id="69" name="pl69"/>
+            <p:cNvSpPr/>
+            <p:nvPr/>
+          </p:nvSpPr>
+          <p:spPr>
+            <a:xfrm>
+              <a:off x="1235312" y="5213711"/>
+              <a:ext cx="6964104" cy="341267"/>
+            </a:xfrm>
+            <a:custGeom>
+              <a:avLst/>
+              <a:pathLst>
+                <a:path w="6964104" h="341267">
+                  <a:moveTo>
+                    <a:pt x="6964104" y="341267"/>
+                  </a:moveTo>
+                  <a:lnTo>
+                    <a:pt x="6893760" y="339719"/>
+                  </a:lnTo>
+                  <a:lnTo>
+                    <a:pt x="6823415" y="338109"/>
+                  </a:lnTo>
+                  <a:lnTo>
+                    <a:pt x="6753071" y="336434"/>
+                  </a:lnTo>
+                  <a:lnTo>
+                    <a:pt x="6682726" y="334693"/>
+                  </a:lnTo>
+                  <a:lnTo>
+                    <a:pt x="6612382" y="332882"/>
+                  </a:lnTo>
+                  <a:lnTo>
+                    <a:pt x="6542037" y="330998"/>
+                  </a:lnTo>
+                  <a:lnTo>
+                    <a:pt x="6471693" y="329039"/>
+                  </a:lnTo>
+                  <a:lnTo>
+                    <a:pt x="6401348" y="327002"/>
+                  </a:lnTo>
+                  <a:lnTo>
+                    <a:pt x="6331004" y="324883"/>
+                  </a:lnTo>
+                  <a:lnTo>
+                    <a:pt x="6260659" y="322680"/>
+                  </a:lnTo>
+                  <a:lnTo>
+                    <a:pt x="6190315" y="320388"/>
+                  </a:lnTo>
+                  <a:lnTo>
+                    <a:pt x="6119970" y="318005"/>
+                  </a:lnTo>
+                  <a:lnTo>
+                    <a:pt x="6049626" y="315526"/>
+                  </a:lnTo>
+                  <a:lnTo>
+                    <a:pt x="5979281" y="312949"/>
+                  </a:lnTo>
+                  <a:lnTo>
+                    <a:pt x="5908937" y="310268"/>
+                  </a:lnTo>
+                  <a:lnTo>
+                    <a:pt x="5838592" y="307480"/>
+                  </a:lnTo>
+                  <a:lnTo>
+                    <a:pt x="5768248" y="304580"/>
+                  </a:lnTo>
+                  <a:lnTo>
+                    <a:pt x="5697903" y="301565"/>
+                  </a:lnTo>
+                  <a:lnTo>
+                    <a:pt x="5627559" y="298429"/>
+                  </a:lnTo>
+                  <a:lnTo>
+                    <a:pt x="5557214" y="295167"/>
+                  </a:lnTo>
+                  <a:lnTo>
+                    <a:pt x="5486870" y="291775"/>
+                  </a:lnTo>
+                  <a:lnTo>
+                    <a:pt x="5416525" y="288247"/>
+                  </a:lnTo>
+                  <a:lnTo>
+                    <a:pt x="5346181" y="284579"/>
+                  </a:lnTo>
+                  <a:lnTo>
+                    <a:pt x="5275836" y="280763"/>
+                  </a:lnTo>
+                  <a:lnTo>
+                    <a:pt x="5205492" y="276795"/>
+                  </a:lnTo>
+                  <a:lnTo>
+                    <a:pt x="5135147" y="272668"/>
+                  </a:lnTo>
+                  <a:lnTo>
+                    <a:pt x="5064803" y="268376"/>
+                  </a:lnTo>
+                  <a:lnTo>
+                    <a:pt x="4994458" y="263913"/>
+                  </a:lnTo>
+                  <a:lnTo>
+                    <a:pt x="4924114" y="259271"/>
+                  </a:lnTo>
+                  <a:lnTo>
+                    <a:pt x="4853769" y="254443"/>
+                  </a:lnTo>
+                  <a:lnTo>
+                    <a:pt x="4783425" y="249422"/>
+                  </a:lnTo>
+                  <a:lnTo>
+                    <a:pt x="4713080" y="244200"/>
+                  </a:lnTo>
+                  <a:lnTo>
+                    <a:pt x="4642736" y="238770"/>
+                  </a:lnTo>
+                  <a:lnTo>
+                    <a:pt x="4572391" y="233122"/>
+                  </a:lnTo>
+                  <a:lnTo>
+                    <a:pt x="4502047" y="227248"/>
+                  </a:lnTo>
+                  <a:lnTo>
+                    <a:pt x="4431702" y="221140"/>
+                  </a:lnTo>
+                  <a:lnTo>
+                    <a:pt x="4361358" y="214787"/>
+                  </a:lnTo>
+                  <a:lnTo>
+                    <a:pt x="4291013" y="208180"/>
+                  </a:lnTo>
+                  <a:lnTo>
+                    <a:pt x="4220669" y="201309"/>
+                  </a:lnTo>
+                  <a:lnTo>
+                    <a:pt x="4150324" y="194163"/>
+                  </a:lnTo>
+                  <a:lnTo>
+                    <a:pt x="4079980" y="186731"/>
+                  </a:lnTo>
+                  <a:lnTo>
+                    <a:pt x="4009635" y="179002"/>
+                  </a:lnTo>
+                  <a:lnTo>
+                    <a:pt x="3939291" y="170964"/>
+                  </a:lnTo>
+                  <a:lnTo>
+                    <a:pt x="3868946" y="162604"/>
+                  </a:lnTo>
+                  <a:lnTo>
+                    <a:pt x="3798602" y="153910"/>
+                  </a:lnTo>
+                  <a:lnTo>
+                    <a:pt x="3728257" y="144868"/>
+                  </a:lnTo>
+                  <a:lnTo>
+                    <a:pt x="3657913" y="135465"/>
+                  </a:lnTo>
+                  <a:lnTo>
+                    <a:pt x="3587569" y="125685"/>
+                  </a:lnTo>
+                  <a:lnTo>
+                    <a:pt x="3517224" y="115514"/>
+                  </a:lnTo>
+                  <a:lnTo>
+                    <a:pt x="3446880" y="104937"/>
+                  </a:lnTo>
+                  <a:lnTo>
+                    <a:pt x="3376535" y="93936"/>
+                  </a:lnTo>
+                  <a:lnTo>
+                    <a:pt x="3306191" y="82495"/>
+                  </a:lnTo>
+                  <a:lnTo>
+                    <a:pt x="3235846" y="79355"/>
+                  </a:lnTo>
+                  <a:lnTo>
+                    <a:pt x="3165502" y="77820"/>
+                  </a:lnTo>
+                  <a:lnTo>
+                    <a:pt x="3095157" y="76277"/>
+                  </a:lnTo>
+                  <a:lnTo>
+                    <a:pt x="3024813" y="74727"/>
+                  </a:lnTo>
+                  <a:lnTo>
+                    <a:pt x="2954468" y="73168"/>
+                  </a:lnTo>
+                  <a:lnTo>
+                    <a:pt x="2884124" y="71602"/>
+                  </a:lnTo>
+                  <a:lnTo>
+                    <a:pt x="2813779" y="70028"/>
+                  </a:lnTo>
+                  <a:lnTo>
+                    <a:pt x="2743435" y="68445"/>
+                  </a:lnTo>
+                  <a:lnTo>
+                    <a:pt x="2673090" y="66855"/>
+                  </a:lnTo>
+                  <a:lnTo>
+                    <a:pt x="2602746" y="65256"/>
+                  </a:lnTo>
+                  <a:lnTo>
+                    <a:pt x="2532401" y="63649"/>
+                  </a:lnTo>
+                  <a:lnTo>
+                    <a:pt x="2462057" y="62034"/>
+                  </a:lnTo>
+                  <a:lnTo>
+                    <a:pt x="2391712" y="60411"/>
+                  </a:lnTo>
+                  <a:lnTo>
+                    <a:pt x="2321368" y="58779"/>
+                  </a:lnTo>
+                  <a:lnTo>
+                    <a:pt x="2251023" y="57139"/>
+                  </a:lnTo>
+                  <a:lnTo>
+                    <a:pt x="2180679" y="55491"/>
+                  </a:lnTo>
+                  <a:lnTo>
+                    <a:pt x="2110334" y="53834"/>
+                  </a:lnTo>
+                  <a:lnTo>
+                    <a:pt x="2039990" y="52169"/>
+                  </a:lnTo>
+                  <a:lnTo>
+                    <a:pt x="1969645" y="50496"/>
+                  </a:lnTo>
+                  <a:lnTo>
+                    <a:pt x="1899301" y="48813"/>
+                  </a:lnTo>
+                  <a:lnTo>
+                    <a:pt x="1828956" y="47123"/>
+                  </a:lnTo>
+                  <a:lnTo>
+                    <a:pt x="1758612" y="45423"/>
+                  </a:lnTo>
+                  <a:lnTo>
+                    <a:pt x="1688267" y="43715"/>
+                  </a:lnTo>
+                  <a:lnTo>
+                    <a:pt x="1617923" y="41998"/>
+                  </a:lnTo>
+                  <a:lnTo>
+                    <a:pt x="1547578" y="40273"/>
+                  </a:lnTo>
+                  <a:lnTo>
+                    <a:pt x="1477234" y="38538"/>
+                  </a:lnTo>
+                  <a:lnTo>
+                    <a:pt x="1406889" y="36795"/>
+                  </a:lnTo>
+                  <a:lnTo>
+                    <a:pt x="1336545" y="35043"/>
+                  </a:lnTo>
+                  <a:lnTo>
+                    <a:pt x="1266200" y="33282"/>
+                  </a:lnTo>
+                  <a:lnTo>
+                    <a:pt x="1195856" y="31512"/>
+                  </a:lnTo>
+                  <a:lnTo>
+                    <a:pt x="1125511" y="29733"/>
+                  </a:lnTo>
+                  <a:lnTo>
+                    <a:pt x="1055167" y="27945"/>
+                  </a:lnTo>
+                  <a:lnTo>
+                    <a:pt x="984822" y="26147"/>
+                  </a:lnTo>
+                  <a:lnTo>
+                    <a:pt x="914478" y="24341"/>
+                  </a:lnTo>
+                  <a:lnTo>
+                    <a:pt x="844133" y="22525"/>
+                  </a:lnTo>
+                  <a:lnTo>
+                    <a:pt x="773789" y="20700"/>
+                  </a:lnTo>
+                  <a:lnTo>
+                    <a:pt x="703444" y="18866"/>
+                  </a:lnTo>
+                  <a:lnTo>
+                    <a:pt x="633100" y="17022"/>
+                  </a:lnTo>
+                  <a:lnTo>
+                    <a:pt x="562755" y="15169"/>
+                  </a:lnTo>
+                  <a:lnTo>
+                    <a:pt x="492411" y="13306"/>
+                  </a:lnTo>
+                  <a:lnTo>
+                    <a:pt x="422066" y="11434"/>
+                  </a:lnTo>
+                  <a:lnTo>
+                    <a:pt x="351722" y="9553"/>
+                  </a:lnTo>
+                  <a:lnTo>
+                    <a:pt x="281377" y="7661"/>
+                  </a:lnTo>
+                  <a:lnTo>
+                    <a:pt x="211033" y="5761"/>
+                  </a:lnTo>
+                  <a:lnTo>
+                    <a:pt x="140688" y="3850"/>
+                  </a:lnTo>
+                  <a:lnTo>
+                    <a:pt x="70344" y="1930"/>
+                  </a:lnTo>
+                  <a:lnTo>
+                    <a:pt x="0" y="0"/>
+                  </a:lnTo>
+                </a:path>
+              </a:pathLst>
+            </a:custGeom>
+          </p:spPr>
+          <p:txBody>
+            <a:bodyPr/>
+            <a:lstStyle/>
+            <a:p/>
+          </p:txBody>
+        </p:sp>
+        <p:sp>
+          <p:nvSpPr>
+            <p:cNvPr id="70" name="pl70"/>
+            <p:cNvSpPr/>
+            <p:nvPr/>
+          </p:nvSpPr>
+          <p:spPr>
+            <a:xfrm>
+              <a:off x="1235312" y="4748686"/>
+              <a:ext cx="6964104" cy="750746"/>
+            </a:xfrm>
+            <a:custGeom>
+              <a:avLst/>
+              <a:pathLst>
+                <a:path w="6964104" h="750746">
+                  <a:moveTo>
+                    <a:pt x="0" y="0"/>
+                  </a:moveTo>
+                  <a:lnTo>
+                    <a:pt x="70344" y="18515"/>
+                  </a:lnTo>
+                  <a:lnTo>
+                    <a:pt x="140688" y="36624"/>
+                  </a:lnTo>
+                  <a:lnTo>
+                    <a:pt x="211033" y="54337"/>
+                  </a:lnTo>
+                  <a:lnTo>
+                    <a:pt x="281377" y="71661"/>
+                  </a:lnTo>
+                  <a:lnTo>
+                    <a:pt x="351722" y="88606"/>
+                  </a:lnTo>
+                  <a:lnTo>
+                    <a:pt x="422066" y="105180"/>
+                  </a:lnTo>
+                  <a:lnTo>
+                    <a:pt x="492411" y="121391"/>
+                  </a:lnTo>
+                  <a:lnTo>
+                    <a:pt x="562755" y="137246"/>
+                  </a:lnTo>
+                  <a:lnTo>
+                    <a:pt x="633100" y="152754"/>
+                  </a:lnTo>
+                  <a:lnTo>
+                    <a:pt x="703444" y="167922"/>
+                  </a:lnTo>
+                  <a:lnTo>
+                    <a:pt x="773789" y="182758"/>
+                  </a:lnTo>
+                  <a:lnTo>
+                    <a:pt x="844133" y="197268"/>
+                  </a:lnTo>
+                  <a:lnTo>
+                    <a:pt x="914478" y="211461"/>
+                  </a:lnTo>
+                  <a:lnTo>
+                    <a:pt x="984822" y="225343"/>
+                  </a:lnTo>
+                  <a:lnTo>
+                    <a:pt x="1055167" y="238920"/>
+                  </a:lnTo>
+                  <a:lnTo>
+                    <a:pt x="1125511" y="252200"/>
+                  </a:lnTo>
+                  <a:lnTo>
+                    <a:pt x="1195856" y="265190"/>
+                  </a:lnTo>
+                  <a:lnTo>
+                    <a:pt x="1266200" y="277894"/>
+                  </a:lnTo>
+                  <a:lnTo>
+                    <a:pt x="1336545" y="290320"/>
+                  </a:lnTo>
+                  <a:lnTo>
+                    <a:pt x="1406889" y="302474"/>
+                  </a:lnTo>
+                  <a:lnTo>
+                    <a:pt x="1477234" y="314362"/>
+                  </a:lnTo>
+                  <a:lnTo>
+                    <a:pt x="1547578" y="325989"/>
+                  </a:lnTo>
+                  <a:lnTo>
+                    <a:pt x="1617923" y="337361"/>
+                  </a:lnTo>
+                  <a:lnTo>
+                    <a:pt x="1688267" y="348484"/>
+                  </a:lnTo>
+                  <a:lnTo>
+                    <a:pt x="1758612" y="359363"/>
+                  </a:lnTo>
+                  <a:lnTo>
+                    <a:pt x="1828956" y="370004"/>
+                  </a:lnTo>
+                  <a:lnTo>
+                    <a:pt x="1899301" y="380412"/>
+                  </a:lnTo>
+                  <a:lnTo>
+                    <a:pt x="1969645" y="390592"/>
+                  </a:lnTo>
+                  <a:lnTo>
+                    <a:pt x="2039990" y="400549"/>
+                  </a:lnTo>
+                  <a:lnTo>
+                    <a:pt x="2110334" y="410287"/>
+                  </a:lnTo>
+                  <a:lnTo>
+                    <a:pt x="2180679" y="419812"/>
+                  </a:lnTo>
+                  <a:lnTo>
+                    <a:pt x="2251023" y="429129"/>
+                  </a:lnTo>
+                  <a:lnTo>
+                    <a:pt x="2321368" y="438241"/>
+                  </a:lnTo>
+                  <a:lnTo>
+                    <a:pt x="2391712" y="447154"/>
+                  </a:lnTo>
+                  <a:lnTo>
+                    <a:pt x="2462057" y="455871"/>
+                  </a:lnTo>
+                  <a:lnTo>
+                    <a:pt x="2532401" y="464398"/>
+                  </a:lnTo>
+                  <a:lnTo>
+                    <a:pt x="2602746" y="472737"/>
+                  </a:lnTo>
+                  <a:lnTo>
+                    <a:pt x="2673090" y="480894"/>
+                  </a:lnTo>
+                  <a:lnTo>
+                    <a:pt x="2743435" y="488872"/>
+                  </a:lnTo>
+                  <a:lnTo>
+                    <a:pt x="2813779" y="496675"/>
+                  </a:lnTo>
+                  <a:lnTo>
+                    <a:pt x="2884124" y="504308"/>
+                  </a:lnTo>
+                  <a:lnTo>
+                    <a:pt x="2954468" y="511773"/>
+                  </a:lnTo>
+                  <a:lnTo>
+                    <a:pt x="3024813" y="519074"/>
+                  </a:lnTo>
+                  <a:lnTo>
+                    <a:pt x="3095157" y="526216"/>
+                  </a:lnTo>
+                  <a:lnTo>
+                    <a:pt x="3165502" y="533201"/>
+                  </a:lnTo>
+                  <a:lnTo>
+                    <a:pt x="3235846" y="540033"/>
+                  </a:lnTo>
+                  <a:lnTo>
+                    <a:pt x="3306191" y="546715"/>
+                  </a:lnTo>
+                  <a:lnTo>
+                    <a:pt x="3376535" y="553251"/>
+                  </a:lnTo>
+                  <a:lnTo>
+                    <a:pt x="3446880" y="559643"/>
+                  </a:lnTo>
+                  <a:lnTo>
+                    <a:pt x="3517224" y="565896"/>
+                  </a:lnTo>
+                  <a:lnTo>
+                    <a:pt x="3587569" y="572011"/>
+                  </a:lnTo>
+                  <a:lnTo>
+                    <a:pt x="3657913" y="577993"/>
+                  </a:lnTo>
+                  <a:lnTo>
+                    <a:pt x="3728257" y="583844"/>
+                  </a:lnTo>
+                  <a:lnTo>
+                    <a:pt x="3798602" y="589566"/>
+                  </a:lnTo>
+                  <a:lnTo>
+                    <a:pt x="3868946" y="595163"/>
+                  </a:lnTo>
+                  <a:lnTo>
+                    <a:pt x="3939291" y="600637"/>
+                  </a:lnTo>
+                  <a:lnTo>
+                    <a:pt x="4009635" y="605991"/>
+                  </a:lnTo>
+                  <a:lnTo>
+                    <a:pt x="4079980" y="611228"/>
+                  </a:lnTo>
+                  <a:lnTo>
+                    <a:pt x="4150324" y="616351"/>
+                  </a:lnTo>
+                  <a:lnTo>
+                    <a:pt x="4220669" y="621361"/>
+                  </a:lnTo>
+                  <a:lnTo>
+                    <a:pt x="4291013" y="626261"/>
+                  </a:lnTo>
+                  <a:lnTo>
+                    <a:pt x="4361358" y="631054"/>
+                  </a:lnTo>
+                  <a:lnTo>
+                    <a:pt x="4431702" y="635742"/>
+                  </a:lnTo>
+                  <a:lnTo>
+                    <a:pt x="4502047" y="640327"/>
+                  </a:lnTo>
+                  <a:lnTo>
+                    <a:pt x="4572391" y="644812"/>
+                  </a:lnTo>
+                  <a:lnTo>
+                    <a:pt x="4642736" y="649198"/>
+                  </a:lnTo>
+                  <a:lnTo>
+                    <a:pt x="4713080" y="653488"/>
+                  </a:lnTo>
+                  <a:lnTo>
+                    <a:pt x="4783425" y="657685"/>
+                  </a:lnTo>
+                  <a:lnTo>
+                    <a:pt x="4853769" y="661789"/>
+                  </a:lnTo>
+                  <a:lnTo>
+                    <a:pt x="4924114" y="665803"/>
+                  </a:lnTo>
+                  <a:lnTo>
+                    <a:pt x="4994458" y="669730"/>
+                  </a:lnTo>
+                  <a:lnTo>
+                    <a:pt x="5064803" y="673570"/>
+                  </a:lnTo>
+                  <a:lnTo>
+                    <a:pt x="5135147" y="677326"/>
+                  </a:lnTo>
+                  <a:lnTo>
+                    <a:pt x="5205492" y="681000"/>
+                  </a:lnTo>
+                  <a:lnTo>
+                    <a:pt x="5275836" y="684594"/>
+                  </a:lnTo>
+                  <a:lnTo>
+                    <a:pt x="5346181" y="688109"/>
+                  </a:lnTo>
+                  <a:lnTo>
+                    <a:pt x="5416525" y="691546"/>
+                  </a:lnTo>
+                  <a:lnTo>
+                    <a:pt x="5486870" y="694909"/>
+                  </a:lnTo>
+                  <a:lnTo>
+                    <a:pt x="5557214" y="698197"/>
+                  </a:lnTo>
+                  <a:lnTo>
+                    <a:pt x="5627559" y="701414"/>
+                  </a:lnTo>
+                  <a:lnTo>
+                    <a:pt x="5697903" y="704560"/>
+                  </a:lnTo>
+                  <a:lnTo>
+                    <a:pt x="5768248" y="707637"/>
+                  </a:lnTo>
+                  <a:lnTo>
+                    <a:pt x="5838592" y="710647"/>
+                  </a:lnTo>
+                  <a:lnTo>
+                    <a:pt x="5908937" y="713591"/>
+                  </a:lnTo>
+                  <a:lnTo>
+                    <a:pt x="5979281" y="716470"/>
+                  </a:lnTo>
+                  <a:lnTo>
+                    <a:pt x="6049626" y="719287"/>
+                  </a:lnTo>
+                  <a:lnTo>
+                    <a:pt x="6119970" y="722041"/>
+                  </a:lnTo>
+                  <a:lnTo>
+                    <a:pt x="6190315" y="724735"/>
+                  </a:lnTo>
+                  <a:lnTo>
+                    <a:pt x="6260659" y="727371"/>
+                  </a:lnTo>
+                  <a:lnTo>
+                    <a:pt x="6331004" y="729948"/>
+                  </a:lnTo>
+                  <a:lnTo>
+                    <a:pt x="6401348" y="732469"/>
+                  </a:lnTo>
+                  <a:lnTo>
+                    <a:pt x="6471693" y="734935"/>
+                  </a:lnTo>
+                  <a:lnTo>
+                    <a:pt x="6542037" y="737346"/>
+                  </a:lnTo>
+                  <a:lnTo>
+                    <a:pt x="6612382" y="739705"/>
+                  </a:lnTo>
+                  <a:lnTo>
+                    <a:pt x="6682726" y="742012"/>
+                  </a:lnTo>
+                  <a:lnTo>
+                    <a:pt x="6753071" y="744269"/>
+                  </a:lnTo>
+                  <a:lnTo>
+                    <a:pt x="6823415" y="746476"/>
+                  </a:lnTo>
+                  <a:lnTo>
+                    <a:pt x="6893760" y="748635"/>
+                  </a:lnTo>
+                  <a:lnTo>
+                    <a:pt x="6964104" y="750746"/>
+                  </a:lnTo>
+                </a:path>
+              </a:pathLst>
+            </a:custGeom>
+            <a:ln w="27101" cap="flat">
+              <a:solidFill>
+                <a:srgbClr val="FF8C00">
+                  <a:alpha val="100000"/>
+                </a:srgbClr>
+              </a:solidFill>
+              <a:prstDash val="solid"/>
+              <a:round/>
+            </a:ln>
+          </p:spPr>
+          <p:txBody>
+            <a:bodyPr/>
+            <a:lstStyle/>
+            <a:p/>
+          </p:txBody>
+        </p:sp>
+        <p:sp>
+          <p:nvSpPr>
+            <p:cNvPr id="71" name="pl71"/>
+            <p:cNvSpPr/>
+            <p:nvPr/>
+          </p:nvSpPr>
+          <p:spPr>
+            <a:xfrm>
+              <a:off x="887106" y="5294352"/>
+              <a:ext cx="7660515" cy="0"/>
+            </a:xfrm>
+            <a:custGeom>
+              <a:avLst/>
+              <a:pathLst>
+                <a:path w="7660515" h="0">
+                  <a:moveTo>
+                    <a:pt x="0" y="0"/>
+                  </a:moveTo>
+                  <a:lnTo>
+                    <a:pt x="7660515" y="0"/>
+                  </a:lnTo>
+                  <a:lnTo>
+                    <a:pt x="7660515" y="0"/>
+                  </a:lnTo>
+                </a:path>
+              </a:pathLst>
+            </a:custGeom>
+            <a:ln w="13550" cap="flat">
+              <a:solidFill>
+                <a:srgbClr val="7F7F7F">
+                  <a:alpha val="100000"/>
+                </a:srgbClr>
+              </a:solidFill>
+              <a:prstDash val="dash"/>
+              <a:round/>
+            </a:ln>
+          </p:spPr>
+          <p:txBody>
+            <a:bodyPr/>
+            <a:lstStyle/>
+            <a:p/>
+          </p:txBody>
+        </p:sp>
+        <p:sp>
+          <p:nvSpPr>
+            <p:cNvPr id="72" name="pl72"/>
+            <p:cNvSpPr/>
+            <p:nvPr/>
+          </p:nvSpPr>
+          <p:spPr>
+            <a:xfrm>
+              <a:off x="4530353" y="4336484"/>
+              <a:ext cx="0" cy="1317069"/>
+            </a:xfrm>
+            <a:custGeom>
+              <a:avLst/>
+              <a:pathLst>
+                <a:path w="0" h="1317069">
+                  <a:moveTo>
+                    <a:pt x="0" y="1317069"/>
+                  </a:moveTo>
+                  <a:lnTo>
+                    <a:pt x="0" y="0"/>
+                  </a:lnTo>
+                  <a:lnTo>
+                    <a:pt x="0" y="0"/>
+                  </a:lnTo>
+                </a:path>
+              </a:pathLst>
+            </a:custGeom>
+            <a:ln w="13550" cap="flat">
+              <a:solidFill>
+                <a:srgbClr val="666666">
+                  <a:alpha val="100000"/>
+                </a:srgbClr>
+              </a:solidFill>
+              <a:prstDash val="dot"/>
+              <a:round/>
+            </a:ln>
+          </p:spPr>
+          <p:txBody>
+            <a:bodyPr/>
+            <a:lstStyle/>
+            <a:p/>
+          </p:txBody>
+        </p:sp>
+        <p:sp>
+          <p:nvSpPr>
+            <p:cNvPr id="73" name="tx73"/>
+            <p:cNvSpPr/>
+            <p:nvPr/>
+          </p:nvSpPr>
+          <p:spPr>
+            <a:xfrm>
+              <a:off x="762297" y="5553636"/>
+              <a:ext cx="62179" cy="80101"/>
+            </a:xfrm>
+            <a:prstGeom prst="rect">
+              <a:avLst/>
+            </a:prstGeom>
+            <a:noFill/>
+          </p:spPr>
+          <p:txBody>
+            <a:bodyPr lIns="0" rIns="0" tIns="0" bIns="0" anchorCtr="1" anchor="ctr" wrap="none"/>
+            <a:lstStyle/>
+            <a:p>
+              <a:pPr algn="l" marL="0" marR="0" indent="0">
+                <a:lnSpc>
+                  <a:spcPts val="880"/>
+                </a:lnSpc>
+                <a:spcBef>
+                  <a:spcPts val="0"/>
+                </a:spcBef>
+                <a:spcAft>
+                  <a:spcPts val="0"/>
+                </a:spcAft>
+              </a:pPr>
+              <a:r>
+                <a:rPr sz="880">
+                  <a:solidFill>
+                    <a:srgbClr val="4D4D4D">
+                      <a:alpha val="100000"/>
+                    </a:srgbClr>
+                  </a:solidFill>
+                  <a:latin typeface="Helvetica"/>
+                  <a:cs typeface="Helvetica"/>
+                </a:rPr>
+                <a:t>0</a:t>
+              </a:r>
+            </a:p>
+          </p:txBody>
+        </p:sp>
+        <p:sp>
+          <p:nvSpPr>
+            <p:cNvPr id="74" name="tx74"/>
+            <p:cNvSpPr/>
+            <p:nvPr/>
+          </p:nvSpPr>
+          <p:spPr>
+            <a:xfrm>
+              <a:off x="762297" y="5254302"/>
+              <a:ext cx="62179" cy="80101"/>
+            </a:xfrm>
+            <a:prstGeom prst="rect">
+              <a:avLst/>
+            </a:prstGeom>
+            <a:noFill/>
+          </p:spPr>
+          <p:txBody>
+            <a:bodyPr lIns="0" rIns="0" tIns="0" bIns="0" anchorCtr="1" anchor="ctr" wrap="none"/>
+            <a:lstStyle/>
+            <a:p>
+              <a:pPr algn="l" marL="0" marR="0" indent="0">
+                <a:lnSpc>
+                  <a:spcPts val="880"/>
+                </a:lnSpc>
+                <a:spcBef>
+                  <a:spcPts val="0"/>
+                </a:spcBef>
+                <a:spcAft>
+                  <a:spcPts val="0"/>
+                </a:spcAft>
+              </a:pPr>
+              <a:r>
+                <a:rPr sz="880">
+                  <a:solidFill>
+                    <a:srgbClr val="4D4D4D">
+                      <a:alpha val="100000"/>
+                    </a:srgbClr>
+                  </a:solidFill>
+                  <a:latin typeface="Helvetica"/>
+                  <a:cs typeface="Helvetica"/>
+                </a:rPr>
+                <a:t>1</a:t>
+              </a:r>
+            </a:p>
+          </p:txBody>
+        </p:sp>
+        <p:sp>
+          <p:nvSpPr>
+            <p:cNvPr id="75" name="tx75"/>
+            <p:cNvSpPr/>
+            <p:nvPr/>
+          </p:nvSpPr>
+          <p:spPr>
+            <a:xfrm>
+              <a:off x="762297" y="4954968"/>
+              <a:ext cx="62179" cy="80101"/>
+            </a:xfrm>
+            <a:prstGeom prst="rect">
+              <a:avLst/>
+            </a:prstGeom>
+            <a:noFill/>
+          </p:spPr>
+          <p:txBody>
+            <a:bodyPr lIns="0" rIns="0" tIns="0" bIns="0" anchorCtr="1" anchor="ctr" wrap="none"/>
+            <a:lstStyle/>
+            <a:p>
+              <a:pPr algn="l" marL="0" marR="0" indent="0">
+                <a:lnSpc>
+                  <a:spcPts val="880"/>
+                </a:lnSpc>
+                <a:spcBef>
+                  <a:spcPts val="0"/>
+                </a:spcBef>
+                <a:spcAft>
+                  <a:spcPts val="0"/>
+                </a:spcAft>
+              </a:pPr>
+              <a:r>
+                <a:rPr sz="880">
+                  <a:solidFill>
+                    <a:srgbClr val="4D4D4D">
+                      <a:alpha val="100000"/>
+                    </a:srgbClr>
+                  </a:solidFill>
+                  <a:latin typeface="Helvetica"/>
+                  <a:cs typeface="Helvetica"/>
+                </a:rPr>
+                <a:t>2</a:t>
+              </a:r>
+            </a:p>
+          </p:txBody>
+        </p:sp>
+        <p:sp>
+          <p:nvSpPr>
+            <p:cNvPr id="76" name="tx76"/>
+            <p:cNvSpPr/>
+            <p:nvPr/>
+          </p:nvSpPr>
+          <p:spPr>
+            <a:xfrm>
+              <a:off x="762297" y="4655634"/>
+              <a:ext cx="62179" cy="80101"/>
+            </a:xfrm>
+            <a:prstGeom prst="rect">
+              <a:avLst/>
+            </a:prstGeom>
+            <a:noFill/>
+          </p:spPr>
+          <p:txBody>
+            <a:bodyPr lIns="0" rIns="0" tIns="0" bIns="0" anchorCtr="1" anchor="ctr" wrap="none"/>
+            <a:lstStyle/>
+            <a:p>
+              <a:pPr algn="l" marL="0" marR="0" indent="0">
+                <a:lnSpc>
+                  <a:spcPts val="880"/>
+                </a:lnSpc>
+                <a:spcBef>
+                  <a:spcPts val="0"/>
+                </a:spcBef>
+                <a:spcAft>
+                  <a:spcPts val="0"/>
+                </a:spcAft>
+              </a:pPr>
+              <a:r>
+                <a:rPr sz="880">
+                  <a:solidFill>
+                    <a:srgbClr val="4D4D4D">
+                      <a:alpha val="100000"/>
+                    </a:srgbClr>
+                  </a:solidFill>
+                  <a:latin typeface="Helvetica"/>
+                  <a:cs typeface="Helvetica"/>
+                </a:rPr>
+                <a:t>3</a:t>
+              </a:r>
+            </a:p>
+          </p:txBody>
+        </p:sp>
+        <p:sp>
+          <p:nvSpPr>
+            <p:cNvPr id="77" name="tx77"/>
+            <p:cNvSpPr/>
+            <p:nvPr/>
+          </p:nvSpPr>
+          <p:spPr>
+            <a:xfrm>
+              <a:off x="762297" y="4356300"/>
+              <a:ext cx="62179" cy="80101"/>
+            </a:xfrm>
+            <a:prstGeom prst="rect">
+              <a:avLst/>
+            </a:prstGeom>
+            <a:noFill/>
+          </p:spPr>
+          <p:txBody>
+            <a:bodyPr lIns="0" rIns="0" tIns="0" bIns="0" anchorCtr="1" anchor="ctr" wrap="none"/>
+            <a:lstStyle/>
+            <a:p>
+              <a:pPr algn="l" marL="0" marR="0" indent="0">
+                <a:lnSpc>
+                  <a:spcPts val="880"/>
+                </a:lnSpc>
+                <a:spcBef>
+                  <a:spcPts val="0"/>
+                </a:spcBef>
+                <a:spcAft>
+                  <a:spcPts val="0"/>
+                </a:spcAft>
+              </a:pPr>
+              <a:r>
+                <a:rPr sz="880">
+                  <a:solidFill>
+                    <a:srgbClr val="4D4D4D">
+                      <a:alpha val="100000"/>
+                    </a:srgbClr>
+                  </a:solidFill>
+                  <a:latin typeface="Helvetica"/>
+                  <a:cs typeface="Helvetica"/>
+                </a:rPr>
+                <a:t>4</a:t>
+              </a:r>
+            </a:p>
+          </p:txBody>
+        </p:sp>
+        <p:sp>
+          <p:nvSpPr>
+            <p:cNvPr id="78" name="tx78"/>
+            <p:cNvSpPr/>
+            <p:nvPr/>
+          </p:nvSpPr>
+          <p:spPr>
+            <a:xfrm>
+              <a:off x="1241001" y="5716183"/>
+              <a:ext cx="161574" cy="80101"/>
+            </a:xfrm>
+            <a:prstGeom prst="rect">
+              <a:avLst/>
+            </a:prstGeom>
+            <a:noFill/>
+          </p:spPr>
+          <p:txBody>
+            <a:bodyPr lIns="0" rIns="0" tIns="0" bIns="0" anchorCtr="1" anchor="ctr" wrap="none"/>
+            <a:lstStyle/>
+            <a:p>
+              <a:pPr algn="l" marL="0" marR="0" indent="0">
+                <a:lnSpc>
+                  <a:spcPts val="880"/>
+                </a:lnSpc>
+                <a:spcBef>
+                  <a:spcPts val="0"/>
+                </a:spcBef>
+                <a:spcAft>
+                  <a:spcPts val="0"/>
+                </a:spcAft>
+              </a:pPr>
+              <a:r>
+                <a:rPr sz="880">
+                  <a:solidFill>
+                    <a:srgbClr val="4D4D4D">
+                      <a:alpha val="100000"/>
+                    </a:srgbClr>
+                  </a:solidFill>
+                  <a:latin typeface="Helvetica"/>
+                  <a:cs typeface="Helvetica"/>
+                </a:rPr>
+                <a:t>-40</a:t>
+              </a:r>
+            </a:p>
+          </p:txBody>
+        </p:sp>
+        <p:sp>
+          <p:nvSpPr>
+            <p:cNvPr id="79" name="tx79"/>
+            <p:cNvSpPr/>
+            <p:nvPr/>
+          </p:nvSpPr>
+          <p:spPr>
+            <a:xfrm>
+              <a:off x="2054602" y="5716183"/>
+              <a:ext cx="161574" cy="80101"/>
+            </a:xfrm>
+            <a:prstGeom prst="rect">
+              <a:avLst/>
+            </a:prstGeom>
+            <a:noFill/>
+          </p:spPr>
+          <p:txBody>
+            <a:bodyPr lIns="0" rIns="0" tIns="0" bIns="0" anchorCtr="1" anchor="ctr" wrap="none"/>
+            <a:lstStyle/>
+            <a:p>
+              <a:pPr algn="l" marL="0" marR="0" indent="0">
+                <a:lnSpc>
+                  <a:spcPts val="880"/>
+                </a:lnSpc>
+                <a:spcBef>
+                  <a:spcPts val="0"/>
+                </a:spcBef>
+                <a:spcAft>
+                  <a:spcPts val="0"/>
+                </a:spcAft>
+              </a:pPr>
+              <a:r>
+                <a:rPr sz="880">
+                  <a:solidFill>
+                    <a:srgbClr val="4D4D4D">
+                      <a:alpha val="100000"/>
+                    </a:srgbClr>
+                  </a:solidFill>
+                  <a:latin typeface="Helvetica"/>
+                  <a:cs typeface="Helvetica"/>
+                </a:rPr>
+                <a:t>-30</a:t>
+              </a:r>
+            </a:p>
+          </p:txBody>
+        </p:sp>
+        <p:sp>
+          <p:nvSpPr>
+            <p:cNvPr id="80" name="tx80"/>
+            <p:cNvSpPr/>
+            <p:nvPr/>
+          </p:nvSpPr>
+          <p:spPr>
+            <a:xfrm>
+              <a:off x="2868203" y="5716183"/>
+              <a:ext cx="161574" cy="80101"/>
+            </a:xfrm>
+            <a:prstGeom prst="rect">
+              <a:avLst/>
+            </a:prstGeom>
+            <a:noFill/>
+          </p:spPr>
+          <p:txBody>
+            <a:bodyPr lIns="0" rIns="0" tIns="0" bIns="0" anchorCtr="1" anchor="ctr" wrap="none"/>
+            <a:lstStyle/>
+            <a:p>
+              <a:pPr algn="l" marL="0" marR="0" indent="0">
+                <a:lnSpc>
+                  <a:spcPts val="880"/>
+                </a:lnSpc>
+                <a:spcBef>
+                  <a:spcPts val="0"/>
+                </a:spcBef>
+                <a:spcAft>
+                  <a:spcPts val="0"/>
+                </a:spcAft>
+              </a:pPr>
+              <a:r>
+                <a:rPr sz="880">
+                  <a:solidFill>
+                    <a:srgbClr val="4D4D4D">
+                      <a:alpha val="100000"/>
+                    </a:srgbClr>
+                  </a:solidFill>
+                  <a:latin typeface="Helvetica"/>
+                  <a:cs typeface="Helvetica"/>
+                </a:rPr>
+                <a:t>-20</a:t>
+              </a:r>
+            </a:p>
+          </p:txBody>
+        </p:sp>
+        <p:sp>
+          <p:nvSpPr>
+            <p:cNvPr id="81" name="tx81"/>
+            <p:cNvSpPr/>
+            <p:nvPr/>
+          </p:nvSpPr>
+          <p:spPr>
+            <a:xfrm>
+              <a:off x="3681805" y="5716183"/>
+              <a:ext cx="161574" cy="80101"/>
+            </a:xfrm>
+            <a:prstGeom prst="rect">
+              <a:avLst/>
+            </a:prstGeom>
+            <a:noFill/>
+          </p:spPr>
+          <p:txBody>
+            <a:bodyPr lIns="0" rIns="0" tIns="0" bIns="0" anchorCtr="1" anchor="ctr" wrap="none"/>
+            <a:lstStyle/>
+            <a:p>
+              <a:pPr algn="l" marL="0" marR="0" indent="0">
+                <a:lnSpc>
+                  <a:spcPts val="880"/>
+                </a:lnSpc>
+                <a:spcBef>
+                  <a:spcPts val="0"/>
+                </a:spcBef>
+                <a:spcAft>
+                  <a:spcPts val="0"/>
+                </a:spcAft>
+              </a:pPr>
+              <a:r>
+                <a:rPr sz="880">
+                  <a:solidFill>
+                    <a:srgbClr val="4D4D4D">
+                      <a:alpha val="100000"/>
+                    </a:srgbClr>
+                  </a:solidFill>
+                  <a:latin typeface="Helvetica"/>
+                  <a:cs typeface="Helvetica"/>
+                </a:rPr>
+                <a:t>-10</a:t>
+              </a:r>
+            </a:p>
+          </p:txBody>
+        </p:sp>
+        <p:sp>
+          <p:nvSpPr>
+            <p:cNvPr id="82" name="tx82"/>
+            <p:cNvSpPr/>
+            <p:nvPr/>
+          </p:nvSpPr>
+          <p:spPr>
+            <a:xfrm>
+              <a:off x="4545104" y="5716183"/>
+              <a:ext cx="62179" cy="80101"/>
+            </a:xfrm>
+            <a:prstGeom prst="rect">
+              <a:avLst/>
+            </a:prstGeom>
+            <a:noFill/>
+          </p:spPr>
+          <p:txBody>
+            <a:bodyPr lIns="0" rIns="0" tIns="0" bIns="0" anchorCtr="1" anchor="ctr" wrap="none"/>
+            <a:lstStyle/>
+            <a:p>
+              <a:pPr algn="l" marL="0" marR="0" indent="0">
+                <a:lnSpc>
+                  <a:spcPts val="880"/>
+                </a:lnSpc>
+                <a:spcBef>
+                  <a:spcPts val="0"/>
+                </a:spcBef>
+                <a:spcAft>
+                  <a:spcPts val="0"/>
+                </a:spcAft>
+              </a:pPr>
+              <a:r>
+                <a:rPr sz="880">
+                  <a:solidFill>
+                    <a:srgbClr val="4D4D4D">
+                      <a:alpha val="100000"/>
+                    </a:srgbClr>
+                  </a:solidFill>
+                  <a:latin typeface="Helvetica"/>
+                  <a:cs typeface="Helvetica"/>
+                </a:rPr>
+                <a:t>0</a:t>
+              </a:r>
+            </a:p>
+          </p:txBody>
+        </p:sp>
+        <p:sp>
+          <p:nvSpPr>
+            <p:cNvPr id="83" name="tx83"/>
+            <p:cNvSpPr/>
+            <p:nvPr/>
+          </p:nvSpPr>
+          <p:spPr>
+            <a:xfrm>
+              <a:off x="5327615" y="5716183"/>
+              <a:ext cx="124358" cy="80101"/>
+            </a:xfrm>
+            <a:prstGeom prst="rect">
+              <a:avLst/>
+            </a:prstGeom>
+            <a:noFill/>
+          </p:spPr>
+          <p:txBody>
+            <a:bodyPr lIns="0" rIns="0" tIns="0" bIns="0" anchorCtr="1" anchor="ctr" wrap="none"/>
+            <a:lstStyle/>
+            <a:p>
+              <a:pPr algn="l" marL="0" marR="0" indent="0">
+                <a:lnSpc>
+                  <a:spcPts val="880"/>
+                </a:lnSpc>
+                <a:spcBef>
+                  <a:spcPts val="0"/>
+                </a:spcBef>
+                <a:spcAft>
+                  <a:spcPts val="0"/>
+                </a:spcAft>
+              </a:pPr>
+              <a:r>
+                <a:rPr sz="880">
+                  <a:solidFill>
+                    <a:srgbClr val="4D4D4D">
+                      <a:alpha val="100000"/>
+                    </a:srgbClr>
+                  </a:solidFill>
+                  <a:latin typeface="Helvetica"/>
+                  <a:cs typeface="Helvetica"/>
+                </a:rPr>
+                <a:t>10</a:t>
+              </a:r>
+            </a:p>
+          </p:txBody>
+        </p:sp>
+        <p:sp>
+          <p:nvSpPr>
+            <p:cNvPr id="84" name="tx84"/>
+            <p:cNvSpPr/>
+            <p:nvPr/>
+          </p:nvSpPr>
+          <p:spPr>
+            <a:xfrm>
+              <a:off x="6141217" y="5716183"/>
+              <a:ext cx="124358" cy="80101"/>
+            </a:xfrm>
+            <a:prstGeom prst="rect">
+              <a:avLst/>
+            </a:prstGeom>
+            <a:noFill/>
+          </p:spPr>
+          <p:txBody>
+            <a:bodyPr lIns="0" rIns="0" tIns="0" bIns="0" anchorCtr="1" anchor="ctr" wrap="none"/>
+            <a:lstStyle/>
+            <a:p>
+              <a:pPr algn="l" marL="0" marR="0" indent="0">
+                <a:lnSpc>
+                  <a:spcPts val="880"/>
+                </a:lnSpc>
+                <a:spcBef>
+                  <a:spcPts val="0"/>
+                </a:spcBef>
+                <a:spcAft>
+                  <a:spcPts val="0"/>
+                </a:spcAft>
+              </a:pPr>
+              <a:r>
+                <a:rPr sz="880">
+                  <a:solidFill>
+                    <a:srgbClr val="4D4D4D">
+                      <a:alpha val="100000"/>
+                    </a:srgbClr>
+                  </a:solidFill>
+                  <a:latin typeface="Helvetica"/>
+                  <a:cs typeface="Helvetica"/>
+                </a:rPr>
+                <a:t>20</a:t>
+              </a:r>
+            </a:p>
+          </p:txBody>
+        </p:sp>
+        <p:sp>
+          <p:nvSpPr>
+            <p:cNvPr id="85" name="tx85"/>
+            <p:cNvSpPr/>
+            <p:nvPr/>
+          </p:nvSpPr>
+          <p:spPr>
+            <a:xfrm>
+              <a:off x="6954818" y="5716183"/>
+              <a:ext cx="124358" cy="80101"/>
+            </a:xfrm>
+            <a:prstGeom prst="rect">
+              <a:avLst/>
+            </a:prstGeom>
+            <a:noFill/>
+          </p:spPr>
+          <p:txBody>
+            <a:bodyPr lIns="0" rIns="0" tIns="0" bIns="0" anchorCtr="1" anchor="ctr" wrap="none"/>
+            <a:lstStyle/>
+            <a:p>
+              <a:pPr algn="l" marL="0" marR="0" indent="0">
+                <a:lnSpc>
+                  <a:spcPts val="880"/>
+                </a:lnSpc>
+                <a:spcBef>
+                  <a:spcPts val="0"/>
+                </a:spcBef>
+                <a:spcAft>
+                  <a:spcPts val="0"/>
+                </a:spcAft>
+              </a:pPr>
+              <a:r>
+                <a:rPr sz="880">
+                  <a:solidFill>
+                    <a:srgbClr val="4D4D4D">
+                      <a:alpha val="100000"/>
+                    </a:srgbClr>
+                  </a:solidFill>
+                  <a:latin typeface="Helvetica"/>
+                  <a:cs typeface="Helvetica"/>
+                </a:rPr>
+                <a:t>30</a:t>
+              </a:r>
+            </a:p>
+          </p:txBody>
+        </p:sp>
+        <p:sp>
+          <p:nvSpPr>
+            <p:cNvPr id="86" name="tx86"/>
+            <p:cNvSpPr/>
+            <p:nvPr/>
+          </p:nvSpPr>
+          <p:spPr>
+            <a:xfrm>
+              <a:off x="7768419" y="5716183"/>
+              <a:ext cx="124358" cy="80101"/>
+            </a:xfrm>
+            <a:prstGeom prst="rect">
+              <a:avLst/>
+            </a:prstGeom>
+            <a:noFill/>
+          </p:spPr>
+          <p:txBody>
+            <a:bodyPr lIns="0" rIns="0" tIns="0" bIns="0" anchorCtr="1" anchor="ctr" wrap="none"/>
+            <a:lstStyle/>
+            <a:p>
+              <a:pPr algn="l" marL="0" marR="0" indent="0">
+                <a:lnSpc>
+                  <a:spcPts val="880"/>
+                </a:lnSpc>
+                <a:spcBef>
+                  <a:spcPts val="0"/>
+                </a:spcBef>
+                <a:spcAft>
+                  <a:spcPts val="0"/>
+                </a:spcAft>
+              </a:pPr>
+              <a:r>
+                <a:rPr sz="880">
+                  <a:solidFill>
+                    <a:srgbClr val="4D4D4D">
+                      <a:alpha val="100000"/>
+                    </a:srgbClr>
+                  </a:solidFill>
+                  <a:latin typeface="Helvetica"/>
+                  <a:cs typeface="Helvetica"/>
+                </a:rPr>
+                <a:t>40</a:t>
+              </a:r>
+            </a:p>
+          </p:txBody>
+        </p:sp>
+        <p:sp>
+          <p:nvSpPr>
+            <p:cNvPr id="87" name="tx87"/>
+            <p:cNvSpPr/>
+            <p:nvPr/>
+          </p:nvSpPr>
+          <p:spPr>
+            <a:xfrm>
+              <a:off x="2928340" y="5855859"/>
+              <a:ext cx="3578047" cy="100218"/>
+            </a:xfrm>
+            <a:prstGeom prst="rect">
+              <a:avLst/>
+            </a:prstGeom>
+            <a:noFill/>
+          </p:spPr>
+          <p:txBody>
+            <a:bodyPr lIns="0" rIns="0" tIns="0" bIns="0" anchorCtr="1" anchor="ctr" wrap="none"/>
+            <a:lstStyle/>
+            <a:p>
+              <a:pPr algn="l" marL="0" marR="0" indent="0">
+                <a:lnSpc>
+                  <a:spcPts val="1100"/>
+                </a:lnSpc>
+                <a:spcBef>
+                  <a:spcPts val="0"/>
+                </a:spcBef>
+                <a:spcAft>
+                  <a:spcPts val="0"/>
+                </a:spcAft>
+              </a:pPr>
+              <a:r>
+                <a:rPr sz="1100">
+                  <a:solidFill>
+                    <a:srgbClr val="000000">
+                      <a:alpha val="100000"/>
+                    </a:srgbClr>
+                  </a:solidFill>
+                  <a:latin typeface="Helvetica"/>
+                  <a:cs typeface="Helvetica"/>
+                </a:rPr>
+                <a:t>eGFR difference (%): 100 × (CKD-EPI Cr-Cys − CG) / CG</a:t>
+              </a:r>
+            </a:p>
+          </p:txBody>
+        </p:sp>
+        <p:sp>
+          <p:nvSpPr>
+            <p:cNvPr id="88" name="tx88"/>
+            <p:cNvSpPr/>
+            <p:nvPr/>
+          </p:nvSpPr>
+          <p:spPr>
+            <a:xfrm rot="-5400000">
+              <a:off x="138035" y="4944909"/>
+              <a:ext cx="1016904" cy="100218"/>
+            </a:xfrm>
+            <a:prstGeom prst="rect">
+              <a:avLst/>
+            </a:prstGeom>
+            <a:noFill/>
+          </p:spPr>
+          <p:txBody>
+            <a:bodyPr lIns="0" rIns="0" tIns="0" bIns="0" anchorCtr="1" anchor="ctr" wrap="none"/>
+            <a:lstStyle/>
+            <a:p>
+              <a:pPr algn="l" marL="0" marR="0" indent="0">
+                <a:lnSpc>
+                  <a:spcPts val="1100"/>
+                </a:lnSpc>
+                <a:spcBef>
+                  <a:spcPts val="0"/>
+                </a:spcBef>
+                <a:spcAft>
+                  <a:spcPts val="0"/>
+                </a:spcAft>
+              </a:pPr>
+              <a:r>
+                <a:rPr sz="1100">
+                  <a:solidFill>
+                    <a:srgbClr val="000000">
+                      <a:alpha val="100000"/>
+                    </a:srgbClr>
+                  </a:solidFill>
+                  <a:latin typeface="Helvetica"/>
+                  <a:cs typeface="Helvetica"/>
+                </a:rPr>
+                <a:t>subHR (95% CI)</a:t>
+              </a:r>
+            </a:p>
+          </p:txBody>
+        </p:sp>
+        <p:sp>
+          <p:nvSpPr>
+            <p:cNvPr id="89" name="tx89"/>
+            <p:cNvSpPr/>
+            <p:nvPr/>
+          </p:nvSpPr>
+          <p:spPr>
+            <a:xfrm>
+              <a:off x="887106" y="4159544"/>
+              <a:ext cx="6985375" cy="82021"/>
+            </a:xfrm>
+            <a:prstGeom prst="rect">
+              <a:avLst/>
+            </a:prstGeom>
+            <a:noFill/>
+          </p:spPr>
+          <p:txBody>
+            <a:bodyPr lIns="0" rIns="0" tIns="0" bIns="0" anchorCtr="1" anchor="ctr" wrap="none"/>
+            <a:lstStyle/>
+            <a:p>
+              <a:pPr algn="l" marL="0" marR="0" indent="0">
+                <a:lnSpc>
+                  <a:spcPts val="900"/>
+                </a:lnSpc>
+                <a:spcBef>
+                  <a:spcPts val="0"/>
+                </a:spcBef>
+                <a:spcAft>
+                  <a:spcPts val="0"/>
+                </a:spcAft>
+              </a:pPr>
+              <a:r>
+                <a:rPr sz="900">
+                  <a:solidFill>
+                    <a:srgbClr val="404040">
+                      <a:alpha val="100000"/>
+                    </a:srgbClr>
+                  </a:solidFill>
+                  <a:latin typeface="Helvetica"/>
+                  <a:cs typeface="Helvetica"/>
+                </a:rPr>
+                <a:t>subHR per 10 % decline: 1.29 (1.06-1.57), p_Bonf = 0.066 (n = 6)  |  per IQR decline (Δ = 29.9 %): 2.15 (1.19-3.88)  |  IQR: [-15.0, 14.9] %</a:t>
+              </a:r>
+            </a:p>
+          </p:txBody>
+        </p:sp>
+        <p:sp>
+          <p:nvSpPr>
+            <p:cNvPr id="90" name="tx90"/>
+            <p:cNvSpPr/>
+            <p:nvPr/>
+          </p:nvSpPr>
+          <p:spPr>
+            <a:xfrm>
+              <a:off x="887106" y="3932770"/>
               <a:ext cx="1982876" cy="120152"/>
             </a:xfrm>
             <a:prstGeom prst="rect">
